--- a/docs/client-deck/Three-Projects-One-Decision.pptx
+++ b/docs/client-deck/Three-Projects-One-Decision.pptx
@@ -35383,7 +35383,7 @@
         <p:spPr>
           <a:xfrm>
             <a:off x="566928" y="1883664"/>
-            <a:ext cx="8595360" cy="548640"/>
+            <a:ext cx="8961120" cy="365760"/>
           </a:xfrm>
           <a:prstGeom prst="rect">
             <a:avLst/>
@@ -35407,7 +35407,7 @@
                 <a:ea typeface="Calibri" pitchFamily="34" charset="-122"/>
                 <a:cs typeface="Calibri" pitchFamily="34" charset="-120"/>
               </a:rPr>
-              <a:t>Only one of the three has a published two-bedroom price today. Sizes are confirmed for all three, so the comparison still holds shape — the two missing prices are being requested.</a:t>
+              <a:t>All three quote a two-bedroom, and the spread is wide — AED 780,000 between the cheapest and the dearest before a single fee is added.</a:t>
             </a:r>
             <a:endParaRPr lang="en-US" sz="1200" dirty="0"/>
           </a:p>
@@ -35428,7 +35428,7 @@
           </p:nvPr>
         </p:nvGraphicFramePr>
         <p:xfrm>
-          <a:off x="566928" y="2487168"/>
+          <a:off x="566928" y="2340864"/>
           <a:ext cx="11027664" cy="914400"/>
         </p:xfrm>
         <a:graphic>
@@ -35441,7 +35441,7 @@
                 <a:gridCol w="2670048"/>
                 <a:gridCol w="2670048"/>
               </a:tblGrid>
-              <a:tr h="288036">
+              <a:tr h="254203">
                 <a:tc>
                   <a:txBody>
                     <a:bodyPr/>
@@ -35715,7 +35715,7 @@
                   </a:tcPr>
                 </a:tc>
               </a:tr>
-              <a:tr h="288036">
+              <a:tr h="254203">
                 <a:tc>
                   <a:txBody>
                     <a:bodyPr/>
@@ -35733,7 +35733,7 @@
                           <a:ea typeface="Calibri" pitchFamily="34" charset="-122"/>
                           <a:cs typeface="Calibri" pitchFamily="34" charset="-120"/>
                         </a:rPr>
-                        <a:t>Offered</a:t>
+                        <a:t>Price from</a:t>
                       </a:r>
                       <a:endParaRPr lang="en-US" sz="1050" dirty="0">
                         <a:latin typeface="Calibri" charset="0"/>
@@ -35801,7 +35801,7 @@
                           <a:ea typeface="Calibri" pitchFamily="34" charset="-122"/>
                           <a:cs typeface="Calibri" pitchFamily="34" charset="-120"/>
                         </a:rPr>
-                        <a:t>Yes</a:t>
+                        <a:t>AED 1,900,000</a:t>
                       </a:r>
                       <a:endParaRPr lang="en-US" sz="1050" dirty="0">
                         <a:latin typeface="Calibri" charset="0"/>
@@ -35869,7 +35869,7 @@
                           <a:ea typeface="Calibri" pitchFamily="34" charset="-122"/>
                           <a:cs typeface="Calibri" pitchFamily="34" charset="-120"/>
                         </a:rPr>
-                        <a:t>Yes</a:t>
+                        <a:t>AED 2,100,000</a:t>
                       </a:r>
                       <a:endParaRPr lang="en-US" sz="1050" dirty="0">
                         <a:latin typeface="Calibri" charset="0"/>
@@ -35929,15 +35929,15 @@
                         <a:buNone/>
                       </a:pPr>
                       <a:r>
-                        <a:rPr lang="en-US" sz="1050" dirty="0">
+                        <a:rPr lang="en-US" sz="1050" b="1" dirty="0">
                           <a:solidFill>
-                            <a:srgbClr val="F3F0E8"/>
+                            <a:srgbClr val="7BE08A"/>
                           </a:solidFill>
                           <a:latin typeface="Calibri" pitchFamily="34" charset="0"/>
                           <a:ea typeface="Calibri" pitchFamily="34" charset="-122"/>
                           <a:cs typeface="Calibri" pitchFamily="34" charset="-120"/>
                         </a:rPr>
-                        <a:t>Yes</a:t>
+                        <a:t>AED 1,320,000</a:t>
                       </a:r>
                       <a:endParaRPr lang="en-US" sz="1050" dirty="0">
                         <a:latin typeface="Calibri" charset="0"/>
@@ -35989,7 +35989,7 @@
                   </a:tcPr>
                 </a:tc>
               </a:tr>
-              <a:tr h="288036">
+              <a:tr h="254203">
                 <a:tc>
                   <a:txBody>
                     <a:bodyPr/>
@@ -36135,9 +36135,9 @@
                         <a:buNone/>
                       </a:pPr>
                       <a:r>
-                        <a:rPr lang="en-US" sz="1050" b="1" dirty="0">
+                        <a:rPr lang="en-US" sz="1050" dirty="0">
                           <a:solidFill>
-                            <a:srgbClr val="7BE08A"/>
+                            <a:srgbClr val="F3F0E8"/>
                           </a:solidFill>
                           <a:latin typeface="Calibri" pitchFamily="34" charset="0"/>
                           <a:ea typeface="Calibri" pitchFamily="34" charset="-122"/>
@@ -36263,7 +36263,7 @@
                   </a:tcPr>
                 </a:tc>
               </a:tr>
-              <a:tr h="288036">
+              <a:tr h="254203">
                 <a:tc>
                   <a:txBody>
                     <a:bodyPr/>
@@ -36281,7 +36281,7 @@
                           <a:ea typeface="Calibri" pitchFamily="34" charset="-122"/>
                           <a:cs typeface="Calibri" pitchFamily="34" charset="-120"/>
                         </a:rPr>
-                        <a:t>Units of this type</a:t>
+                        <a:t>Price per sqft</a:t>
                       </a:r>
                       <a:endParaRPr lang="en-US" sz="1050" dirty="0">
                         <a:latin typeface="Calibri" charset="0"/>
@@ -36411,6 +36411,212 @@
                       <a:r>
                         <a:rPr lang="en-US" sz="1050" dirty="0">
                           <a:solidFill>
+                            <a:srgbClr val="F3F0E8"/>
+                          </a:solidFill>
+                          <a:latin typeface="Calibri" pitchFamily="34" charset="0"/>
+                          <a:ea typeface="Calibri" pitchFamily="34" charset="-122"/>
+                          <a:cs typeface="Calibri" pitchFamily="34" charset="-120"/>
+                        </a:rPr>
+                        <a:t>AED 1,909</a:t>
+                      </a:r>
+                      <a:endParaRPr lang="en-US" sz="1050" dirty="0">
+                        <a:latin typeface="Calibri" charset="0"/>
+                        <a:ea typeface="Calibri" charset="0"/>
+                        <a:cs typeface="Calibri" charset="0"/>
+                      </a:endParaRPr>
+                    </a:p>
+                  </a:txBody>
+                  <a:tcPr marL="82296" marR="82296" marT="36576" marB="36576" anchor="ctr">
+                    <a:lnL w="6350" cap="flat" cmpd="sng" algn="ctr">
+                      <a:solidFill>
+                        <a:srgbClr val="2E3A35"/>
+                      </a:solidFill>
+                      <a:prstDash val="solid"/>
+                      <a:round/>
+                      <a:headEnd type="none" w="med" len="med"/>
+                      <a:tailEnd type="none" w="med" len="med"/>
+                    </a:lnL>
+                    <a:lnR w="6350" cap="flat" cmpd="sng" algn="ctr">
+                      <a:solidFill>
+                        <a:srgbClr val="2E3A35"/>
+                      </a:solidFill>
+                      <a:prstDash val="solid"/>
+                      <a:round/>
+                      <a:headEnd type="none" w="med" len="med"/>
+                      <a:tailEnd type="none" w="med" len="med"/>
+                    </a:lnR>
+                    <a:lnT w="6350" cap="flat" cmpd="sng" algn="ctr">
+                      <a:solidFill>
+                        <a:srgbClr val="2E3A35"/>
+                      </a:solidFill>
+                      <a:prstDash val="solid"/>
+                      <a:round/>
+                      <a:headEnd type="none" w="med" len="med"/>
+                      <a:tailEnd type="none" w="med" len="med"/>
+                    </a:lnT>
+                    <a:lnB w="6350" cap="flat" cmpd="sng" algn="ctr">
+                      <a:solidFill>
+                        <a:srgbClr val="2E3A35"/>
+                      </a:solidFill>
+                      <a:prstDash val="solid"/>
+                      <a:round/>
+                      <a:headEnd type="none" w="med" len="med"/>
+                      <a:tailEnd type="none" w="med" len="med"/>
+                    </a:lnB>
+                    <a:solidFill>
+                      <a:srgbClr val="171E1B"/>
+                    </a:solidFill>
+                  </a:tcPr>
+                </a:tc>
+                <a:tc>
+                  <a:txBody>
+                    <a:bodyPr/>
+                    <a:lstStyle/>
+                    <a:p>
+                      <a:pPr algn="r" indent="0" marL="0">
+                        <a:buNone/>
+                      </a:pPr>
+                      <a:r>
+                        <a:rPr lang="en-US" sz="1050" b="1" dirty="0">
+                          <a:solidFill>
+                            <a:srgbClr val="7BE08A"/>
+                          </a:solidFill>
+                          <a:latin typeface="Calibri" pitchFamily="34" charset="0"/>
+                          <a:ea typeface="Calibri" pitchFamily="34" charset="-122"/>
+                          <a:cs typeface="Calibri" pitchFamily="34" charset="-120"/>
+                        </a:rPr>
+                        <a:t>AED 1,550</a:t>
+                      </a:r>
+                      <a:endParaRPr lang="en-US" sz="1050" dirty="0">
+                        <a:latin typeface="Calibri" charset="0"/>
+                        <a:ea typeface="Calibri" charset="0"/>
+                        <a:cs typeface="Calibri" charset="0"/>
+                      </a:endParaRPr>
+                    </a:p>
+                  </a:txBody>
+                  <a:tcPr marL="82296" marR="82296" marT="36576" marB="36576" anchor="ctr">
+                    <a:lnL w="6350" cap="flat" cmpd="sng" algn="ctr">
+                      <a:solidFill>
+                        <a:srgbClr val="2E3A35"/>
+                      </a:solidFill>
+                      <a:prstDash val="solid"/>
+                      <a:round/>
+                      <a:headEnd type="none" w="med" len="med"/>
+                      <a:tailEnd type="none" w="med" len="med"/>
+                    </a:lnL>
+                    <a:lnR w="6350" cap="flat" cmpd="sng" algn="ctr">
+                      <a:solidFill>
+                        <a:srgbClr val="2E3A35"/>
+                      </a:solidFill>
+                      <a:prstDash val="solid"/>
+                      <a:round/>
+                      <a:headEnd type="none" w="med" len="med"/>
+                      <a:tailEnd type="none" w="med" len="med"/>
+                    </a:lnR>
+                    <a:lnT w="6350" cap="flat" cmpd="sng" algn="ctr">
+                      <a:solidFill>
+                        <a:srgbClr val="2E3A35"/>
+                      </a:solidFill>
+                      <a:prstDash val="solid"/>
+                      <a:round/>
+                      <a:headEnd type="none" w="med" len="med"/>
+                      <a:tailEnd type="none" w="med" len="med"/>
+                    </a:lnT>
+                    <a:lnB w="6350" cap="flat" cmpd="sng" algn="ctr">
+                      <a:solidFill>
+                        <a:srgbClr val="2E3A35"/>
+                      </a:solidFill>
+                      <a:prstDash val="solid"/>
+                      <a:round/>
+                      <a:headEnd type="none" w="med" len="med"/>
+                      <a:tailEnd type="none" w="med" len="med"/>
+                    </a:lnB>
+                    <a:solidFill>
+                      <a:srgbClr val="171E1B"/>
+                    </a:solidFill>
+                  </a:tcPr>
+                </a:tc>
+              </a:tr>
+              <a:tr h="254203">
+                <a:tc>
+                  <a:txBody>
+                    <a:bodyPr/>
+                    <a:lstStyle/>
+                    <a:p>
+                      <a:pPr algn="l" indent="0" marL="0">
+                        <a:buNone/>
+                      </a:pPr>
+                      <a:r>
+                        <a:rPr lang="en-US" sz="1050" dirty="0">
+                          <a:solidFill>
+                            <a:srgbClr val="A7B0AB"/>
+                          </a:solidFill>
+                          <a:latin typeface="Calibri" pitchFamily="34" charset="0"/>
+                          <a:ea typeface="Calibri" pitchFamily="34" charset="-122"/>
+                          <a:cs typeface="Calibri" pitchFamily="34" charset="-120"/>
+                        </a:rPr>
+                        <a:t>Step-up vs own 1 BR / sqft</a:t>
+                      </a:r>
+                      <a:endParaRPr lang="en-US" sz="1050" dirty="0">
+                        <a:latin typeface="Calibri" charset="0"/>
+                        <a:ea typeface="Calibri" charset="0"/>
+                        <a:cs typeface="Calibri" charset="0"/>
+                      </a:endParaRPr>
+                    </a:p>
+                  </a:txBody>
+                  <a:tcPr marL="82296" marR="82296" marT="36576" marB="36576" anchor="ctr">
+                    <a:lnL w="6350" cap="flat" cmpd="sng" algn="ctr">
+                      <a:solidFill>
+                        <a:srgbClr val="2E3A35"/>
+                      </a:solidFill>
+                      <a:prstDash val="solid"/>
+                      <a:round/>
+                      <a:headEnd type="none" w="med" len="med"/>
+                      <a:tailEnd type="none" w="med" len="med"/>
+                    </a:lnL>
+                    <a:lnR w="6350" cap="flat" cmpd="sng" algn="ctr">
+                      <a:solidFill>
+                        <a:srgbClr val="2E3A35"/>
+                      </a:solidFill>
+                      <a:prstDash val="solid"/>
+                      <a:round/>
+                      <a:headEnd type="none" w="med" len="med"/>
+                      <a:tailEnd type="none" w="med" len="med"/>
+                    </a:lnR>
+                    <a:lnT w="6350" cap="flat" cmpd="sng" algn="ctr">
+                      <a:solidFill>
+                        <a:srgbClr val="2E3A35"/>
+                      </a:solidFill>
+                      <a:prstDash val="solid"/>
+                      <a:round/>
+                      <a:headEnd type="none" w="med" len="med"/>
+                      <a:tailEnd type="none" w="med" len="med"/>
+                    </a:lnT>
+                    <a:lnB w="6350" cap="flat" cmpd="sng" algn="ctr">
+                      <a:solidFill>
+                        <a:srgbClr val="2E3A35"/>
+                      </a:solidFill>
+                      <a:prstDash val="solid"/>
+                      <a:round/>
+                      <a:headEnd type="none" w="med" len="med"/>
+                      <a:tailEnd type="none" w="med" len="med"/>
+                    </a:lnB>
+                    <a:solidFill>
+                      <a:srgbClr val="1B2320"/>
+                    </a:solidFill>
+                  </a:tcPr>
+                </a:tc>
+                <a:tc>
+                  <a:txBody>
+                    <a:bodyPr/>
+                    <a:lstStyle/>
+                    <a:p>
+                      <a:pPr algn="r" indent="0" marL="0">
+                        <a:buNone/>
+                      </a:pPr>
+                      <a:r>
+                        <a:rPr lang="en-US" sz="1050" dirty="0">
+                          <a:solidFill>
                             <a:srgbClr val="828C87"/>
                           </a:solidFill>
                           <a:latin typeface="Calibri" pitchFamily="34" charset="0"/>
@@ -36464,7 +36670,1171 @@
                       <a:tailEnd type="none" w="med" len="med"/>
                     </a:lnB>
                     <a:solidFill>
+                      <a:srgbClr val="1B2320"/>
+                    </a:solidFill>
+                  </a:tcPr>
+                </a:tc>
+                <a:tc>
+                  <a:txBody>
+                    <a:bodyPr/>
+                    <a:lstStyle/>
+                    <a:p>
+                      <a:pPr algn="r" indent="0" marL="0">
+                        <a:buNone/>
+                      </a:pPr>
+                      <a:r>
+                        <a:rPr lang="en-US" sz="1050" dirty="0">
+                          <a:solidFill>
+                            <a:srgbClr val="F3F0E8"/>
+                          </a:solidFill>
+                          <a:latin typeface="Calibri" pitchFamily="34" charset="0"/>
+                          <a:ea typeface="Calibri" pitchFamily="34" charset="-122"/>
+                          <a:cs typeface="Calibri" pitchFamily="34" charset="-120"/>
+                        </a:rPr>
+                        <a:t>+43%</a:t>
+                      </a:r>
+                      <a:endParaRPr lang="en-US" sz="1050" dirty="0">
+                        <a:latin typeface="Calibri" charset="0"/>
+                        <a:ea typeface="Calibri" charset="0"/>
+                        <a:cs typeface="Calibri" charset="0"/>
+                      </a:endParaRPr>
+                    </a:p>
+                  </a:txBody>
+                  <a:tcPr marL="82296" marR="82296" marT="36576" marB="36576" anchor="ctr">
+                    <a:lnL w="6350" cap="flat" cmpd="sng" algn="ctr">
+                      <a:solidFill>
+                        <a:srgbClr val="2E3A35"/>
+                      </a:solidFill>
+                      <a:prstDash val="solid"/>
+                      <a:round/>
+                      <a:headEnd type="none" w="med" len="med"/>
+                      <a:tailEnd type="none" w="med" len="med"/>
+                    </a:lnL>
+                    <a:lnR w="6350" cap="flat" cmpd="sng" algn="ctr">
+                      <a:solidFill>
+                        <a:srgbClr val="2E3A35"/>
+                      </a:solidFill>
+                      <a:prstDash val="solid"/>
+                      <a:round/>
+                      <a:headEnd type="none" w="med" len="med"/>
+                      <a:tailEnd type="none" w="med" len="med"/>
+                    </a:lnR>
+                    <a:lnT w="6350" cap="flat" cmpd="sng" algn="ctr">
+                      <a:solidFill>
+                        <a:srgbClr val="2E3A35"/>
+                      </a:solidFill>
+                      <a:prstDash val="solid"/>
+                      <a:round/>
+                      <a:headEnd type="none" w="med" len="med"/>
+                      <a:tailEnd type="none" w="med" len="med"/>
+                    </a:lnT>
+                    <a:lnB w="6350" cap="flat" cmpd="sng" algn="ctr">
+                      <a:solidFill>
+                        <a:srgbClr val="2E3A35"/>
+                      </a:solidFill>
+                      <a:prstDash val="solid"/>
+                      <a:round/>
+                      <a:headEnd type="none" w="med" len="med"/>
+                      <a:tailEnd type="none" w="med" len="med"/>
+                    </a:lnB>
+                    <a:solidFill>
+                      <a:srgbClr val="1B2320"/>
+                    </a:solidFill>
+                  </a:tcPr>
+                </a:tc>
+                <a:tc>
+                  <a:txBody>
+                    <a:bodyPr/>
+                    <a:lstStyle/>
+                    <a:p>
+                      <a:pPr algn="r" indent="0" marL="0">
+                        <a:buNone/>
+                      </a:pPr>
+                      <a:r>
+                        <a:rPr lang="en-US" sz="1050" b="1" dirty="0">
+                          <a:solidFill>
+                            <a:srgbClr val="7BE08A"/>
+                          </a:solidFill>
+                          <a:latin typeface="Calibri" pitchFamily="34" charset="0"/>
+                          <a:ea typeface="Calibri" pitchFamily="34" charset="-122"/>
+                          <a:cs typeface="Calibri" pitchFamily="34" charset="-120"/>
+                        </a:rPr>
+                        <a:t>+7%</a:t>
+                      </a:r>
+                      <a:endParaRPr lang="en-US" sz="1050" dirty="0">
+                        <a:latin typeface="Calibri" charset="0"/>
+                        <a:ea typeface="Calibri" charset="0"/>
+                        <a:cs typeface="Calibri" charset="0"/>
+                      </a:endParaRPr>
+                    </a:p>
+                  </a:txBody>
+                  <a:tcPr marL="82296" marR="82296" marT="36576" marB="36576" anchor="ctr">
+                    <a:lnL w="6350" cap="flat" cmpd="sng" algn="ctr">
+                      <a:solidFill>
+                        <a:srgbClr val="2E3A35"/>
+                      </a:solidFill>
+                      <a:prstDash val="solid"/>
+                      <a:round/>
+                      <a:headEnd type="none" w="med" len="med"/>
+                      <a:tailEnd type="none" w="med" len="med"/>
+                    </a:lnL>
+                    <a:lnR w="6350" cap="flat" cmpd="sng" algn="ctr">
+                      <a:solidFill>
+                        <a:srgbClr val="2E3A35"/>
+                      </a:solidFill>
+                      <a:prstDash val="solid"/>
+                      <a:round/>
+                      <a:headEnd type="none" w="med" len="med"/>
+                      <a:tailEnd type="none" w="med" len="med"/>
+                    </a:lnR>
+                    <a:lnT w="6350" cap="flat" cmpd="sng" algn="ctr">
+                      <a:solidFill>
+                        <a:srgbClr val="2E3A35"/>
+                      </a:solidFill>
+                      <a:prstDash val="solid"/>
+                      <a:round/>
+                      <a:headEnd type="none" w="med" len="med"/>
+                      <a:tailEnd type="none" w="med" len="med"/>
+                    </a:lnT>
+                    <a:lnB w="6350" cap="flat" cmpd="sng" algn="ctr">
+                      <a:solidFill>
+                        <a:srgbClr val="2E3A35"/>
+                      </a:solidFill>
+                      <a:prstDash val="solid"/>
+                      <a:round/>
+                      <a:headEnd type="none" w="med" len="med"/>
+                      <a:tailEnd type="none" w="med" len="med"/>
+                    </a:lnB>
+                    <a:solidFill>
+                      <a:srgbClr val="1B2320"/>
+                    </a:solidFill>
+                  </a:tcPr>
+                </a:tc>
+              </a:tr>
+              <a:tr h="254203">
+                <a:tc>
+                  <a:txBody>
+                    <a:bodyPr/>
+                    <a:lstStyle/>
+                    <a:p>
+                      <a:pPr algn="l" indent="0" marL="0">
+                        <a:buNone/>
+                      </a:pPr>
+                      <a:r>
+                        <a:rPr lang="en-US" sz="1050" dirty="0">
+                          <a:solidFill>
+                            <a:srgbClr val="A7B0AB"/>
+                          </a:solidFill>
+                          <a:latin typeface="Calibri" pitchFamily="34" charset="0"/>
+                          <a:ea typeface="Calibri" pitchFamily="34" charset="-122"/>
+                          <a:cs typeface="Calibri" pitchFamily="34" charset="-120"/>
+                        </a:rPr>
+                        <a:t>DLD 4%</a:t>
+                      </a:r>
+                      <a:endParaRPr lang="en-US" sz="1050" dirty="0">
+                        <a:latin typeface="Calibri" charset="0"/>
+                        <a:ea typeface="Calibri" charset="0"/>
+                        <a:cs typeface="Calibri" charset="0"/>
+                      </a:endParaRPr>
+                    </a:p>
+                  </a:txBody>
+                  <a:tcPr marL="82296" marR="82296" marT="36576" marB="36576" anchor="ctr">
+                    <a:lnL w="6350" cap="flat" cmpd="sng" algn="ctr">
+                      <a:solidFill>
+                        <a:srgbClr val="2E3A35"/>
+                      </a:solidFill>
+                      <a:prstDash val="solid"/>
+                      <a:round/>
+                      <a:headEnd type="none" w="med" len="med"/>
+                      <a:tailEnd type="none" w="med" len="med"/>
+                    </a:lnL>
+                    <a:lnR w="6350" cap="flat" cmpd="sng" algn="ctr">
+                      <a:solidFill>
+                        <a:srgbClr val="2E3A35"/>
+                      </a:solidFill>
+                      <a:prstDash val="solid"/>
+                      <a:round/>
+                      <a:headEnd type="none" w="med" len="med"/>
+                      <a:tailEnd type="none" w="med" len="med"/>
+                    </a:lnR>
+                    <a:lnT w="6350" cap="flat" cmpd="sng" algn="ctr">
+                      <a:solidFill>
+                        <a:srgbClr val="2E3A35"/>
+                      </a:solidFill>
+                      <a:prstDash val="solid"/>
+                      <a:round/>
+                      <a:headEnd type="none" w="med" len="med"/>
+                      <a:tailEnd type="none" w="med" len="med"/>
+                    </a:lnT>
+                    <a:lnB w="6350" cap="flat" cmpd="sng" algn="ctr">
+                      <a:solidFill>
+                        <a:srgbClr val="2E3A35"/>
+                      </a:solidFill>
+                      <a:prstDash val="solid"/>
+                      <a:round/>
+                      <a:headEnd type="none" w="med" len="med"/>
+                      <a:tailEnd type="none" w="med" len="med"/>
+                    </a:lnB>
+                    <a:solidFill>
                       <a:srgbClr val="171E1B"/>
+                    </a:solidFill>
+                  </a:tcPr>
+                </a:tc>
+                <a:tc>
+                  <a:txBody>
+                    <a:bodyPr/>
+                    <a:lstStyle/>
+                    <a:p>
+                      <a:pPr algn="r" indent="0" marL="0">
+                        <a:buNone/>
+                      </a:pPr>
+                      <a:r>
+                        <a:rPr lang="en-US" sz="1050" dirty="0">
+                          <a:solidFill>
+                            <a:srgbClr val="F3F0E8"/>
+                          </a:solidFill>
+                          <a:latin typeface="Calibri" pitchFamily="34" charset="0"/>
+                          <a:ea typeface="Calibri" pitchFamily="34" charset="-122"/>
+                          <a:cs typeface="Calibri" pitchFamily="34" charset="-120"/>
+                        </a:rPr>
+                        <a:t>76,000</a:t>
+                      </a:r>
+                      <a:endParaRPr lang="en-US" sz="1050" dirty="0">
+                        <a:latin typeface="Calibri" charset="0"/>
+                        <a:ea typeface="Calibri" charset="0"/>
+                        <a:cs typeface="Calibri" charset="0"/>
+                      </a:endParaRPr>
+                    </a:p>
+                  </a:txBody>
+                  <a:tcPr marL="82296" marR="82296" marT="36576" marB="36576" anchor="ctr">
+                    <a:lnL w="6350" cap="flat" cmpd="sng" algn="ctr">
+                      <a:solidFill>
+                        <a:srgbClr val="2E3A35"/>
+                      </a:solidFill>
+                      <a:prstDash val="solid"/>
+                      <a:round/>
+                      <a:headEnd type="none" w="med" len="med"/>
+                      <a:tailEnd type="none" w="med" len="med"/>
+                    </a:lnL>
+                    <a:lnR w="6350" cap="flat" cmpd="sng" algn="ctr">
+                      <a:solidFill>
+                        <a:srgbClr val="2E3A35"/>
+                      </a:solidFill>
+                      <a:prstDash val="solid"/>
+                      <a:round/>
+                      <a:headEnd type="none" w="med" len="med"/>
+                      <a:tailEnd type="none" w="med" len="med"/>
+                    </a:lnR>
+                    <a:lnT w="6350" cap="flat" cmpd="sng" algn="ctr">
+                      <a:solidFill>
+                        <a:srgbClr val="2E3A35"/>
+                      </a:solidFill>
+                      <a:prstDash val="solid"/>
+                      <a:round/>
+                      <a:headEnd type="none" w="med" len="med"/>
+                      <a:tailEnd type="none" w="med" len="med"/>
+                    </a:lnT>
+                    <a:lnB w="6350" cap="flat" cmpd="sng" algn="ctr">
+                      <a:solidFill>
+                        <a:srgbClr val="2E3A35"/>
+                      </a:solidFill>
+                      <a:prstDash val="solid"/>
+                      <a:round/>
+                      <a:headEnd type="none" w="med" len="med"/>
+                      <a:tailEnd type="none" w="med" len="med"/>
+                    </a:lnB>
+                    <a:solidFill>
+                      <a:srgbClr val="171E1B"/>
+                    </a:solidFill>
+                  </a:tcPr>
+                </a:tc>
+                <a:tc>
+                  <a:txBody>
+                    <a:bodyPr/>
+                    <a:lstStyle/>
+                    <a:p>
+                      <a:pPr algn="r" indent="0" marL="0">
+                        <a:buNone/>
+                      </a:pPr>
+                      <a:r>
+                        <a:rPr lang="en-US" sz="1050" dirty="0">
+                          <a:solidFill>
+                            <a:srgbClr val="F3F0E8"/>
+                          </a:solidFill>
+                          <a:latin typeface="Calibri" pitchFamily="34" charset="0"/>
+                          <a:ea typeface="Calibri" pitchFamily="34" charset="-122"/>
+                          <a:cs typeface="Calibri" pitchFamily="34" charset="-120"/>
+                        </a:rPr>
+                        <a:t>84,000</a:t>
+                      </a:r>
+                      <a:endParaRPr lang="en-US" sz="1050" dirty="0">
+                        <a:latin typeface="Calibri" charset="0"/>
+                        <a:ea typeface="Calibri" charset="0"/>
+                        <a:cs typeface="Calibri" charset="0"/>
+                      </a:endParaRPr>
+                    </a:p>
+                  </a:txBody>
+                  <a:tcPr marL="82296" marR="82296" marT="36576" marB="36576" anchor="ctr">
+                    <a:lnL w="6350" cap="flat" cmpd="sng" algn="ctr">
+                      <a:solidFill>
+                        <a:srgbClr val="2E3A35"/>
+                      </a:solidFill>
+                      <a:prstDash val="solid"/>
+                      <a:round/>
+                      <a:headEnd type="none" w="med" len="med"/>
+                      <a:tailEnd type="none" w="med" len="med"/>
+                    </a:lnL>
+                    <a:lnR w="6350" cap="flat" cmpd="sng" algn="ctr">
+                      <a:solidFill>
+                        <a:srgbClr val="2E3A35"/>
+                      </a:solidFill>
+                      <a:prstDash val="solid"/>
+                      <a:round/>
+                      <a:headEnd type="none" w="med" len="med"/>
+                      <a:tailEnd type="none" w="med" len="med"/>
+                    </a:lnR>
+                    <a:lnT w="6350" cap="flat" cmpd="sng" algn="ctr">
+                      <a:solidFill>
+                        <a:srgbClr val="2E3A35"/>
+                      </a:solidFill>
+                      <a:prstDash val="solid"/>
+                      <a:round/>
+                      <a:headEnd type="none" w="med" len="med"/>
+                      <a:tailEnd type="none" w="med" len="med"/>
+                    </a:lnT>
+                    <a:lnB w="6350" cap="flat" cmpd="sng" algn="ctr">
+                      <a:solidFill>
+                        <a:srgbClr val="2E3A35"/>
+                      </a:solidFill>
+                      <a:prstDash val="solid"/>
+                      <a:round/>
+                      <a:headEnd type="none" w="med" len="med"/>
+                      <a:tailEnd type="none" w="med" len="med"/>
+                    </a:lnB>
+                    <a:solidFill>
+                      <a:srgbClr val="171E1B"/>
+                    </a:solidFill>
+                  </a:tcPr>
+                </a:tc>
+                <a:tc>
+                  <a:txBody>
+                    <a:bodyPr/>
+                    <a:lstStyle/>
+                    <a:p>
+                      <a:pPr algn="r" indent="0" marL="0">
+                        <a:buNone/>
+                      </a:pPr>
+                      <a:r>
+                        <a:rPr lang="en-US" sz="1050" dirty="0">
+                          <a:solidFill>
+                            <a:srgbClr val="F3F0E8"/>
+                          </a:solidFill>
+                          <a:latin typeface="Calibri" pitchFamily="34" charset="0"/>
+                          <a:ea typeface="Calibri" pitchFamily="34" charset="-122"/>
+                          <a:cs typeface="Calibri" pitchFamily="34" charset="-120"/>
+                        </a:rPr>
+                        <a:t>52,800</a:t>
+                      </a:r>
+                      <a:endParaRPr lang="en-US" sz="1050" dirty="0">
+                        <a:latin typeface="Calibri" charset="0"/>
+                        <a:ea typeface="Calibri" charset="0"/>
+                        <a:cs typeface="Calibri" charset="0"/>
+                      </a:endParaRPr>
+                    </a:p>
+                  </a:txBody>
+                  <a:tcPr marL="82296" marR="82296" marT="36576" marB="36576" anchor="ctr">
+                    <a:lnL w="6350" cap="flat" cmpd="sng" algn="ctr">
+                      <a:solidFill>
+                        <a:srgbClr val="2E3A35"/>
+                      </a:solidFill>
+                      <a:prstDash val="solid"/>
+                      <a:round/>
+                      <a:headEnd type="none" w="med" len="med"/>
+                      <a:tailEnd type="none" w="med" len="med"/>
+                    </a:lnL>
+                    <a:lnR w="6350" cap="flat" cmpd="sng" algn="ctr">
+                      <a:solidFill>
+                        <a:srgbClr val="2E3A35"/>
+                      </a:solidFill>
+                      <a:prstDash val="solid"/>
+                      <a:round/>
+                      <a:headEnd type="none" w="med" len="med"/>
+                      <a:tailEnd type="none" w="med" len="med"/>
+                    </a:lnR>
+                    <a:lnT w="6350" cap="flat" cmpd="sng" algn="ctr">
+                      <a:solidFill>
+                        <a:srgbClr val="2E3A35"/>
+                      </a:solidFill>
+                      <a:prstDash val="solid"/>
+                      <a:round/>
+                      <a:headEnd type="none" w="med" len="med"/>
+                      <a:tailEnd type="none" w="med" len="med"/>
+                    </a:lnT>
+                    <a:lnB w="6350" cap="flat" cmpd="sng" algn="ctr">
+                      <a:solidFill>
+                        <a:srgbClr val="2E3A35"/>
+                      </a:solidFill>
+                      <a:prstDash val="solid"/>
+                      <a:round/>
+                      <a:headEnd type="none" w="med" len="med"/>
+                      <a:tailEnd type="none" w="med" len="med"/>
+                    </a:lnB>
+                    <a:solidFill>
+                      <a:srgbClr val="171E1B"/>
+                    </a:solidFill>
+                  </a:tcPr>
+                </a:tc>
+              </a:tr>
+              <a:tr h="254203">
+                <a:tc>
+                  <a:txBody>
+                    <a:bodyPr/>
+                    <a:lstStyle/>
+                    <a:p>
+                      <a:pPr algn="l" indent="0" marL="0">
+                        <a:buNone/>
+                      </a:pPr>
+                      <a:r>
+                        <a:rPr lang="en-US" sz="1050" dirty="0">
+                          <a:solidFill>
+                            <a:srgbClr val="A7B0AB"/>
+                          </a:solidFill>
+                          <a:latin typeface="Calibri" pitchFamily="34" charset="0"/>
+                          <a:ea typeface="Calibri" pitchFamily="34" charset="-122"/>
+                          <a:cs typeface="Calibri" pitchFamily="34" charset="-120"/>
+                        </a:rPr>
+                        <a:t>Admin fee</a:t>
+                      </a:r>
+                      <a:endParaRPr lang="en-US" sz="1050" dirty="0">
+                        <a:latin typeface="Calibri" charset="0"/>
+                        <a:ea typeface="Calibri" charset="0"/>
+                        <a:cs typeface="Calibri" charset="0"/>
+                      </a:endParaRPr>
+                    </a:p>
+                  </a:txBody>
+                  <a:tcPr marL="82296" marR="82296" marT="36576" marB="36576" anchor="ctr">
+                    <a:lnL w="6350" cap="flat" cmpd="sng" algn="ctr">
+                      <a:solidFill>
+                        <a:srgbClr val="2E3A35"/>
+                      </a:solidFill>
+                      <a:prstDash val="solid"/>
+                      <a:round/>
+                      <a:headEnd type="none" w="med" len="med"/>
+                      <a:tailEnd type="none" w="med" len="med"/>
+                    </a:lnL>
+                    <a:lnR w="6350" cap="flat" cmpd="sng" algn="ctr">
+                      <a:solidFill>
+                        <a:srgbClr val="2E3A35"/>
+                      </a:solidFill>
+                      <a:prstDash val="solid"/>
+                      <a:round/>
+                      <a:headEnd type="none" w="med" len="med"/>
+                      <a:tailEnd type="none" w="med" len="med"/>
+                    </a:lnR>
+                    <a:lnT w="6350" cap="flat" cmpd="sng" algn="ctr">
+                      <a:solidFill>
+                        <a:srgbClr val="2E3A35"/>
+                      </a:solidFill>
+                      <a:prstDash val="solid"/>
+                      <a:round/>
+                      <a:headEnd type="none" w="med" len="med"/>
+                      <a:tailEnd type="none" w="med" len="med"/>
+                    </a:lnT>
+                    <a:lnB w="6350" cap="flat" cmpd="sng" algn="ctr">
+                      <a:solidFill>
+                        <a:srgbClr val="2E3A35"/>
+                      </a:solidFill>
+                      <a:prstDash val="solid"/>
+                      <a:round/>
+                      <a:headEnd type="none" w="med" len="med"/>
+                      <a:tailEnd type="none" w="med" len="med"/>
+                    </a:lnB>
+                    <a:solidFill>
+                      <a:srgbClr val="1B2320"/>
+                    </a:solidFill>
+                  </a:tcPr>
+                </a:tc>
+                <a:tc>
+                  <a:txBody>
+                    <a:bodyPr/>
+                    <a:lstStyle/>
+                    <a:p>
+                      <a:pPr algn="r" indent="0" marL="0">
+                        <a:buNone/>
+                      </a:pPr>
+                      <a:r>
+                        <a:rPr lang="en-US" sz="1050" dirty="0">
+                          <a:solidFill>
+                            <a:srgbClr val="F3F0E8"/>
+                          </a:solidFill>
+                          <a:latin typeface="Calibri" pitchFamily="34" charset="0"/>
+                          <a:ea typeface="Calibri" pitchFamily="34" charset="-122"/>
+                          <a:cs typeface="Calibri" pitchFamily="34" charset="-120"/>
+                        </a:rPr>
+                        <a:t>4,000</a:t>
+                      </a:r>
+                      <a:endParaRPr lang="en-US" sz="1050" dirty="0">
+                        <a:latin typeface="Calibri" charset="0"/>
+                        <a:ea typeface="Calibri" charset="0"/>
+                        <a:cs typeface="Calibri" charset="0"/>
+                      </a:endParaRPr>
+                    </a:p>
+                  </a:txBody>
+                  <a:tcPr marL="82296" marR="82296" marT="36576" marB="36576" anchor="ctr">
+                    <a:lnL w="6350" cap="flat" cmpd="sng" algn="ctr">
+                      <a:solidFill>
+                        <a:srgbClr val="2E3A35"/>
+                      </a:solidFill>
+                      <a:prstDash val="solid"/>
+                      <a:round/>
+                      <a:headEnd type="none" w="med" len="med"/>
+                      <a:tailEnd type="none" w="med" len="med"/>
+                    </a:lnL>
+                    <a:lnR w="6350" cap="flat" cmpd="sng" algn="ctr">
+                      <a:solidFill>
+                        <a:srgbClr val="2E3A35"/>
+                      </a:solidFill>
+                      <a:prstDash val="solid"/>
+                      <a:round/>
+                      <a:headEnd type="none" w="med" len="med"/>
+                      <a:tailEnd type="none" w="med" len="med"/>
+                    </a:lnR>
+                    <a:lnT w="6350" cap="flat" cmpd="sng" algn="ctr">
+                      <a:solidFill>
+                        <a:srgbClr val="2E3A35"/>
+                      </a:solidFill>
+                      <a:prstDash val="solid"/>
+                      <a:round/>
+                      <a:headEnd type="none" w="med" len="med"/>
+                      <a:tailEnd type="none" w="med" len="med"/>
+                    </a:lnT>
+                    <a:lnB w="6350" cap="flat" cmpd="sng" algn="ctr">
+                      <a:solidFill>
+                        <a:srgbClr val="2E3A35"/>
+                      </a:solidFill>
+                      <a:prstDash val="solid"/>
+                      <a:round/>
+                      <a:headEnd type="none" w="med" len="med"/>
+                      <a:tailEnd type="none" w="med" len="med"/>
+                    </a:lnB>
+                    <a:solidFill>
+                      <a:srgbClr val="1B2320"/>
+                    </a:solidFill>
+                  </a:tcPr>
+                </a:tc>
+                <a:tc>
+                  <a:txBody>
+                    <a:bodyPr/>
+                    <a:lstStyle/>
+                    <a:p>
+                      <a:pPr algn="r" indent="0" marL="0">
+                        <a:buNone/>
+                      </a:pPr>
+                      <a:r>
+                        <a:rPr lang="en-US" sz="1050" dirty="0">
+                          <a:solidFill>
+                            <a:srgbClr val="F3F0E8"/>
+                          </a:solidFill>
+                          <a:latin typeface="Calibri" pitchFamily="34" charset="0"/>
+                          <a:ea typeface="Calibri" pitchFamily="34" charset="-122"/>
+                          <a:cs typeface="Calibri" pitchFamily="34" charset="-120"/>
+                        </a:rPr>
+                        <a:t>5,250  est</a:t>
+                      </a:r>
+                      <a:endParaRPr lang="en-US" sz="1050" dirty="0">
+                        <a:latin typeface="Calibri" charset="0"/>
+                        <a:ea typeface="Calibri" charset="0"/>
+                        <a:cs typeface="Calibri" charset="0"/>
+                      </a:endParaRPr>
+                    </a:p>
+                  </a:txBody>
+                  <a:tcPr marL="82296" marR="82296" marT="36576" marB="36576" anchor="ctr">
+                    <a:lnL w="6350" cap="flat" cmpd="sng" algn="ctr">
+                      <a:solidFill>
+                        <a:srgbClr val="2E3A35"/>
+                      </a:solidFill>
+                      <a:prstDash val="solid"/>
+                      <a:round/>
+                      <a:headEnd type="none" w="med" len="med"/>
+                      <a:tailEnd type="none" w="med" len="med"/>
+                    </a:lnL>
+                    <a:lnR w="6350" cap="flat" cmpd="sng" algn="ctr">
+                      <a:solidFill>
+                        <a:srgbClr val="2E3A35"/>
+                      </a:solidFill>
+                      <a:prstDash val="solid"/>
+                      <a:round/>
+                      <a:headEnd type="none" w="med" len="med"/>
+                      <a:tailEnd type="none" w="med" len="med"/>
+                    </a:lnR>
+                    <a:lnT w="6350" cap="flat" cmpd="sng" algn="ctr">
+                      <a:solidFill>
+                        <a:srgbClr val="2E3A35"/>
+                      </a:solidFill>
+                      <a:prstDash val="solid"/>
+                      <a:round/>
+                      <a:headEnd type="none" w="med" len="med"/>
+                      <a:tailEnd type="none" w="med" len="med"/>
+                    </a:lnT>
+                    <a:lnB w="6350" cap="flat" cmpd="sng" algn="ctr">
+                      <a:solidFill>
+                        <a:srgbClr val="2E3A35"/>
+                      </a:solidFill>
+                      <a:prstDash val="solid"/>
+                      <a:round/>
+                      <a:headEnd type="none" w="med" len="med"/>
+                      <a:tailEnd type="none" w="med" len="med"/>
+                    </a:lnB>
+                    <a:solidFill>
+                      <a:srgbClr val="1B2320"/>
+                    </a:solidFill>
+                  </a:tcPr>
+                </a:tc>
+                <a:tc>
+                  <a:txBody>
+                    <a:bodyPr/>
+                    <a:lstStyle/>
+                    <a:p>
+                      <a:pPr algn="r" indent="0" marL="0">
+                        <a:buNone/>
+                      </a:pPr>
+                      <a:r>
+                        <a:rPr lang="en-US" sz="1050" dirty="0">
+                          <a:solidFill>
+                            <a:srgbClr val="F3F0E8"/>
+                          </a:solidFill>
+                          <a:latin typeface="Calibri" pitchFamily="34" charset="0"/>
+                          <a:ea typeface="Calibri" pitchFamily="34" charset="-122"/>
+                          <a:cs typeface="Calibri" pitchFamily="34" charset="-120"/>
+                        </a:rPr>
+                        <a:t>5,250  est</a:t>
+                      </a:r>
+                      <a:endParaRPr lang="en-US" sz="1050" dirty="0">
+                        <a:latin typeface="Calibri" charset="0"/>
+                        <a:ea typeface="Calibri" charset="0"/>
+                        <a:cs typeface="Calibri" charset="0"/>
+                      </a:endParaRPr>
+                    </a:p>
+                  </a:txBody>
+                  <a:tcPr marL="82296" marR="82296" marT="36576" marB="36576" anchor="ctr">
+                    <a:lnL w="6350" cap="flat" cmpd="sng" algn="ctr">
+                      <a:solidFill>
+                        <a:srgbClr val="2E3A35"/>
+                      </a:solidFill>
+                      <a:prstDash val="solid"/>
+                      <a:round/>
+                      <a:headEnd type="none" w="med" len="med"/>
+                      <a:tailEnd type="none" w="med" len="med"/>
+                    </a:lnL>
+                    <a:lnR w="6350" cap="flat" cmpd="sng" algn="ctr">
+                      <a:solidFill>
+                        <a:srgbClr val="2E3A35"/>
+                      </a:solidFill>
+                      <a:prstDash val="solid"/>
+                      <a:round/>
+                      <a:headEnd type="none" w="med" len="med"/>
+                      <a:tailEnd type="none" w="med" len="med"/>
+                    </a:lnR>
+                    <a:lnT w="6350" cap="flat" cmpd="sng" algn="ctr">
+                      <a:solidFill>
+                        <a:srgbClr val="2E3A35"/>
+                      </a:solidFill>
+                      <a:prstDash val="solid"/>
+                      <a:round/>
+                      <a:headEnd type="none" w="med" len="med"/>
+                      <a:tailEnd type="none" w="med" len="med"/>
+                    </a:lnT>
+                    <a:lnB w="6350" cap="flat" cmpd="sng" algn="ctr">
+                      <a:solidFill>
+                        <a:srgbClr val="2E3A35"/>
+                      </a:solidFill>
+                      <a:prstDash val="solid"/>
+                      <a:round/>
+                      <a:headEnd type="none" w="med" len="med"/>
+                      <a:tailEnd type="none" w="med" len="med"/>
+                    </a:lnB>
+                    <a:solidFill>
+                      <a:srgbClr val="1B2320"/>
+                    </a:solidFill>
+                  </a:tcPr>
+                </a:tc>
+              </a:tr>
+              <a:tr h="254203">
+                <a:tc>
+                  <a:txBody>
+                    <a:bodyPr/>
+                    <a:lstStyle/>
+                    <a:p>
+                      <a:pPr algn="l" indent="0" marL="0">
+                        <a:buNone/>
+                      </a:pPr>
+                      <a:r>
+                        <a:rPr lang="en-US" sz="1050" b="1" dirty="0">
+                          <a:solidFill>
+                            <a:srgbClr val="F3F0E8"/>
+                          </a:solidFill>
+                          <a:latin typeface="Calibri" pitchFamily="34" charset="0"/>
+                          <a:ea typeface="Calibri" pitchFamily="34" charset="-122"/>
+                          <a:cs typeface="Calibri" pitchFamily="34" charset="-120"/>
+                        </a:rPr>
+                        <a:t>All-in cost</a:t>
+                      </a:r>
+                      <a:endParaRPr lang="en-US" sz="1050" dirty="0">
+                        <a:latin typeface="Calibri" charset="0"/>
+                        <a:ea typeface="Calibri" charset="0"/>
+                        <a:cs typeface="Calibri" charset="0"/>
+                      </a:endParaRPr>
+                    </a:p>
+                  </a:txBody>
+                  <a:tcPr marL="82296" marR="82296" marT="36576" marB="36576" anchor="ctr">
+                    <a:lnL w="6350" cap="flat" cmpd="sng" algn="ctr">
+                      <a:solidFill>
+                        <a:srgbClr val="2E3A35"/>
+                      </a:solidFill>
+                      <a:prstDash val="solid"/>
+                      <a:round/>
+                      <a:headEnd type="none" w="med" len="med"/>
+                      <a:tailEnd type="none" w="med" len="med"/>
+                    </a:lnL>
+                    <a:lnR w="6350" cap="flat" cmpd="sng" algn="ctr">
+                      <a:solidFill>
+                        <a:srgbClr val="2E3A35"/>
+                      </a:solidFill>
+                      <a:prstDash val="solid"/>
+                      <a:round/>
+                      <a:headEnd type="none" w="med" len="med"/>
+                      <a:tailEnd type="none" w="med" len="med"/>
+                    </a:lnR>
+                    <a:lnT w="6350" cap="flat" cmpd="sng" algn="ctr">
+                      <a:solidFill>
+                        <a:srgbClr val="2E3A35"/>
+                      </a:solidFill>
+                      <a:prstDash val="solid"/>
+                      <a:round/>
+                      <a:headEnd type="none" w="med" len="med"/>
+                      <a:tailEnd type="none" w="med" len="med"/>
+                    </a:lnT>
+                    <a:lnB w="6350" cap="flat" cmpd="sng" algn="ctr">
+                      <a:solidFill>
+                        <a:srgbClr val="2E3A35"/>
+                      </a:solidFill>
+                      <a:prstDash val="solid"/>
+                      <a:round/>
+                      <a:headEnd type="none" w="med" len="med"/>
+                      <a:tailEnd type="none" w="med" len="med"/>
+                    </a:lnB>
+                    <a:solidFill>
+                      <a:srgbClr val="202A26"/>
+                    </a:solidFill>
+                  </a:tcPr>
+                </a:tc>
+                <a:tc>
+                  <a:txBody>
+                    <a:bodyPr/>
+                    <a:lstStyle/>
+                    <a:p>
+                      <a:pPr algn="r" indent="0" marL="0">
+                        <a:buNone/>
+                      </a:pPr>
+                      <a:r>
+                        <a:rPr lang="en-US" sz="1050" b="1" dirty="0">
+                          <a:solidFill>
+                            <a:srgbClr val="F3F0E8"/>
+                          </a:solidFill>
+                          <a:latin typeface="Calibri" pitchFamily="34" charset="0"/>
+                          <a:ea typeface="Calibri" pitchFamily="34" charset="-122"/>
+                          <a:cs typeface="Calibri" pitchFamily="34" charset="-120"/>
+                        </a:rPr>
+                        <a:t>AED 1,980,000</a:t>
+                      </a:r>
+                      <a:endParaRPr lang="en-US" sz="1050" dirty="0">
+                        <a:latin typeface="Calibri" charset="0"/>
+                        <a:ea typeface="Calibri" charset="0"/>
+                        <a:cs typeface="Calibri" charset="0"/>
+                      </a:endParaRPr>
+                    </a:p>
+                  </a:txBody>
+                  <a:tcPr marL="82296" marR="82296" marT="36576" marB="36576" anchor="ctr">
+                    <a:lnL w="6350" cap="flat" cmpd="sng" algn="ctr">
+                      <a:solidFill>
+                        <a:srgbClr val="2E3A35"/>
+                      </a:solidFill>
+                      <a:prstDash val="solid"/>
+                      <a:round/>
+                      <a:headEnd type="none" w="med" len="med"/>
+                      <a:tailEnd type="none" w="med" len="med"/>
+                    </a:lnL>
+                    <a:lnR w="6350" cap="flat" cmpd="sng" algn="ctr">
+                      <a:solidFill>
+                        <a:srgbClr val="2E3A35"/>
+                      </a:solidFill>
+                      <a:prstDash val="solid"/>
+                      <a:round/>
+                      <a:headEnd type="none" w="med" len="med"/>
+                      <a:tailEnd type="none" w="med" len="med"/>
+                    </a:lnR>
+                    <a:lnT w="6350" cap="flat" cmpd="sng" algn="ctr">
+                      <a:solidFill>
+                        <a:srgbClr val="2E3A35"/>
+                      </a:solidFill>
+                      <a:prstDash val="solid"/>
+                      <a:round/>
+                      <a:headEnd type="none" w="med" len="med"/>
+                      <a:tailEnd type="none" w="med" len="med"/>
+                    </a:lnT>
+                    <a:lnB w="6350" cap="flat" cmpd="sng" algn="ctr">
+                      <a:solidFill>
+                        <a:srgbClr val="2E3A35"/>
+                      </a:solidFill>
+                      <a:prstDash val="solid"/>
+                      <a:round/>
+                      <a:headEnd type="none" w="med" len="med"/>
+                      <a:tailEnd type="none" w="med" len="med"/>
+                    </a:lnB>
+                    <a:solidFill>
+                      <a:srgbClr val="202A26"/>
+                    </a:solidFill>
+                  </a:tcPr>
+                </a:tc>
+                <a:tc>
+                  <a:txBody>
+                    <a:bodyPr/>
+                    <a:lstStyle/>
+                    <a:p>
+                      <a:pPr algn="r" indent="0" marL="0">
+                        <a:buNone/>
+                      </a:pPr>
+                      <a:r>
+                        <a:rPr lang="en-US" sz="1050" b="1" dirty="0">
+                          <a:solidFill>
+                            <a:srgbClr val="F3F0E8"/>
+                          </a:solidFill>
+                          <a:latin typeface="Calibri" pitchFamily="34" charset="0"/>
+                          <a:ea typeface="Calibri" pitchFamily="34" charset="-122"/>
+                          <a:cs typeface="Calibri" pitchFamily="34" charset="-120"/>
+                        </a:rPr>
+                        <a:t>AED 2,189,250</a:t>
+                      </a:r>
+                      <a:endParaRPr lang="en-US" sz="1050" dirty="0">
+                        <a:latin typeface="Calibri" charset="0"/>
+                        <a:ea typeface="Calibri" charset="0"/>
+                        <a:cs typeface="Calibri" charset="0"/>
+                      </a:endParaRPr>
+                    </a:p>
+                  </a:txBody>
+                  <a:tcPr marL="82296" marR="82296" marT="36576" marB="36576" anchor="ctr">
+                    <a:lnL w="6350" cap="flat" cmpd="sng" algn="ctr">
+                      <a:solidFill>
+                        <a:srgbClr val="2E3A35"/>
+                      </a:solidFill>
+                      <a:prstDash val="solid"/>
+                      <a:round/>
+                      <a:headEnd type="none" w="med" len="med"/>
+                      <a:tailEnd type="none" w="med" len="med"/>
+                    </a:lnL>
+                    <a:lnR w="6350" cap="flat" cmpd="sng" algn="ctr">
+                      <a:solidFill>
+                        <a:srgbClr val="2E3A35"/>
+                      </a:solidFill>
+                      <a:prstDash val="solid"/>
+                      <a:round/>
+                      <a:headEnd type="none" w="med" len="med"/>
+                      <a:tailEnd type="none" w="med" len="med"/>
+                    </a:lnR>
+                    <a:lnT w="6350" cap="flat" cmpd="sng" algn="ctr">
+                      <a:solidFill>
+                        <a:srgbClr val="2E3A35"/>
+                      </a:solidFill>
+                      <a:prstDash val="solid"/>
+                      <a:round/>
+                      <a:headEnd type="none" w="med" len="med"/>
+                      <a:tailEnd type="none" w="med" len="med"/>
+                    </a:lnT>
+                    <a:lnB w="6350" cap="flat" cmpd="sng" algn="ctr">
+                      <a:solidFill>
+                        <a:srgbClr val="2E3A35"/>
+                      </a:solidFill>
+                      <a:prstDash val="solid"/>
+                      <a:round/>
+                      <a:headEnd type="none" w="med" len="med"/>
+                      <a:tailEnd type="none" w="med" len="med"/>
+                    </a:lnB>
+                    <a:solidFill>
+                      <a:srgbClr val="202A26"/>
+                    </a:solidFill>
+                  </a:tcPr>
+                </a:tc>
+                <a:tc>
+                  <a:txBody>
+                    <a:bodyPr/>
+                    <a:lstStyle/>
+                    <a:p>
+                      <a:pPr algn="r" indent="0" marL="0">
+                        <a:buNone/>
+                      </a:pPr>
+                      <a:r>
+                        <a:rPr lang="en-US" sz="1050" b="1" dirty="0">
+                          <a:solidFill>
+                            <a:srgbClr val="7BE08A"/>
+                          </a:solidFill>
+                          <a:latin typeface="Calibri" pitchFamily="34" charset="0"/>
+                          <a:ea typeface="Calibri" pitchFamily="34" charset="-122"/>
+                          <a:cs typeface="Calibri" pitchFamily="34" charset="-120"/>
+                        </a:rPr>
+                        <a:t>AED 1,378,050</a:t>
+                      </a:r>
+                      <a:endParaRPr lang="en-US" sz="1050" dirty="0">
+                        <a:latin typeface="Calibri" charset="0"/>
+                        <a:ea typeface="Calibri" charset="0"/>
+                        <a:cs typeface="Calibri" charset="0"/>
+                      </a:endParaRPr>
+                    </a:p>
+                  </a:txBody>
+                  <a:tcPr marL="82296" marR="82296" marT="36576" marB="36576" anchor="ctr">
+                    <a:lnL w="6350" cap="flat" cmpd="sng" algn="ctr">
+                      <a:solidFill>
+                        <a:srgbClr val="2E3A35"/>
+                      </a:solidFill>
+                      <a:prstDash val="solid"/>
+                      <a:round/>
+                      <a:headEnd type="none" w="med" len="med"/>
+                      <a:tailEnd type="none" w="med" len="med"/>
+                    </a:lnL>
+                    <a:lnR w="6350" cap="flat" cmpd="sng" algn="ctr">
+                      <a:solidFill>
+                        <a:srgbClr val="2E3A35"/>
+                      </a:solidFill>
+                      <a:prstDash val="solid"/>
+                      <a:round/>
+                      <a:headEnd type="none" w="med" len="med"/>
+                      <a:tailEnd type="none" w="med" len="med"/>
+                    </a:lnR>
+                    <a:lnT w="6350" cap="flat" cmpd="sng" algn="ctr">
+                      <a:solidFill>
+                        <a:srgbClr val="2E3A35"/>
+                      </a:solidFill>
+                      <a:prstDash val="solid"/>
+                      <a:round/>
+                      <a:headEnd type="none" w="med" len="med"/>
+                      <a:tailEnd type="none" w="med" len="med"/>
+                    </a:lnT>
+                    <a:lnB w="6350" cap="flat" cmpd="sng" algn="ctr">
+                      <a:solidFill>
+                        <a:srgbClr val="2E3A35"/>
+                      </a:solidFill>
+                      <a:prstDash val="solid"/>
+                      <a:round/>
+                      <a:headEnd type="none" w="med" len="med"/>
+                      <a:tailEnd type="none" w="med" len="med"/>
+                    </a:lnB>
+                    <a:solidFill>
+                      <a:srgbClr val="202A26"/>
+                    </a:solidFill>
+                  </a:tcPr>
+                </a:tc>
+              </a:tr>
+              <a:tr h="254203">
+                <a:tc>
+                  <a:txBody>
+                    <a:bodyPr/>
+                    <a:lstStyle/>
+                    <a:p>
+                      <a:pPr algn="l" indent="0" marL="0">
+                        <a:buNone/>
+                      </a:pPr>
+                      <a:r>
+                        <a:rPr lang="en-US" sz="1050" dirty="0">
+                          <a:solidFill>
+                            <a:srgbClr val="A7B0AB"/>
+                          </a:solidFill>
+                          <a:latin typeface="Calibri" pitchFamily="34" charset="0"/>
+                          <a:ea typeface="Calibri" pitchFamily="34" charset="-122"/>
+                          <a:cs typeface="Calibri" pitchFamily="34" charset="-120"/>
+                        </a:rPr>
+                        <a:t>Units of this type</a:t>
+                      </a:r>
+                      <a:endParaRPr lang="en-US" sz="1050" dirty="0">
+                        <a:latin typeface="Calibri" charset="0"/>
+                        <a:ea typeface="Calibri" charset="0"/>
+                        <a:cs typeface="Calibri" charset="0"/>
+                      </a:endParaRPr>
+                    </a:p>
+                  </a:txBody>
+                  <a:tcPr marL="82296" marR="82296" marT="36576" marB="36576" anchor="ctr">
+                    <a:lnL w="6350" cap="flat" cmpd="sng" algn="ctr">
+                      <a:solidFill>
+                        <a:srgbClr val="2E3A35"/>
+                      </a:solidFill>
+                      <a:prstDash val="solid"/>
+                      <a:round/>
+                      <a:headEnd type="none" w="med" len="med"/>
+                      <a:tailEnd type="none" w="med" len="med"/>
+                    </a:lnL>
+                    <a:lnR w="6350" cap="flat" cmpd="sng" algn="ctr">
+                      <a:solidFill>
+                        <a:srgbClr val="2E3A35"/>
+                      </a:solidFill>
+                      <a:prstDash val="solid"/>
+                      <a:round/>
+                      <a:headEnd type="none" w="med" len="med"/>
+                      <a:tailEnd type="none" w="med" len="med"/>
+                    </a:lnR>
+                    <a:lnT w="6350" cap="flat" cmpd="sng" algn="ctr">
+                      <a:solidFill>
+                        <a:srgbClr val="2E3A35"/>
+                      </a:solidFill>
+                      <a:prstDash val="solid"/>
+                      <a:round/>
+                      <a:headEnd type="none" w="med" len="med"/>
+                      <a:tailEnd type="none" w="med" len="med"/>
+                    </a:lnT>
+                    <a:lnB w="6350" cap="flat" cmpd="sng" algn="ctr">
+                      <a:solidFill>
+                        <a:srgbClr val="2E3A35"/>
+                      </a:solidFill>
+                      <a:prstDash val="solid"/>
+                      <a:round/>
+                      <a:headEnd type="none" w="med" len="med"/>
+                      <a:tailEnd type="none" w="med" len="med"/>
+                    </a:lnB>
+                    <a:solidFill>
+                      <a:srgbClr val="1B2320"/>
+                    </a:solidFill>
+                  </a:tcPr>
+                </a:tc>
+                <a:tc>
+                  <a:txBody>
+                    <a:bodyPr/>
+                    <a:lstStyle/>
+                    <a:p>
+                      <a:pPr algn="r" indent="0" marL="0">
+                        <a:buNone/>
+                      </a:pPr>
+                      <a:r>
+                        <a:rPr lang="en-US" sz="1050" dirty="0">
+                          <a:solidFill>
+                            <a:srgbClr val="828C87"/>
+                          </a:solidFill>
+                          <a:latin typeface="Calibri" pitchFamily="34" charset="0"/>
+                          <a:ea typeface="Calibri" pitchFamily="34" charset="-122"/>
+                          <a:cs typeface="Calibri" pitchFamily="34" charset="-120"/>
+                        </a:rPr>
+                        <a:t>To confirm</a:t>
+                      </a:r>
+                      <a:endParaRPr lang="en-US" sz="1050" dirty="0">
+                        <a:latin typeface="Calibri" charset="0"/>
+                        <a:ea typeface="Calibri" charset="0"/>
+                        <a:cs typeface="Calibri" charset="0"/>
+                      </a:endParaRPr>
+                    </a:p>
+                  </a:txBody>
+                  <a:tcPr marL="82296" marR="82296" marT="36576" marB="36576" anchor="ctr">
+                    <a:lnL w="6350" cap="flat" cmpd="sng" algn="ctr">
+                      <a:solidFill>
+                        <a:srgbClr val="2E3A35"/>
+                      </a:solidFill>
+                      <a:prstDash val="solid"/>
+                      <a:round/>
+                      <a:headEnd type="none" w="med" len="med"/>
+                      <a:tailEnd type="none" w="med" len="med"/>
+                    </a:lnL>
+                    <a:lnR w="6350" cap="flat" cmpd="sng" algn="ctr">
+                      <a:solidFill>
+                        <a:srgbClr val="2E3A35"/>
+                      </a:solidFill>
+                      <a:prstDash val="solid"/>
+                      <a:round/>
+                      <a:headEnd type="none" w="med" len="med"/>
+                      <a:tailEnd type="none" w="med" len="med"/>
+                    </a:lnR>
+                    <a:lnT w="6350" cap="flat" cmpd="sng" algn="ctr">
+                      <a:solidFill>
+                        <a:srgbClr val="2E3A35"/>
+                      </a:solidFill>
+                      <a:prstDash val="solid"/>
+                      <a:round/>
+                      <a:headEnd type="none" w="med" len="med"/>
+                      <a:tailEnd type="none" w="med" len="med"/>
+                    </a:lnT>
+                    <a:lnB w="6350" cap="flat" cmpd="sng" algn="ctr">
+                      <a:solidFill>
+                        <a:srgbClr val="2E3A35"/>
+                      </a:solidFill>
+                      <a:prstDash val="solid"/>
+                      <a:round/>
+                      <a:headEnd type="none" w="med" len="med"/>
+                      <a:tailEnd type="none" w="med" len="med"/>
+                    </a:lnB>
+                    <a:solidFill>
+                      <a:srgbClr val="1B2320"/>
+                    </a:solidFill>
+                  </a:tcPr>
+                </a:tc>
+                <a:tc>
+                  <a:txBody>
+                    <a:bodyPr/>
+                    <a:lstStyle/>
+                    <a:p>
+                      <a:pPr algn="r" indent="0" marL="0">
+                        <a:buNone/>
+                      </a:pPr>
+                      <a:r>
+                        <a:rPr lang="en-US" sz="1050" dirty="0">
+                          <a:solidFill>
+                            <a:srgbClr val="828C87"/>
+                          </a:solidFill>
+                          <a:latin typeface="Calibri" pitchFamily="34" charset="0"/>
+                          <a:ea typeface="Calibri" pitchFamily="34" charset="-122"/>
+                          <a:cs typeface="Calibri" pitchFamily="34" charset="-120"/>
+                        </a:rPr>
+                        <a:t>To confirm</a:t>
+                      </a:r>
+                      <a:endParaRPr lang="en-US" sz="1050" dirty="0">
+                        <a:latin typeface="Calibri" charset="0"/>
+                        <a:ea typeface="Calibri" charset="0"/>
+                        <a:cs typeface="Calibri" charset="0"/>
+                      </a:endParaRPr>
+                    </a:p>
+                  </a:txBody>
+                  <a:tcPr marL="82296" marR="82296" marT="36576" marB="36576" anchor="ctr">
+                    <a:lnL w="6350" cap="flat" cmpd="sng" algn="ctr">
+                      <a:solidFill>
+                        <a:srgbClr val="2E3A35"/>
+                      </a:solidFill>
+                      <a:prstDash val="solid"/>
+                      <a:round/>
+                      <a:headEnd type="none" w="med" len="med"/>
+                      <a:tailEnd type="none" w="med" len="med"/>
+                    </a:lnL>
+                    <a:lnR w="6350" cap="flat" cmpd="sng" algn="ctr">
+                      <a:solidFill>
+                        <a:srgbClr val="2E3A35"/>
+                      </a:solidFill>
+                      <a:prstDash val="solid"/>
+                      <a:round/>
+                      <a:headEnd type="none" w="med" len="med"/>
+                      <a:tailEnd type="none" w="med" len="med"/>
+                    </a:lnR>
+                    <a:lnT w="6350" cap="flat" cmpd="sng" algn="ctr">
+                      <a:solidFill>
+                        <a:srgbClr val="2E3A35"/>
+                      </a:solidFill>
+                      <a:prstDash val="solid"/>
+                      <a:round/>
+                      <a:headEnd type="none" w="med" len="med"/>
+                      <a:tailEnd type="none" w="med" len="med"/>
+                    </a:lnT>
+                    <a:lnB w="6350" cap="flat" cmpd="sng" algn="ctr">
+                      <a:solidFill>
+                        <a:srgbClr val="2E3A35"/>
+                      </a:solidFill>
+                      <a:prstDash val="solid"/>
+                      <a:round/>
+                      <a:headEnd type="none" w="med" len="med"/>
+                      <a:tailEnd type="none" w="med" len="med"/>
+                    </a:lnB>
+                    <a:solidFill>
+                      <a:srgbClr val="1B2320"/>
                     </a:solidFill>
                   </a:tcPr>
                 </a:tc>
@@ -36532,560 +37902,12 @@
                       <a:tailEnd type="none" w="med" len="med"/>
                     </a:lnB>
                     <a:solidFill>
-                      <a:srgbClr val="171E1B"/>
-                    </a:solidFill>
-                  </a:tcPr>
-                </a:tc>
-              </a:tr>
-              <a:tr h="288036">
-                <a:tc>
-                  <a:txBody>
-                    <a:bodyPr/>
-                    <a:lstStyle/>
-                    <a:p>
-                      <a:pPr algn="l" indent="0" marL="0">
-                        <a:buNone/>
-                      </a:pPr>
-                      <a:r>
-                        <a:rPr lang="en-US" sz="1050" dirty="0">
-                          <a:solidFill>
-                            <a:srgbClr val="A7B0AB"/>
-                          </a:solidFill>
-                          <a:latin typeface="Calibri" pitchFamily="34" charset="0"/>
-                          <a:ea typeface="Calibri" pitchFamily="34" charset="-122"/>
-                          <a:cs typeface="Calibri" pitchFamily="34" charset="-120"/>
-                        </a:rPr>
-                        <a:t>Price from</a:t>
-                      </a:r>
-                      <a:endParaRPr lang="en-US" sz="1050" dirty="0">
-                        <a:latin typeface="Calibri" charset="0"/>
-                        <a:ea typeface="Calibri" charset="0"/>
-                        <a:cs typeface="Calibri" charset="0"/>
-                      </a:endParaRPr>
-                    </a:p>
-                  </a:txBody>
-                  <a:tcPr marL="82296" marR="82296" marT="36576" marB="36576" anchor="ctr">
-                    <a:lnL w="6350" cap="flat" cmpd="sng" algn="ctr">
-                      <a:solidFill>
-                        <a:srgbClr val="2E3A35"/>
-                      </a:solidFill>
-                      <a:prstDash val="solid"/>
-                      <a:round/>
-                      <a:headEnd type="none" w="med" len="med"/>
-                      <a:tailEnd type="none" w="med" len="med"/>
-                    </a:lnL>
-                    <a:lnR w="6350" cap="flat" cmpd="sng" algn="ctr">
-                      <a:solidFill>
-                        <a:srgbClr val="2E3A35"/>
-                      </a:solidFill>
-                      <a:prstDash val="solid"/>
-                      <a:round/>
-                      <a:headEnd type="none" w="med" len="med"/>
-                      <a:tailEnd type="none" w="med" len="med"/>
-                    </a:lnR>
-                    <a:lnT w="6350" cap="flat" cmpd="sng" algn="ctr">
-                      <a:solidFill>
-                        <a:srgbClr val="2E3A35"/>
-                      </a:solidFill>
-                      <a:prstDash val="solid"/>
-                      <a:round/>
-                      <a:headEnd type="none" w="med" len="med"/>
-                      <a:tailEnd type="none" w="med" len="med"/>
-                    </a:lnT>
-                    <a:lnB w="6350" cap="flat" cmpd="sng" algn="ctr">
-                      <a:solidFill>
-                        <a:srgbClr val="2E3A35"/>
-                      </a:solidFill>
-                      <a:prstDash val="solid"/>
-                      <a:round/>
-                      <a:headEnd type="none" w="med" len="med"/>
-                      <a:tailEnd type="none" w="med" len="med"/>
-                    </a:lnB>
-                    <a:solidFill>
-                      <a:srgbClr val="1B2320"/>
-                    </a:solidFill>
-                  </a:tcPr>
-                </a:tc>
-                <a:tc>
-                  <a:txBody>
-                    <a:bodyPr/>
-                    <a:lstStyle/>
-                    <a:p>
-                      <a:pPr algn="r" indent="0" marL="0">
-                        <a:buNone/>
-                      </a:pPr>
-                      <a:r>
-                        <a:rPr lang="en-US" sz="1050" dirty="0">
-                          <a:solidFill>
-                            <a:srgbClr val="828C87"/>
-                          </a:solidFill>
-                          <a:latin typeface="Calibri" pitchFamily="34" charset="0"/>
-                          <a:ea typeface="Calibri" pitchFamily="34" charset="-122"/>
-                          <a:cs typeface="Calibri" pitchFamily="34" charset="-120"/>
-                        </a:rPr>
-                        <a:t>Price list requested</a:t>
-                      </a:r>
-                      <a:endParaRPr lang="en-US" sz="1050" dirty="0">
-                        <a:latin typeface="Calibri" charset="0"/>
-                        <a:ea typeface="Calibri" charset="0"/>
-                        <a:cs typeface="Calibri" charset="0"/>
-                      </a:endParaRPr>
-                    </a:p>
-                  </a:txBody>
-                  <a:tcPr marL="82296" marR="82296" marT="36576" marB="36576" anchor="ctr">
-                    <a:lnL w="6350" cap="flat" cmpd="sng" algn="ctr">
-                      <a:solidFill>
-                        <a:srgbClr val="2E3A35"/>
-                      </a:solidFill>
-                      <a:prstDash val="solid"/>
-                      <a:round/>
-                      <a:headEnd type="none" w="med" len="med"/>
-                      <a:tailEnd type="none" w="med" len="med"/>
-                    </a:lnL>
-                    <a:lnR w="6350" cap="flat" cmpd="sng" algn="ctr">
-                      <a:solidFill>
-                        <a:srgbClr val="2E3A35"/>
-                      </a:solidFill>
-                      <a:prstDash val="solid"/>
-                      <a:round/>
-                      <a:headEnd type="none" w="med" len="med"/>
-                      <a:tailEnd type="none" w="med" len="med"/>
-                    </a:lnR>
-                    <a:lnT w="6350" cap="flat" cmpd="sng" algn="ctr">
-                      <a:solidFill>
-                        <a:srgbClr val="2E3A35"/>
-                      </a:solidFill>
-                      <a:prstDash val="solid"/>
-                      <a:round/>
-                      <a:headEnd type="none" w="med" len="med"/>
-                      <a:tailEnd type="none" w="med" len="med"/>
-                    </a:lnT>
-                    <a:lnB w="6350" cap="flat" cmpd="sng" algn="ctr">
-                      <a:solidFill>
-                        <a:srgbClr val="2E3A35"/>
-                      </a:solidFill>
-                      <a:prstDash val="solid"/>
-                      <a:round/>
-                      <a:headEnd type="none" w="med" len="med"/>
-                      <a:tailEnd type="none" w="med" len="med"/>
-                    </a:lnB>
-                    <a:solidFill>
-                      <a:srgbClr val="1B2320"/>
-                    </a:solidFill>
-                  </a:tcPr>
-                </a:tc>
-                <a:tc>
-                  <a:txBody>
-                    <a:bodyPr/>
-                    <a:lstStyle/>
-                    <a:p>
-                      <a:pPr algn="r" indent="0" marL="0">
-                        <a:buNone/>
-                      </a:pPr>
-                      <a:r>
-                        <a:rPr lang="en-US" sz="1050" dirty="0">
-                          <a:solidFill>
-                            <a:srgbClr val="F3F0E8"/>
-                          </a:solidFill>
-                          <a:latin typeface="Calibri" pitchFamily="34" charset="0"/>
-                          <a:ea typeface="Calibri" pitchFamily="34" charset="-122"/>
-                          <a:cs typeface="Calibri" pitchFamily="34" charset="-120"/>
-                        </a:rPr>
-                        <a:t>AED 2,100,000</a:t>
-                      </a:r>
-                      <a:endParaRPr lang="en-US" sz="1050" dirty="0">
-                        <a:latin typeface="Calibri" charset="0"/>
-                        <a:ea typeface="Calibri" charset="0"/>
-                        <a:cs typeface="Calibri" charset="0"/>
-                      </a:endParaRPr>
-                    </a:p>
-                  </a:txBody>
-                  <a:tcPr marL="82296" marR="82296" marT="36576" marB="36576" anchor="ctr">
-                    <a:lnL w="6350" cap="flat" cmpd="sng" algn="ctr">
-                      <a:solidFill>
-                        <a:srgbClr val="2E3A35"/>
-                      </a:solidFill>
-                      <a:prstDash val="solid"/>
-                      <a:round/>
-                      <a:headEnd type="none" w="med" len="med"/>
-                      <a:tailEnd type="none" w="med" len="med"/>
-                    </a:lnL>
-                    <a:lnR w="6350" cap="flat" cmpd="sng" algn="ctr">
-                      <a:solidFill>
-                        <a:srgbClr val="2E3A35"/>
-                      </a:solidFill>
-                      <a:prstDash val="solid"/>
-                      <a:round/>
-                      <a:headEnd type="none" w="med" len="med"/>
-                      <a:tailEnd type="none" w="med" len="med"/>
-                    </a:lnR>
-                    <a:lnT w="6350" cap="flat" cmpd="sng" algn="ctr">
-                      <a:solidFill>
-                        <a:srgbClr val="2E3A35"/>
-                      </a:solidFill>
-                      <a:prstDash val="solid"/>
-                      <a:round/>
-                      <a:headEnd type="none" w="med" len="med"/>
-                      <a:tailEnd type="none" w="med" len="med"/>
-                    </a:lnT>
-                    <a:lnB w="6350" cap="flat" cmpd="sng" algn="ctr">
-                      <a:solidFill>
-                        <a:srgbClr val="2E3A35"/>
-                      </a:solidFill>
-                      <a:prstDash val="solid"/>
-                      <a:round/>
-                      <a:headEnd type="none" w="med" len="med"/>
-                      <a:tailEnd type="none" w="med" len="med"/>
-                    </a:lnB>
-                    <a:solidFill>
-                      <a:srgbClr val="1B2320"/>
-                    </a:solidFill>
-                  </a:tcPr>
-                </a:tc>
-                <a:tc>
-                  <a:txBody>
-                    <a:bodyPr/>
-                    <a:lstStyle/>
-                    <a:p>
-                      <a:pPr algn="r" indent="0" marL="0">
-                        <a:buNone/>
-                      </a:pPr>
-                      <a:r>
-                        <a:rPr lang="en-US" sz="1050" dirty="0">
-                          <a:solidFill>
-                            <a:srgbClr val="828C87"/>
-                          </a:solidFill>
-                          <a:latin typeface="Calibri" pitchFamily="34" charset="0"/>
-                          <a:ea typeface="Calibri" pitchFamily="34" charset="-122"/>
-                          <a:cs typeface="Calibri" pitchFamily="34" charset="-120"/>
-                        </a:rPr>
-                        <a:t>Price list requested</a:t>
-                      </a:r>
-                      <a:endParaRPr lang="en-US" sz="1050" dirty="0">
-                        <a:latin typeface="Calibri" charset="0"/>
-                        <a:ea typeface="Calibri" charset="0"/>
-                        <a:cs typeface="Calibri" charset="0"/>
-                      </a:endParaRPr>
-                    </a:p>
-                  </a:txBody>
-                  <a:tcPr marL="82296" marR="82296" marT="36576" marB="36576" anchor="ctr">
-                    <a:lnL w="6350" cap="flat" cmpd="sng" algn="ctr">
-                      <a:solidFill>
-                        <a:srgbClr val="2E3A35"/>
-                      </a:solidFill>
-                      <a:prstDash val="solid"/>
-                      <a:round/>
-                      <a:headEnd type="none" w="med" len="med"/>
-                      <a:tailEnd type="none" w="med" len="med"/>
-                    </a:lnL>
-                    <a:lnR w="6350" cap="flat" cmpd="sng" algn="ctr">
-                      <a:solidFill>
-                        <a:srgbClr val="2E3A35"/>
-                      </a:solidFill>
-                      <a:prstDash val="solid"/>
-                      <a:round/>
-                      <a:headEnd type="none" w="med" len="med"/>
-                      <a:tailEnd type="none" w="med" len="med"/>
-                    </a:lnR>
-                    <a:lnT w="6350" cap="flat" cmpd="sng" algn="ctr">
-                      <a:solidFill>
-                        <a:srgbClr val="2E3A35"/>
-                      </a:solidFill>
-                      <a:prstDash val="solid"/>
-                      <a:round/>
-                      <a:headEnd type="none" w="med" len="med"/>
-                      <a:tailEnd type="none" w="med" len="med"/>
-                    </a:lnT>
-                    <a:lnB w="6350" cap="flat" cmpd="sng" algn="ctr">
-                      <a:solidFill>
-                        <a:srgbClr val="2E3A35"/>
-                      </a:solidFill>
-                      <a:prstDash val="solid"/>
-                      <a:round/>
-                      <a:headEnd type="none" w="med" len="med"/>
-                      <a:tailEnd type="none" w="med" len="med"/>
-                    </a:lnB>
-                    <a:solidFill>
                       <a:srgbClr val="1B2320"/>
                     </a:solidFill>
                   </a:tcPr>
                 </a:tc>
               </a:tr>
-              <a:tr h="288036">
-                <a:tc>
-                  <a:txBody>
-                    <a:bodyPr/>
-                    <a:lstStyle/>
-                    <a:p>
-                      <a:pPr algn="l" indent="0" marL="0">
-                        <a:buNone/>
-                      </a:pPr>
-                      <a:r>
-                        <a:rPr lang="en-US" sz="1050" dirty="0">
-                          <a:solidFill>
-                            <a:srgbClr val="A7B0AB"/>
-                          </a:solidFill>
-                          <a:latin typeface="Calibri" pitchFamily="34" charset="0"/>
-                          <a:ea typeface="Calibri" pitchFamily="34" charset="-122"/>
-                          <a:cs typeface="Calibri" pitchFamily="34" charset="-120"/>
-                        </a:rPr>
-                        <a:t>Price per sqft</a:t>
-                      </a:r>
-                      <a:endParaRPr lang="en-US" sz="1050" dirty="0">
-                        <a:latin typeface="Calibri" charset="0"/>
-                        <a:ea typeface="Calibri" charset="0"/>
-                        <a:cs typeface="Calibri" charset="0"/>
-                      </a:endParaRPr>
-                    </a:p>
-                  </a:txBody>
-                  <a:tcPr marL="82296" marR="82296" marT="36576" marB="36576" anchor="ctr">
-                    <a:lnL w="6350" cap="flat" cmpd="sng" algn="ctr">
-                      <a:solidFill>
-                        <a:srgbClr val="2E3A35"/>
-                      </a:solidFill>
-                      <a:prstDash val="solid"/>
-                      <a:round/>
-                      <a:headEnd type="none" w="med" len="med"/>
-                      <a:tailEnd type="none" w="med" len="med"/>
-                    </a:lnL>
-                    <a:lnR w="6350" cap="flat" cmpd="sng" algn="ctr">
-                      <a:solidFill>
-                        <a:srgbClr val="2E3A35"/>
-                      </a:solidFill>
-                      <a:prstDash val="solid"/>
-                      <a:round/>
-                      <a:headEnd type="none" w="med" len="med"/>
-                      <a:tailEnd type="none" w="med" len="med"/>
-                    </a:lnR>
-                    <a:lnT w="6350" cap="flat" cmpd="sng" algn="ctr">
-                      <a:solidFill>
-                        <a:srgbClr val="2E3A35"/>
-                      </a:solidFill>
-                      <a:prstDash val="solid"/>
-                      <a:round/>
-                      <a:headEnd type="none" w="med" len="med"/>
-                      <a:tailEnd type="none" w="med" len="med"/>
-                    </a:lnT>
-                    <a:lnB w="6350" cap="flat" cmpd="sng" algn="ctr">
-                      <a:solidFill>
-                        <a:srgbClr val="2E3A35"/>
-                      </a:solidFill>
-                      <a:prstDash val="solid"/>
-                      <a:round/>
-                      <a:headEnd type="none" w="med" len="med"/>
-                      <a:tailEnd type="none" w="med" len="med"/>
-                    </a:lnB>
-                    <a:solidFill>
-                      <a:srgbClr val="171E1B"/>
-                    </a:solidFill>
-                  </a:tcPr>
-                </a:tc>
-                <a:tc>
-                  <a:txBody>
-                    <a:bodyPr/>
-                    <a:lstStyle/>
-                    <a:p>
-                      <a:pPr algn="r" indent="0" marL="0">
-                        <a:buNone/>
-                      </a:pPr>
-                      <a:r>
-                        <a:rPr lang="en-US" sz="1050" dirty="0">
-                          <a:solidFill>
-                            <a:srgbClr val="F3F0E8"/>
-                          </a:solidFill>
-                          <a:latin typeface="Calibri" pitchFamily="34" charset="0"/>
-                          <a:ea typeface="Calibri" pitchFamily="34" charset="-122"/>
-                          <a:cs typeface="Calibri" pitchFamily="34" charset="-120"/>
-                        </a:rPr>
-                        <a:t>—</a:t>
-                      </a:r>
-                      <a:endParaRPr lang="en-US" sz="1050" dirty="0">
-                        <a:latin typeface="Calibri" charset="0"/>
-                        <a:ea typeface="Calibri" charset="0"/>
-                        <a:cs typeface="Calibri" charset="0"/>
-                      </a:endParaRPr>
-                    </a:p>
-                  </a:txBody>
-                  <a:tcPr marL="82296" marR="82296" marT="36576" marB="36576" anchor="ctr">
-                    <a:lnL w="6350" cap="flat" cmpd="sng" algn="ctr">
-                      <a:solidFill>
-                        <a:srgbClr val="2E3A35"/>
-                      </a:solidFill>
-                      <a:prstDash val="solid"/>
-                      <a:round/>
-                      <a:headEnd type="none" w="med" len="med"/>
-                      <a:tailEnd type="none" w="med" len="med"/>
-                    </a:lnL>
-                    <a:lnR w="6350" cap="flat" cmpd="sng" algn="ctr">
-                      <a:solidFill>
-                        <a:srgbClr val="2E3A35"/>
-                      </a:solidFill>
-                      <a:prstDash val="solid"/>
-                      <a:round/>
-                      <a:headEnd type="none" w="med" len="med"/>
-                      <a:tailEnd type="none" w="med" len="med"/>
-                    </a:lnR>
-                    <a:lnT w="6350" cap="flat" cmpd="sng" algn="ctr">
-                      <a:solidFill>
-                        <a:srgbClr val="2E3A35"/>
-                      </a:solidFill>
-                      <a:prstDash val="solid"/>
-                      <a:round/>
-                      <a:headEnd type="none" w="med" len="med"/>
-                      <a:tailEnd type="none" w="med" len="med"/>
-                    </a:lnT>
-                    <a:lnB w="6350" cap="flat" cmpd="sng" algn="ctr">
-                      <a:solidFill>
-                        <a:srgbClr val="2E3A35"/>
-                      </a:solidFill>
-                      <a:prstDash val="solid"/>
-                      <a:round/>
-                      <a:headEnd type="none" w="med" len="med"/>
-                      <a:tailEnd type="none" w="med" len="med"/>
-                    </a:lnB>
-                    <a:solidFill>
-                      <a:srgbClr val="171E1B"/>
-                    </a:solidFill>
-                  </a:tcPr>
-                </a:tc>
-                <a:tc>
-                  <a:txBody>
-                    <a:bodyPr/>
-                    <a:lstStyle/>
-                    <a:p>
-                      <a:pPr algn="r" indent="0" marL="0">
-                        <a:buNone/>
-                      </a:pPr>
-                      <a:r>
-                        <a:rPr lang="en-US" sz="1050" dirty="0">
-                          <a:solidFill>
-                            <a:srgbClr val="F3F0E8"/>
-                          </a:solidFill>
-                          <a:latin typeface="Calibri" pitchFamily="34" charset="0"/>
-                          <a:ea typeface="Calibri" pitchFamily="34" charset="-122"/>
-                          <a:cs typeface="Calibri" pitchFamily="34" charset="-120"/>
-                        </a:rPr>
-                        <a:t>≈ AED 1,850</a:t>
-                      </a:r>
-                      <a:endParaRPr lang="en-US" sz="1050" dirty="0">
-                        <a:latin typeface="Calibri" charset="0"/>
-                        <a:ea typeface="Calibri" charset="0"/>
-                        <a:cs typeface="Calibri" charset="0"/>
-                      </a:endParaRPr>
-                    </a:p>
-                  </a:txBody>
-                  <a:tcPr marL="82296" marR="82296" marT="36576" marB="36576" anchor="ctr">
-                    <a:lnL w="6350" cap="flat" cmpd="sng" algn="ctr">
-                      <a:solidFill>
-                        <a:srgbClr val="2E3A35"/>
-                      </a:solidFill>
-                      <a:prstDash val="solid"/>
-                      <a:round/>
-                      <a:headEnd type="none" w="med" len="med"/>
-                      <a:tailEnd type="none" w="med" len="med"/>
-                    </a:lnL>
-                    <a:lnR w="6350" cap="flat" cmpd="sng" algn="ctr">
-                      <a:solidFill>
-                        <a:srgbClr val="2E3A35"/>
-                      </a:solidFill>
-                      <a:prstDash val="solid"/>
-                      <a:round/>
-                      <a:headEnd type="none" w="med" len="med"/>
-                      <a:tailEnd type="none" w="med" len="med"/>
-                    </a:lnR>
-                    <a:lnT w="6350" cap="flat" cmpd="sng" algn="ctr">
-                      <a:solidFill>
-                        <a:srgbClr val="2E3A35"/>
-                      </a:solidFill>
-                      <a:prstDash val="solid"/>
-                      <a:round/>
-                      <a:headEnd type="none" w="med" len="med"/>
-                      <a:tailEnd type="none" w="med" len="med"/>
-                    </a:lnT>
-                    <a:lnB w="6350" cap="flat" cmpd="sng" algn="ctr">
-                      <a:solidFill>
-                        <a:srgbClr val="2E3A35"/>
-                      </a:solidFill>
-                      <a:prstDash val="solid"/>
-                      <a:round/>
-                      <a:headEnd type="none" w="med" len="med"/>
-                      <a:tailEnd type="none" w="med" len="med"/>
-                    </a:lnB>
-                    <a:solidFill>
-                      <a:srgbClr val="171E1B"/>
-                    </a:solidFill>
-                  </a:tcPr>
-                </a:tc>
-                <a:tc>
-                  <a:txBody>
-                    <a:bodyPr/>
-                    <a:lstStyle/>
-                    <a:p>
-                      <a:pPr algn="r" indent="0" marL="0">
-                        <a:buNone/>
-                      </a:pPr>
-                      <a:r>
-                        <a:rPr lang="en-US" sz="1050" dirty="0">
-                          <a:solidFill>
-                            <a:srgbClr val="F3F0E8"/>
-                          </a:solidFill>
-                          <a:latin typeface="Calibri" pitchFamily="34" charset="0"/>
-                          <a:ea typeface="Calibri" pitchFamily="34" charset="-122"/>
-                          <a:cs typeface="Calibri" pitchFamily="34" charset="-120"/>
-                        </a:rPr>
-                        <a:t>—</a:t>
-                      </a:r>
-                      <a:endParaRPr lang="en-US" sz="1050" dirty="0">
-                        <a:latin typeface="Calibri" charset="0"/>
-                        <a:ea typeface="Calibri" charset="0"/>
-                        <a:cs typeface="Calibri" charset="0"/>
-                      </a:endParaRPr>
-                    </a:p>
-                  </a:txBody>
-                  <a:tcPr marL="82296" marR="82296" marT="36576" marB="36576" anchor="ctr">
-                    <a:lnL w="6350" cap="flat" cmpd="sng" algn="ctr">
-                      <a:solidFill>
-                        <a:srgbClr val="2E3A35"/>
-                      </a:solidFill>
-                      <a:prstDash val="solid"/>
-                      <a:round/>
-                      <a:headEnd type="none" w="med" len="med"/>
-                      <a:tailEnd type="none" w="med" len="med"/>
-                    </a:lnL>
-                    <a:lnR w="6350" cap="flat" cmpd="sng" algn="ctr">
-                      <a:solidFill>
-                        <a:srgbClr val="2E3A35"/>
-                      </a:solidFill>
-                      <a:prstDash val="solid"/>
-                      <a:round/>
-                      <a:headEnd type="none" w="med" len="med"/>
-                      <a:tailEnd type="none" w="med" len="med"/>
-                    </a:lnR>
-                    <a:lnT w="6350" cap="flat" cmpd="sng" algn="ctr">
-                      <a:solidFill>
-                        <a:srgbClr val="2E3A35"/>
-                      </a:solidFill>
-                      <a:prstDash val="solid"/>
-                      <a:round/>
-                      <a:headEnd type="none" w="med" len="med"/>
-                      <a:tailEnd type="none" w="med" len="med"/>
-                    </a:lnT>
-                    <a:lnB w="6350" cap="flat" cmpd="sng" algn="ctr">
-                      <a:solidFill>
-                        <a:srgbClr val="2E3A35"/>
-                      </a:solidFill>
-                      <a:prstDash val="solid"/>
-                      <a:round/>
-                      <a:headEnd type="none" w="med" len="med"/>
-                      <a:tailEnd type="none" w="med" len="med"/>
-                    </a:lnB>
-                    <a:solidFill>
-                      <a:srgbClr val="171E1B"/>
-                    </a:solidFill>
-                  </a:tcPr>
-                </a:tc>
-              </a:tr>
-              <a:tr h="288036">
+              <a:tr h="254203">
                 <a:tc>
                   <a:txBody>
                     <a:bodyPr/>
@@ -37150,7 +37972,7 @@
                       <a:tailEnd type="none" w="med" len="med"/>
                     </a:lnB>
                     <a:solidFill>
-                      <a:srgbClr val="1B2320"/>
+                      <a:srgbClr val="171E1B"/>
                     </a:solidFill>
                   </a:tcPr>
                 </a:tc>
@@ -37163,9 +37985,9 @@
                         <a:buNone/>
                       </a:pPr>
                       <a:r>
-                        <a:rPr lang="en-US" sz="1050" dirty="0">
+                        <a:rPr lang="en-US" sz="1050" b="1" dirty="0">
                           <a:solidFill>
-                            <a:srgbClr val="F3F0E8"/>
+                            <a:srgbClr val="7BE08A"/>
                           </a:solidFill>
                           <a:latin typeface="Calibri" pitchFamily="34" charset="0"/>
                           <a:ea typeface="Calibri" pitchFamily="34" charset="-122"/>
@@ -37218,7 +38040,7 @@
                       <a:tailEnd type="none" w="med" len="med"/>
                     </a:lnB>
                     <a:solidFill>
-                      <a:srgbClr val="1B2320"/>
+                      <a:srgbClr val="171E1B"/>
                     </a:solidFill>
                   </a:tcPr>
                 </a:tc>
@@ -37286,7 +38108,7 @@
                       <a:tailEnd type="none" w="med" len="med"/>
                     </a:lnB>
                     <a:solidFill>
-                      <a:srgbClr val="1B2320"/>
+                      <a:srgbClr val="171E1B"/>
                     </a:solidFill>
                   </a:tcPr>
                 </a:tc>
@@ -37354,12 +38176,12 @@
                       <a:tailEnd type="none" w="med" len="med"/>
                     </a:lnB>
                     <a:solidFill>
-                      <a:srgbClr val="1B2320"/>
+                      <a:srgbClr val="171E1B"/>
                     </a:solidFill>
                   </a:tcPr>
                 </a:tc>
               </a:tr>
-              <a:tr h="288036">
+              <a:tr h="254203">
                 <a:tc>
                   <a:txBody>
                     <a:bodyPr/>
@@ -37424,7 +38246,7 @@
                       <a:tailEnd type="none" w="med" len="med"/>
                     </a:lnB>
                     <a:solidFill>
-                      <a:srgbClr val="171E1B"/>
+                      <a:srgbClr val="1B2320"/>
                     </a:solidFill>
                   </a:tcPr>
                 </a:tc>
@@ -37492,7 +38314,7 @@
                       <a:tailEnd type="none" w="med" len="med"/>
                     </a:lnB>
                     <a:solidFill>
-                      <a:srgbClr val="171E1B"/>
+                      <a:srgbClr val="1B2320"/>
                     </a:solidFill>
                   </a:tcPr>
                 </a:tc>
@@ -37560,7 +38382,7 @@
                       <a:tailEnd type="none" w="med" len="med"/>
                     </a:lnB>
                     <a:solidFill>
-                      <a:srgbClr val="171E1B"/>
+                      <a:srgbClr val="1B2320"/>
                     </a:solidFill>
                   </a:tcPr>
                 </a:tc>
@@ -37628,7 +38450,7 @@
                       <a:tailEnd type="none" w="med" len="med"/>
                     </a:lnB>
                     <a:solidFill>
-                      <a:srgbClr val="171E1B"/>
+                      <a:srgbClr val="1B2320"/>
                     </a:solidFill>
                   </a:tcPr>
                 </a:tc>
@@ -37645,12 +38467,12 @@
         </p:nvSpPr>
         <p:spPr>
           <a:xfrm>
-            <a:off x="566928" y="4956048"/>
-            <a:ext cx="5486400" cy="1051560"/>
+            <a:off x="566928" y="5230368"/>
+            <a:ext cx="5486400" cy="1024128"/>
           </a:xfrm>
           <a:prstGeom prst="roundRect">
             <a:avLst>
-              <a:gd name="adj" fmla="val 2609"/>
+              <a:gd name="adj" fmla="val 2679"/>
             </a:avLst>
           </a:prstGeom>
           <a:solidFill>
@@ -37672,8 +38494,8 @@
         </p:nvSpPr>
         <p:spPr>
           <a:xfrm>
-            <a:off x="768096" y="5065776"/>
-            <a:ext cx="5084064" cy="832104"/>
+            <a:off x="768096" y="5340096"/>
+            <a:ext cx="5084064" cy="804672"/>
           </a:xfrm>
           <a:prstGeom prst="rect">
             <a:avLst/>
@@ -37692,7 +38514,7 @@
               <a:buNone/>
             </a:pPr>
             <a:r>
-              <a:rPr lang="en-US" sz="1050" b="1" dirty="0">
+              <a:rPr lang="en-US" sz="1000" b="1" dirty="0">
                 <a:solidFill>
                   <a:srgbClr val="F3F0E8"/>
                 </a:solidFill>
@@ -37700,7 +38522,7 @@
                 <a:ea typeface="Calibri" pitchFamily="34" charset="-122"/>
                 <a:cs typeface="Calibri" pitchFamily="34" charset="-120"/>
               </a:rPr>
-              <a:t>What Arancia's 2 BR tells you. </a:t>
+              <a:t>The number worth saying out loud. </a:t>
             </a:r>
             <a:pPr indent="0" marL="0">
               <a:lnSpc>
@@ -37709,7 +38531,7 @@
               <a:buNone/>
             </a:pPr>
             <a:r>
-              <a:rPr lang="en-US" sz="1050" dirty="0">
+              <a:rPr lang="en-US" sz="1000" dirty="0">
                 <a:solidFill>
                   <a:srgbClr val="A7B0AB"/>
                 </a:solidFill>
@@ -37717,9 +38539,9 @@
                 <a:ea typeface="Calibri" pitchFamily="34" charset="-122"/>
                 <a:cs typeface="Calibri" pitchFamily="34" charset="-120"/>
               </a:rPr>
-              <a:t>AED 2.1M for 1,100–1,179 sqft is around AED 1,850/sqft — well above its own one-bedroom at 1,333. The two-bedroom is priced as the family product, not as two one-beds.</a:t>
+              <a:t>Celesto's two-bedroom is 851.64 sqft — within fourteen square feet of Floareá's ONE-bedroom at 837.54. Same floor area, an extra bedroom, for AED 173,890 more all-in.</a:t>
             </a:r>
-            <a:endParaRPr lang="en-US" sz="1050" dirty="0"/>
+            <a:endParaRPr lang="en-US" sz="1000" dirty="0"/>
           </a:p>
         </p:txBody>
       </p:sp>
@@ -37731,12 +38553,12 @@
         </p:nvSpPr>
         <p:spPr>
           <a:xfrm>
-            <a:off x="6400800" y="4956048"/>
-            <a:ext cx="5193792" cy="1051560"/>
+            <a:off x="6400800" y="5230368"/>
+            <a:ext cx="5193792" cy="1024128"/>
           </a:xfrm>
           <a:prstGeom prst="roundRect">
             <a:avLst>
-              <a:gd name="adj" fmla="val 2609"/>
+              <a:gd name="adj" fmla="val 2679"/>
             </a:avLst>
           </a:prstGeom>
           <a:solidFill>
@@ -37758,8 +38580,8 @@
         </p:nvSpPr>
         <p:spPr>
           <a:xfrm>
-            <a:off x="6601968" y="5065776"/>
-            <a:ext cx="4791456" cy="832104"/>
+            <a:off x="6601968" y="5340096"/>
+            <a:ext cx="4791456" cy="804672"/>
           </a:xfrm>
           <a:prstGeom prst="rect">
             <a:avLst/>
@@ -37778,15 +38600,15 @@
               <a:buNone/>
             </a:pPr>
             <a:r>
-              <a:rPr lang="en-US" sz="1050" b="1" dirty="0">
+              <a:rPr lang="en-US" sz="1000" b="1" dirty="0">
                 <a:solidFill>
-                  <a:srgbClr val="E0A45C"/>
+                  <a:srgbClr val="F3F0E8"/>
                 </a:solidFill>
                 <a:latin typeface="Calibri" pitchFamily="34" charset="0"/>
                 <a:ea typeface="Calibri" pitchFamily="34" charset="-122"/>
                 <a:cs typeface="Calibri" pitchFamily="34" charset="-120"/>
               </a:rPr>
-              <a:t>Needed to finish this slide. </a:t>
+              <a:t>How each prices the step up. </a:t>
             </a:r>
             <a:pPr indent="0" marL="0">
               <a:lnSpc>
@@ -37795,7 +38617,7 @@
               <a:buNone/>
             </a:pPr>
             <a:r>
-              <a:rPr lang="en-US" sz="1050" dirty="0">
+              <a:rPr lang="en-US" sz="1000" dirty="0">
                 <a:solidFill>
                   <a:srgbClr val="A7B0AB"/>
                 </a:solidFill>
@@ -37803,9 +38625,9 @@
                 <a:ea typeface="Calibri" pitchFamily="34" charset="-122"/>
                 <a:cs typeface="Calibri" pitchFamily="34" charset="-120"/>
               </a:rPr>
-              <a:t>Two-bedroom price lists for Floareá Skies and Celesto 4, plus Floareá 2 BR sizes and unit counts per type. One sales offer per project is enough — same format as FS 611.</a:t>
+              <a:t>Arancia charges 43% more per sqft for its two-bedroom than its one-bedroom. Celesto charges 7%. Arancia is the better 1 BR buy; Celesto is by far the better 2 BR buy.</a:t>
             </a:r>
-            <a:endParaRPr lang="en-US" sz="1050" dirty="0"/>
+            <a:endParaRPr lang="en-US" sz="1000" dirty="0"/>
           </a:p>
         </p:txBody>
       </p:sp>

--- a/docs/client-deck/Three-Projects-One-Decision.pptx
+++ b/docs/client-deck/Three-Projects-One-Decision.pptx
@@ -5882,7 +5882,7 @@
                           <a:ea typeface="Calibri" pitchFamily="34" charset="-122"/>
                           <a:cs typeface="Calibri" pitchFamily="34" charset="-120"/>
                         </a:rPr>
-                        <a:t>Service charge</a:t>
+                        <a:t>Service charge · AED 15/sqft</a:t>
                       </a:r>
                       <a:endParaRPr lang="en-US" sz="1050" dirty="0">
                         <a:latin typeface="Calibri" charset="0"/>
@@ -5950,7 +5950,7 @@
                           <a:ea typeface="Calibri" pitchFamily="34" charset="-122"/>
                           <a:cs typeface="Calibri" pitchFamily="34" charset="-120"/>
                         </a:rPr>
-                        <a:t>11,726</a:t>
+                        <a:t>12,563</a:t>
                       </a:r>
                       <a:endParaRPr lang="en-US" sz="1050" dirty="0">
                         <a:latin typeface="Calibri" charset="0"/>
@@ -6018,7 +6018,7 @@
                           <a:ea typeface="Calibri" pitchFamily="34" charset="-122"/>
                           <a:cs typeface="Calibri" pitchFamily="34" charset="-120"/>
                         </a:rPr>
-                        <a:t>€2,733</a:t>
+                        <a:t>€2,928</a:t>
                       </a:r>
                       <a:endParaRPr lang="en-US" sz="1050" dirty="0">
                         <a:latin typeface="Calibri" charset="0"/>
@@ -6156,7 +6156,7 @@
                           <a:ea typeface="Calibri" pitchFamily="34" charset="-122"/>
                           <a:cs typeface="Calibri" pitchFamily="34" charset="-120"/>
                         </a:rPr>
-                        <a:t>68,274</a:t>
+                        <a:t>67,437</a:t>
                       </a:r>
                       <a:endParaRPr lang="en-US" sz="1050" dirty="0">
                         <a:latin typeface="Calibri" charset="0"/>
@@ -6224,7 +6224,7 @@
                           <a:ea typeface="Calibri" pitchFamily="34" charset="-122"/>
                           <a:cs typeface="Calibri" pitchFamily="34" charset="-120"/>
                         </a:rPr>
-                        <a:t>€15,915</a:t>
+                        <a:t>€15,720</a:t>
                       </a:r>
                       <a:endParaRPr lang="en-US" sz="1050" dirty="0">
                         <a:latin typeface="Calibri" charset="0"/>
@@ -6362,7 +6362,7 @@
                           <a:ea typeface="Calibri" pitchFamily="34" charset="-122"/>
                           <a:cs typeface="Calibri" pitchFamily="34" charset="-120"/>
                         </a:rPr>
-                        <a:t>5.7%</a:t>
+                        <a:t>5.6%</a:t>
                       </a:r>
                       <a:endParaRPr lang="en-US" sz="1050" dirty="0">
                         <a:latin typeface="Calibri" charset="0"/>
@@ -6624,7 +6624,7 @@
                 <a:ea typeface="Calibri" pitchFamily="34" charset="-122"/>
                 <a:cs typeface="Calibri" pitchFamily="34" charset="-120"/>
               </a:rPr>
-              <a:t>The two estimates. </a:t>
+              <a:t>One estimate left. </a:t>
             </a:r>
             <a:pPr indent="0" marL="0">
               <a:lnSpc>
@@ -6641,7 +6641,7 @@
                 <a:ea typeface="Calibri" pitchFamily="34" charset="-122"/>
                 <a:cs typeface="Calibri" pitchFamily="34" charset="-120"/>
               </a:rPr>
-              <a:t>Service charge at AED 14/sqft is modelled, not published. Gross rent of AED 80,000 is mid-range for a JVC 1BR — the range is 74–86k.</a:t>
+              <a:t>The service charge is published at AED 15/sqft. Only the rent is modelled: AED 80,000 is mid-range for a JVC 1BR, where the range is 74–86k.</a:t>
             </a:r>
             <a:endParaRPr lang="en-US" sz="1050" dirty="0"/>
           </a:p>
@@ -17306,13 +17306,13 @@
             <a:r>
               <a:rPr lang="en-US" sz="1050" b="1" dirty="0">
                 <a:solidFill>
-                  <a:srgbClr val="F3F0E8"/>
+                  <a:srgbClr val="E0A45C"/>
                 </a:solidFill>
                 <a:latin typeface="Calibri" pitchFamily="34" charset="0"/>
                 <a:ea typeface="Calibri" pitchFamily="34" charset="-122"/>
                 <a:cs typeface="Calibri" pitchFamily="34" charset="-120"/>
               </a:rPr>
-              <a:t>Assumptions. </a:t>
+              <a:t>The one still unpublished. </a:t>
             </a:r>
             <a:pPr indent="0" marL="0">
               <a:lnSpc>
@@ -17329,7 +17329,7 @@
                 <a:ea typeface="Calibri" pitchFamily="34" charset="-122"/>
                 <a:cs typeface="Calibri" pitchFamily="34" charset="-120"/>
               </a:rPr>
-              <a:t>Service charge modelled at AED 14/sqft — unpublished, and the amenity load is heavy. At AED 25/sqft the net yield falls to roughly 5.4%.</a:t>
+              <a:t>Arancia is the only one of the three with no service charge on record, so AED 15/sqft is modelled — matching Floareá. Its amenity and landscape load is the heaviest, so the real figure could be higher: at AED 25/sqft the yield falls to ~5.4%.</a:t>
             </a:r>
             <a:endParaRPr lang="en-US" sz="1050" dirty="0"/>
           </a:p>
@@ -20261,7 +20261,7 @@
                           <a:ea typeface="Calibri" pitchFamily="34" charset="-122"/>
                           <a:cs typeface="Calibri" pitchFamily="34" charset="-120"/>
                         </a:rPr>
-                        <a:t>To confirm</a:t>
+                        <a:t>AED 12 / sqft (confirm)</a:t>
                       </a:r>
                       <a:endParaRPr lang="en-US" sz="1050" dirty="0">
                         <a:latin typeface="Calibri" charset="0"/>
@@ -23053,7 +23053,7 @@
                           <a:ea typeface="Calibri" pitchFamily="34" charset="-122"/>
                           <a:cs typeface="Calibri" pitchFamily="34" charset="-120"/>
                         </a:rPr>
-                        <a:t>37,439</a:t>
+                        <a:t>38,090</a:t>
                       </a:r>
                       <a:endParaRPr lang="en-US" sz="1050" dirty="0">
                         <a:latin typeface="Calibri" charset="0"/>
@@ -23121,7 +23121,7 @@
                           <a:ea typeface="Calibri" pitchFamily="34" charset="-122"/>
                           <a:cs typeface="Calibri" pitchFamily="34" charset="-120"/>
                         </a:rPr>
-                        <a:t>€8,727</a:t>
+                        <a:t>€8,879</a:t>
                       </a:r>
                       <a:endParaRPr lang="en-US" sz="1050" dirty="0">
                         <a:latin typeface="Calibri" charset="0"/>
@@ -23259,7 +23259,7 @@
                           <a:ea typeface="Calibri" pitchFamily="34" charset="-122"/>
                           <a:cs typeface="Calibri" pitchFamily="34" charset="-120"/>
                         </a:rPr>
-                        <a:t>6.6%</a:t>
+                        <a:t>6.7%</a:t>
                       </a:r>
                       <a:endParaRPr lang="en-US" sz="1050" dirty="0">
                         <a:latin typeface="Calibri" charset="0"/>
@@ -24760,7 +24760,7 @@
                           <a:ea typeface="Calibri" pitchFamily="34" charset="-122"/>
                           <a:cs typeface="Calibri" pitchFamily="34" charset="-120"/>
                         </a:rPr>
-                        <a:t>52,295</a:t>
+                        <a:t>53,396</a:t>
                       </a:r>
                       <a:endParaRPr lang="en-US" sz="1050" dirty="0">
                         <a:latin typeface="Calibri" charset="0"/>
@@ -24828,7 +24828,7 @@
                           <a:ea typeface="Calibri" pitchFamily="34" charset="-122"/>
                           <a:cs typeface="Calibri" pitchFamily="34" charset="-120"/>
                         </a:rPr>
-                        <a:t>€12,190</a:t>
+                        <a:t>€12,447</a:t>
                       </a:r>
                       <a:endParaRPr lang="en-US" sz="1050" dirty="0">
                         <a:latin typeface="Calibri" charset="0"/>
@@ -24966,7 +24966,7 @@
                           <a:ea typeface="Calibri" pitchFamily="34" charset="-122"/>
                           <a:cs typeface="Calibri" pitchFamily="34" charset="-120"/>
                         </a:rPr>
-                        <a:t>6.2%</a:t>
+                        <a:t>6.4%</a:t>
                       </a:r>
                       <a:endParaRPr lang="en-US" sz="1050" dirty="0">
                         <a:latin typeface="Calibri" charset="0"/>
@@ -25722,7 +25722,7 @@
                 <a:ea typeface="Calibri" pitchFamily="34" charset="-122"/>
                 <a:cs typeface="Calibri" pitchFamily="34" charset="-120"/>
               </a:rPr>
-              <a:t>FX 1 EUR = 4.29 AED. Service charge modelled at AED 14/sqft. Net yield is net rental divided by total cost including fees. Not financial advice.</a:t>
+              <a:t>FX 1 EUR = 4.29 AED. Service charge AED 12/sqft, published for Celesto Tower — confirm for Celesto 4. Net yield is net rental divided by total cost including fees. Not financial advice.</a:t>
             </a:r>
             <a:endParaRPr lang="en-US" sz="750" dirty="0"/>
           </a:p>
@@ -27911,7 +27911,7 @@
                 <a:ea typeface="Calibri" pitchFamily="34" charset="-122"/>
                 <a:cs typeface="Calibri" pitchFamily="34" charset="-120"/>
               </a:rPr>
-              <a:t>Service charge unpublished on a heavily amenitised rooftop</a:t>
+              <a:t>Service charge is the highest of the three at AED 15/sqft — the rooftop pool and meditation deck cost something to run</a:t>
             </a:r>
             <a:endParaRPr lang="en-US" sz="1050" dirty="0"/>
           </a:p>
@@ -28178,7 +28178,7 @@
                 <a:ea typeface="Calibri" pitchFamily="34" charset="-122"/>
                 <a:cs typeface="Calibri" pitchFamily="34" charset="-120"/>
               </a:rPr>
-              <a:t>Heaviest amenity load with no published service charge</a:t>
+              <a:t>The only one with no published service charge, and the heaviest amenity and landscape load</a:t>
             </a:r>
             <a:endParaRPr lang="en-US" sz="1050" dirty="0"/>
           </a:p>
@@ -29250,7 +29250,7 @@
                 <a:ea typeface="Calibri" pitchFamily="34" charset="-122"/>
                 <a:cs typeface="Calibri" pitchFamily="34" charset="-120"/>
               </a:rPr>
-              <a:t>on a live sales offer Floareá prices at AED 1.2M all-in for 837 sqft — the largest unit and the earliest keys, but the lowest modelled yield at 5.7%. For a yield-first buyer the answer is now Celesto 4, subject to its price list. For space, earliest handover and least capital tied up, it is Floareá. </a:t>
+              <a:t>on a live sales offer Floareá prices at AED 1.2M all-in for 837 sqft — the largest unit and the earliest keys, but the lowest yield at 5.6%. For a yield-first buyer the answer is now Celesto 4, and its lead widened once the published service charges came in (12/sqft against 15). For space, earliest handover and least capital tied up, it is Floareá. </a:t>
             </a:r>
             <a:pPr indent="0" marL="0">
               <a:lnSpc>
@@ -30409,7 +30409,7 @@
                 <a:ea typeface="Calibri" pitchFamily="34" charset="-122"/>
                 <a:cs typeface="Calibri" pitchFamily="34" charset="-120"/>
               </a:rPr>
-              <a:t>Service charge per sqft in writing</a:t>
+              <a:t>Service charge AED 15/sqft published — confirm in writing</a:t>
             </a:r>
             <a:endParaRPr lang="en-US" sz="1050" dirty="0"/>
           </a:p>
@@ -30613,7 +30613,7 @@
                 <a:ea typeface="Calibri" pitchFamily="34" charset="-122"/>
                 <a:cs typeface="Calibri" pitchFamily="34" charset="-120"/>
               </a:rPr>
-              <a:t>Service charge per sqft — at AED 25 the yield drops to ~5.4%</a:t>
+              <a:t>Service charge — the only one unpublished. At AED 25 the yield drops to ~5.4%</a:t>
             </a:r>
             <a:endParaRPr lang="en-US" sz="1050" dirty="0"/>
           </a:p>
@@ -30865,7 +30865,7 @@
                 <a:ea typeface="Calibri" pitchFamily="34" charset="-122"/>
                 <a:cs typeface="Calibri" pitchFamily="34" charset="-120"/>
               </a:rPr>
-              <a:t>1BR and 2BR price list — the blocker</a:t>
+              <a:t>1BR price list — still the blocker (2BR confirmed at 1.32M)</a:t>
             </a:r>
             <a:endParaRPr lang="en-US" sz="1050" dirty="0"/>
           </a:p>
@@ -30889,7 +30889,7 @@
                 <a:ea typeface="Calibri" pitchFamily="34" charset="-122"/>
                 <a:cs typeface="Calibri" pitchFamily="34" charset="-120"/>
               </a:rPr>
-              <a:t>Service charge per sqft</a:t>
+              <a:t>Service charge — AED 12/sqft is Celesto Tower's rate; confirm for Celesto 4</a:t>
             </a:r>
             <a:endParaRPr lang="en-US" sz="1050" dirty="0"/>
           </a:p>
@@ -31280,7 +31280,7 @@
           </p:nvPr>
         </p:nvGraphicFramePr>
         <p:xfrm>
-          <a:off x="566928" y="1975104"/>
+          <a:off x="566928" y="1847088"/>
           <a:ext cx="11027664" cy="914400"/>
         </p:xfrm>
         <a:graphic>
@@ -31293,7 +31293,7 @@
                 <a:gridCol w="2670048"/>
                 <a:gridCol w="2670048"/>
               </a:tblGrid>
-              <a:tr h="254203">
+              <a:tr h="235915">
                 <a:tc>
                   <a:txBody>
                     <a:bodyPr/>
@@ -31567,7 +31567,7 @@
                   </a:tcPr>
                 </a:tc>
               </a:tr>
-              <a:tr h="254203">
+              <a:tr h="235915">
                 <a:tc>
                   <a:txBody>
                     <a:bodyPr/>
@@ -31577,7 +31577,7 @@
                         <a:buNone/>
                       </a:pPr>
                       <a:r>
-                        <a:rPr lang="en-US" sz="1050" dirty="0">
+                        <a:rPr lang="en-US" sz="1000" dirty="0">
                           <a:solidFill>
                             <a:srgbClr val="A7B0AB"/>
                           </a:solidFill>
@@ -31587,7 +31587,7 @@
                         </a:rPr>
                         <a:t>Community</a:t>
                       </a:r>
-                      <a:endParaRPr lang="en-US" sz="1050" dirty="0">
+                      <a:endParaRPr lang="en-US" sz="1000" dirty="0">
                         <a:latin typeface="Calibri" charset="0"/>
                         <a:ea typeface="Calibri" charset="0"/>
                         <a:cs typeface="Calibri" charset="0"/>
@@ -31645,7 +31645,7 @@
                         <a:buNone/>
                       </a:pPr>
                       <a:r>
-                        <a:rPr lang="en-US" sz="1050" dirty="0">
+                        <a:rPr lang="en-US" sz="1000" dirty="0">
                           <a:solidFill>
                             <a:srgbClr val="F3F0E8"/>
                           </a:solidFill>
@@ -31655,7 +31655,7 @@
                         </a:rPr>
                         <a:t>JVC</a:t>
                       </a:r>
-                      <a:endParaRPr lang="en-US" sz="1050" dirty="0">
+                      <a:endParaRPr lang="en-US" sz="1000" dirty="0">
                         <a:latin typeface="Calibri" charset="0"/>
                         <a:ea typeface="Calibri" charset="0"/>
                         <a:cs typeface="Calibri" charset="0"/>
@@ -31713,7 +31713,7 @@
                         <a:buNone/>
                       </a:pPr>
                       <a:r>
-                        <a:rPr lang="en-US" sz="1050" dirty="0">
+                        <a:rPr lang="en-US" sz="1000" dirty="0">
                           <a:solidFill>
                             <a:srgbClr val="F3F0E8"/>
                           </a:solidFill>
@@ -31723,7 +31723,7 @@
                         </a:rPr>
                         <a:t>City of Arabia</a:t>
                       </a:r>
-                      <a:endParaRPr lang="en-US" sz="1050" dirty="0">
+                      <a:endParaRPr lang="en-US" sz="1000" dirty="0">
                         <a:latin typeface="Calibri" charset="0"/>
                         <a:ea typeface="Calibri" charset="0"/>
                         <a:cs typeface="Calibri" charset="0"/>
@@ -31781,7 +31781,7 @@
                         <a:buNone/>
                       </a:pPr>
                       <a:r>
-                        <a:rPr lang="en-US" sz="1050" dirty="0">
+                        <a:rPr lang="en-US" sz="1000" dirty="0">
                           <a:solidFill>
                             <a:srgbClr val="F3F0E8"/>
                           </a:solidFill>
@@ -31791,7 +31791,7 @@
                         </a:rPr>
                         <a:t>DLRC</a:t>
                       </a:r>
-                      <a:endParaRPr lang="en-US" sz="1050" dirty="0">
+                      <a:endParaRPr lang="en-US" sz="1000" dirty="0">
                         <a:latin typeface="Calibri" charset="0"/>
                         <a:ea typeface="Calibri" charset="0"/>
                         <a:cs typeface="Calibri" charset="0"/>
@@ -31841,7 +31841,7 @@
                   </a:tcPr>
                 </a:tc>
               </a:tr>
-              <a:tr h="254203">
+              <a:tr h="235915">
                 <a:tc>
                   <a:txBody>
                     <a:bodyPr/>
@@ -31851,7 +31851,7 @@
                         <a:buNone/>
                       </a:pPr>
                       <a:r>
-                        <a:rPr lang="en-US" sz="1050" dirty="0">
+                        <a:rPr lang="en-US" sz="1000" dirty="0">
                           <a:solidFill>
                             <a:srgbClr val="A7B0AB"/>
                           </a:solidFill>
@@ -31861,7 +31861,7 @@
                         </a:rPr>
                         <a:t>Developer</a:t>
                       </a:r>
-                      <a:endParaRPr lang="en-US" sz="1050" dirty="0">
+                      <a:endParaRPr lang="en-US" sz="1000" dirty="0">
                         <a:latin typeface="Calibri" charset="0"/>
                         <a:ea typeface="Calibri" charset="0"/>
                         <a:cs typeface="Calibri" charset="0"/>
@@ -31919,7 +31919,7 @@
                         <a:buNone/>
                       </a:pPr>
                       <a:r>
-                        <a:rPr lang="en-US" sz="1050" dirty="0">
+                        <a:rPr lang="en-US" sz="1000" dirty="0">
                           <a:solidFill>
                             <a:srgbClr val="F3F0E8"/>
                           </a:solidFill>
@@ -31929,7 +31929,7 @@
                         </a:rPr>
                         <a:t>Mashriq Elite</a:t>
                       </a:r>
-                      <a:endParaRPr lang="en-US" sz="1050" dirty="0">
+                      <a:endParaRPr lang="en-US" sz="1000" dirty="0">
                         <a:latin typeface="Calibri" charset="0"/>
                         <a:ea typeface="Calibri" charset="0"/>
                         <a:cs typeface="Calibri" charset="0"/>
@@ -31987,7 +31987,7 @@
                         <a:buNone/>
                       </a:pPr>
                       <a:r>
-                        <a:rPr lang="en-US" sz="1050" dirty="0">
+                        <a:rPr lang="en-US" sz="1000" dirty="0">
                           <a:solidFill>
                             <a:srgbClr val="F3F0E8"/>
                           </a:solidFill>
@@ -31997,7 +31997,7 @@
                         </a:rPr>
                         <a:t>BEYOND · OMNIYAT</a:t>
                       </a:r>
-                      <a:endParaRPr lang="en-US" sz="1050" dirty="0">
+                      <a:endParaRPr lang="en-US" sz="1000" dirty="0">
                         <a:latin typeface="Calibri" charset="0"/>
                         <a:ea typeface="Calibri" charset="0"/>
                         <a:cs typeface="Calibri" charset="0"/>
@@ -32055,7 +32055,7 @@
                         <a:buNone/>
                       </a:pPr>
                       <a:r>
-                        <a:rPr lang="en-US" sz="1050" dirty="0">
+                        <a:rPr lang="en-US" sz="1000" dirty="0">
                           <a:solidFill>
                             <a:srgbClr val="F3F0E8"/>
                           </a:solidFill>
@@ -32065,7 +32065,7 @@
                         </a:rPr>
                         <a:t>Al Tarrad</a:t>
                       </a:r>
-                      <a:endParaRPr lang="en-US" sz="1050" dirty="0">
+                      <a:endParaRPr lang="en-US" sz="1000" dirty="0">
                         <a:latin typeface="Calibri" charset="0"/>
                         <a:ea typeface="Calibri" charset="0"/>
                         <a:cs typeface="Calibri" charset="0"/>
@@ -32115,7 +32115,7 @@
                   </a:tcPr>
                 </a:tc>
               </a:tr>
-              <a:tr h="254203">
+              <a:tr h="235915">
                 <a:tc>
                   <a:txBody>
                     <a:bodyPr/>
@@ -32125,7 +32125,7 @@
                         <a:buNone/>
                       </a:pPr>
                       <a:r>
-                        <a:rPr lang="en-US" sz="1050" dirty="0">
+                        <a:rPr lang="en-US" sz="1000" dirty="0">
                           <a:solidFill>
                             <a:srgbClr val="A7B0AB"/>
                           </a:solidFill>
@@ -32135,7 +32135,7 @@
                         </a:rPr>
                         <a:t>Handover</a:t>
                       </a:r>
-                      <a:endParaRPr lang="en-US" sz="1050" dirty="0">
+                      <a:endParaRPr lang="en-US" sz="1000" dirty="0">
                         <a:latin typeface="Calibri" charset="0"/>
                         <a:ea typeface="Calibri" charset="0"/>
                         <a:cs typeface="Calibri" charset="0"/>
@@ -32193,7 +32193,7 @@
                         <a:buNone/>
                       </a:pPr>
                       <a:r>
-                        <a:rPr lang="en-US" sz="1050" b="1" dirty="0">
+                        <a:rPr lang="en-US" sz="1000" b="1" dirty="0">
                           <a:solidFill>
                             <a:srgbClr val="7BE08A"/>
                           </a:solidFill>
@@ -32203,7 +32203,7 @@
                         </a:rPr>
                         <a:t>Q1 2028</a:t>
                       </a:r>
-                      <a:endParaRPr lang="en-US" sz="1050" dirty="0">
+                      <a:endParaRPr lang="en-US" sz="1000" dirty="0">
                         <a:latin typeface="Calibri" charset="0"/>
                         <a:ea typeface="Calibri" charset="0"/>
                         <a:cs typeface="Calibri" charset="0"/>
@@ -32261,7 +32261,7 @@
                         <a:buNone/>
                       </a:pPr>
                       <a:r>
-                        <a:rPr lang="en-US" sz="1050" dirty="0">
+                        <a:rPr lang="en-US" sz="1000" dirty="0">
                           <a:solidFill>
                             <a:srgbClr val="F3F0E8"/>
                           </a:solidFill>
@@ -32271,7 +32271,7 @@
                         </a:rPr>
                         <a:t>Q1 2029</a:t>
                       </a:r>
-                      <a:endParaRPr lang="en-US" sz="1050" dirty="0">
+                      <a:endParaRPr lang="en-US" sz="1000" dirty="0">
                         <a:latin typeface="Calibri" charset="0"/>
                         <a:ea typeface="Calibri" charset="0"/>
                         <a:cs typeface="Calibri" charset="0"/>
@@ -32329,7 +32329,7 @@
                         <a:buNone/>
                       </a:pPr>
                       <a:r>
-                        <a:rPr lang="en-US" sz="1050" dirty="0">
+                        <a:rPr lang="en-US" sz="1000" dirty="0">
                           <a:solidFill>
                             <a:srgbClr val="F3F0E8"/>
                           </a:solidFill>
@@ -32339,7 +32339,7 @@
                         </a:rPr>
                         <a:t>Q4 2028</a:t>
                       </a:r>
-                      <a:endParaRPr lang="en-US" sz="1050" dirty="0">
+                      <a:endParaRPr lang="en-US" sz="1000" dirty="0">
                         <a:latin typeface="Calibri" charset="0"/>
                         <a:ea typeface="Calibri" charset="0"/>
                         <a:cs typeface="Calibri" charset="0"/>
@@ -32389,7 +32389,7 @@
                   </a:tcPr>
                 </a:tc>
               </a:tr>
-              <a:tr h="254203">
+              <a:tr h="235915">
                 <a:tc>
                   <a:txBody>
                     <a:bodyPr/>
@@ -32399,7 +32399,7 @@
                         <a:buNone/>
                       </a:pPr>
                       <a:r>
-                        <a:rPr lang="en-US" sz="1050" dirty="0">
+                        <a:rPr lang="en-US" sz="1000" dirty="0">
                           <a:solidFill>
                             <a:srgbClr val="A7B0AB"/>
                           </a:solidFill>
@@ -32409,7 +32409,7 @@
                         </a:rPr>
                         <a:t>Units in building</a:t>
                       </a:r>
-                      <a:endParaRPr lang="en-US" sz="1050" dirty="0">
+                      <a:endParaRPr lang="en-US" sz="1000" dirty="0">
                         <a:latin typeface="Calibri" charset="0"/>
                         <a:ea typeface="Calibri" charset="0"/>
                         <a:cs typeface="Calibri" charset="0"/>
@@ -32467,7 +32467,7 @@
                         <a:buNone/>
                       </a:pPr>
                       <a:r>
-                        <a:rPr lang="en-US" sz="1050" b="1" dirty="0">
+                        <a:rPr lang="en-US" sz="1000" b="1" dirty="0">
                           <a:solidFill>
                             <a:srgbClr val="7BE08A"/>
                           </a:solidFill>
@@ -32477,7 +32477,7 @@
                         </a:rPr>
                         <a:t>192</a:t>
                       </a:r>
-                      <a:endParaRPr lang="en-US" sz="1050" dirty="0">
+                      <a:endParaRPr lang="en-US" sz="1000" dirty="0">
                         <a:latin typeface="Calibri" charset="0"/>
                         <a:ea typeface="Calibri" charset="0"/>
                         <a:cs typeface="Calibri" charset="0"/>
@@ -32535,7 +32535,7 @@
                         <a:buNone/>
                       </a:pPr>
                       <a:r>
-                        <a:rPr lang="en-US" sz="1050" dirty="0">
+                        <a:rPr lang="en-US" sz="1000" dirty="0">
                           <a:solidFill>
                             <a:srgbClr val="F3F0E8"/>
                           </a:solidFill>
@@ -32545,7 +32545,7 @@
                         </a:rPr>
                         <a:t>272</a:t>
                       </a:r>
-                      <a:endParaRPr lang="en-US" sz="1050" dirty="0">
+                      <a:endParaRPr lang="en-US" sz="1000" dirty="0">
                         <a:latin typeface="Calibri" charset="0"/>
                         <a:ea typeface="Calibri" charset="0"/>
                         <a:cs typeface="Calibri" charset="0"/>
@@ -32603,7 +32603,7 @@
                         <a:buNone/>
                       </a:pPr>
                       <a:r>
-                        <a:rPr lang="en-US" sz="1050" dirty="0">
+                        <a:rPr lang="en-US" sz="1000" dirty="0">
                           <a:solidFill>
                             <a:srgbClr val="F3F0E8"/>
                           </a:solidFill>
@@ -32613,7 +32613,7 @@
                         </a:rPr>
                         <a:t>414</a:t>
                       </a:r>
-                      <a:endParaRPr lang="en-US" sz="1050" dirty="0">
+                      <a:endParaRPr lang="en-US" sz="1000" dirty="0">
                         <a:latin typeface="Calibri" charset="0"/>
                         <a:ea typeface="Calibri" charset="0"/>
                         <a:cs typeface="Calibri" charset="0"/>
@@ -32663,7 +32663,7 @@
                   </a:tcPr>
                 </a:tc>
               </a:tr>
-              <a:tr h="254203">
+              <a:tr h="235915">
                 <a:tc>
                   <a:txBody>
                     <a:bodyPr/>
@@ -32673,7 +32673,7 @@
                         <a:buNone/>
                       </a:pPr>
                       <a:r>
-                        <a:rPr lang="en-US" sz="1050" dirty="0">
+                        <a:rPr lang="en-US" sz="1000" dirty="0">
                           <a:solidFill>
                             <a:srgbClr val="A7B0AB"/>
                           </a:solidFill>
@@ -32683,7 +32683,7 @@
                         </a:rPr>
                         <a:t>1 BR size</a:t>
                       </a:r>
-                      <a:endParaRPr lang="en-US" sz="1050" dirty="0">
+                      <a:endParaRPr lang="en-US" sz="1000" dirty="0">
                         <a:latin typeface="Calibri" charset="0"/>
                         <a:ea typeface="Calibri" charset="0"/>
                         <a:cs typeface="Calibri" charset="0"/>
@@ -32741,7 +32741,7 @@
                         <a:buNone/>
                       </a:pPr>
                       <a:r>
-                        <a:rPr lang="en-US" sz="1050" b="1" dirty="0">
+                        <a:rPr lang="en-US" sz="1000" b="1" dirty="0">
                           <a:solidFill>
                             <a:srgbClr val="7BE08A"/>
                           </a:solidFill>
@@ -32751,7 +32751,7 @@
                         </a:rPr>
                         <a:t>837 sqft</a:t>
                       </a:r>
-                      <a:endParaRPr lang="en-US" sz="1050" dirty="0">
+                      <a:endParaRPr lang="en-US" sz="1000" dirty="0">
                         <a:latin typeface="Calibri" charset="0"/>
                         <a:ea typeface="Calibri" charset="0"/>
                         <a:cs typeface="Calibri" charset="0"/>
@@ -32809,7 +32809,7 @@
                         <a:buNone/>
                       </a:pPr>
                       <a:r>
-                        <a:rPr lang="en-US" sz="1050" dirty="0">
+                        <a:rPr lang="en-US" sz="1000" dirty="0">
                           <a:solidFill>
                             <a:srgbClr val="F3F0E8"/>
                           </a:solidFill>
@@ -32819,7 +32819,7 @@
                         </a:rPr>
                         <a:t>750–762 sqft</a:t>
                       </a:r>
-                      <a:endParaRPr lang="en-US" sz="1050" dirty="0">
+                      <a:endParaRPr lang="en-US" sz="1000" dirty="0">
                         <a:latin typeface="Calibri" charset="0"/>
                         <a:ea typeface="Calibri" charset="0"/>
                         <a:cs typeface="Calibri" charset="0"/>
@@ -32877,7 +32877,7 @@
                         <a:buNone/>
                       </a:pPr>
                       <a:r>
-                        <a:rPr lang="en-US" sz="1050" dirty="0">
+                        <a:rPr lang="en-US" sz="1000" dirty="0">
                           <a:solidFill>
                             <a:srgbClr val="F3F0E8"/>
                           </a:solidFill>
@@ -32887,7 +32887,7 @@
                         </a:rPr>
                         <a:t>550–598 sqft</a:t>
                       </a:r>
-                      <a:endParaRPr lang="en-US" sz="1050" dirty="0">
+                      <a:endParaRPr lang="en-US" sz="1000" dirty="0">
                         <a:latin typeface="Calibri" charset="0"/>
                         <a:ea typeface="Calibri" charset="0"/>
                         <a:cs typeface="Calibri" charset="0"/>
@@ -32937,7 +32937,7 @@
                   </a:tcPr>
                 </a:tc>
               </a:tr>
-              <a:tr h="254203">
+              <a:tr h="235915">
                 <a:tc>
                   <a:txBody>
                     <a:bodyPr/>
@@ -32947,7 +32947,7 @@
                         <a:buNone/>
                       </a:pPr>
                       <a:r>
-                        <a:rPr lang="en-US" sz="1050" dirty="0">
+                        <a:rPr lang="en-US" sz="1000" dirty="0">
                           <a:solidFill>
                             <a:srgbClr val="A7B0AB"/>
                           </a:solidFill>
@@ -32957,7 +32957,7 @@
                         </a:rPr>
                         <a:t>1 BR all-in cost</a:t>
                       </a:r>
-                      <a:endParaRPr lang="en-US" sz="1050" dirty="0">
+                      <a:endParaRPr lang="en-US" sz="1000" dirty="0">
                         <a:latin typeface="Calibri" charset="0"/>
                         <a:ea typeface="Calibri" charset="0"/>
                         <a:cs typeface="Calibri" charset="0"/>
@@ -33015,7 +33015,7 @@
                         <a:buNone/>
                       </a:pPr>
                       <a:r>
-                        <a:rPr lang="en-US" sz="1050" dirty="0">
+                        <a:rPr lang="en-US" sz="1000" dirty="0">
                           <a:solidFill>
                             <a:srgbClr val="F3F0E8"/>
                           </a:solidFill>
@@ -33025,7 +33025,7 @@
                         </a:rPr>
                         <a:t>AED 1,204,160</a:t>
                       </a:r>
-                      <a:endParaRPr lang="en-US" sz="1050" dirty="0">
+                      <a:endParaRPr lang="en-US" sz="1000" dirty="0">
                         <a:latin typeface="Calibri" charset="0"/>
                         <a:ea typeface="Calibri" charset="0"/>
                         <a:cs typeface="Calibri" charset="0"/>
@@ -33083,7 +33083,7 @@
                         <a:buNone/>
                       </a:pPr>
                       <a:r>
-                        <a:rPr lang="en-US" sz="1050" dirty="0">
+                        <a:rPr lang="en-US" sz="1000" dirty="0">
                           <a:solidFill>
                             <a:srgbClr val="F3F0E8"/>
                           </a:solidFill>
@@ -33093,7 +33093,7 @@
                         </a:rPr>
                         <a:t>AED 1,045,250</a:t>
                       </a:r>
-                      <a:endParaRPr lang="en-US" sz="1050" dirty="0">
+                      <a:endParaRPr lang="en-US" sz="1000" dirty="0">
                         <a:latin typeface="Calibri" charset="0"/>
                         <a:ea typeface="Calibri" charset="0"/>
                         <a:cs typeface="Calibri" charset="0"/>
@@ -33151,7 +33151,7 @@
                         <a:buNone/>
                       </a:pPr>
                       <a:r>
-                        <a:rPr lang="en-US" sz="1050" b="1" dirty="0">
+                        <a:rPr lang="en-US" sz="1000" b="1" dirty="0">
                           <a:solidFill>
                             <a:srgbClr val="7BE08A"/>
                           </a:solidFill>
@@ -33161,7 +33161,7 @@
                         </a:rPr>
                         <a:t>≈837,250  est</a:t>
                       </a:r>
-                      <a:endParaRPr lang="en-US" sz="1050" dirty="0">
+                      <a:endParaRPr lang="en-US" sz="1000" dirty="0">
                         <a:latin typeface="Calibri" charset="0"/>
                         <a:ea typeface="Calibri" charset="0"/>
                         <a:cs typeface="Calibri" charset="0"/>
@@ -33211,7 +33211,7 @@
                   </a:tcPr>
                 </a:tc>
               </a:tr>
-              <a:tr h="254203">
+              <a:tr h="235915">
                 <a:tc>
                   <a:txBody>
                     <a:bodyPr/>
@@ -33221,7 +33221,7 @@
                         <a:buNone/>
                       </a:pPr>
                       <a:r>
-                        <a:rPr lang="en-US" sz="1050" dirty="0">
+                        <a:rPr lang="en-US" sz="1000" dirty="0">
                           <a:solidFill>
                             <a:srgbClr val="A7B0AB"/>
                           </a:solidFill>
@@ -33231,7 +33231,7 @@
                         </a:rPr>
                         <a:t>Price per sqft</a:t>
                       </a:r>
-                      <a:endParaRPr lang="en-US" sz="1050" dirty="0">
+                      <a:endParaRPr lang="en-US" sz="1000" dirty="0">
                         <a:latin typeface="Calibri" charset="0"/>
                         <a:ea typeface="Calibri" charset="0"/>
                         <a:cs typeface="Calibri" charset="0"/>
@@ -33289,7 +33289,7 @@
                         <a:buNone/>
                       </a:pPr>
                       <a:r>
-                        <a:rPr lang="en-US" sz="1050" dirty="0">
+                        <a:rPr lang="en-US" sz="1000" dirty="0">
                           <a:solidFill>
                             <a:srgbClr val="F3F0E8"/>
                           </a:solidFill>
@@ -33299,7 +33299,7 @@
                         </a:rPr>
                         <a:t>AED 1,378</a:t>
                       </a:r>
-                      <a:endParaRPr lang="en-US" sz="1050" dirty="0">
+                      <a:endParaRPr lang="en-US" sz="1000" dirty="0">
                         <a:latin typeface="Calibri" charset="0"/>
                         <a:ea typeface="Calibri" charset="0"/>
                         <a:cs typeface="Calibri" charset="0"/>
@@ -33357,7 +33357,7 @@
                         <a:buNone/>
                       </a:pPr>
                       <a:r>
-                        <a:rPr lang="en-US" sz="1050" b="1" dirty="0">
+                        <a:rPr lang="en-US" sz="1000" b="1" dirty="0">
                           <a:solidFill>
                             <a:srgbClr val="7BE08A"/>
                           </a:solidFill>
@@ -33367,7 +33367,7 @@
                         </a:rPr>
                         <a:t>AED 1,333</a:t>
                       </a:r>
-                      <a:endParaRPr lang="en-US" sz="1050" dirty="0">
+                      <a:endParaRPr lang="en-US" sz="1000" dirty="0">
                         <a:latin typeface="Calibri" charset="0"/>
                         <a:ea typeface="Calibri" charset="0"/>
                         <a:cs typeface="Calibri" charset="0"/>
@@ -33425,7 +33425,7 @@
                         <a:buNone/>
                       </a:pPr>
                       <a:r>
-                        <a:rPr lang="en-US" sz="1050" dirty="0">
+                        <a:rPr lang="en-US" sz="1000" dirty="0">
                           <a:solidFill>
                             <a:srgbClr val="F3F0E8"/>
                           </a:solidFill>
@@ -33435,7 +33435,7 @@
                         </a:rPr>
                         <a:t>AED 1,454  est</a:t>
                       </a:r>
-                      <a:endParaRPr lang="en-US" sz="1050" dirty="0">
+                      <a:endParaRPr lang="en-US" sz="1000" dirty="0">
                         <a:latin typeface="Calibri" charset="0"/>
                         <a:ea typeface="Calibri" charset="0"/>
                         <a:cs typeface="Calibri" charset="0"/>
@@ -33485,7 +33485,7 @@
                   </a:tcPr>
                 </a:tc>
               </a:tr>
-              <a:tr h="254203">
+              <a:tr h="235915">
                 <a:tc>
                   <a:txBody>
                     <a:bodyPr/>
@@ -33495,7 +33495,7 @@
                         <a:buNone/>
                       </a:pPr>
                       <a:r>
-                        <a:rPr lang="en-US" sz="1050" dirty="0">
+                        <a:rPr lang="en-US" sz="1000" dirty="0">
                           <a:solidFill>
                             <a:srgbClr val="A7B0AB"/>
                           </a:solidFill>
@@ -33505,7 +33505,7 @@
                         </a:rPr>
                         <a:t>Net rental yield</a:t>
                       </a:r>
-                      <a:endParaRPr lang="en-US" sz="1050" dirty="0">
+                      <a:endParaRPr lang="en-US" sz="1000" dirty="0">
                         <a:latin typeface="Calibri" charset="0"/>
                         <a:ea typeface="Calibri" charset="0"/>
                         <a:cs typeface="Calibri" charset="0"/>
@@ -33563,7 +33563,7 @@
                         <a:buNone/>
                       </a:pPr>
                       <a:r>
-                        <a:rPr lang="en-US" sz="1050" dirty="0">
+                        <a:rPr lang="en-US" sz="1000" dirty="0">
                           <a:solidFill>
                             <a:srgbClr val="F3F0E8"/>
                           </a:solidFill>
@@ -33571,9 +33571,9 @@
                           <a:ea typeface="Calibri" pitchFamily="34" charset="-122"/>
                           <a:cs typeface="Calibri" pitchFamily="34" charset="-120"/>
                         </a:rPr>
-                        <a:t>5.7%</a:t>
+                        <a:t>5.6%</a:t>
                       </a:r>
-                      <a:endParaRPr lang="en-US" sz="1050" dirty="0">
+                      <a:endParaRPr lang="en-US" sz="1000" dirty="0">
                         <a:latin typeface="Calibri" charset="0"/>
                         <a:ea typeface="Calibri" charset="0"/>
                         <a:cs typeface="Calibri" charset="0"/>
@@ -33631,7 +33631,7 @@
                         <a:buNone/>
                       </a:pPr>
                       <a:r>
-                        <a:rPr lang="en-US" sz="1050" dirty="0">
+                        <a:rPr lang="en-US" sz="1000" dirty="0">
                           <a:solidFill>
                             <a:srgbClr val="F3F0E8"/>
                           </a:solidFill>
@@ -33641,7 +33641,7 @@
                         </a:rPr>
                         <a:t>6.1%</a:t>
                       </a:r>
-                      <a:endParaRPr lang="en-US" sz="1050" dirty="0">
+                      <a:endParaRPr lang="en-US" sz="1000" dirty="0">
                         <a:latin typeface="Calibri" charset="0"/>
                         <a:ea typeface="Calibri" charset="0"/>
                         <a:cs typeface="Calibri" charset="0"/>
@@ -33699,7 +33699,7 @@
                         <a:buNone/>
                       </a:pPr>
                       <a:r>
-                        <a:rPr lang="en-US" sz="1050" b="1" dirty="0">
+                        <a:rPr lang="en-US" sz="1000" b="1" dirty="0">
                           <a:solidFill>
                             <a:srgbClr val="7BE08A"/>
                           </a:solidFill>
@@ -33707,9 +33707,9 @@
                           <a:ea typeface="Calibri" pitchFamily="34" charset="-122"/>
                           <a:cs typeface="Calibri" pitchFamily="34" charset="-120"/>
                         </a:rPr>
-                        <a:t>6.2%  est</a:t>
+                        <a:t>6.4%  est</a:t>
                       </a:r>
-                      <a:endParaRPr lang="en-US" sz="1050" dirty="0">
+                      <a:endParaRPr lang="en-US" sz="1000" dirty="0">
                         <a:latin typeface="Calibri" charset="0"/>
                         <a:ea typeface="Calibri" charset="0"/>
                         <a:cs typeface="Calibri" charset="0"/>
@@ -33759,7 +33759,7 @@
                   </a:tcPr>
                 </a:tc>
               </a:tr>
-              <a:tr h="254203">
+              <a:tr h="235915">
                 <a:tc>
                   <a:txBody>
                     <a:bodyPr/>
@@ -33769,7 +33769,7 @@
                         <a:buNone/>
                       </a:pPr>
                       <a:r>
-                        <a:rPr lang="en-US" sz="1050" dirty="0">
+                        <a:rPr lang="en-US" sz="1000" dirty="0">
                           <a:solidFill>
                             <a:srgbClr val="A7B0AB"/>
                           </a:solidFill>
@@ -33777,9 +33777,9 @@
                           <a:ea typeface="Calibri" pitchFamily="34" charset="-122"/>
                           <a:cs typeface="Calibri" pitchFamily="34" charset="-120"/>
                         </a:rPr>
-                        <a:t>Capital in before keys</a:t>
+                        <a:t>Service charge / sqft</a:t>
                       </a:r>
-                      <a:endParaRPr lang="en-US" sz="1050" dirty="0">
+                      <a:endParaRPr lang="en-US" sz="1000" dirty="0">
                         <a:latin typeface="Calibri" charset="0"/>
                         <a:ea typeface="Calibri" charset="0"/>
                         <a:cs typeface="Calibri" charset="0"/>
@@ -33837,17 +33837,17 @@
                         <a:buNone/>
                       </a:pPr>
                       <a:r>
-                        <a:rPr lang="en-US" sz="1050" b="1" dirty="0">
+                        <a:rPr lang="en-US" sz="1000" dirty="0">
                           <a:solidFill>
-                            <a:srgbClr val="7BE08A"/>
+                            <a:srgbClr val="F3F0E8"/>
                           </a:solidFill>
                           <a:latin typeface="Calibri" pitchFamily="34" charset="0"/>
                           <a:ea typeface="Calibri" pitchFamily="34" charset="-122"/>
                           <a:cs typeface="Calibri" pitchFamily="34" charset="-120"/>
                         </a:rPr>
-                        <a:t>30%</a:t>
+                        <a:t>AED 15</a:t>
                       </a:r>
-                      <a:endParaRPr lang="en-US" sz="1050" dirty="0">
+                      <a:endParaRPr lang="en-US" sz="1000" dirty="0">
                         <a:latin typeface="Calibri" charset="0"/>
                         <a:ea typeface="Calibri" charset="0"/>
                         <a:cs typeface="Calibri" charset="0"/>
@@ -33905,7 +33905,7 @@
                         <a:buNone/>
                       </a:pPr>
                       <a:r>
-                        <a:rPr lang="en-US" sz="1050" dirty="0">
+                        <a:rPr lang="en-US" sz="1000" dirty="0">
                           <a:solidFill>
                             <a:srgbClr val="F3F0E8"/>
                           </a:solidFill>
@@ -33913,9 +33913,9 @@
                           <a:ea typeface="Calibri" pitchFamily="34" charset="-122"/>
                           <a:cs typeface="Calibri" pitchFamily="34" charset="-120"/>
                         </a:rPr>
-                        <a:t>40%</a:t>
+                        <a:t>To confirm</a:t>
                       </a:r>
-                      <a:endParaRPr lang="en-US" sz="1050" dirty="0">
+                      <a:endParaRPr lang="en-US" sz="1000" dirty="0">
                         <a:latin typeface="Calibri" charset="0"/>
                         <a:ea typeface="Calibri" charset="0"/>
                         <a:cs typeface="Calibri" charset="0"/>
@@ -33973,17 +33973,17 @@
                         <a:buNone/>
                       </a:pPr>
                       <a:r>
-                        <a:rPr lang="en-US" sz="1050" dirty="0">
+                        <a:rPr lang="en-US" sz="1000" b="1" dirty="0">
                           <a:solidFill>
-                            <a:srgbClr val="F3F0E8"/>
+                            <a:srgbClr val="7BE08A"/>
                           </a:solidFill>
                           <a:latin typeface="Calibri" pitchFamily="34" charset="0"/>
                           <a:ea typeface="Calibri" pitchFamily="34" charset="-122"/>
                           <a:cs typeface="Calibri" pitchFamily="34" charset="-120"/>
                         </a:rPr>
-                        <a:t>50%</a:t>
+                        <a:t>AED 12</a:t>
                       </a:r>
-                      <a:endParaRPr lang="en-US" sz="1050" dirty="0">
+                      <a:endParaRPr lang="en-US" sz="1000" dirty="0">
                         <a:latin typeface="Calibri" charset="0"/>
                         <a:ea typeface="Calibri" charset="0"/>
                         <a:cs typeface="Calibri" charset="0"/>
@@ -34033,7 +34033,7 @@
                   </a:tcPr>
                 </a:tc>
               </a:tr>
-              <a:tr h="254203">
+              <a:tr h="235915">
                 <a:tc>
                   <a:txBody>
                     <a:bodyPr/>
@@ -34043,7 +34043,7 @@
                         <a:buNone/>
                       </a:pPr>
                       <a:r>
-                        <a:rPr lang="en-US" sz="1050" dirty="0">
+                        <a:rPr lang="en-US" sz="1000" dirty="0">
                           <a:solidFill>
                             <a:srgbClr val="A7B0AB"/>
                           </a:solidFill>
@@ -34051,9 +34051,9 @@
                           <a:ea typeface="Calibri" pitchFamily="34" charset="-122"/>
                           <a:cs typeface="Calibri" pitchFamily="34" charset="-120"/>
                         </a:rPr>
-                        <a:t>4% DLD fee</a:t>
+                        <a:t>Capital in before keys</a:t>
                       </a:r>
-                      <a:endParaRPr lang="en-US" sz="1050" dirty="0">
+                      <a:endParaRPr lang="en-US" sz="1000" dirty="0">
                         <a:latin typeface="Calibri" charset="0"/>
                         <a:ea typeface="Calibri" charset="0"/>
                         <a:cs typeface="Calibri" charset="0"/>
@@ -34111,17 +34111,17 @@
                         <a:buNone/>
                       </a:pPr>
                       <a:r>
-                        <a:rPr lang="en-US" sz="1050" dirty="0">
+                        <a:rPr lang="en-US" sz="1000" b="1" dirty="0">
                           <a:solidFill>
-                            <a:srgbClr val="F3F0E8"/>
+                            <a:srgbClr val="7BE08A"/>
                           </a:solidFill>
                           <a:latin typeface="Calibri" pitchFamily="34" charset="0"/>
                           <a:ea typeface="Calibri" pitchFamily="34" charset="-122"/>
                           <a:cs typeface="Calibri" pitchFamily="34" charset="-120"/>
                         </a:rPr>
-                        <a:t>Payable</a:t>
+                        <a:t>30%</a:t>
                       </a:r>
-                      <a:endParaRPr lang="en-US" sz="1050" dirty="0">
+                      <a:endParaRPr lang="en-US" sz="1000" dirty="0">
                         <a:latin typeface="Calibri" charset="0"/>
                         <a:ea typeface="Calibri" charset="0"/>
                         <a:cs typeface="Calibri" charset="0"/>
@@ -34179,7 +34179,7 @@
                         <a:buNone/>
                       </a:pPr>
                       <a:r>
-                        <a:rPr lang="en-US" sz="1050" dirty="0">
+                        <a:rPr lang="en-US" sz="1000" dirty="0">
                           <a:solidFill>
                             <a:srgbClr val="F3F0E8"/>
                           </a:solidFill>
@@ -34187,9 +34187,9 @@
                           <a:ea typeface="Calibri" pitchFamily="34" charset="-122"/>
                           <a:cs typeface="Calibri" pitchFamily="34" charset="-120"/>
                         </a:rPr>
-                        <a:t>Payable</a:t>
+                        <a:t>40%</a:t>
                       </a:r>
-                      <a:endParaRPr lang="en-US" sz="1050" dirty="0">
+                      <a:endParaRPr lang="en-US" sz="1000" dirty="0">
                         <a:latin typeface="Calibri" charset="0"/>
                         <a:ea typeface="Calibri" charset="0"/>
                         <a:cs typeface="Calibri" charset="0"/>
@@ -34247,7 +34247,7 @@
                         <a:buNone/>
                       </a:pPr>
                       <a:r>
-                        <a:rPr lang="en-US" sz="1050" dirty="0">
+                        <a:rPr lang="en-US" sz="1000" dirty="0">
                           <a:solidFill>
                             <a:srgbClr val="F3F0E8"/>
                           </a:solidFill>
@@ -34255,9 +34255,9 @@
                           <a:ea typeface="Calibri" pitchFamily="34" charset="-122"/>
                           <a:cs typeface="Calibri" pitchFamily="34" charset="-120"/>
                         </a:rPr>
-                        <a:t>To confirm</a:t>
+                        <a:t>50%</a:t>
                       </a:r>
-                      <a:endParaRPr lang="en-US" sz="1050" dirty="0">
+                      <a:endParaRPr lang="en-US" sz="1000" dirty="0">
                         <a:latin typeface="Calibri" charset="0"/>
                         <a:ea typeface="Calibri" charset="0"/>
                         <a:cs typeface="Calibri" charset="0"/>
@@ -34307,7 +34307,7 @@
                   </a:tcPr>
                 </a:tc>
               </a:tr>
-              <a:tr h="254203">
+              <a:tr h="235915">
                 <a:tc>
                   <a:txBody>
                     <a:bodyPr/>
@@ -34317,7 +34317,7 @@
                         <a:buNone/>
                       </a:pPr>
                       <a:r>
-                        <a:rPr lang="en-US" sz="1050" dirty="0">
+                        <a:rPr lang="en-US" sz="1000" dirty="0">
                           <a:solidFill>
                             <a:srgbClr val="A7B0AB"/>
                           </a:solidFill>
@@ -34325,9 +34325,9 @@
                           <a:ea typeface="Calibri" pitchFamily="34" charset="-122"/>
                           <a:cs typeface="Calibri" pitchFamily="34" charset="-120"/>
                         </a:rPr>
-                        <a:t>Furnished on handover</a:t>
+                        <a:t>4% DLD fee</a:t>
                       </a:r>
-                      <a:endParaRPr lang="en-US" sz="1050" dirty="0">
+                      <a:endParaRPr lang="en-US" sz="1000" dirty="0">
                         <a:latin typeface="Calibri" charset="0"/>
                         <a:ea typeface="Calibri" charset="0"/>
                         <a:cs typeface="Calibri" charset="0"/>
@@ -34385,17 +34385,17 @@
                         <a:buNone/>
                       </a:pPr>
                       <a:r>
-                        <a:rPr lang="en-US" sz="1050" b="1" dirty="0">
+                        <a:rPr lang="en-US" sz="1000" dirty="0">
                           <a:solidFill>
-                            <a:srgbClr val="7BE08A"/>
+                            <a:srgbClr val="F3F0E8"/>
                           </a:solidFill>
                           <a:latin typeface="Calibri" pitchFamily="34" charset="0"/>
                           <a:ea typeface="Calibri" pitchFamily="34" charset="-122"/>
                           <a:cs typeface="Calibri" pitchFamily="34" charset="-120"/>
                         </a:rPr>
-                        <a:t>Yes</a:t>
+                        <a:t>Payable</a:t>
                       </a:r>
-                      <a:endParaRPr lang="en-US" sz="1050" dirty="0">
+                      <a:endParaRPr lang="en-US" sz="1000" dirty="0">
                         <a:latin typeface="Calibri" charset="0"/>
                         <a:ea typeface="Calibri" charset="0"/>
                         <a:cs typeface="Calibri" charset="0"/>
@@ -34453,7 +34453,7 @@
                         <a:buNone/>
                       </a:pPr>
                       <a:r>
-                        <a:rPr lang="en-US" sz="1050" dirty="0">
+                        <a:rPr lang="en-US" sz="1000" dirty="0">
                           <a:solidFill>
                             <a:srgbClr val="F3F0E8"/>
                           </a:solidFill>
@@ -34461,9 +34461,9 @@
                           <a:ea typeface="Calibri" pitchFamily="34" charset="-122"/>
                           <a:cs typeface="Calibri" pitchFamily="34" charset="-120"/>
                         </a:rPr>
-                        <a:t>No</a:t>
+                        <a:t>Payable</a:t>
                       </a:r>
-                      <a:endParaRPr lang="en-US" sz="1050" dirty="0">
+                      <a:endParaRPr lang="en-US" sz="1000" dirty="0">
                         <a:latin typeface="Calibri" charset="0"/>
                         <a:ea typeface="Calibri" charset="0"/>
                         <a:cs typeface="Calibri" charset="0"/>
@@ -34521,17 +34521,17 @@
                         <a:buNone/>
                       </a:pPr>
                       <a:r>
-                        <a:rPr lang="en-US" sz="1050" b="1" dirty="0">
+                        <a:rPr lang="en-US" sz="1000" dirty="0">
                           <a:solidFill>
-                            <a:srgbClr val="7BE08A"/>
+                            <a:srgbClr val="F3F0E8"/>
                           </a:solidFill>
                           <a:latin typeface="Calibri" pitchFamily="34" charset="0"/>
                           <a:ea typeface="Calibri" pitchFamily="34" charset="-122"/>
                           <a:cs typeface="Calibri" pitchFamily="34" charset="-120"/>
                         </a:rPr>
-                        <a:t>Yes</a:t>
+                        <a:t>To confirm</a:t>
                       </a:r>
-                      <a:endParaRPr lang="en-US" sz="1050" dirty="0">
+                      <a:endParaRPr lang="en-US" sz="1000" dirty="0">
                         <a:latin typeface="Calibri" charset="0"/>
                         <a:ea typeface="Calibri" charset="0"/>
                         <a:cs typeface="Calibri" charset="0"/>
@@ -34581,7 +34581,7 @@
                   </a:tcPr>
                 </a:tc>
               </a:tr>
-              <a:tr h="254203">
+              <a:tr h="235915">
                 <a:tc>
                   <a:txBody>
                     <a:bodyPr/>
@@ -34591,7 +34591,7 @@
                         <a:buNone/>
                       </a:pPr>
                       <a:r>
-                        <a:rPr lang="en-US" sz="1050" dirty="0">
+                        <a:rPr lang="en-US" sz="1000" dirty="0">
                           <a:solidFill>
                             <a:srgbClr val="A7B0AB"/>
                           </a:solidFill>
@@ -34599,9 +34599,9 @@
                           <a:ea typeface="Calibri" pitchFamily="34" charset="-122"/>
                           <a:cs typeface="Calibri" pitchFamily="34" charset="-120"/>
                         </a:rPr>
-                        <a:t>Metro</a:t>
+                        <a:t>Furnished on handover</a:t>
                       </a:r>
-                      <a:endParaRPr lang="en-US" sz="1050" dirty="0">
+                      <a:endParaRPr lang="en-US" sz="1000" dirty="0">
                         <a:latin typeface="Calibri" charset="0"/>
                         <a:ea typeface="Calibri" charset="0"/>
                         <a:cs typeface="Calibri" charset="0"/>
@@ -34659,17 +34659,17 @@
                         <a:buNone/>
                       </a:pPr>
                       <a:r>
-                        <a:rPr lang="en-US" sz="1050" dirty="0">
+                        <a:rPr lang="en-US" sz="1000" b="1" dirty="0">
                           <a:solidFill>
-                            <a:srgbClr val="F3F0E8"/>
+                            <a:srgbClr val="7BE08A"/>
                           </a:solidFill>
                           <a:latin typeface="Calibri" pitchFamily="34" charset="0"/>
                           <a:ea typeface="Calibri" pitchFamily="34" charset="-122"/>
                           <a:cs typeface="Calibri" pitchFamily="34" charset="-120"/>
                         </a:rPr>
-                        <a:t>Purple Line, future</a:t>
+                        <a:t>Yes</a:t>
                       </a:r>
-                      <a:endParaRPr lang="en-US" sz="1050" dirty="0">
+                      <a:endParaRPr lang="en-US" sz="1000" dirty="0">
                         <a:latin typeface="Calibri" charset="0"/>
                         <a:ea typeface="Calibri" charset="0"/>
                         <a:cs typeface="Calibri" charset="0"/>
@@ -34727,7 +34727,7 @@
                         <a:buNone/>
                       </a:pPr>
                       <a:r>
-                        <a:rPr lang="en-US" sz="1050" dirty="0">
+                        <a:rPr lang="en-US" sz="1000" dirty="0">
                           <a:solidFill>
                             <a:srgbClr val="F3F0E8"/>
                           </a:solidFill>
@@ -34735,9 +34735,9 @@
                           <a:ea typeface="Calibri" pitchFamily="34" charset="-122"/>
                           <a:cs typeface="Calibri" pitchFamily="34" charset="-120"/>
                         </a:rPr>
-                        <a:t>—</a:t>
+                        <a:t>No</a:t>
                       </a:r>
-                      <a:endParaRPr lang="en-US" sz="1050" dirty="0">
+                      <a:endParaRPr lang="en-US" sz="1000" dirty="0">
                         <a:latin typeface="Calibri" charset="0"/>
                         <a:ea typeface="Calibri" charset="0"/>
                         <a:cs typeface="Calibri" charset="0"/>
@@ -34795,7 +34795,7 @@
                         <a:buNone/>
                       </a:pPr>
                       <a:r>
-                        <a:rPr lang="en-US" sz="1050" b="1" dirty="0">
+                        <a:rPr lang="en-US" sz="1000" b="1" dirty="0">
                           <a:solidFill>
                             <a:srgbClr val="7BE08A"/>
                           </a:solidFill>
@@ -34803,9 +34803,9 @@
                           <a:ea typeface="Calibri" pitchFamily="34" charset="-122"/>
                           <a:cs typeface="Calibri" pitchFamily="34" charset="-120"/>
                         </a:rPr>
-                        <a:t>Blue Line, 1 min</a:t>
+                        <a:t>Yes</a:t>
                       </a:r>
-                      <a:endParaRPr lang="en-US" sz="1050" dirty="0">
+                      <a:endParaRPr lang="en-US" sz="1000" dirty="0">
                         <a:latin typeface="Calibri" charset="0"/>
                         <a:ea typeface="Calibri" charset="0"/>
                         <a:cs typeface="Calibri" charset="0"/>
@@ -34855,7 +34855,7 @@
                   </a:tcPr>
                 </a:tc>
               </a:tr>
-              <a:tr h="254203">
+              <a:tr h="235915">
                 <a:tc>
                   <a:txBody>
                     <a:bodyPr/>
@@ -34865,7 +34865,7 @@
                         <a:buNone/>
                       </a:pPr>
                       <a:r>
-                        <a:rPr lang="en-US" sz="1050" dirty="0">
+                        <a:rPr lang="en-US" sz="1000" dirty="0">
                           <a:solidFill>
                             <a:srgbClr val="A7B0AB"/>
                           </a:solidFill>
@@ -34873,9 +34873,9 @@
                           <a:ea typeface="Calibri" pitchFamily="34" charset="-122"/>
                           <a:cs typeface="Calibri" pitchFamily="34" charset="-120"/>
                         </a:rPr>
-                        <a:t>To DXB airport</a:t>
+                        <a:t>Metro</a:t>
                       </a:r>
-                      <a:endParaRPr lang="en-US" sz="1050" dirty="0">
+                      <a:endParaRPr lang="en-US" sz="1000" dirty="0">
                         <a:latin typeface="Calibri" charset="0"/>
                         <a:ea typeface="Calibri" charset="0"/>
                         <a:cs typeface="Calibri" charset="0"/>
@@ -34933,7 +34933,7 @@
                         <a:buNone/>
                       </a:pPr>
                       <a:r>
-                        <a:rPr lang="en-US" sz="1050" dirty="0">
+                        <a:rPr lang="en-US" sz="1000" dirty="0">
                           <a:solidFill>
                             <a:srgbClr val="F3F0E8"/>
                           </a:solidFill>
@@ -34941,9 +34941,9 @@
                           <a:ea typeface="Calibri" pitchFamily="34" charset="-122"/>
                           <a:cs typeface="Calibri" pitchFamily="34" charset="-120"/>
                         </a:rPr>
-                        <a:t>35 min</a:t>
+                        <a:t>Purple Line, future</a:t>
                       </a:r>
-                      <a:endParaRPr lang="en-US" sz="1050" dirty="0">
+                      <a:endParaRPr lang="en-US" sz="1000" dirty="0">
                         <a:latin typeface="Calibri" charset="0"/>
                         <a:ea typeface="Calibri" charset="0"/>
                         <a:cs typeface="Calibri" charset="0"/>
@@ -35001,7 +35001,7 @@
                         <a:buNone/>
                       </a:pPr>
                       <a:r>
-                        <a:rPr lang="en-US" sz="1050" dirty="0">
+                        <a:rPr lang="en-US" sz="1000" dirty="0">
                           <a:solidFill>
                             <a:srgbClr val="F3F0E8"/>
                           </a:solidFill>
@@ -35009,9 +35009,9 @@
                           <a:ea typeface="Calibri" pitchFamily="34" charset="-122"/>
                           <a:cs typeface="Calibri" pitchFamily="34" charset="-120"/>
                         </a:rPr>
-                        <a:t>To confirm</a:t>
+                        <a:t>—</a:t>
                       </a:r>
-                      <a:endParaRPr lang="en-US" sz="1050" dirty="0">
+                      <a:endParaRPr lang="en-US" sz="1000" dirty="0">
                         <a:latin typeface="Calibri" charset="0"/>
                         <a:ea typeface="Calibri" charset="0"/>
                         <a:cs typeface="Calibri" charset="0"/>
@@ -35069,7 +35069,281 @@
                         <a:buNone/>
                       </a:pPr>
                       <a:r>
-                        <a:rPr lang="en-US" sz="1050" b="1" dirty="0">
+                        <a:rPr lang="en-US" sz="1000" b="1" dirty="0">
+                          <a:solidFill>
+                            <a:srgbClr val="7BE08A"/>
+                          </a:solidFill>
+                          <a:latin typeface="Calibri" pitchFamily="34" charset="0"/>
+                          <a:ea typeface="Calibri" pitchFamily="34" charset="-122"/>
+                          <a:cs typeface="Calibri" pitchFamily="34" charset="-120"/>
+                        </a:rPr>
+                        <a:t>Blue Line, 1 min</a:t>
+                      </a:r>
+                      <a:endParaRPr lang="en-US" sz="1000" dirty="0">
+                        <a:latin typeface="Calibri" charset="0"/>
+                        <a:ea typeface="Calibri" charset="0"/>
+                        <a:cs typeface="Calibri" charset="0"/>
+                      </a:endParaRPr>
+                    </a:p>
+                  </a:txBody>
+                  <a:tcPr marL="82296" marR="82296" marT="36576" marB="36576" anchor="ctr">
+                    <a:lnL w="6350" cap="flat" cmpd="sng" algn="ctr">
+                      <a:solidFill>
+                        <a:srgbClr val="2E3A35"/>
+                      </a:solidFill>
+                      <a:prstDash val="solid"/>
+                      <a:round/>
+                      <a:headEnd type="none" w="med" len="med"/>
+                      <a:tailEnd type="none" w="med" len="med"/>
+                    </a:lnL>
+                    <a:lnR w="6350" cap="flat" cmpd="sng" algn="ctr">
+                      <a:solidFill>
+                        <a:srgbClr val="2E3A35"/>
+                      </a:solidFill>
+                      <a:prstDash val="solid"/>
+                      <a:round/>
+                      <a:headEnd type="none" w="med" len="med"/>
+                      <a:tailEnd type="none" w="med" len="med"/>
+                    </a:lnR>
+                    <a:lnT w="6350" cap="flat" cmpd="sng" algn="ctr">
+                      <a:solidFill>
+                        <a:srgbClr val="2E3A35"/>
+                      </a:solidFill>
+                      <a:prstDash val="solid"/>
+                      <a:round/>
+                      <a:headEnd type="none" w="med" len="med"/>
+                      <a:tailEnd type="none" w="med" len="med"/>
+                    </a:lnT>
+                    <a:lnB w="6350" cap="flat" cmpd="sng" algn="ctr">
+                      <a:solidFill>
+                        <a:srgbClr val="2E3A35"/>
+                      </a:solidFill>
+                      <a:prstDash val="solid"/>
+                      <a:round/>
+                      <a:headEnd type="none" w="med" len="med"/>
+                      <a:tailEnd type="none" w="med" len="med"/>
+                    </a:lnB>
+                    <a:solidFill>
+                      <a:srgbClr val="171E1B"/>
+                    </a:solidFill>
+                  </a:tcPr>
+                </a:tc>
+              </a:tr>
+              <a:tr h="235915">
+                <a:tc>
+                  <a:txBody>
+                    <a:bodyPr/>
+                    <a:lstStyle/>
+                    <a:p>
+                      <a:pPr algn="l" indent="0" marL="0">
+                        <a:buNone/>
+                      </a:pPr>
+                      <a:r>
+                        <a:rPr lang="en-US" sz="1000" dirty="0">
+                          <a:solidFill>
+                            <a:srgbClr val="A7B0AB"/>
+                          </a:solidFill>
+                          <a:latin typeface="Calibri" pitchFamily="34" charset="0"/>
+                          <a:ea typeface="Calibri" pitchFamily="34" charset="-122"/>
+                          <a:cs typeface="Calibri" pitchFamily="34" charset="-120"/>
+                        </a:rPr>
+                        <a:t>To DXB airport</a:t>
+                      </a:r>
+                      <a:endParaRPr lang="en-US" sz="1000" dirty="0">
+                        <a:latin typeface="Calibri" charset="0"/>
+                        <a:ea typeface="Calibri" charset="0"/>
+                        <a:cs typeface="Calibri" charset="0"/>
+                      </a:endParaRPr>
+                    </a:p>
+                  </a:txBody>
+                  <a:tcPr marL="82296" marR="82296" marT="36576" marB="36576" anchor="ctr">
+                    <a:lnL w="6350" cap="flat" cmpd="sng" algn="ctr">
+                      <a:solidFill>
+                        <a:srgbClr val="2E3A35"/>
+                      </a:solidFill>
+                      <a:prstDash val="solid"/>
+                      <a:round/>
+                      <a:headEnd type="none" w="med" len="med"/>
+                      <a:tailEnd type="none" w="med" len="med"/>
+                    </a:lnL>
+                    <a:lnR w="6350" cap="flat" cmpd="sng" algn="ctr">
+                      <a:solidFill>
+                        <a:srgbClr val="2E3A35"/>
+                      </a:solidFill>
+                      <a:prstDash val="solid"/>
+                      <a:round/>
+                      <a:headEnd type="none" w="med" len="med"/>
+                      <a:tailEnd type="none" w="med" len="med"/>
+                    </a:lnR>
+                    <a:lnT w="6350" cap="flat" cmpd="sng" algn="ctr">
+                      <a:solidFill>
+                        <a:srgbClr val="2E3A35"/>
+                      </a:solidFill>
+                      <a:prstDash val="solid"/>
+                      <a:round/>
+                      <a:headEnd type="none" w="med" len="med"/>
+                      <a:tailEnd type="none" w="med" len="med"/>
+                    </a:lnT>
+                    <a:lnB w="6350" cap="flat" cmpd="sng" algn="ctr">
+                      <a:solidFill>
+                        <a:srgbClr val="2E3A35"/>
+                      </a:solidFill>
+                      <a:prstDash val="solid"/>
+                      <a:round/>
+                      <a:headEnd type="none" w="med" len="med"/>
+                      <a:tailEnd type="none" w="med" len="med"/>
+                    </a:lnB>
+                    <a:solidFill>
+                      <a:srgbClr val="1B2320"/>
+                    </a:solidFill>
+                  </a:tcPr>
+                </a:tc>
+                <a:tc>
+                  <a:txBody>
+                    <a:bodyPr/>
+                    <a:lstStyle/>
+                    <a:p>
+                      <a:pPr algn="r" indent="0" marL="0">
+                        <a:buNone/>
+                      </a:pPr>
+                      <a:r>
+                        <a:rPr lang="en-US" sz="1000" dirty="0">
+                          <a:solidFill>
+                            <a:srgbClr val="F3F0E8"/>
+                          </a:solidFill>
+                          <a:latin typeface="Calibri" pitchFamily="34" charset="0"/>
+                          <a:ea typeface="Calibri" pitchFamily="34" charset="-122"/>
+                          <a:cs typeface="Calibri" pitchFamily="34" charset="-120"/>
+                        </a:rPr>
+                        <a:t>35 min</a:t>
+                      </a:r>
+                      <a:endParaRPr lang="en-US" sz="1000" dirty="0">
+                        <a:latin typeface="Calibri" charset="0"/>
+                        <a:ea typeface="Calibri" charset="0"/>
+                        <a:cs typeface="Calibri" charset="0"/>
+                      </a:endParaRPr>
+                    </a:p>
+                  </a:txBody>
+                  <a:tcPr marL="82296" marR="82296" marT="36576" marB="36576" anchor="ctr">
+                    <a:lnL w="6350" cap="flat" cmpd="sng" algn="ctr">
+                      <a:solidFill>
+                        <a:srgbClr val="2E3A35"/>
+                      </a:solidFill>
+                      <a:prstDash val="solid"/>
+                      <a:round/>
+                      <a:headEnd type="none" w="med" len="med"/>
+                      <a:tailEnd type="none" w="med" len="med"/>
+                    </a:lnL>
+                    <a:lnR w="6350" cap="flat" cmpd="sng" algn="ctr">
+                      <a:solidFill>
+                        <a:srgbClr val="2E3A35"/>
+                      </a:solidFill>
+                      <a:prstDash val="solid"/>
+                      <a:round/>
+                      <a:headEnd type="none" w="med" len="med"/>
+                      <a:tailEnd type="none" w="med" len="med"/>
+                    </a:lnR>
+                    <a:lnT w="6350" cap="flat" cmpd="sng" algn="ctr">
+                      <a:solidFill>
+                        <a:srgbClr val="2E3A35"/>
+                      </a:solidFill>
+                      <a:prstDash val="solid"/>
+                      <a:round/>
+                      <a:headEnd type="none" w="med" len="med"/>
+                      <a:tailEnd type="none" w="med" len="med"/>
+                    </a:lnT>
+                    <a:lnB w="6350" cap="flat" cmpd="sng" algn="ctr">
+                      <a:solidFill>
+                        <a:srgbClr val="2E3A35"/>
+                      </a:solidFill>
+                      <a:prstDash val="solid"/>
+                      <a:round/>
+                      <a:headEnd type="none" w="med" len="med"/>
+                      <a:tailEnd type="none" w="med" len="med"/>
+                    </a:lnB>
+                    <a:solidFill>
+                      <a:srgbClr val="1B2320"/>
+                    </a:solidFill>
+                  </a:tcPr>
+                </a:tc>
+                <a:tc>
+                  <a:txBody>
+                    <a:bodyPr/>
+                    <a:lstStyle/>
+                    <a:p>
+                      <a:pPr algn="r" indent="0" marL="0">
+                        <a:buNone/>
+                      </a:pPr>
+                      <a:r>
+                        <a:rPr lang="en-US" sz="1000" dirty="0">
+                          <a:solidFill>
+                            <a:srgbClr val="F3F0E8"/>
+                          </a:solidFill>
+                          <a:latin typeface="Calibri" pitchFamily="34" charset="0"/>
+                          <a:ea typeface="Calibri" pitchFamily="34" charset="-122"/>
+                          <a:cs typeface="Calibri" pitchFamily="34" charset="-120"/>
+                        </a:rPr>
+                        <a:t>To confirm</a:t>
+                      </a:r>
+                      <a:endParaRPr lang="en-US" sz="1000" dirty="0">
+                        <a:latin typeface="Calibri" charset="0"/>
+                        <a:ea typeface="Calibri" charset="0"/>
+                        <a:cs typeface="Calibri" charset="0"/>
+                      </a:endParaRPr>
+                    </a:p>
+                  </a:txBody>
+                  <a:tcPr marL="82296" marR="82296" marT="36576" marB="36576" anchor="ctr">
+                    <a:lnL w="6350" cap="flat" cmpd="sng" algn="ctr">
+                      <a:solidFill>
+                        <a:srgbClr val="2E3A35"/>
+                      </a:solidFill>
+                      <a:prstDash val="solid"/>
+                      <a:round/>
+                      <a:headEnd type="none" w="med" len="med"/>
+                      <a:tailEnd type="none" w="med" len="med"/>
+                    </a:lnL>
+                    <a:lnR w="6350" cap="flat" cmpd="sng" algn="ctr">
+                      <a:solidFill>
+                        <a:srgbClr val="2E3A35"/>
+                      </a:solidFill>
+                      <a:prstDash val="solid"/>
+                      <a:round/>
+                      <a:headEnd type="none" w="med" len="med"/>
+                      <a:tailEnd type="none" w="med" len="med"/>
+                    </a:lnR>
+                    <a:lnT w="6350" cap="flat" cmpd="sng" algn="ctr">
+                      <a:solidFill>
+                        <a:srgbClr val="2E3A35"/>
+                      </a:solidFill>
+                      <a:prstDash val="solid"/>
+                      <a:round/>
+                      <a:headEnd type="none" w="med" len="med"/>
+                      <a:tailEnd type="none" w="med" len="med"/>
+                    </a:lnT>
+                    <a:lnB w="6350" cap="flat" cmpd="sng" algn="ctr">
+                      <a:solidFill>
+                        <a:srgbClr val="2E3A35"/>
+                      </a:solidFill>
+                      <a:prstDash val="solid"/>
+                      <a:round/>
+                      <a:headEnd type="none" w="med" len="med"/>
+                      <a:tailEnd type="none" w="med" len="med"/>
+                    </a:lnB>
+                    <a:solidFill>
+                      <a:srgbClr val="1B2320"/>
+                    </a:solidFill>
+                  </a:tcPr>
+                </a:tc>
+                <a:tc>
+                  <a:txBody>
+                    <a:bodyPr/>
+                    <a:lstStyle/>
+                    <a:p>
+                      <a:pPr algn="r" indent="0" marL="0">
+                        <a:buNone/>
+                      </a:pPr>
+                      <a:r>
+                        <a:rPr lang="en-US" sz="1000" b="1" dirty="0">
                           <a:solidFill>
                             <a:srgbClr val="7BE08A"/>
                           </a:solidFill>
@@ -35079,7 +35353,7 @@
                         </a:rPr>
                         <a:t>18 min</a:t>
                       </a:r>
-                      <a:endParaRPr lang="en-US" sz="1050" dirty="0">
+                      <a:endParaRPr lang="en-US" sz="1000" dirty="0">
                         <a:latin typeface="Calibri" charset="0"/>
                         <a:ea typeface="Calibri" charset="0"/>
                         <a:cs typeface="Calibri" charset="0"/>
@@ -35124,7 +35398,7 @@
                       <a:tailEnd type="none" w="med" len="med"/>
                     </a:lnB>
                     <a:solidFill>
-                      <a:srgbClr val="171E1B"/>
+                      <a:srgbClr val="1B2320"/>
                     </a:solidFill>
                   </a:tcPr>
                 </a:tc>
@@ -35141,7 +35415,7 @@
         </p:nvSpPr>
         <p:spPr>
           <a:xfrm>
-            <a:off x="566928" y="5486400"/>
+            <a:off x="566928" y="5504688"/>
             <a:ext cx="11027664" cy="457200"/>
           </a:xfrm>
           <a:prstGeom prst="rect">
@@ -35158,7 +35432,7 @@
               <a:buNone/>
             </a:pPr>
             <a:r>
-              <a:rPr lang="en-US" sz="900" b="1" dirty="0">
+              <a:rPr lang="en-US" sz="850" b="1" dirty="0">
                 <a:solidFill>
                   <a:srgbClr val="7BE08A"/>
                 </a:solidFill>
@@ -35172,7 +35446,7 @@
               <a:buNone/>
             </a:pPr>
             <a:r>
-              <a:rPr lang="en-US" sz="900" dirty="0">
+              <a:rPr lang="en-US" sz="850" dirty="0">
                 <a:solidFill>
                   <a:srgbClr val="828C87"/>
                 </a:solidFill>
@@ -35182,7 +35456,7 @@
               </a:rPr>
               <a:t> marks the strongest of the three on that row. Floareá's figures come from a live sales offer (unit FS 611, 18 July 2026); Arancia and Celesto are published or estimated and still to be confirmed on a price list. Not financial advice.</a:t>
             </a:r>
-            <a:endParaRPr lang="en-US" sz="900" dirty="0"/>
+            <a:endParaRPr lang="en-US" sz="850" dirty="0"/>
           </a:p>
         </p:txBody>
       </p:sp>
@@ -42723,7 +42997,7 @@
                           <a:ea typeface="Calibri" pitchFamily="34" charset="-122"/>
                           <a:cs typeface="Calibri" pitchFamily="34" charset="-120"/>
                         </a:rPr>
-                        <a:t>To confirm</a:t>
+                        <a:t>AED 15 / sqft</a:t>
                       </a:r>
                       <a:endParaRPr lang="en-US" sz="1050" dirty="0">
                         <a:latin typeface="Calibri" charset="0"/>

--- a/docs/client-deck/Three-Projects-One-Decision.pptx
+++ b/docs/client-deck/Three-Projects-One-Decision.pptx
@@ -5470,7 +5470,7 @@
                           <a:ea typeface="Calibri" pitchFamily="34" charset="-122"/>
                           <a:cs typeface="Calibri" pitchFamily="34" charset="-120"/>
                         </a:rPr>
-                        <a:t>Average gross rental estimate</a:t>
+                        <a:t>Average gross rental</a:t>
                       </a:r>
                       <a:endParaRPr lang="en-US" sz="1050" dirty="0">
                         <a:latin typeface="Calibri" charset="0"/>
@@ -6624,7 +6624,7 @@
                 <a:ea typeface="Calibri" pitchFamily="34" charset="-122"/>
                 <a:cs typeface="Calibri" pitchFamily="34" charset="-120"/>
               </a:rPr>
-              <a:t>One estimate left. </a:t>
+              <a:t>Nothing on this page is an estimate. </a:t>
             </a:r>
             <a:pPr indent="0" marL="0">
               <a:lnSpc>
@@ -6641,7 +6641,7 @@
                 <a:ea typeface="Calibri" pitchFamily="34" charset="-122"/>
                 <a:cs typeface="Calibri" pitchFamily="34" charset="-120"/>
               </a:rPr>
-              <a:t>The service charge is published at AED 15/sqft. Only the rent is modelled: AED 80,000 is mid-range for a JVC 1BR, where the range is 74–86k.</a:t>
+              <a:t>Price, fees and plan come from the sales offer; the service charge is published at AED 15/sqft; the rent is confirmed at AED 80,000. Floareá is the only one of the three where every line is evidenced.</a:t>
             </a:r>
             <a:endParaRPr lang="en-US" sz="1050" dirty="0"/>
           </a:p>
@@ -30409,7 +30409,7 @@
                 <a:ea typeface="Calibri" pitchFamily="34" charset="-122"/>
                 <a:cs typeface="Calibri" pitchFamily="34" charset="-120"/>
               </a:rPr>
-              <a:t>Service charge AED 15/sqft published — confirm in writing</a:t>
+              <a:t>Service charge AED 15/sqft published, rent confirmed at 80k — 1 BR fully evidenced</a:t>
             </a:r>
             <a:endParaRPr lang="en-US" sz="1050" dirty="0"/>
           </a:p>

--- a/docs/client-deck/Three-Projects-One-Decision.pptx
+++ b/docs/client-deck/Three-Projects-One-Decision.pptx
@@ -28,10 +28,9 @@
     <p:sldId id="276" r:id="rId22"/>
     <p:sldId id="277" r:id="rId23"/>
     <p:sldId id="278" r:id="rId24"/>
-    <p:sldId id="279" r:id="rId25"/>
   </p:sldIdLst>
   <p:notesMasterIdLst>
-    <p:notesMasterId r:id="rId26"/>
+    <p:notesMasterId r:id="rId25"/>
   </p:notesMasterIdLst>
   <p:sldSz cx="12192000" cy="6858000"/>
   <p:notesSz cx="6858000" cy="12192000"/>
@@ -2320,94 +2319,6 @@
 </p:notes>
 </file>
 
-<file path=ppt/notesSlides/notesSlide24.xml><?xml version="1.0" encoding="utf-8"?>
-<p:notes xmlns:a="http://schemas.openxmlformats.org/drawingml/2006/main" xmlns:r="http://schemas.openxmlformats.org/officeDocument/2006/relationships" xmlns:p="http://schemas.openxmlformats.org/presentationml/2006/main">
-  <p:cSld>
-    <p:spTree>
-      <p:nvGrpSpPr>
-        <p:cNvPr id="1" name=""/>
-        <p:cNvGrpSpPr/>
-        <p:nvPr/>
-      </p:nvGrpSpPr>
-      <p:grpSpPr>
-        <a:xfrm>
-          <a:off x="0" y="0"/>
-          <a:ext cx="0" cy="0"/>
-          <a:chOff x="0" y="0"/>
-          <a:chExt cx="0" cy="0"/>
-        </a:xfrm>
-      </p:grpSpPr>
-      <p:sp>
-        <p:nvSpPr>
-          <p:cNvPr id="2" name="Slide Image Placeholder 1"/>
-          <p:cNvSpPr>
-            <a:spLocks noGrp="1" noRot="1" noChangeAspect="1"/>
-          </p:cNvSpPr>
-          <p:nvPr>
-            <p:ph type="sldImg"/>
-          </p:nvPr>
-        </p:nvSpPr>
-        <p:spPr/>
-      </p:sp>
-      <p:sp>
-        <p:nvSpPr>
-          <p:cNvPr id="3" name="Notes Placeholder 2"/>
-          <p:cNvSpPr>
-            <a:spLocks noGrp="1"/>
-          </p:cNvSpPr>
-          <p:nvPr>
-            <p:ph type="body" idx="1"/>
-          </p:nvPr>
-        </p:nvSpPr>
-        <p:spPr/>
-        <p:txBody>
-          <a:bodyPr/>
-          <a:lstStyle/>
-          <a:p>
-            <a:r>
-              <a:rPr lang="en-US" dirty="0"/>
-              <a:t/>
-            </a:r>
-            <a:endParaRPr lang="en-US" dirty="0"/>
-          </a:p>
-        </p:txBody>
-      </p:sp>
-      <p:sp>
-        <p:nvSpPr>
-          <p:cNvPr id="4" name="Slide Number Placeholder 3"/>
-          <p:cNvSpPr>
-            <a:spLocks noGrp="1"/>
-          </p:cNvSpPr>
-          <p:nvPr>
-            <p:ph type="sldNum" sz="quarter" idx="10"/>
-          </p:nvPr>
-        </p:nvSpPr>
-        <p:spPr/>
-        <p:txBody>
-          <a:bodyPr/>
-          <a:lstStyle/>
-          <a:p>
-            <a:fld id="{F7021451-1387-4CA6-816F-3879F97B5CBC}" type="slidenum">
-              <a:rPr lang="en-US"/>
-              <a:t>24</a:t>
-            </a:fld>
-            <a:endParaRPr lang="en-US"/>
-          </a:p>
-        </p:txBody>
-      </p:sp>
-    </p:spTree>
-    <p:extLst>
-      <p:ext uri="{BB962C8B-B14F-4D97-AF65-F5344CB8AC3E}">
-        <p14:creationId xmlns:p14="http://schemas.microsoft.com/office/powerpoint/2010/main" val="1024086991"/>
-      </p:ext>
-    </p:extLst>
-  </p:cSld>
-  <p:clrMapOvr>
-    <a:masterClrMapping/>
-  </p:clrMapOvr>
-</p:notes>
-</file>
-
 <file path=ppt/notesSlides/notesSlide3.xml><?xml version="1.0" encoding="utf-8"?>
 <p:notes xmlns:a="http://schemas.openxmlformats.org/drawingml/2006/main" xmlns:r="http://schemas.openxmlformats.org/officeDocument/2006/relationships" xmlns:p="http://schemas.openxmlformats.org/presentationml/2006/main">
   <p:cSld>
@@ -3550,7 +3461,7 @@
                 <a:ea typeface="Calibri" pitchFamily="34" charset="-122"/>
                 <a:cs typeface="Calibri" pitchFamily="34" charset="-120"/>
               </a:rPr>
-              <a:t> · JVC · 2027</a:t>
+              <a:t> · JVC · 2028</a:t>
             </a:r>
             <a:endParaRPr lang="en-US" sz="1200" dirty="0"/>
           </a:p>
@@ -4701,109 +4612,6 @@
           </a:p>
         </p:txBody>
       </p:sp>
-      <p:sp>
-        <p:nvSpPr>
-          <p:cNvPr id="20" name="Shape 18"/>
-          <p:cNvSpPr/>
-          <p:nvPr/>
-        </p:nvSpPr>
-        <p:spPr>
-          <a:xfrm>
-            <a:off x="566928" y="5138928"/>
-            <a:ext cx="11027664" cy="841248"/>
-          </a:xfrm>
-          <a:prstGeom prst="roundRect">
-            <a:avLst>
-              <a:gd name="adj" fmla="val 3261"/>
-            </a:avLst>
-          </a:prstGeom>
-          <a:solidFill>
-            <a:srgbClr val="202A26"/>
-          </a:solidFill>
-          <a:ln w="6350">
-            <a:solidFill>
-              <a:srgbClr val="2E3A35"/>
-            </a:solidFill>
-            <a:prstDash val="solid"/>
-          </a:ln>
-        </p:spPr>
-      </p:sp>
-      <p:sp>
-        <p:nvSpPr>
-          <p:cNvPr id="21" name="Text 19"/>
-          <p:cNvSpPr/>
-          <p:nvPr/>
-        </p:nvSpPr>
-        <p:spPr>
-          <a:xfrm>
-            <a:off x="768096" y="5248656"/>
-            <a:ext cx="10625328" cy="621792"/>
-          </a:xfrm>
-          <a:prstGeom prst="rect">
-            <a:avLst/>
-          </a:prstGeom>
-          <a:noFill/>
-          <a:ln/>
-        </p:spPr>
-        <p:txBody>
-          <a:bodyPr wrap="square" lIns="0" tIns="0" rIns="0" bIns="0" rtlCol="0" anchor="t"/>
-          <a:lstStyle/>
-          <a:p>
-            <a:pPr indent="0" marL="0">
-              <a:lnSpc>
-                <a:spcPct val="118000"/>
-              </a:lnSpc>
-              <a:buNone/>
-            </a:pPr>
-            <a:r>
-              <a:rPr lang="en-US" sz="1100" dirty="0">
-                <a:solidFill>
-                  <a:srgbClr val="A7B0AB"/>
-                </a:solidFill>
-                <a:latin typeface="Calibri" pitchFamily="34" charset="0"/>
-                <a:ea typeface="Calibri" pitchFamily="34" charset="-122"/>
-                <a:cs typeface="Calibri" pitchFamily="34" charset="-120"/>
-              </a:rPr>
-              <a:t>A fitted unit leases faster and rents higher in JVC's young-professional tenant pool — it is the strongest single reason to choose this project over Arancia. </a:t>
-            </a:r>
-            <a:pPr indent="0" marL="0">
-              <a:lnSpc>
-                <a:spcPct val="118000"/>
-              </a:lnSpc>
-              <a:buNone/>
-            </a:pPr>
-            <a:r>
-              <a:rPr lang="en-US" sz="1100" b="1" dirty="0">
-                <a:solidFill>
-                  <a:srgbClr val="F3F0E8"/>
-                </a:solidFill>
-                <a:latin typeface="Calibri" pitchFamily="34" charset="0"/>
-                <a:ea typeface="Calibri" pitchFamily="34" charset="-122"/>
-                <a:cs typeface="Calibri" pitchFamily="34" charset="-120"/>
-              </a:rPr>
-              <a:t>Note the kitchen specification is blank on the developer's own deliverables sheet</a:t>
-            </a:r>
-            <a:pPr indent="0" marL="0">
-              <a:lnSpc>
-                <a:spcPct val="118000"/>
-              </a:lnSpc>
-              <a:buNone/>
-            </a:pPr>
-            <a:r>
-              <a:rPr lang="en-US" sz="1100" dirty="0">
-                <a:solidFill>
-                  <a:srgbClr val="A7B0AB"/>
-                </a:solidFill>
-                <a:latin typeface="Calibri" pitchFamily="34" charset="0"/>
-                <a:ea typeface="Calibri" pitchFamily="34" charset="-122"/>
-                <a:cs typeface="Calibri" pitchFamily="34" charset="-120"/>
-              </a:rPr>
-              <a:t> and needs to be confirmed in writing.</a:t>
-            </a:r>
-            <a:endParaRPr lang="en-US" sz="1100" dirty="0"/>
-          </a:p>
-        </p:txBody>
-      </p:sp>
     </p:spTree>
   </p:cSld>
   <p:clrMapOvr>
@@ -5757,7 +5565,7 @@
                           <a:ea typeface="Calibri" pitchFamily="34" charset="-122"/>
                           <a:cs typeface="Calibri" pitchFamily="34" charset="-120"/>
                         </a:rPr>
-                        <a:t>4,200</a:t>
+                        <a:t>4,000</a:t>
                       </a:r>
                       <a:endParaRPr lang="en-US" sz="1050" dirty="0">
                         <a:latin typeface="Calibri" charset="0"/>
@@ -5825,7 +5633,7 @@
                           <a:ea typeface="Calibri" pitchFamily="34" charset="-122"/>
                           <a:cs typeface="Calibri" pitchFamily="34" charset="-120"/>
                         </a:rPr>
-                        <a:t>€979</a:t>
+                        <a:t>€932</a:t>
                       </a:r>
                       <a:endParaRPr lang="en-US" sz="1050" dirty="0">
                         <a:latin typeface="Calibri" charset="0"/>
@@ -6169,7 +5977,7 @@
                           <a:ea typeface="Calibri" pitchFamily="34" charset="-122"/>
                           <a:cs typeface="Calibri" pitchFamily="34" charset="-120"/>
                         </a:rPr>
-                        <a:t>1,204,360</a:t>
+                        <a:t>1,204,160</a:t>
                       </a:r>
                       <a:endParaRPr lang="en-US" sz="1050" dirty="0">
                         <a:latin typeface="Calibri" charset="0"/>
@@ -6237,7 +6045,7 @@
                           <a:ea typeface="Calibri" pitchFamily="34" charset="-122"/>
                           <a:cs typeface="Calibri" pitchFamily="34" charset="-120"/>
                         </a:rPr>
-                        <a:t>€280,737</a:t>
+                        <a:t>€280,690</a:t>
                       </a:r>
                       <a:endParaRPr lang="en-US" sz="1050" dirty="0">
                         <a:latin typeface="Calibri" charset="0"/>
@@ -7596,178 +7404,6 @@
         </p:nvSpPr>
         <p:spPr>
           <a:xfrm>
-            <a:off x="566928" y="3291840"/>
-            <a:ext cx="5486400" cy="914400"/>
-          </a:xfrm>
-          <a:prstGeom prst="roundRect">
-            <a:avLst>
-              <a:gd name="adj" fmla="val 3000"/>
-            </a:avLst>
-          </a:prstGeom>
-          <a:solidFill>
-            <a:srgbClr val="202A26"/>
-          </a:solidFill>
-          <a:ln w="6350">
-            <a:solidFill>
-              <a:srgbClr val="2E3A35"/>
-            </a:solidFill>
-            <a:prstDash val="solid"/>
-          </a:ln>
-        </p:spPr>
-      </p:sp>
-      <p:sp>
-        <p:nvSpPr>
-          <p:cNvPr id="11" name="Text 7"/>
-          <p:cNvSpPr/>
-          <p:nvPr/>
-        </p:nvSpPr>
-        <p:spPr>
-          <a:xfrm>
-            <a:off x="768096" y="3401568"/>
-            <a:ext cx="5084064" cy="694944"/>
-          </a:xfrm>
-          <a:prstGeom prst="rect">
-            <a:avLst/>
-          </a:prstGeom>
-          <a:noFill/>
-          <a:ln/>
-        </p:spPr>
-        <p:txBody>
-          <a:bodyPr wrap="square" lIns="0" tIns="0" rIns="0" bIns="0" rtlCol="0" anchor="t"/>
-          <a:lstStyle/>
-          <a:p>
-            <a:pPr indent="0" marL="0">
-              <a:lnSpc>
-                <a:spcPct val="118000"/>
-              </a:lnSpc>
-              <a:buNone/>
-            </a:pPr>
-            <a:r>
-              <a:rPr lang="en-US" sz="1050" b="1" dirty="0">
-                <a:solidFill>
-                  <a:srgbClr val="F3F0E8"/>
-                </a:solidFill>
-                <a:latin typeface="Calibri" pitchFamily="34" charset="0"/>
-                <a:ea typeface="Calibri" pitchFamily="34" charset="-122"/>
-                <a:cs typeface="Calibri" pitchFamily="34" charset="-120"/>
-              </a:rPr>
-              <a:t>These are real numbers, not a "from" price. </a:t>
-            </a:r>
-            <a:pPr indent="0" marL="0">
-              <a:lnSpc>
-                <a:spcPct val="118000"/>
-              </a:lnSpc>
-              <a:buNone/>
-            </a:pPr>
-            <a:r>
-              <a:rPr lang="en-US" sz="1050" dirty="0">
-                <a:solidFill>
-                  <a:srgbClr val="A7B0AB"/>
-                </a:solidFill>
-                <a:latin typeface="Calibri" pitchFamily="34" charset="0"/>
-                <a:ea typeface="Calibri" pitchFamily="34" charset="-122"/>
-                <a:cs typeface="Calibri" pitchFamily="34" charset="-120"/>
-              </a:rPr>
-              <a:t>Everything above is taken from the developer's sales offer for unit FS 611 dated 18 July 2026 — a specific 6th-floor pool-view apartment with one parking bay.</a:t>
-            </a:r>
-            <a:endParaRPr lang="en-US" sz="1050" dirty="0"/>
-          </a:p>
-        </p:txBody>
-      </p:sp>
-      <p:sp>
-        <p:nvSpPr>
-          <p:cNvPr id="12" name="Shape 8"/>
-          <p:cNvSpPr/>
-          <p:nvPr/>
-        </p:nvSpPr>
-        <p:spPr>
-          <a:xfrm>
-            <a:off x="6400800" y="3291840"/>
-            <a:ext cx="5193792" cy="914400"/>
-          </a:xfrm>
-          <a:prstGeom prst="roundRect">
-            <a:avLst>
-              <a:gd name="adj" fmla="val 3000"/>
-            </a:avLst>
-          </a:prstGeom>
-          <a:solidFill>
-            <a:srgbClr val="202A26"/>
-          </a:solidFill>
-          <a:ln w="6350">
-            <a:solidFill>
-              <a:srgbClr val="2E3A35"/>
-            </a:solidFill>
-            <a:prstDash val="solid"/>
-          </a:ln>
-        </p:spPr>
-      </p:sp>
-      <p:sp>
-        <p:nvSpPr>
-          <p:cNvPr id="13" name="Text 9"/>
-          <p:cNvSpPr/>
-          <p:nvPr/>
-        </p:nvSpPr>
-        <p:spPr>
-          <a:xfrm>
-            <a:off x="6601968" y="3401568"/>
-            <a:ext cx="4791456" cy="694944"/>
-          </a:xfrm>
-          <a:prstGeom prst="rect">
-            <a:avLst/>
-          </a:prstGeom>
-          <a:noFill/>
-          <a:ln/>
-        </p:spPr>
-        <p:txBody>
-          <a:bodyPr wrap="square" lIns="0" tIns="0" rIns="0" bIns="0" rtlCol="0" anchor="t"/>
-          <a:lstStyle/>
-          <a:p>
-            <a:pPr indent="0" marL="0">
-              <a:lnSpc>
-                <a:spcPct val="118000"/>
-              </a:lnSpc>
-              <a:buNone/>
-            </a:pPr>
-            <a:r>
-              <a:rPr lang="en-US" sz="1050" b="1" dirty="0">
-                <a:solidFill>
-                  <a:srgbClr val="F3F0E8"/>
-                </a:solidFill>
-                <a:latin typeface="Calibri" pitchFamily="34" charset="0"/>
-                <a:ea typeface="Calibri" pitchFamily="34" charset="-122"/>
-                <a:cs typeface="Calibri" pitchFamily="34" charset="-120"/>
-              </a:rPr>
-              <a:t>Nothing on this page is an estimate. </a:t>
-            </a:r>
-            <a:pPr indent="0" marL="0">
-              <a:lnSpc>
-                <a:spcPct val="118000"/>
-              </a:lnSpc>
-              <a:buNone/>
-            </a:pPr>
-            <a:r>
-              <a:rPr lang="en-US" sz="1050" dirty="0">
-                <a:solidFill>
-                  <a:srgbClr val="A7B0AB"/>
-                </a:solidFill>
-                <a:latin typeface="Calibri" pitchFamily="34" charset="0"/>
-                <a:ea typeface="Calibri" pitchFamily="34" charset="-122"/>
-                <a:cs typeface="Calibri" pitchFamily="34" charset="-120"/>
-              </a:rPr>
-              <a:t>Price, fees and plan come from the sales offer; the service charge is AED 14/sqft; the rent is confirmed at AED 80,000. Floareá is the only one of the three where every line is evidenced.</a:t>
-            </a:r>
-            <a:endParaRPr lang="en-US" sz="1050" dirty="0"/>
-          </a:p>
-        </p:txBody>
-      </p:sp>
-      <p:sp>
-        <p:nvSpPr>
-          <p:cNvPr id="14" name="Shape 10"/>
-          <p:cNvSpPr/>
-          <p:nvPr/>
-        </p:nvSpPr>
-        <p:spPr>
-          <a:xfrm>
             <a:off x="566928" y="4617720"/>
             <a:ext cx="2564892" cy="0"/>
           </a:xfrm>
@@ -7785,7 +7421,7 @@
       </p:sp>
       <p:sp>
         <p:nvSpPr>
-          <p:cNvPr id="15" name="Text 11"/>
+          <p:cNvPr id="11" name="Text 7"/>
           <p:cNvSpPr/>
           <p:nvPr/>
         </p:nvSpPr>
@@ -7827,7 +7463,7 @@
       </p:sp>
       <p:sp>
         <p:nvSpPr>
-          <p:cNvPr id="16" name="Text 12"/>
+          <p:cNvPr id="12" name="Text 8"/>
           <p:cNvSpPr/>
           <p:nvPr/>
         </p:nvSpPr>
@@ -7866,7 +7502,7 @@
       </p:sp>
       <p:sp>
         <p:nvSpPr>
-          <p:cNvPr id="17" name="Shape 13"/>
+          <p:cNvPr id="13" name="Shape 9"/>
           <p:cNvSpPr/>
           <p:nvPr/>
         </p:nvSpPr>
@@ -7889,7 +7525,7 @@
       </p:sp>
       <p:sp>
         <p:nvSpPr>
-          <p:cNvPr id="18" name="Text 14"/>
+          <p:cNvPr id="14" name="Text 10"/>
           <p:cNvSpPr/>
           <p:nvPr/>
         </p:nvSpPr>
@@ -7942,7 +7578,7 @@
       </p:sp>
       <p:sp>
         <p:nvSpPr>
-          <p:cNvPr id="19" name="Text 15"/>
+          <p:cNvPr id="15" name="Text 11"/>
           <p:cNvSpPr/>
           <p:nvPr/>
         </p:nvSpPr>
@@ -7981,7 +7617,7 @@
       </p:sp>
       <p:sp>
         <p:nvSpPr>
-          <p:cNvPr id="20" name="Shape 16"/>
+          <p:cNvPr id="16" name="Shape 12"/>
           <p:cNvSpPr/>
           <p:nvPr/>
         </p:nvSpPr>
@@ -8004,7 +7640,7 @@
       </p:sp>
       <p:sp>
         <p:nvSpPr>
-          <p:cNvPr id="21" name="Text 17"/>
+          <p:cNvPr id="17" name="Text 13"/>
           <p:cNvSpPr/>
           <p:nvPr/>
         </p:nvSpPr>
@@ -8046,7 +7682,7 @@
       </p:sp>
       <p:sp>
         <p:nvSpPr>
-          <p:cNvPr id="22" name="Text 18"/>
+          <p:cNvPr id="18" name="Text 14"/>
           <p:cNvSpPr/>
           <p:nvPr/>
         </p:nvSpPr>
@@ -8085,7 +7721,7 @@
       </p:sp>
       <p:sp>
         <p:nvSpPr>
-          <p:cNvPr id="23" name="Shape 19"/>
+          <p:cNvPr id="19" name="Shape 15"/>
           <p:cNvSpPr/>
           <p:nvPr/>
         </p:nvSpPr>
@@ -8108,7 +7744,7 @@
       </p:sp>
       <p:sp>
         <p:nvSpPr>
-          <p:cNvPr id="24" name="Text 20"/>
+          <p:cNvPr id="20" name="Text 16"/>
           <p:cNvSpPr/>
           <p:nvPr/>
         </p:nvSpPr>
@@ -8150,7 +7786,7 @@
       </p:sp>
       <p:sp>
         <p:nvSpPr>
-          <p:cNvPr id="25" name="Text 21"/>
+          <p:cNvPr id="21" name="Text 17"/>
           <p:cNvSpPr/>
           <p:nvPr/>
         </p:nvSpPr>
@@ -8189,7 +7825,7 @@
       </p:sp>
       <p:sp>
         <p:nvSpPr>
-          <p:cNvPr id="26" name="Text 22"/>
+          <p:cNvPr id="22" name="Text 18"/>
           <p:cNvSpPr/>
           <p:nvPr/>
         </p:nvSpPr>
@@ -11221,93 +10857,7 @@
       </p:graphicFrame>
       <p:sp>
         <p:nvSpPr>
-          <p:cNvPr id="9" name="Shape 5"/>
-          <p:cNvSpPr/>
-          <p:nvPr/>
-        </p:nvSpPr>
-        <p:spPr>
-          <a:xfrm>
-            <a:off x="566928" y="4645152"/>
-            <a:ext cx="5486400" cy="1051560"/>
-          </a:xfrm>
-          <a:prstGeom prst="roundRect">
-            <a:avLst>
-              <a:gd name="adj" fmla="val 2609"/>
-            </a:avLst>
-          </a:prstGeom>
-          <a:solidFill>
-            <a:srgbClr val="202A26"/>
-          </a:solidFill>
-          <a:ln w="6350">
-            <a:solidFill>
-              <a:srgbClr val="2E3A35"/>
-            </a:solidFill>
-            <a:prstDash val="solid"/>
-          </a:ln>
-        </p:spPr>
-      </p:sp>
-      <p:sp>
-        <p:nvSpPr>
-          <p:cNvPr id="10" name="Text 6"/>
-          <p:cNvSpPr/>
-          <p:nvPr/>
-        </p:nvSpPr>
-        <p:spPr>
-          <a:xfrm>
-            <a:off x="768096" y="4754880"/>
-            <a:ext cx="5084064" cy="832104"/>
-          </a:xfrm>
-          <a:prstGeom prst="rect">
-            <a:avLst/>
-          </a:prstGeom>
-          <a:noFill/>
-          <a:ln/>
-        </p:spPr>
-        <p:txBody>
-          <a:bodyPr wrap="square" lIns="0" tIns="0" rIns="0" bIns="0" rtlCol="0" anchor="t"/>
-          <a:lstStyle/>
-          <a:p>
-            <a:pPr indent="0" marL="0">
-              <a:lnSpc>
-                <a:spcPct val="118000"/>
-              </a:lnSpc>
-              <a:buNone/>
-            </a:pPr>
-            <a:r>
-              <a:rPr lang="en-US" sz="1050" b="1" dirty="0">
-                <a:solidFill>
-                  <a:srgbClr val="F3F0E8"/>
-                </a:solidFill>
-                <a:latin typeface="Calibri" pitchFamily="34" charset="0"/>
-                <a:ea typeface="Calibri" pitchFamily="34" charset="-122"/>
-                <a:cs typeface="Calibri" pitchFamily="34" charset="-120"/>
-              </a:rPr>
-              <a:t>What the client writes on day one: AED 280,960. </a:t>
-            </a:r>
-            <a:pPr indent="0" marL="0">
-              <a:lnSpc>
-                <a:spcPct val="118000"/>
-              </a:lnSpc>
-              <a:buNone/>
-            </a:pPr>
-            <a:r>
-              <a:rPr lang="en-US" sz="1050" dirty="0">
-                <a:solidFill>
-                  <a:srgbClr val="A7B0AB"/>
-                </a:solidFill>
-                <a:latin typeface="Calibri" pitchFamily="34" charset="0"/>
-                <a:ea typeface="Calibri" pitchFamily="34" charset="-122"/>
-                <a:cs typeface="Calibri" pitchFamily="34" charset="-120"/>
-              </a:rPr>
-              <a:t>The 20% deposit plus DLD and admin, all due at booking. After that only AED 115,400 falls due across the next eighteen months.</a:t>
-            </a:r>
-            <a:endParaRPr lang="en-US" sz="1050" dirty="0"/>
-          </a:p>
-        </p:txBody>
-      </p:sp>
-      <p:sp>
-        <p:nvSpPr>
-          <p:cNvPr id="11" name="Text 7"/>
+          <p:cNvPr id="9" name="Text 5"/>
           <p:cNvSpPr/>
           <p:nvPr/>
         </p:nvSpPr>
@@ -11346,7 +10896,7 @@
       </p:sp>
       <p:pic>
         <p:nvPicPr>
-          <p:cNvPr id="12" name="Image 0" descr="preencoded.png">    </p:cNvPr>
+          <p:cNvPr id="10" name="Image 0" descr="preencoded.png">    </p:cNvPr>
           <p:cNvPicPr>
             <a:picLocks noChangeAspect="1"/>
           </p:cNvPicPr>
@@ -11550,144 +11100,6 @@
                           <a:ea typeface="Calibri" pitchFamily="34" charset="-122"/>
                           <a:cs typeface="Calibri" pitchFamily="34" charset="-120"/>
                         </a:rPr>
-                        <a:t>Unit / floor / parking</a:t>
-                      </a:r>
-                      <a:endParaRPr lang="en-US" sz="1050" dirty="0">
-                        <a:latin typeface="Calibri" charset="0"/>
-                        <a:ea typeface="Calibri" charset="0"/>
-                        <a:cs typeface="Calibri" charset="0"/>
-                      </a:endParaRPr>
-                    </a:p>
-                  </a:txBody>
-                  <a:tcPr marL="82296" marR="82296" marT="36576" marB="36576" anchor="ctr">
-                    <a:lnL w="6350" cap="flat" cmpd="sng" algn="ctr">
-                      <a:solidFill>
-                        <a:srgbClr val="2E3A35"/>
-                      </a:solidFill>
-                      <a:prstDash val="solid"/>
-                      <a:round/>
-                      <a:headEnd type="none" w="med" len="med"/>
-                      <a:tailEnd type="none" w="med" len="med"/>
-                    </a:lnL>
-                    <a:lnR w="6350" cap="flat" cmpd="sng" algn="ctr">
-                      <a:solidFill>
-                        <a:srgbClr val="2E3A35"/>
-                      </a:solidFill>
-                      <a:prstDash val="solid"/>
-                      <a:round/>
-                      <a:headEnd type="none" w="med" len="med"/>
-                      <a:tailEnd type="none" w="med" len="med"/>
-                    </a:lnR>
-                    <a:lnT w="6350" cap="flat" cmpd="sng" algn="ctr">
-                      <a:solidFill>
-                        <a:srgbClr val="2E3A35"/>
-                      </a:solidFill>
-                      <a:prstDash val="solid"/>
-                      <a:round/>
-                      <a:headEnd type="none" w="med" len="med"/>
-                      <a:tailEnd type="none" w="med" len="med"/>
-                    </a:lnT>
-                    <a:lnB w="6350" cap="flat" cmpd="sng" algn="ctr">
-                      <a:solidFill>
-                        <a:srgbClr val="2E3A35"/>
-                      </a:solidFill>
-                      <a:prstDash val="solid"/>
-                      <a:round/>
-                      <a:headEnd type="none" w="med" len="med"/>
-                      <a:tailEnd type="none" w="med" len="med"/>
-                    </a:lnB>
-                    <a:solidFill>
-                      <a:srgbClr val="171E1B"/>
-                    </a:solidFill>
-                  </a:tcPr>
-                </a:tc>
-                <a:tc>
-                  <a:txBody>
-                    <a:bodyPr/>
-                    <a:lstStyle/>
-                    <a:p>
-                      <a:pPr algn="r" indent="0" marL="0">
-                        <a:buNone/>
-                      </a:pPr>
-                      <a:r>
-                        <a:rPr lang="en-US" sz="1050" dirty="0">
-                          <a:solidFill>
-                            <a:srgbClr val="F3F0E8"/>
-                          </a:solidFill>
-                          <a:latin typeface="Calibri" pitchFamily="34" charset="0"/>
-                          <a:ea typeface="Calibri" pitchFamily="34" charset="-122"/>
-                          <a:cs typeface="Calibri" pitchFamily="34" charset="-120"/>
-                        </a:rPr>
-                        <a:t>FS 611 · 6th floor · 01</a:t>
-                      </a:r>
-                      <a:endParaRPr lang="en-US" sz="1050" dirty="0">
-                        <a:latin typeface="Calibri" charset="0"/>
-                        <a:ea typeface="Calibri" charset="0"/>
-                        <a:cs typeface="Calibri" charset="0"/>
-                      </a:endParaRPr>
-                    </a:p>
-                  </a:txBody>
-                  <a:tcPr marL="82296" marR="82296" marT="36576" marB="36576" anchor="ctr">
-                    <a:lnL w="6350" cap="flat" cmpd="sng" algn="ctr">
-                      <a:solidFill>
-                        <a:srgbClr val="2E3A35"/>
-                      </a:solidFill>
-                      <a:prstDash val="solid"/>
-                      <a:round/>
-                      <a:headEnd type="none" w="med" len="med"/>
-                      <a:tailEnd type="none" w="med" len="med"/>
-                    </a:lnL>
-                    <a:lnR w="6350" cap="flat" cmpd="sng" algn="ctr">
-                      <a:solidFill>
-                        <a:srgbClr val="2E3A35"/>
-                      </a:solidFill>
-                      <a:prstDash val="solid"/>
-                      <a:round/>
-                      <a:headEnd type="none" w="med" len="med"/>
-                      <a:tailEnd type="none" w="med" len="med"/>
-                    </a:lnR>
-                    <a:lnT w="6350" cap="flat" cmpd="sng" algn="ctr">
-                      <a:solidFill>
-                        <a:srgbClr val="2E3A35"/>
-                      </a:solidFill>
-                      <a:prstDash val="solid"/>
-                      <a:round/>
-                      <a:headEnd type="none" w="med" len="med"/>
-                      <a:tailEnd type="none" w="med" len="med"/>
-                    </a:lnT>
-                    <a:lnB w="6350" cap="flat" cmpd="sng" algn="ctr">
-                      <a:solidFill>
-                        <a:srgbClr val="2E3A35"/>
-                      </a:solidFill>
-                      <a:prstDash val="solid"/>
-                      <a:round/>
-                      <a:headEnd type="none" w="med" len="med"/>
-                      <a:tailEnd type="none" w="med" len="med"/>
-                    </a:lnB>
-                    <a:solidFill>
-                      <a:srgbClr val="171E1B"/>
-                    </a:solidFill>
-                  </a:tcPr>
-                </a:tc>
-              </a:tr>
-              <a:tr h="274320">
-                <a:tc>
-                  <a:txBody>
-                    <a:bodyPr/>
-                    <a:lstStyle/>
-                    <a:p>
-                      <a:pPr algn="l" indent="0" marL="0">
-                        <a:buNone/>
-                      </a:pPr>
-                      <a:r>
-                        <a:rPr lang="en-US" sz="1050" dirty="0">
-                          <a:solidFill>
-                            <a:srgbClr val="A7B0AB"/>
-                          </a:solidFill>
-                          <a:latin typeface="Calibri" pitchFamily="34" charset="0"/>
-                          <a:ea typeface="Calibri" pitchFamily="34" charset="-122"/>
-                          <a:cs typeface="Calibri" pitchFamily="34" charset="-120"/>
-                        </a:rPr>
                         <a:t>Total area</a:t>
                       </a:r>
                       <a:endParaRPr lang="en-US" sz="1050" dirty="0">
@@ -11735,7 +11147,7 @@
                       <a:tailEnd type="none" w="med" len="med"/>
                     </a:lnB>
                     <a:solidFill>
-                      <a:srgbClr val="1B2320"/>
+                      <a:srgbClr val="171E1B"/>
                     </a:solidFill>
                   </a:tcPr>
                 </a:tc>
@@ -11803,7 +11215,7 @@
                       <a:tailEnd type="none" w="med" len="med"/>
                     </a:lnB>
                     <a:solidFill>
-                      <a:srgbClr val="1B2320"/>
+                      <a:srgbClr val="171E1B"/>
                     </a:solidFill>
                   </a:tcPr>
                 </a:tc>
@@ -11844,12 +11256,19 @@
           <a:chExt cx="0" cy="0"/>
         </a:xfrm>
       </p:grpSpPr>
-      <p:sp>
-        <p:nvSpPr>
-          <p:cNvPr id="2" name="Shape 0"/>
-          <p:cNvSpPr/>
+      <p:pic>
+        <p:nvPicPr>
+          <p:cNvPr id="2" name="Image 0" descr="preencoded.png">    </p:cNvPr>
+          <p:cNvPicPr>
+            <a:picLocks noChangeAspect="1"/>
+          </p:cNvPicPr>
           <p:nvPr/>
-        </p:nvSpPr>
+        </p:nvPicPr>
+        <p:blipFill>
+          <a:blip r:embed="rId1"/>
+          <a:srcRect l="0" r="0" t="0" b="0"/>
+          <a:stretch/>
+        </p:blipFill>
         <p:spPr>
           <a:xfrm>
             <a:off x="0" y="0"/>
@@ -11858,37 +11277,35 @@
           <a:prstGeom prst="rect">
             <a:avLst/>
           </a:prstGeom>
-          <a:solidFill>
-            <a:srgbClr val="11150F"/>
-          </a:solidFill>
-          <a:ln/>
         </p:spPr>
-      </p:sp>
+      </p:pic>
+      <p:pic>
+        <p:nvPicPr>
+          <p:cNvPr id="3" name="Image 1" descr="preencoded.png">    </p:cNvPr>
+          <p:cNvPicPr>
+            <a:picLocks noChangeAspect="1"/>
+          </p:cNvPicPr>
+          <p:nvPr/>
+        </p:nvPicPr>
+        <p:blipFill>
+          <a:blip r:embed="rId2"/>
+          <a:stretch>
+            <a:fillRect/>
+          </a:stretch>
+        </p:blipFill>
+        <p:spPr>
+          <a:xfrm>
+            <a:off x="0" y="0"/>
+            <a:ext cx="12161520" cy="6858000"/>
+          </a:xfrm>
+          <a:prstGeom prst="rect">
+            <a:avLst/>
+          </a:prstGeom>
+        </p:spPr>
+      </p:pic>
       <p:sp>
         <p:nvSpPr>
-          <p:cNvPr id="3" name="Shape 1"/>
-          <p:cNvSpPr/>
-          <p:nvPr/>
-        </p:nvSpPr>
-        <p:spPr>
-          <a:xfrm>
-            <a:off x="5669280" y="-2651760"/>
-            <a:ext cx="8778240" cy="5852160"/>
-          </a:xfrm>
-          <a:prstGeom prst="ellipse">
-            <a:avLst/>
-          </a:prstGeom>
-          <a:solidFill>
-            <a:srgbClr val="B08A25">
-              <a:alpha val="22000"/>
-            </a:srgbClr>
-          </a:solidFill>
-          <a:ln/>
-        </p:spPr>
-      </p:sp>
-      <p:sp>
-        <p:nvSpPr>
-          <p:cNvPr id="4" name="Text 2"/>
+          <p:cNvPr id="4" name="Text 0"/>
           <p:cNvSpPr/>
           <p:nvPr/>
         </p:nvSpPr>
@@ -11927,7 +11344,7 @@
       </p:sp>
       <p:sp>
         <p:nvSpPr>
-          <p:cNvPr id="5" name="Text 3"/>
+          <p:cNvPr id="5" name="Text 1"/>
           <p:cNvSpPr/>
           <p:nvPr/>
         </p:nvSpPr>
@@ -11976,7 +11393,7 @@
       </p:sp>
       <p:sp>
         <p:nvSpPr>
-          <p:cNvPr id="6" name="Text 4"/>
+          <p:cNvPr id="6" name="Text 2"/>
           <p:cNvSpPr/>
           <p:nvPr/>
         </p:nvSpPr>
@@ -12015,7 +11432,7 @@
       </p:sp>
       <p:sp>
         <p:nvSpPr>
-          <p:cNvPr id="7" name="Text 5"/>
+          <p:cNvPr id="7" name="Text 3"/>
           <p:cNvSpPr/>
           <p:nvPr/>
         </p:nvSpPr>
@@ -12046,7 +11463,7 @@
                 <a:ea typeface="Calibri" pitchFamily="34" charset="-122"/>
                 <a:cs typeface="Calibri" pitchFamily="34" charset="-120"/>
               </a:rPr>
-              <a:t>Developer · BEYOND · OMNIYAT Group        Handover · Q1 2029        From · AED 1,000,000</a:t>
+              <a:t>Developer · BEYOND · OMNIYAT Group        Handover · Q1 2029        From · AED 1,450,000</a:t>
             </a:r>
             <a:endParaRPr lang="en-US" sz="1300" dirty="0"/>
           </a:p>
@@ -12054,7 +11471,7 @@
       </p:sp>
       <p:sp>
         <p:nvSpPr>
-          <p:cNvPr id="8" name="Text 6"/>
+          <p:cNvPr id="8" name="Text 4"/>
           <p:cNvSpPr/>
           <p:nvPr/>
         </p:nvSpPr>
@@ -12093,7 +11510,7 @@
       </p:sp>
       <p:sp>
         <p:nvSpPr>
-          <p:cNvPr id="9" name="Text 7"/>
+          <p:cNvPr id="9" name="Text 5"/>
           <p:cNvSpPr/>
           <p:nvPr/>
         </p:nvSpPr>
@@ -12804,92 +12221,6 @@
           </a:p>
         </p:txBody>
       </p:sp>
-      <p:sp>
-        <p:nvSpPr>
-          <p:cNvPr id="17" name="Shape 15"/>
-          <p:cNvSpPr/>
-          <p:nvPr/>
-        </p:nvSpPr>
-        <p:spPr>
-          <a:xfrm>
-            <a:off x="5943600" y="4160520"/>
-            <a:ext cx="5650992" cy="1417320"/>
-          </a:xfrm>
-          <a:prstGeom prst="roundRect">
-            <a:avLst>
-              <a:gd name="adj" fmla="val 1935"/>
-            </a:avLst>
-          </a:prstGeom>
-          <a:solidFill>
-            <a:srgbClr val="202A26"/>
-          </a:solidFill>
-          <a:ln w="6350">
-            <a:solidFill>
-              <a:srgbClr val="2E3A35"/>
-            </a:solidFill>
-            <a:prstDash val="solid"/>
-          </a:ln>
-        </p:spPr>
-      </p:sp>
-      <p:sp>
-        <p:nvSpPr>
-          <p:cNvPr id="18" name="Text 16"/>
-          <p:cNvSpPr/>
-          <p:nvPr/>
-        </p:nvSpPr>
-        <p:spPr>
-          <a:xfrm>
-            <a:off x="6144768" y="4270248"/>
-            <a:ext cx="5248656" cy="1197864"/>
-          </a:xfrm>
-          <a:prstGeom prst="rect">
-            <a:avLst/>
-          </a:prstGeom>
-          <a:noFill/>
-          <a:ln/>
-        </p:spPr>
-        <p:txBody>
-          <a:bodyPr wrap="square" lIns="0" tIns="0" rIns="0" bIns="0" rtlCol="0" anchor="t"/>
-          <a:lstStyle/>
-          <a:p>
-            <a:pPr indent="0" marL="0">
-              <a:lnSpc>
-                <a:spcPct val="118000"/>
-              </a:lnSpc>
-              <a:buNone/>
-            </a:pPr>
-            <a:r>
-              <a:rPr lang="en-US" sz="1100" b="1" dirty="0">
-                <a:solidFill>
-                  <a:srgbClr val="F3F0E8"/>
-                </a:solidFill>
-                <a:latin typeface="Calibri" pitchFamily="34" charset="0"/>
-                <a:ea typeface="Calibri" pitchFamily="34" charset="-122"/>
-                <a:cs typeface="Calibri" pitchFamily="34" charset="-120"/>
-              </a:rPr>
-              <a:t>Both sides of being early. </a:t>
-            </a:r>
-            <a:pPr indent="0" marL="0">
-              <a:lnSpc>
-                <a:spcPct val="118000"/>
-              </a:lnSpc>
-              <a:buNone/>
-            </a:pPr>
-            <a:r>
-              <a:rPr lang="en-US" sz="1100" dirty="0">
-                <a:solidFill>
-                  <a:srgbClr val="A7B0AB"/>
-                </a:solidFill>
-                <a:latin typeface="Calibri" pitchFamily="34" charset="0"/>
-                <a:ea typeface="Calibri" pitchFamily="34" charset="-122"/>
-                <a:cs typeface="Calibri" pitchFamily="34" charset="-120"/>
-              </a:rPr>
-              <a:t>Your client buys at first-phase pricing into a community that will still be building around them for years. That is the upside and the risk in the same sentence — and the reason the handover is 2029.</a:t>
-            </a:r>
-            <a:endParaRPr lang="en-US" sz="1100" dirty="0"/>
-          </a:p>
-        </p:txBody>
-      </p:sp>
     </p:spTree>
   </p:cSld>
   <p:clrMapOvr>
@@ -14852,7 +14183,7 @@
                           <a:ea typeface="Calibri" pitchFamily="34" charset="-122"/>
                           <a:cs typeface="Calibri" pitchFamily="34" charset="-120"/>
                         </a:rPr>
-                        <a:t>AED 1,000,000</a:t>
+                        <a:t>AED 1,450,000</a:t>
                       </a:r>
                       <a:endParaRPr lang="en-US" sz="1050" dirty="0">
                         <a:latin typeface="Calibri" charset="0"/>
@@ -15426,72 +14757,52 @@
           </a:p>
         </p:txBody>
       </p:sp>
-      <p:sp>
-        <p:nvSpPr>
-          <p:cNvPr id="13" name="Shape 9"/>
-          <p:cNvSpPr/>
+      <p:pic>
+        <p:nvPicPr>
+          <p:cNvPr id="13" name="Image 0" descr="preencoded.png">    </p:cNvPr>
+          <p:cNvPicPr>
+            <a:picLocks noChangeAspect="1"/>
+          </p:cNvPicPr>
           <p:nvPr/>
-        </p:nvSpPr>
+        </p:nvPicPr>
+        <p:blipFill>
+          <a:blip r:embed="rId1"/>
+          <a:srcRect l="0" r="0" t="0" b="0"/>
+          <a:stretch/>
+        </p:blipFill>
         <p:spPr>
           <a:xfrm>
-            <a:off x="5943600" y="4407408"/>
-            <a:ext cx="5650992" cy="1170432"/>
-          </a:xfrm>
-          <a:prstGeom prst="roundRect">
-            <a:avLst>
-              <a:gd name="adj" fmla="val 2344"/>
-            </a:avLst>
-          </a:prstGeom>
-          <a:solidFill>
-            <a:srgbClr val="171E1B"/>
-          </a:solidFill>
-          <a:ln w="9525">
-            <a:solidFill>
-              <a:srgbClr val="2E3A35"/>
-            </a:solidFill>
-            <a:prstDash val="dash"/>
-          </a:ln>
-        </p:spPr>
-      </p:sp>
-      <p:sp>
-        <p:nvSpPr>
-          <p:cNvPr id="14" name="Text 10"/>
-          <p:cNvSpPr/>
-          <p:nvPr/>
-        </p:nvSpPr>
-        <p:spPr>
-          <a:xfrm>
-            <a:off x="6035040" y="4407408"/>
-            <a:ext cx="5468112" cy="1170432"/>
+            <a:off x="5943600" y="4315968"/>
+            <a:ext cx="2743200" cy="1298448"/>
           </a:xfrm>
           <a:prstGeom prst="rect">
             <a:avLst/>
           </a:prstGeom>
-          <a:noFill/>
-          <a:ln/>
         </p:spPr>
-        <p:txBody>
-          <a:bodyPr wrap="square" lIns="0" tIns="0" rIns="0" bIns="0" rtlCol="0" anchor="ctr"/>
-          <a:lstStyle/>
-          <a:p>
-            <a:pPr algn="ctr" indent="0" marL="0">
-              <a:buNone/>
-            </a:pPr>
-            <a:r>
-              <a:rPr lang="en-US" sz="1100" dirty="0">
-                <a:solidFill>
-                  <a:srgbClr val="828C87"/>
-                </a:solidFill>
-                <a:latin typeface="Calibri" pitchFamily="34" charset="0"/>
-                <a:ea typeface="Calibri" pitchFamily="34" charset="-122"/>
-                <a:cs typeface="Calibri" pitchFamily="34" charset="-120"/>
-              </a:rPr>
-              <a:t>Render slot — drop the five Arancia images in here as a photo grid</a:t>
-            </a:r>
-            <a:endParaRPr lang="en-US" sz="1100" dirty="0"/>
-          </a:p>
-        </p:txBody>
-      </p:sp>
+      </p:pic>
+      <p:pic>
+        <p:nvPicPr>
+          <p:cNvPr id="14" name="Image 1" descr="preencoded.png">    </p:cNvPr>
+          <p:cNvPicPr>
+            <a:picLocks noChangeAspect="1"/>
+          </p:cNvPicPr>
+          <p:nvPr/>
+        </p:nvPicPr>
+        <p:blipFill>
+          <a:blip r:embed="rId2"/>
+          <a:srcRect l="0" r="0" t="0" b="0"/>
+          <a:stretch/>
+        </p:blipFill>
+        <p:spPr>
+          <a:xfrm>
+            <a:off x="8851392" y="4315968"/>
+            <a:ext cx="2743200" cy="1298448"/>
+          </a:xfrm>
+          <a:prstGeom prst="rect">
+            <a:avLst/>
+          </a:prstGeom>
+        </p:spPr>
+      </p:pic>
     </p:spTree>
   </p:cSld>
   <p:clrMapOvr>
@@ -16033,7 +15344,7 @@
                           <a:ea typeface="Calibri" pitchFamily="34" charset="-122"/>
                           <a:cs typeface="Calibri" pitchFamily="34" charset="-120"/>
                         </a:rPr>
-                        <a:t>1,000,000</a:t>
+                        <a:t>1,450,000</a:t>
                       </a:r>
                       <a:endParaRPr lang="en-US" sz="1050" dirty="0">
                         <a:latin typeface="Calibri" charset="0"/>
@@ -16101,7 +15412,7 @@
                           <a:ea typeface="Calibri" pitchFamily="34" charset="-122"/>
                           <a:cs typeface="Calibri" pitchFamily="34" charset="-120"/>
                         </a:rPr>
-                        <a:t>€233,100</a:t>
+                        <a:t>€337,995</a:t>
                       </a:r>
                       <a:endParaRPr lang="en-US" sz="1050" dirty="0">
                         <a:latin typeface="Calibri" charset="0"/>
@@ -16239,7 +15550,7 @@
                           <a:ea typeface="Calibri" pitchFamily="34" charset="-122"/>
                           <a:cs typeface="Calibri" pitchFamily="34" charset="-120"/>
                         </a:rPr>
-                        <a:t>40,000</a:t>
+                        <a:t>58,000</a:t>
                       </a:r>
                       <a:endParaRPr lang="en-US" sz="1050" dirty="0">
                         <a:latin typeface="Calibri" charset="0"/>
@@ -16307,7 +15618,7 @@
                           <a:ea typeface="Calibri" pitchFamily="34" charset="-122"/>
                           <a:cs typeface="Calibri" pitchFamily="34" charset="-120"/>
                         </a:rPr>
-                        <a:t>€9,324</a:t>
+                        <a:t>€13,520</a:t>
                       </a:r>
                       <a:endParaRPr lang="en-US" sz="1050" dirty="0">
                         <a:latin typeface="Calibri" charset="0"/>
@@ -16445,7 +15756,7 @@
                           <a:ea typeface="Calibri" pitchFamily="34" charset="-122"/>
                           <a:cs typeface="Calibri" pitchFamily="34" charset="-120"/>
                         </a:rPr>
-                        <a:t>4,200</a:t>
+                        <a:t>5,250</a:t>
                       </a:r>
                       <a:endParaRPr lang="en-US" sz="1050" dirty="0">
                         <a:latin typeface="Calibri" charset="0"/>
@@ -16513,7 +15824,7 @@
                           <a:ea typeface="Calibri" pitchFamily="34" charset="-122"/>
                           <a:cs typeface="Calibri" pitchFamily="34" charset="-120"/>
                         </a:rPr>
-                        <a:t>€979</a:t>
+                        <a:t>€1,224</a:t>
                       </a:r>
                       <a:endParaRPr lang="en-US" sz="1050" dirty="0">
                         <a:latin typeface="Calibri" charset="0"/>
@@ -16643,15 +15954,15 @@
                         <a:buNone/>
                       </a:pPr>
                       <a:r>
-                        <a:rPr lang="en-US" sz="1050" b="1" dirty="0">
+                        <a:rPr lang="en-US" sz="1050" dirty="0">
                           <a:solidFill>
-                            <a:srgbClr val="7BE08A"/>
+                            <a:srgbClr val="F3F0E8"/>
                           </a:solidFill>
                           <a:latin typeface="Calibri" pitchFamily="34" charset="0"/>
                           <a:ea typeface="Calibri" pitchFamily="34" charset="-122"/>
                           <a:cs typeface="Calibri" pitchFamily="34" charset="-120"/>
                         </a:rPr>
-                        <a:t>1,333</a:t>
+                        <a:t>1,933</a:t>
                       </a:r>
                       <a:endParaRPr lang="en-US" sz="1050" dirty="0">
                         <a:latin typeface="Calibri" charset="0"/>
@@ -16719,7 +16030,7 @@
                           <a:ea typeface="Calibri" pitchFamily="34" charset="-122"/>
                           <a:cs typeface="Calibri" pitchFamily="34" charset="-120"/>
                         </a:rPr>
-                        <a:t>€311</a:t>
+                        <a:t>€451</a:t>
                       </a:r>
                       <a:endParaRPr lang="en-US" sz="1050" dirty="0">
                         <a:latin typeface="Calibri" charset="0"/>
@@ -16857,7 +16168,7 @@
                           <a:ea typeface="Calibri" pitchFamily="34" charset="-122"/>
                           <a:cs typeface="Calibri" pitchFamily="34" charset="-120"/>
                         </a:rPr>
-                        <a:t>1,044,200</a:t>
+                        <a:t>1,513,250</a:t>
                       </a:r>
                       <a:endParaRPr lang="en-US" sz="1050" dirty="0">
                         <a:latin typeface="Calibri" charset="0"/>
@@ -16925,7 +16236,7 @@
                           <a:ea typeface="Calibri" pitchFamily="34" charset="-122"/>
                           <a:cs typeface="Calibri" pitchFamily="34" charset="-120"/>
                         </a:rPr>
-                        <a:t>€243,403</a:t>
+                        <a:t>€352,739</a:t>
                       </a:r>
                       <a:endParaRPr lang="en-US" sz="1050" dirty="0">
                         <a:latin typeface="Calibri" charset="0"/>
@@ -18157,13 +17468,13 @@
                       <a:r>
                         <a:rPr lang="en-US" sz="1050" b="1" dirty="0">
                           <a:solidFill>
-                            <a:srgbClr val="7BE08A"/>
+                            <a:srgbClr val="F3F0E8"/>
                           </a:solidFill>
                           <a:latin typeface="Calibri" pitchFamily="34" charset="0"/>
                           <a:ea typeface="Calibri" pitchFamily="34" charset="-122"/>
                           <a:cs typeface="Calibri" pitchFamily="34" charset="-120"/>
                         </a:rPr>
-                        <a:t>7.5%</a:t>
+                        <a:t>5.2%</a:t>
                       </a:r>
                       <a:endParaRPr lang="en-US" sz="1050" dirty="0">
                         <a:latin typeface="Calibri" charset="0"/>
@@ -18284,178 +17595,6 @@
         </p:nvSpPr>
         <p:spPr>
           <a:xfrm>
-            <a:off x="566928" y="3291840"/>
-            <a:ext cx="5486400" cy="914400"/>
-          </a:xfrm>
-          <a:prstGeom prst="roundRect">
-            <a:avLst>
-              <a:gd name="adj" fmla="val 3000"/>
-            </a:avLst>
-          </a:prstGeom>
-          <a:solidFill>
-            <a:srgbClr val="202A26"/>
-          </a:solidFill>
-          <a:ln w="6350">
-            <a:solidFill>
-              <a:srgbClr val="2E3A35"/>
-            </a:solidFill>
-            <a:prstDash val="solid"/>
-          </a:ln>
-        </p:spPr>
-      </p:sp>
-      <p:sp>
-        <p:nvSpPr>
-          <p:cNvPr id="11" name="Text 7"/>
-          <p:cNvSpPr/>
-          <p:nvPr/>
-        </p:nvSpPr>
-        <p:spPr>
-          <a:xfrm>
-            <a:off x="768096" y="3401568"/>
-            <a:ext cx="5084064" cy="694944"/>
-          </a:xfrm>
-          <a:prstGeom prst="rect">
-            <a:avLst/>
-          </a:prstGeom>
-          <a:noFill/>
-          <a:ln/>
-        </p:spPr>
-        <p:txBody>
-          <a:bodyPr wrap="square" lIns="0" tIns="0" rIns="0" bIns="0" rtlCol="0" anchor="t"/>
-          <a:lstStyle/>
-          <a:p>
-            <a:pPr indent="0" marL="0">
-              <a:lnSpc>
-                <a:spcPct val="118000"/>
-              </a:lnSpc>
-              <a:buNone/>
-            </a:pPr>
-            <a:r>
-              <a:rPr lang="en-US" sz="1050" b="1" dirty="0">
-                <a:solidFill>
-                  <a:srgbClr val="F3F0E8"/>
-                </a:solidFill>
-                <a:latin typeface="Calibri" pitchFamily="34" charset="0"/>
-                <a:ea typeface="Calibri" pitchFamily="34" charset="-122"/>
-                <a:cs typeface="Calibri" pitchFamily="34" charset="-120"/>
-              </a:rPr>
-              <a:t>The best income of the three. </a:t>
-            </a:r>
-            <a:pPr indent="0" marL="0">
-              <a:lnSpc>
-                <a:spcPct val="118000"/>
-              </a:lnSpc>
-              <a:buNone/>
-            </a:pPr>
-            <a:r>
-              <a:rPr lang="en-US" sz="1050" dirty="0">
-                <a:solidFill>
-                  <a:srgbClr val="A7B0AB"/>
-                </a:solidFill>
-                <a:latin typeface="Calibri" pitchFamily="34" charset="0"/>
-                <a:ea typeface="Calibri" pitchFamily="34" charset="-122"/>
-                <a:cs typeface="Calibri" pitchFamily="34" charset="-120"/>
-              </a:rPr>
-              <a:t>AED 90,000 a year on a AED 1.04M all-in cost returns AED 78,750 net — a 7.5% yield, the highest here. It is also the cheapest land per foot at AED 1,333.</a:t>
-            </a:r>
-            <a:endParaRPr lang="en-US" sz="1050" dirty="0"/>
-          </a:p>
-        </p:txBody>
-      </p:sp>
-      <p:sp>
-        <p:nvSpPr>
-          <p:cNvPr id="12" name="Shape 8"/>
-          <p:cNvSpPr/>
-          <p:nvPr/>
-        </p:nvSpPr>
-        <p:spPr>
-          <a:xfrm>
-            <a:off x="6400800" y="3291840"/>
-            <a:ext cx="5193792" cy="914400"/>
-          </a:xfrm>
-          <a:prstGeom prst="roundRect">
-            <a:avLst>
-              <a:gd name="adj" fmla="val 3000"/>
-            </a:avLst>
-          </a:prstGeom>
-          <a:solidFill>
-            <a:srgbClr val="202A26"/>
-          </a:solidFill>
-          <a:ln w="6350">
-            <a:solidFill>
-              <a:srgbClr val="2E3A35"/>
-            </a:solidFill>
-            <a:prstDash val="solid"/>
-          </a:ln>
-        </p:spPr>
-      </p:sp>
-      <p:sp>
-        <p:nvSpPr>
-          <p:cNvPr id="13" name="Text 9"/>
-          <p:cNvSpPr/>
-          <p:nvPr/>
-        </p:nvSpPr>
-        <p:spPr>
-          <a:xfrm>
-            <a:off x="6601968" y="3401568"/>
-            <a:ext cx="4791456" cy="694944"/>
-          </a:xfrm>
-          <a:prstGeom prst="rect">
-            <a:avLst/>
-          </a:prstGeom>
-          <a:noFill/>
-          <a:ln/>
-        </p:spPr>
-        <p:txBody>
-          <a:bodyPr wrap="square" lIns="0" tIns="0" rIns="0" bIns="0" rtlCol="0" anchor="t"/>
-          <a:lstStyle/>
-          <a:p>
-            <a:pPr indent="0" marL="0">
-              <a:lnSpc>
-                <a:spcPct val="118000"/>
-              </a:lnSpc>
-              <a:buNone/>
-            </a:pPr>
-            <a:r>
-              <a:rPr lang="en-US" sz="1050" b="1" dirty="0">
-                <a:solidFill>
-                  <a:srgbClr val="E0A45C"/>
-                </a:solidFill>
-                <a:latin typeface="Calibri" pitchFamily="34" charset="0"/>
-                <a:ea typeface="Calibri" pitchFamily="34" charset="-122"/>
-                <a:cs typeface="Calibri" pitchFamily="34" charset="-120"/>
-              </a:rPr>
-              <a:t>The one still unpublished. </a:t>
-            </a:r>
-            <a:pPr indent="0" marL="0">
-              <a:lnSpc>
-                <a:spcPct val="118000"/>
-              </a:lnSpc>
-              <a:buNone/>
-            </a:pPr>
-            <a:r>
-              <a:rPr lang="en-US" sz="1050" dirty="0">
-                <a:solidFill>
-                  <a:srgbClr val="A7B0AB"/>
-                </a:solidFill>
-                <a:latin typeface="Calibri" pitchFamily="34" charset="0"/>
-                <a:ea typeface="Calibri" pitchFamily="34" charset="-122"/>
-                <a:cs typeface="Calibri" pitchFamily="34" charset="-120"/>
-              </a:rPr>
-              <a:t>Arancia is the only one of the three with no service charge on record, so AED 15/sqft is modelled — matching Floareá. Its amenity and landscape load is the heaviest, so the real figure could be higher: at AED 25/sqft the yield falls to ~6.8%.</a:t>
-            </a:r>
-            <a:endParaRPr lang="en-US" sz="1050" dirty="0"/>
-          </a:p>
-        </p:txBody>
-      </p:sp>
-      <p:sp>
-        <p:nvSpPr>
-          <p:cNvPr id="14" name="Shape 10"/>
-          <p:cNvSpPr/>
-          <p:nvPr/>
-        </p:nvSpPr>
-        <p:spPr>
-          <a:xfrm>
             <a:off x="566928" y="4617720"/>
             <a:ext cx="2564892" cy="0"/>
           </a:xfrm>
@@ -18473,7 +17612,7 @@
       </p:sp>
       <p:sp>
         <p:nvSpPr>
-          <p:cNvPr id="15" name="Text 11"/>
+          <p:cNvPr id="11" name="Text 7"/>
           <p:cNvSpPr/>
           <p:nvPr/>
         </p:nvSpPr>
@@ -18504,7 +17643,7 @@
                 <a:ea typeface="Arial" pitchFamily="34" charset="-122"/>
                 <a:cs typeface="Arial" pitchFamily="34" charset="-120"/>
               </a:rPr>
-              <a:t>7.5%</a:t>
+              <a:t>90,000</a:t>
             </a:r>
             <a:pPr indent="0" marL="0">
               <a:buNone/>
@@ -18515,7 +17654,7 @@
       </p:sp>
       <p:sp>
         <p:nvSpPr>
-          <p:cNvPr id="16" name="Text 12"/>
+          <p:cNvPr id="12" name="Text 8"/>
           <p:cNvSpPr/>
           <p:nvPr/>
         </p:nvSpPr>
@@ -18546,7 +17685,7 @@
                 <a:ea typeface="Calibri" pitchFamily="34" charset="-122"/>
                 <a:cs typeface="Calibri" pitchFamily="34" charset="-120"/>
               </a:rPr>
-              <a:t>NET YIELD · HIGHEST</a:t>
+              <a:t>AED RENT · HIGHEST</a:t>
             </a:r>
             <a:endParaRPr lang="en-US" sz="850" dirty="0"/>
           </a:p>
@@ -18554,7 +17693,7 @@
       </p:sp>
       <p:sp>
         <p:nvSpPr>
-          <p:cNvPr id="17" name="Shape 13"/>
+          <p:cNvPr id="13" name="Shape 9"/>
           <p:cNvSpPr/>
           <p:nvPr/>
         </p:nvSpPr>
@@ -18577,7 +17716,7 @@
       </p:sp>
       <p:sp>
         <p:nvSpPr>
-          <p:cNvPr id="18" name="Text 14"/>
+          <p:cNvPr id="14" name="Text 10"/>
           <p:cNvSpPr/>
           <p:nvPr/>
         </p:nvSpPr>
@@ -18608,7 +17747,7 @@
                 <a:ea typeface="Arial" pitchFamily="34" charset="-122"/>
                 <a:cs typeface="Arial" pitchFamily="34" charset="-120"/>
               </a:rPr>
-              <a:t>1,333</a:t>
+              <a:t>1,933</a:t>
             </a:r>
             <a:pPr indent="0" marL="0">
               <a:buNone/>
@@ -18619,7 +17758,7 @@
       </p:sp>
       <p:sp>
         <p:nvSpPr>
-          <p:cNvPr id="19" name="Text 15"/>
+          <p:cNvPr id="15" name="Text 11"/>
           <p:cNvSpPr/>
           <p:nvPr/>
         </p:nvSpPr>
@@ -18650,7 +17789,7 @@
                 <a:ea typeface="Calibri" pitchFamily="34" charset="-122"/>
                 <a:cs typeface="Calibri" pitchFamily="34" charset="-120"/>
               </a:rPr>
-              <a:t>AED / SQFT · CHEAPEST</a:t>
+              <a:t>AED / SQFT · PREMIUM</a:t>
             </a:r>
             <a:endParaRPr lang="en-US" sz="850" dirty="0"/>
           </a:p>
@@ -18658,7 +17797,7 @@
       </p:sp>
       <p:sp>
         <p:nvSpPr>
-          <p:cNvPr id="20" name="Shape 16"/>
+          <p:cNvPr id="16" name="Shape 12"/>
           <p:cNvSpPr/>
           <p:nvPr/>
         </p:nvSpPr>
@@ -18681,7 +17820,7 @@
       </p:sp>
       <p:sp>
         <p:nvSpPr>
-          <p:cNvPr id="21" name="Text 17"/>
+          <p:cNvPr id="17" name="Text 13"/>
           <p:cNvSpPr/>
           <p:nvPr/>
         </p:nvSpPr>
@@ -18723,7 +17862,7 @@
       </p:sp>
       <p:sp>
         <p:nvSpPr>
-          <p:cNvPr id="22" name="Text 18"/>
+          <p:cNvPr id="18" name="Text 14"/>
           <p:cNvSpPr/>
           <p:nvPr/>
         </p:nvSpPr>
@@ -18762,7 +17901,7 @@
       </p:sp>
       <p:sp>
         <p:nvSpPr>
-          <p:cNvPr id="23" name="Shape 19"/>
+          <p:cNvPr id="19" name="Shape 15"/>
           <p:cNvSpPr/>
           <p:nvPr/>
         </p:nvSpPr>
@@ -18785,7 +17924,7 @@
       </p:sp>
       <p:sp>
         <p:nvSpPr>
-          <p:cNvPr id="24" name="Text 20"/>
+          <p:cNvPr id="20" name="Text 16"/>
           <p:cNvSpPr/>
           <p:nvPr/>
         </p:nvSpPr>
@@ -18827,7 +17966,7 @@
       </p:sp>
       <p:sp>
         <p:nvSpPr>
-          <p:cNvPr id="25" name="Text 21"/>
+          <p:cNvPr id="21" name="Text 17"/>
           <p:cNvSpPr/>
           <p:nvPr/>
         </p:nvSpPr>
@@ -18866,7 +18005,7 @@
       </p:sp>
       <p:sp>
         <p:nvSpPr>
-          <p:cNvPr id="26" name="Text 22"/>
+          <p:cNvPr id="22" name="Text 18"/>
           <p:cNvSpPr/>
           <p:nvPr/>
         </p:nvSpPr>
@@ -19473,215 +18612,7 @@
       </p:sp>
       <p:sp>
         <p:nvSpPr>
-          <p:cNvPr id="8" name="Shape 6"/>
-          <p:cNvSpPr/>
-          <p:nvPr/>
-        </p:nvSpPr>
-        <p:spPr>
-          <a:xfrm>
-            <a:off x="566928" y="3017520"/>
-            <a:ext cx="2249424" cy="0"/>
-          </a:xfrm>
-          <a:prstGeom prst="line">
-            <a:avLst/>
-          </a:prstGeom>
-          <a:noFill/>
-          <a:ln w="9525">
-            <a:solidFill>
-              <a:srgbClr val="2E3A35"/>
-            </a:solidFill>
-            <a:prstDash val="solid"/>
-          </a:ln>
-        </p:spPr>
-      </p:sp>
-      <p:sp>
-        <p:nvSpPr>
-          <p:cNvPr id="9" name="Text 7"/>
-          <p:cNvSpPr/>
-          <p:nvPr/>
-        </p:nvSpPr>
-        <p:spPr>
-          <a:xfrm>
-            <a:off x="566928" y="3108960"/>
-            <a:ext cx="2249424" cy="457200"/>
-          </a:xfrm>
-          <a:prstGeom prst="rect">
-            <a:avLst/>
-          </a:prstGeom>
-          <a:noFill/>
-          <a:ln/>
-        </p:spPr>
-        <p:txBody>
-          <a:bodyPr wrap="square" lIns="0" tIns="0" rIns="0" bIns="0" rtlCol="0" anchor="ctr"/>
-          <a:lstStyle/>
-          <a:p>
-            <a:pPr indent="0" marL="0">
-              <a:buNone/>
-            </a:pPr>
-            <a:r>
-              <a:rPr lang="en-US" sz="2600" b="1" dirty="0">
-                <a:solidFill>
-                  <a:srgbClr val="3A8FBF"/>
-                </a:solidFill>
-                <a:latin typeface="Arial" pitchFamily="34" charset="0"/>
-                <a:ea typeface="Arial" pitchFamily="34" charset="-122"/>
-                <a:cs typeface="Arial" pitchFamily="34" charset="-120"/>
-              </a:rPr>
-              <a:t>4th</a:t>
-            </a:r>
-            <a:pPr indent="0" marL="0">
-              <a:buNone/>
-            </a:pPr>
-            <a:endParaRPr lang="en-US" sz="2600" dirty="0"/>
-          </a:p>
-        </p:txBody>
-      </p:sp>
-      <p:sp>
-        <p:nvSpPr>
-          <p:cNvPr id="10" name="Text 8"/>
-          <p:cNvSpPr/>
-          <p:nvPr/>
-        </p:nvSpPr>
-        <p:spPr>
-          <a:xfrm>
-            <a:off x="566928" y="3584448"/>
-            <a:ext cx="2249424" cy="237744"/>
-          </a:xfrm>
-          <a:prstGeom prst="rect">
-            <a:avLst/>
-          </a:prstGeom>
-          <a:noFill/>
-          <a:ln/>
-        </p:spPr>
-        <p:txBody>
-          <a:bodyPr wrap="square" lIns="0" tIns="0" rIns="0" bIns="0" rtlCol="0" anchor="ctr"/>
-          <a:lstStyle/>
-          <a:p>
-            <a:pPr indent="0" marL="0">
-              <a:buNone/>
-            </a:pPr>
-            <a:r>
-              <a:rPr lang="en-US" sz="850" b="1" spc="160" kern="0" dirty="0">
-                <a:solidFill>
-                  <a:srgbClr val="828C87"/>
-                </a:solidFill>
-                <a:latin typeface="Calibri" pitchFamily="34" charset="0"/>
-                <a:ea typeface="Calibri" pitchFamily="34" charset="-122"/>
-                <a:cs typeface="Calibri" pitchFamily="34" charset="-120"/>
-              </a:rPr>
-              <a:t>IN THE SERIES</a:t>
-            </a:r>
-            <a:endParaRPr lang="en-US" sz="850" dirty="0"/>
-          </a:p>
-        </p:txBody>
-      </p:sp>
-      <p:sp>
-        <p:nvSpPr>
-          <p:cNvPr id="11" name="Shape 9"/>
-          <p:cNvSpPr/>
-          <p:nvPr/>
-        </p:nvSpPr>
-        <p:spPr>
-          <a:xfrm>
-            <a:off x="3072384" y="3017520"/>
-            <a:ext cx="2249424" cy="0"/>
-          </a:xfrm>
-          <a:prstGeom prst="line">
-            <a:avLst/>
-          </a:prstGeom>
-          <a:noFill/>
-          <a:ln w="9525">
-            <a:solidFill>
-              <a:srgbClr val="2E3A35"/>
-            </a:solidFill>
-            <a:prstDash val="solid"/>
-          </a:ln>
-        </p:spPr>
-      </p:sp>
-      <p:sp>
-        <p:nvSpPr>
-          <p:cNvPr id="12" name="Text 10"/>
-          <p:cNvSpPr/>
-          <p:nvPr/>
-        </p:nvSpPr>
-        <p:spPr>
-          <a:xfrm>
-            <a:off x="3072384" y="3108960"/>
-            <a:ext cx="2249424" cy="457200"/>
-          </a:xfrm>
-          <a:prstGeom prst="rect">
-            <a:avLst/>
-          </a:prstGeom>
-          <a:noFill/>
-          <a:ln/>
-        </p:spPr>
-        <p:txBody>
-          <a:bodyPr wrap="square" lIns="0" tIns="0" rIns="0" bIns="0" rtlCol="0" anchor="ctr"/>
-          <a:lstStyle/>
-          <a:p>
-            <a:pPr indent="0" marL="0">
-              <a:buNone/>
-            </a:pPr>
-            <a:r>
-              <a:rPr lang="en-US" sz="2600" b="1" dirty="0">
-                <a:solidFill>
-                  <a:srgbClr val="3A8FBF"/>
-                </a:solidFill>
-                <a:latin typeface="Arial" pitchFamily="34" charset="0"/>
-                <a:ea typeface="Arial" pitchFamily="34" charset="-122"/>
-                <a:cs typeface="Arial" pitchFamily="34" charset="-120"/>
-              </a:rPr>
-              <a:t>99.99%</a:t>
-            </a:r>
-            <a:pPr indent="0" marL="0">
-              <a:buNone/>
-            </a:pPr>
-            <a:endParaRPr lang="en-US" sz="2600" dirty="0"/>
-          </a:p>
-        </p:txBody>
-      </p:sp>
-      <p:sp>
-        <p:nvSpPr>
-          <p:cNvPr id="13" name="Text 11"/>
-          <p:cNvSpPr/>
-          <p:nvPr/>
-        </p:nvSpPr>
-        <p:spPr>
-          <a:xfrm>
-            <a:off x="3072384" y="3584448"/>
-            <a:ext cx="2249424" cy="237744"/>
-          </a:xfrm>
-          <a:prstGeom prst="rect">
-            <a:avLst/>
-          </a:prstGeom>
-          <a:noFill/>
-          <a:ln/>
-        </p:spPr>
-        <p:txBody>
-          <a:bodyPr wrap="square" lIns="0" tIns="0" rIns="0" bIns="0" rtlCol="0" anchor="ctr"/>
-          <a:lstStyle/>
-          <a:p>
-            <a:pPr indent="0" marL="0">
-              <a:buNone/>
-            </a:pPr>
-            <a:r>
-              <a:rPr lang="en-US" sz="850" b="1" spc="160" kern="0" dirty="0">
-                <a:solidFill>
-                  <a:srgbClr val="828C87"/>
-                </a:solidFill>
-                <a:latin typeface="Calibri" pitchFamily="34" charset="0"/>
-                <a:ea typeface="Calibri" pitchFamily="34" charset="-122"/>
-                <a:cs typeface="Calibri" pitchFamily="34" charset="-120"/>
-              </a:rPr>
-              <a:t>OF ALLOWED GFA USED</a:t>
-            </a:r>
-            <a:endParaRPr lang="en-US" sz="850" dirty="0"/>
-          </a:p>
-        </p:txBody>
-      </p:sp>
-      <p:sp>
-        <p:nvSpPr>
-          <p:cNvPr id="14" name="Text 12"/>
+          <p:cNvPr id="8" name="Text 6"/>
           <p:cNvSpPr/>
           <p:nvPr/>
         </p:nvSpPr>
@@ -19757,7 +18688,7 @@
       </p:sp>
       <p:sp>
         <p:nvSpPr>
-          <p:cNvPr id="15" name="Text 13"/>
+          <p:cNvPr id="9" name="Text 7"/>
           <p:cNvSpPr/>
           <p:nvPr/>
         </p:nvSpPr>
@@ -19794,92 +18725,6 @@
               <a:t>The submitted design package is itself a confidence signal: a full climate and solar study, site accessibility and land-use analysis, verified area calculations against permitted GFA, a reconciled unit matrix and complete floor plans. Residential GFA comes in at 22,309.05 sqm against an allowed 22,311.00.</a:t>
             </a:r>
             <a:endParaRPr lang="en-US" sz="1250" dirty="0"/>
-          </a:p>
-        </p:txBody>
-      </p:sp>
-      <p:sp>
-        <p:nvSpPr>
-          <p:cNvPr id="16" name="Shape 14"/>
-          <p:cNvSpPr/>
-          <p:nvPr/>
-        </p:nvSpPr>
-        <p:spPr>
-          <a:xfrm>
-            <a:off x="5943600" y="4206240"/>
-            <a:ext cx="5650992" cy="1371600"/>
-          </a:xfrm>
-          <a:prstGeom prst="roundRect">
-            <a:avLst>
-              <a:gd name="adj" fmla="val 2000"/>
-            </a:avLst>
-          </a:prstGeom>
-          <a:solidFill>
-            <a:srgbClr val="202A26"/>
-          </a:solidFill>
-          <a:ln w="6350">
-            <a:solidFill>
-              <a:srgbClr val="2E3A35"/>
-            </a:solidFill>
-            <a:prstDash val="solid"/>
-          </a:ln>
-        </p:spPr>
-      </p:sp>
-      <p:sp>
-        <p:nvSpPr>
-          <p:cNvPr id="17" name="Text 15"/>
-          <p:cNvSpPr/>
-          <p:nvPr/>
-        </p:nvSpPr>
-        <p:spPr>
-          <a:xfrm>
-            <a:off x="6144768" y="4315968"/>
-            <a:ext cx="5248656" cy="1152144"/>
-          </a:xfrm>
-          <a:prstGeom prst="rect">
-            <a:avLst/>
-          </a:prstGeom>
-          <a:noFill/>
-          <a:ln/>
-        </p:spPr>
-        <p:txBody>
-          <a:bodyPr wrap="square" lIns="0" tIns="0" rIns="0" bIns="0" rtlCol="0" anchor="t"/>
-          <a:lstStyle/>
-          <a:p>
-            <a:pPr indent="0" marL="0">
-              <a:lnSpc>
-                <a:spcPct val="118000"/>
-              </a:lnSpc>
-              <a:buNone/>
-            </a:pPr>
-            <a:r>
-              <a:rPr lang="en-US" sz="1100" b="1" dirty="0">
-                <a:solidFill>
-                  <a:srgbClr val="F3F0E8"/>
-                </a:solidFill>
-                <a:latin typeface="Calibri" pitchFamily="34" charset="0"/>
-                <a:ea typeface="Calibri" pitchFamily="34" charset="-122"/>
-                <a:cs typeface="Calibri" pitchFamily="34" charset="-120"/>
-              </a:rPr>
-              <a:t>Be straight about what that number means. </a:t>
-            </a:r>
-            <a:pPr indent="0" marL="0">
-              <a:lnSpc>
-                <a:spcPct val="118000"/>
-              </a:lnSpc>
-              <a:buNone/>
-            </a:pPr>
-            <a:r>
-              <a:rPr lang="en-US" sz="1100" dirty="0">
-                <a:solidFill>
-                  <a:srgbClr val="A7B0AB"/>
-                </a:solidFill>
-                <a:latin typeface="Calibri" pitchFamily="34" charset="0"/>
-                <a:ea typeface="Calibri" pitchFamily="34" charset="-122"/>
-                <a:cs typeface="Calibri" pitchFamily="34" charset="-120"/>
-              </a:rPr>
-              <a:t>The developer has taken essentially every square metre the plot allows. That is efficient — and it is why there are 414 units here. Density drives the low entry price and the competition at handover. Both, not one.</a:t>
-            </a:r>
-            <a:endParaRPr lang="en-US" sz="1100" dirty="0"/>
           </a:p>
         </p:txBody>
       </p:sp>
@@ -22730,95 +21575,9 @@
                 <a:ea typeface="Calibri" pitchFamily="34" charset="-122"/>
                 <a:cs typeface="Calibri" pitchFamily="34" charset="-120"/>
               </a:rPr>
-              <a:t>One buyer, roughly AED 1M of capital, looking for an off-plan one-bedroom that earns. Three shortlisted projects that answer it in three completely different ways.</a:t>
+              <a:t>One buyer, roughly AED 1.5–2M of capital, looking for an off-plan one- or two-bedroom that earns. Three shortlisted projects that answer it in three completely different ways.</a:t>
             </a:r>
             <a:endParaRPr lang="en-US" sz="1500" dirty="0"/>
-          </a:p>
-        </p:txBody>
-      </p:sp>
-      <p:sp>
-        <p:nvSpPr>
-          <p:cNvPr id="5" name="Shape 3"/>
-          <p:cNvSpPr/>
-          <p:nvPr/>
-        </p:nvSpPr>
-        <p:spPr>
-          <a:xfrm>
-            <a:off x="566928" y="3200400"/>
-            <a:ext cx="5669280" cy="960120"/>
-          </a:xfrm>
-          <a:prstGeom prst="roundRect">
-            <a:avLst>
-              <a:gd name="adj" fmla="val 2857"/>
-            </a:avLst>
-          </a:prstGeom>
-          <a:solidFill>
-            <a:srgbClr val="202A26"/>
-          </a:solidFill>
-          <a:ln w="6350">
-            <a:solidFill>
-              <a:srgbClr val="2E3A35"/>
-            </a:solidFill>
-            <a:prstDash val="solid"/>
-          </a:ln>
-        </p:spPr>
-      </p:sp>
-      <p:sp>
-        <p:nvSpPr>
-          <p:cNvPr id="6" name="Text 4"/>
-          <p:cNvSpPr/>
-          <p:nvPr/>
-        </p:nvSpPr>
-        <p:spPr>
-          <a:xfrm>
-            <a:off x="768096" y="3310128"/>
-            <a:ext cx="5266944" cy="740664"/>
-          </a:xfrm>
-          <a:prstGeom prst="rect">
-            <a:avLst/>
-          </a:prstGeom>
-          <a:noFill/>
-          <a:ln/>
-        </p:spPr>
-        <p:txBody>
-          <a:bodyPr wrap="square" lIns="0" tIns="0" rIns="0" bIns="0" rtlCol="0" anchor="t"/>
-          <a:lstStyle/>
-          <a:p>
-            <a:pPr indent="0" marL="0">
-              <a:lnSpc>
-                <a:spcPct val="118000"/>
-              </a:lnSpc>
-              <a:buNone/>
-            </a:pPr>
-            <a:r>
-              <a:rPr lang="en-US" sz="1100" b="1" dirty="0">
-                <a:solidFill>
-                  <a:srgbClr val="F3F0E8"/>
-                </a:solidFill>
-                <a:latin typeface="Calibri" pitchFamily="34" charset="0"/>
-                <a:ea typeface="Calibri" pitchFamily="34" charset="-122"/>
-                <a:cs typeface="Calibri" pitchFamily="34" charset="-120"/>
-              </a:rPr>
-              <a:t>Edit this slide before you present. </a:t>
-            </a:r>
-            <a:pPr indent="0" marL="0">
-              <a:lnSpc>
-                <a:spcPct val="118000"/>
-              </a:lnSpc>
-              <a:buNone/>
-            </a:pPr>
-            <a:r>
-              <a:rPr lang="en-US" sz="1100" dirty="0">
-                <a:solidFill>
-                  <a:srgbClr val="A7B0AB"/>
-                </a:solidFill>
-                <a:latin typeface="Calibri" pitchFamily="34" charset="0"/>
-                <a:ea typeface="Calibri" pitchFamily="34" charset="-122"/>
-                <a:cs typeface="Calibri" pitchFamily="34" charset="-120"/>
-              </a:rPr>
-              <a:t>Replace the budget, unit type and priority order with the client's own words — the rest of the deck holds up whatever you put here.</a:t>
-            </a:r>
-            <a:endParaRPr lang="en-US" sz="1100" dirty="0"/>
           </a:p>
         </p:txBody>
       </p:sp>
@@ -23072,7 +21831,7 @@
                           <a:ea typeface="Calibri" pitchFamily="34" charset="-122"/>
                           <a:cs typeface="Calibri" pitchFamily="34" charset="-120"/>
                         </a:rPr>
-                        <a:t>≈ AED 1,000,000</a:t>
+                        <a:t>≈ AED 2,000,000</a:t>
                       </a:r>
                       <a:endParaRPr lang="en-US" sz="1100" dirty="0">
                         <a:latin typeface="Calibri" charset="0"/>
@@ -23210,7 +21969,7 @@
                           <a:ea typeface="Calibri" pitchFamily="34" charset="-122"/>
                           <a:cs typeface="Calibri" pitchFamily="34" charset="-120"/>
                         </a:rPr>
-                        <a:t>1 Bedroom</a:t>
+                        <a:t>1–2 Bedroom</a:t>
                       </a:r>
                       <a:endParaRPr lang="en-US" sz="1100" dirty="0">
                         <a:latin typeface="Calibri" charset="0"/>
@@ -23958,7 +22717,7 @@
       </p:graphicFrame>
       <p:sp>
         <p:nvSpPr>
-          <p:cNvPr id="8" name="Shape 5"/>
+          <p:cNvPr id="6" name="Shape 3"/>
           <p:cNvSpPr/>
           <p:nvPr/>
         </p:nvSpPr>
@@ -23981,7 +22740,7 @@
       </p:sp>
       <p:sp>
         <p:nvSpPr>
-          <p:cNvPr id="9" name="Text 6"/>
+          <p:cNvPr id="7" name="Text 4"/>
           <p:cNvSpPr/>
           <p:nvPr/>
         </p:nvSpPr>
@@ -24023,7 +22782,7 @@
       </p:sp>
       <p:sp>
         <p:nvSpPr>
-          <p:cNvPr id="10" name="Text 7"/>
+          <p:cNvPr id="8" name="Text 5"/>
           <p:cNvSpPr/>
           <p:nvPr/>
         </p:nvSpPr>
@@ -24062,7 +22821,7 @@
       </p:sp>
       <p:sp>
         <p:nvSpPr>
-          <p:cNvPr id="11" name="Shape 8"/>
+          <p:cNvPr id="9" name="Shape 6"/>
           <p:cNvSpPr/>
           <p:nvPr/>
         </p:nvSpPr>
@@ -24085,7 +22844,7 @@
       </p:sp>
       <p:sp>
         <p:nvSpPr>
-          <p:cNvPr id="12" name="Text 9"/>
+          <p:cNvPr id="10" name="Text 7"/>
           <p:cNvSpPr/>
           <p:nvPr/>
         </p:nvSpPr>
@@ -24127,7 +22886,7 @@
       </p:sp>
       <p:sp>
         <p:nvSpPr>
-          <p:cNvPr id="13" name="Text 10"/>
+          <p:cNvPr id="11" name="Text 8"/>
           <p:cNvSpPr/>
           <p:nvPr/>
         </p:nvSpPr>
@@ -24166,7 +22925,7 @@
       </p:sp>
       <p:sp>
         <p:nvSpPr>
-          <p:cNvPr id="14" name="Shape 11"/>
+          <p:cNvPr id="12" name="Shape 9"/>
           <p:cNvSpPr/>
           <p:nvPr/>
         </p:nvSpPr>
@@ -24189,7 +22948,7 @@
       </p:sp>
       <p:sp>
         <p:nvSpPr>
-          <p:cNvPr id="15" name="Text 12"/>
+          <p:cNvPr id="13" name="Text 10"/>
           <p:cNvSpPr/>
           <p:nvPr/>
         </p:nvSpPr>
@@ -24242,7 +23001,7 @@
       </p:sp>
       <p:sp>
         <p:nvSpPr>
-          <p:cNvPr id="16" name="Text 13"/>
+          <p:cNvPr id="14" name="Text 11"/>
           <p:cNvSpPr/>
           <p:nvPr/>
         </p:nvSpPr>
@@ -24281,7 +23040,7 @@
       </p:sp>
       <p:sp>
         <p:nvSpPr>
-          <p:cNvPr id="17" name="Text 14"/>
+          <p:cNvPr id="15" name="Text 12"/>
           <p:cNvSpPr/>
           <p:nvPr/>
         </p:nvSpPr>
@@ -24320,7 +23079,7 @@
       </p:sp>
       <p:sp>
         <p:nvSpPr>
-          <p:cNvPr id="18" name="Text 15"/>
+          <p:cNvPr id="16" name="Text 13"/>
           <p:cNvSpPr/>
           <p:nvPr/>
         </p:nvSpPr>
@@ -25310,7 +24069,7 @@
                           <a:ea typeface="Calibri" pitchFamily="34" charset="-122"/>
                           <a:cs typeface="Calibri" pitchFamily="34" charset="-120"/>
                         </a:rPr>
-                        <a:t>4,200</a:t>
+                        <a:t>5,250</a:t>
                       </a:r>
                       <a:endParaRPr lang="en-US" sz="1050" dirty="0">
                         <a:latin typeface="Calibri" charset="0"/>
@@ -25378,7 +24137,7 @@
                           <a:ea typeface="Calibri" pitchFamily="34" charset="-122"/>
                           <a:cs typeface="Calibri" pitchFamily="34" charset="-120"/>
                         </a:rPr>
-                        <a:t>€979</a:t>
+                        <a:t>€1,224</a:t>
                       </a:r>
                       <a:endParaRPr lang="en-US" sz="1050" dirty="0">
                         <a:latin typeface="Calibri" charset="0"/>
@@ -25722,7 +24481,7 @@
                           <a:ea typeface="Calibri" pitchFamily="34" charset="-122"/>
                           <a:cs typeface="Calibri" pitchFamily="34" charset="-120"/>
                         </a:rPr>
-                        <a:t>565,800</a:t>
+                        <a:t>566,850</a:t>
                       </a:r>
                       <a:endParaRPr lang="en-US" sz="1050" dirty="0">
                         <a:latin typeface="Calibri" charset="0"/>
@@ -25790,7 +24549,7 @@
                           <a:ea typeface="Calibri" pitchFamily="34" charset="-122"/>
                           <a:cs typeface="Calibri" pitchFamily="34" charset="-120"/>
                         </a:rPr>
-                        <a:t>€131,888</a:t>
+                        <a:t>€132,133</a:t>
                       </a:r>
                       <a:endParaRPr lang="en-US" sz="1050" dirty="0">
                         <a:latin typeface="Calibri" charset="0"/>
@@ -26605,7 +25364,7 @@
                           <a:ea typeface="Calibri" pitchFamily="34" charset="-122"/>
                           <a:cs typeface="Calibri" pitchFamily="34" charset="-120"/>
                         </a:rPr>
-                        <a:t>≈800,000</a:t>
+                        <a:t>≈860,000</a:t>
                       </a:r>
                       <a:endParaRPr lang="en-US" sz="1050" dirty="0">
                         <a:latin typeface="Calibri" charset="0"/>
@@ -26673,7 +25432,7 @@
                           <a:ea typeface="Calibri" pitchFamily="34" charset="-122"/>
                           <a:cs typeface="Calibri" pitchFamily="34" charset="-120"/>
                         </a:rPr>
-                        <a:t>€186,480</a:t>
+                        <a:t>€200,466</a:t>
                       </a:r>
                       <a:endParaRPr lang="en-US" sz="1050" dirty="0">
                         <a:latin typeface="Calibri" charset="0"/>
@@ -26811,7 +25570,7 @@
                           <a:ea typeface="Calibri" pitchFamily="34" charset="-122"/>
                           <a:cs typeface="Calibri" pitchFamily="34" charset="-120"/>
                         </a:rPr>
-                        <a:t>32,000</a:t>
+                        <a:t>34,400</a:t>
                       </a:r>
                       <a:endParaRPr lang="en-US" sz="1050" dirty="0">
                         <a:latin typeface="Calibri" charset="0"/>
@@ -26879,7 +25638,7 @@
                           <a:ea typeface="Calibri" pitchFamily="34" charset="-122"/>
                           <a:cs typeface="Calibri" pitchFamily="34" charset="-120"/>
                         </a:rPr>
-                        <a:t>€7,459</a:t>
+                        <a:t>€8,019</a:t>
                       </a:r>
                       <a:endParaRPr lang="en-US" sz="1050" dirty="0">
                         <a:latin typeface="Calibri" charset="0"/>
@@ -27017,7 +25776,7 @@
                           <a:ea typeface="Calibri" pitchFamily="34" charset="-122"/>
                           <a:cs typeface="Calibri" pitchFamily="34" charset="-120"/>
                         </a:rPr>
-                        <a:t>4,200</a:t>
+                        <a:t>5,250</a:t>
                       </a:r>
                       <a:endParaRPr lang="en-US" sz="1050" dirty="0">
                         <a:latin typeface="Calibri" charset="0"/>
@@ -27085,7 +25844,7 @@
                           <a:ea typeface="Calibri" pitchFamily="34" charset="-122"/>
                           <a:cs typeface="Calibri" pitchFamily="34" charset="-120"/>
                         </a:rPr>
-                        <a:t>€979</a:t>
+                        <a:t>€1,224</a:t>
                       </a:r>
                       <a:endParaRPr lang="en-US" sz="1050" dirty="0">
                         <a:latin typeface="Calibri" charset="0"/>
@@ -27223,7 +25982,7 @@
                           <a:ea typeface="Calibri" pitchFamily="34" charset="-122"/>
                           <a:cs typeface="Calibri" pitchFamily="34" charset="-120"/>
                         </a:rPr>
-                        <a:t>1,356</a:t>
+                        <a:t>1,458</a:t>
                       </a:r>
                       <a:endParaRPr lang="en-US" sz="1050" dirty="0">
                         <a:latin typeface="Calibri" charset="0"/>
@@ -27291,7 +26050,7 @@
                           <a:ea typeface="Calibri" pitchFamily="34" charset="-122"/>
                           <a:cs typeface="Calibri" pitchFamily="34" charset="-120"/>
                         </a:rPr>
-                        <a:t>€316</a:t>
+                        <a:t>€340</a:t>
                       </a:r>
                       <a:endParaRPr lang="en-US" sz="1050" dirty="0">
                         <a:latin typeface="Calibri" charset="0"/>
@@ -27429,7 +26188,7 @@
                           <a:ea typeface="Calibri" pitchFamily="34" charset="-122"/>
                           <a:cs typeface="Calibri" pitchFamily="34" charset="-120"/>
                         </a:rPr>
-                        <a:t>836,200</a:t>
+                        <a:t>899,650</a:t>
                       </a:r>
                       <a:endParaRPr lang="en-US" sz="1050" dirty="0">
                         <a:latin typeface="Calibri" charset="0"/>
@@ -27497,7 +26256,7 @@
                           <a:ea typeface="Calibri" pitchFamily="34" charset="-122"/>
                           <a:cs typeface="Calibri" pitchFamily="34" charset="-120"/>
                         </a:rPr>
-                        <a:t>€194,918</a:t>
+                        <a:t>€209,708</a:t>
                       </a:r>
                       <a:endParaRPr lang="en-US" sz="1050" dirty="0">
                         <a:latin typeface="Calibri" charset="0"/>
@@ -27841,7 +26600,7 @@
                           <a:ea typeface="Calibri" pitchFamily="34" charset="-122"/>
                           <a:cs typeface="Calibri" pitchFamily="34" charset="-120"/>
                         </a:rPr>
-                        <a:t>7.3%</a:t>
+                        <a:t>6.8%</a:t>
                       </a:r>
                       <a:endParaRPr lang="en-US" sz="1050" dirty="0">
                         <a:latin typeface="Calibri" charset="0"/>
@@ -27962,178 +26721,6 @@
         </p:nvSpPr>
         <p:spPr>
           <a:xfrm>
-            <a:off x="566928" y="3520440"/>
-            <a:ext cx="5486400" cy="1005840"/>
-          </a:xfrm>
-          <a:prstGeom prst="roundRect">
-            <a:avLst>
-              <a:gd name="adj" fmla="val 2727"/>
-            </a:avLst>
-          </a:prstGeom>
-          <a:solidFill>
-            <a:srgbClr val="202A26"/>
-          </a:solidFill>
-          <a:ln w="6350">
-            <a:solidFill>
-              <a:srgbClr val="2E3A35"/>
-            </a:solidFill>
-            <a:prstDash val="solid"/>
-          </a:ln>
-        </p:spPr>
-      </p:sp>
-      <p:sp>
-        <p:nvSpPr>
-          <p:cNvPr id="11" name="Text 7"/>
-          <p:cNvSpPr/>
-          <p:nvPr/>
-        </p:nvSpPr>
-        <p:spPr>
-          <a:xfrm>
-            <a:off x="768096" y="3630168"/>
-            <a:ext cx="5084064" cy="786384"/>
-          </a:xfrm>
-          <a:prstGeom prst="rect">
-            <a:avLst/>
-          </a:prstGeom>
-          <a:noFill/>
-          <a:ln/>
-        </p:spPr>
-        <p:txBody>
-          <a:bodyPr wrap="square" lIns="0" tIns="0" rIns="0" bIns="0" rtlCol="0" anchor="t"/>
-          <a:lstStyle/>
-          <a:p>
-            <a:pPr indent="0" marL="0">
-              <a:lnSpc>
-                <a:spcPct val="118000"/>
-              </a:lnSpc>
-              <a:buNone/>
-            </a:pPr>
-            <a:r>
-              <a:rPr lang="en-US" sz="1050" b="1" dirty="0">
-                <a:solidFill>
-                  <a:srgbClr val="E0A45C"/>
-                </a:solidFill>
-                <a:latin typeface="Calibri" pitchFamily="34" charset="0"/>
-                <a:ea typeface="Calibri" pitchFamily="34" charset="-122"/>
-                <a:cs typeface="Calibri" pitchFamily="34" charset="-120"/>
-              </a:rPr>
-              <a:t>The 1BR price is not confirmed. </a:t>
-            </a:r>
-            <a:pPr indent="0" marL="0">
-              <a:lnSpc>
-                <a:spcPct val="118000"/>
-              </a:lnSpc>
-              <a:buNone/>
-            </a:pPr>
-            <a:r>
-              <a:rPr lang="en-US" sz="1050" dirty="0">
-                <a:solidFill>
-                  <a:srgbClr val="A7B0AB"/>
-                </a:solidFill>
-                <a:latin typeface="Calibri" pitchFamily="34" charset="0"/>
-                <a:ea typeface="Calibri" pitchFamily="34" charset="-122"/>
-                <a:cs typeface="Calibri" pitchFamily="34" charset="-120"/>
-              </a:rPr>
-              <a:t>Only the AED 540,000 studio entry is published. The AED 823,000 figure online belongs to Celesto Tower — the earlier 272-unit, Q4 2027 project. Replace this column from the price list.</a:t>
-            </a:r>
-            <a:endParaRPr lang="en-US" sz="1050" dirty="0"/>
-          </a:p>
-        </p:txBody>
-      </p:sp>
-      <p:sp>
-        <p:nvSpPr>
-          <p:cNvPr id="12" name="Shape 8"/>
-          <p:cNvSpPr/>
-          <p:nvPr/>
-        </p:nvSpPr>
-        <p:spPr>
-          <a:xfrm>
-            <a:off x="6400800" y="3520440"/>
-            <a:ext cx="5193792" cy="1005840"/>
-          </a:xfrm>
-          <a:prstGeom prst="roundRect">
-            <a:avLst>
-              <a:gd name="adj" fmla="val 2727"/>
-            </a:avLst>
-          </a:prstGeom>
-          <a:solidFill>
-            <a:srgbClr val="202A26"/>
-          </a:solidFill>
-          <a:ln w="6350">
-            <a:solidFill>
-              <a:srgbClr val="2E3A35"/>
-            </a:solidFill>
-            <a:prstDash val="solid"/>
-          </a:ln>
-        </p:spPr>
-      </p:sp>
-      <p:sp>
-        <p:nvSpPr>
-          <p:cNvPr id="13" name="Text 9"/>
-          <p:cNvSpPr/>
-          <p:nvPr/>
-        </p:nvSpPr>
-        <p:spPr>
-          <a:xfrm>
-            <a:off x="6601968" y="3630168"/>
-            <a:ext cx="4791456" cy="786384"/>
-          </a:xfrm>
-          <a:prstGeom prst="rect">
-            <a:avLst/>
-          </a:prstGeom>
-          <a:noFill/>
-          <a:ln/>
-        </p:spPr>
-        <p:txBody>
-          <a:bodyPr wrap="square" lIns="0" tIns="0" rIns="0" bIns="0" rtlCol="0" anchor="t"/>
-          <a:lstStyle/>
-          <a:p>
-            <a:pPr indent="0" marL="0">
-              <a:lnSpc>
-                <a:spcPct val="118000"/>
-              </a:lnSpc>
-              <a:buNone/>
-            </a:pPr>
-            <a:r>
-              <a:rPr lang="en-US" sz="1050" b="1" dirty="0">
-                <a:solidFill>
-                  <a:srgbClr val="F3F0E8"/>
-                </a:solidFill>
-                <a:latin typeface="Calibri" pitchFamily="34" charset="0"/>
-                <a:ea typeface="Calibri" pitchFamily="34" charset="-122"/>
-                <a:cs typeface="Calibri" pitchFamily="34" charset="-120"/>
-              </a:rPr>
-              <a:t>The smallest cheque and the second-best yield. </a:t>
-            </a:r>
-            <a:pPr indent="0" marL="0">
-              <a:lnSpc>
-                <a:spcPct val="118000"/>
-              </a:lnSpc>
-              <a:buNone/>
-            </a:pPr>
-            <a:r>
-              <a:rPr lang="en-US" sz="1050" dirty="0">
-                <a:solidFill>
-                  <a:srgbClr val="A7B0AB"/>
-                </a:solidFill>
-                <a:latin typeface="Calibri" pitchFamily="34" charset="0"/>
-                <a:ea typeface="Calibri" pitchFamily="34" charset="-122"/>
-                <a:cs typeface="Calibri" pitchFamily="34" charset="-120"/>
-              </a:rPr>
-              <a:t>AED 836,200 all-in returns AED 60,920 net — 7.3%, just behind Arancia on a third less capital, and priced below Floareá per foot at AED 1,356.</a:t>
-            </a:r>
-            <a:endParaRPr lang="en-US" sz="1050" dirty="0"/>
-          </a:p>
-        </p:txBody>
-      </p:sp>
-      <p:sp>
-        <p:nvSpPr>
-          <p:cNvPr id="14" name="Shape 10"/>
-          <p:cNvSpPr/>
-          <p:nvPr/>
-        </p:nvSpPr>
-        <p:spPr>
-          <a:xfrm>
             <a:off x="566928" y="4754880"/>
             <a:ext cx="2564892" cy="0"/>
           </a:xfrm>
@@ -28151,7 +26738,7 @@
       </p:sp>
       <p:sp>
         <p:nvSpPr>
-          <p:cNvPr id="15" name="Text 11"/>
+          <p:cNvPr id="11" name="Text 7"/>
           <p:cNvSpPr/>
           <p:nvPr/>
         </p:nvSpPr>
@@ -28193,7 +26780,7 @@
       </p:sp>
       <p:sp>
         <p:nvSpPr>
-          <p:cNvPr id="16" name="Text 12"/>
+          <p:cNvPr id="12" name="Text 8"/>
           <p:cNvSpPr/>
           <p:nvPr/>
         </p:nvSpPr>
@@ -28232,7 +26819,7 @@
       </p:sp>
       <p:sp>
         <p:nvSpPr>
-          <p:cNvPr id="17" name="Shape 13"/>
+          <p:cNvPr id="13" name="Shape 9"/>
           <p:cNvSpPr/>
           <p:nvPr/>
         </p:nvSpPr>
@@ -28255,7 +26842,7 @@
       </p:sp>
       <p:sp>
         <p:nvSpPr>
-          <p:cNvPr id="18" name="Text 14"/>
+          <p:cNvPr id="14" name="Text 10"/>
           <p:cNvSpPr/>
           <p:nvPr/>
         </p:nvSpPr>
@@ -28297,7 +26884,7 @@
       </p:sp>
       <p:sp>
         <p:nvSpPr>
-          <p:cNvPr id="19" name="Text 15"/>
+          <p:cNvPr id="15" name="Text 11"/>
           <p:cNvSpPr/>
           <p:nvPr/>
         </p:nvSpPr>
@@ -28336,7 +26923,7 @@
       </p:sp>
       <p:sp>
         <p:nvSpPr>
-          <p:cNvPr id="20" name="Shape 16"/>
+          <p:cNvPr id="16" name="Shape 12"/>
           <p:cNvSpPr/>
           <p:nvPr/>
         </p:nvSpPr>
@@ -28359,7 +26946,7 @@
       </p:sp>
       <p:sp>
         <p:nvSpPr>
-          <p:cNvPr id="21" name="Text 17"/>
+          <p:cNvPr id="17" name="Text 13"/>
           <p:cNvSpPr/>
           <p:nvPr/>
         </p:nvSpPr>
@@ -28412,7 +26999,7 @@
       </p:sp>
       <p:sp>
         <p:nvSpPr>
-          <p:cNvPr id="22" name="Text 18"/>
+          <p:cNvPr id="18" name="Text 14"/>
           <p:cNvSpPr/>
           <p:nvPr/>
         </p:nvSpPr>
@@ -28451,7 +27038,7 @@
       </p:sp>
       <p:sp>
         <p:nvSpPr>
-          <p:cNvPr id="23" name="Shape 19"/>
+          <p:cNvPr id="19" name="Shape 15"/>
           <p:cNvSpPr/>
           <p:nvPr/>
         </p:nvSpPr>
@@ -28474,7 +27061,7 @@
       </p:sp>
       <p:sp>
         <p:nvSpPr>
-          <p:cNvPr id="24" name="Text 20"/>
+          <p:cNvPr id="20" name="Text 16"/>
           <p:cNvSpPr/>
           <p:nvPr/>
         </p:nvSpPr>
@@ -28527,7 +27114,7 @@
       </p:sp>
       <p:sp>
         <p:nvSpPr>
-          <p:cNvPr id="25" name="Text 21"/>
+          <p:cNvPr id="21" name="Text 17"/>
           <p:cNvSpPr/>
           <p:nvPr/>
         </p:nvSpPr>
@@ -28566,7 +27153,7 @@
       </p:sp>
       <p:sp>
         <p:nvSpPr>
-          <p:cNvPr id="26" name="Text 22"/>
+          <p:cNvPr id="22" name="Text 18"/>
           <p:cNvSpPr/>
           <p:nvPr/>
         </p:nvSpPr>
@@ -28989,7 +27576,7 @@
                 <a:ea typeface="Calibri" pitchFamily="34" charset="-122"/>
                 <a:cs typeface="Calibri" pitchFamily="34" charset="-120"/>
               </a:rPr>
-              <a:t>Highest all-in cost at AED 1.2M and the lowest yield of the three at 5.7% — second-highest rent, but on the biggest outlay</a:t>
+              <a:t>AED 1.2M all-in for the mid yield of the three at 5.7% — a size-and-timing buy more than an income buy</a:t>
             </a:r>
             <a:endParaRPr lang="en-US" sz="1050" dirty="0"/>
           </a:p>
@@ -29164,6 +27751,30 @@
         <p:txBody>
           <a:bodyPr wrap="square" lIns="0" tIns="0" rIns="0" bIns="0" rtlCol="0" anchor="t"/>
           <a:lstStyle/>
+          <a:p>
+            <a:pPr marL="342900" indent="-342900">
+              <a:lnSpc>
+                <a:spcPct val="110000"/>
+              </a:lnSpc>
+              <a:spcAft>
+                <a:spcPts val="500"/>
+              </a:spcAft>
+              <a:buSzPct val="100000"/>
+              <a:buChar char="•"/>
+            </a:pPr>
+            <a:r>
+              <a:rPr lang="en-US" sz="1050" dirty="0">
+                <a:solidFill>
+                  <a:srgbClr val="A7B0AB"/>
+                </a:solidFill>
+                <a:latin typeface="Calibri" pitchFamily="34" charset="0"/>
+                <a:ea typeface="Calibri" pitchFamily="34" charset="-122"/>
+                <a:cs typeface="Calibri" pitchFamily="34" charset="-120"/>
+              </a:rPr>
+              <a:t>At the confirmed AED 1.45M price it is the dearest per foot (1,933) and the lowest yield of the three at 5.2%</a:t>
+            </a:r>
+            <a:endParaRPr lang="en-US" sz="1050" dirty="0"/>
+          </a:p>
           <a:p>
             <a:pPr marL="342900" indent="-342900">
               <a:lnSpc>
@@ -29499,7 +28110,7 @@
                 <a:ea typeface="Calibri" pitchFamily="34" charset="-122"/>
                 <a:cs typeface="Calibri" pitchFamily="34" charset="-120"/>
               </a:rPr>
-              <a:t>The 1BR is small at 550 sqft; price per foot is not cheap</a:t>
+              <a:t>The 1BR is the smallest of the three at 590 sqft</a:t>
             </a:r>
             <a:endParaRPr lang="en-US" sz="1050" dirty="0"/>
           </a:p>
@@ -29938,7 +28549,7 @@
                 <a:ea typeface="Calibri" pitchFamily="34" charset="-122"/>
                 <a:cs typeface="Calibri" pitchFamily="34" charset="-120"/>
               </a:rPr>
-              <a:t>Q1 2028, 837 sqft, only 30% before handover. The trade is a lower yield and a 70% completion payment.</a:t>
+              <a:t>Q1 2028, 837 sqft, only 30% before handover — and the developer will talk about the price.</a:t>
             </a:r>
             <a:endParaRPr lang="en-US" sz="900" dirty="0"/>
           </a:p>
@@ -30024,7 +28635,7 @@
                 <a:ea typeface="Calibri" pitchFamily="34" charset="-122"/>
                 <a:cs typeface="Calibri" pitchFamily="34" charset="-120"/>
               </a:rPr>
-              <a:t>“I want the best income, and I can wait until 2029 for it.”</a:t>
+              <a:t>“I want the best address and the strongest rent, and I can wait until 2029.”</a:t>
             </a:r>
             <a:endParaRPr lang="en-US" sz="1300" dirty="0"/>
           </a:p>
@@ -30102,7 +28713,7 @@
                 <a:ea typeface="Calibri" pitchFamily="34" charset="-122"/>
                 <a:cs typeface="Calibri" pitchFamily="34" charset="-120"/>
               </a:rPr>
-              <a:t>The highest net return of the three at AED 78,750 a year — 7.5% — plus the cheapest land per foot.</a:t>
+              <a:t>AED 90,000 a year — the highest rent of the three — OMNIYAT's brand and the only true community. Priced for it at 1,933/sqft.</a:t>
             </a:r>
             <a:endParaRPr lang="en-US" sz="900" dirty="0"/>
           </a:p>
@@ -30188,7 +28799,7 @@
                 <a:ea typeface="Calibri" pitchFamily="34" charset="-122"/>
                 <a:cs typeface="Calibri" pitchFamily="34" charset="-120"/>
               </a:rPr>
-              <a:t>“I want the smallest cheque, paid monthly, without giving up much yield.”</a:t>
+              <a:t>“I want the smallest cheque, paid monthly, and the best yield.”</a:t>
             </a:r>
             <a:endParaRPr lang="en-US" sz="1300" dirty="0"/>
           </a:p>
@@ -30266,7 +28877,7 @@
                 <a:ea typeface="Calibri" pitchFamily="34" charset="-122"/>
                 <a:cs typeface="Calibri" pitchFamily="34" charset="-120"/>
               </a:rPr>
-              <a:t>7.3% on a third less capital than Arancia, 1% a month for 30 months, metro at one minute.</a:t>
+              <a:t>6.8% on the least capital, 1% a month for 30 months, metro at one minute.</a:t>
             </a:r>
             <a:endParaRPr lang="en-US" sz="900" dirty="0"/>
           </a:p>
@@ -30335,7 +28946,7 @@
                 <a:ea typeface="Calibri" pitchFamily="34" charset="-122"/>
                 <a:cs typeface="Calibri" pitchFamily="34" charset="-120"/>
               </a:rPr>
-              <a:t>My read, and it changed once the real Floareá numbers came in: </a:t>
+              <a:t>My read, on the confirmed prices: </a:t>
             </a:r>
             <a:pPr indent="0" marL="0">
               <a:lnSpc>
@@ -30352,7 +28963,7 @@
                 <a:ea typeface="Calibri" pitchFamily="34" charset="-122"/>
                 <a:cs typeface="Calibri" pitchFamily="34" charset="-120"/>
               </a:rPr>
-              <a:t>with the rents in, Arancia leads on income at 7.5% — AED 90,000 of rent on the cheapest land per foot. Celesto follows at 7.3% on a third less capital. Floareá trails at 5.7%: the second-highest rent, but on the biggest outlay. For space, earliest handover and least capital tied up, Floareá is still the answer — just not on yield. </a:t>
+              <a:t>yield-first, it is Celesto 4 at 6.8% on the smallest cheque. Floareá sits in the middle at 5.7% with the earliest keys and the biggest apartment. Arancia at AED 1.45M is the premium play — the strongest rent and name at 5.2%, bought for the address, not the yield. </a:t>
             </a:r>
             <a:pPr indent="0" marL="0">
               <a:lnSpc>
@@ -30369,7 +28980,7 @@
                 <a:ea typeface="Calibri" pitchFamily="34" charset="-122"/>
                 <a:cs typeface="Calibri" pitchFamily="34" charset="-120"/>
               </a:rPr>
-              <a:t>The caveat that matters: </a:t>
+              <a:t>Still open: </a:t>
             </a:r>
             <a:pPr indent="0" marL="0">
               <a:lnSpc>
@@ -30386,7 +28997,7 @@
                 <a:ea typeface="Calibri" pitchFamily="34" charset="-122"/>
                 <a:cs typeface="Calibri" pitchFamily="34" charset="-120"/>
               </a:rPr>
-              <a:t>only Floareá's numbers are confirmed. Arancia is quoted at AED 1.0M on portals and 1.1M on BEYOND's own site — at 1.1M its yield falls to 6.9%. Celesto's 1BR price is an estimate entirely.</a:t>
+              <a:t>Celesto's price is an estimate; Arancia's service charge is unpublished.</a:t>
             </a:r>
             <a:endParaRPr lang="en-US" sz="1100" dirty="0"/>
           </a:p>
@@ -31035,7 +29646,7 @@
                 <a:ea typeface="Calibri" pitchFamily="34" charset="-122"/>
                 <a:cs typeface="Calibri" pitchFamily="34" charset="-120"/>
               </a:rPr>
-              <a:t>Dubai off-plan residential</a:t>
+              <a:t>Bridges &amp; Allies Real Estate · Dubai off-plan residential</a:t>
             </a:r>
             <a:endParaRPr lang="en-US" sz="1300" dirty="0"/>
           </a:p>
@@ -31049,12 +29660,12 @@
         </p:nvSpPr>
         <p:spPr>
           <a:xfrm>
-            <a:off x="7680960" y="3749040"/>
-            <a:ext cx="3913632" cy="1097280"/>
+            <a:off x="7680960" y="3785616"/>
+            <a:ext cx="3913632" cy="402336"/>
           </a:xfrm>
           <a:prstGeom prst="roundRect">
             <a:avLst>
-              <a:gd name="adj" fmla="val 2500"/>
+              <a:gd name="adj" fmla="val 6818"/>
             </a:avLst>
           </a:prstGeom>
           <a:solidFill>
@@ -31076,8 +29687,8 @@
         </p:nvSpPr>
         <p:spPr>
           <a:xfrm>
-            <a:off x="7882128" y="3858768"/>
-            <a:ext cx="3511296" cy="877824"/>
+            <a:off x="7882128" y="3785616"/>
+            <a:ext cx="3602736" cy="402336"/>
           </a:xfrm>
           <a:prstGeom prst="rect">
             <a:avLst/>
@@ -31086,33 +29697,204 @@
           <a:ln/>
         </p:spPr>
         <p:txBody>
-          <a:bodyPr wrap="square" lIns="0" tIns="0" rIns="0" bIns="0" rtlCol="0" anchor="t"/>
+          <a:bodyPr wrap="square" lIns="0" tIns="0" rIns="0" bIns="0" rtlCol="0" anchor="ctr"/>
           <a:lstStyle/>
           <a:p>
             <a:pPr indent="0" marL="0">
-              <a:lnSpc>
-                <a:spcPct val="118000"/>
-              </a:lnSpc>
               <a:buNone/>
             </a:pPr>
             <a:r>
-              <a:rPr lang="en-US" sz="1050" dirty="0">
+              <a:rPr lang="en-US" sz="1150" dirty="0">
                 <a:solidFill>
-                  <a:srgbClr val="A7B0AB"/>
+                  <a:srgbClr val="7BE08A"/>
                 </a:solidFill>
                 <a:latin typeface="Calibri" pitchFamily="34" charset="0"/>
                 <a:ea typeface="Calibri" pitchFamily="34" charset="-122"/>
                 <a:cs typeface="Calibri" pitchFamily="34" charset="-120"/>
               </a:rPr>
-              <a:t>Add your phone, email and Instagram handle here before sending — this is the slide the client screenshots.</a:t>
+              <a:t>📞   </a:t>
             </a:r>
-            <a:endParaRPr lang="en-US" sz="1050" dirty="0"/>
+            <a:pPr indent="0" marL="0">
+              <a:buNone/>
+            </a:pPr>
+            <a:r>
+              <a:rPr lang="en-US" sz="1150" b="1" dirty="0">
+                <a:solidFill>
+                  <a:srgbClr val="F3F0E8"/>
+                </a:solidFill>
+                <a:latin typeface="Calibri" pitchFamily="34" charset="0"/>
+                <a:ea typeface="Calibri" pitchFamily="34" charset="-122"/>
+                <a:cs typeface="Calibri" pitchFamily="34" charset="-120"/>
+              </a:rPr>
+              <a:t>+971 56 164 5645</a:t>
+            </a:r>
+            <a:endParaRPr lang="en-US" sz="1150" dirty="0"/>
           </a:p>
         </p:txBody>
       </p:sp>
       <p:sp>
         <p:nvSpPr>
-          <p:cNvPr id="21" name="Text 19"/>
+          <p:cNvPr id="21" name="Shape 19"/>
+          <p:cNvSpPr/>
+          <p:nvPr/>
+        </p:nvSpPr>
+        <p:spPr>
+          <a:xfrm>
+            <a:off x="7680960" y="4261104"/>
+            <a:ext cx="3913632" cy="402336"/>
+          </a:xfrm>
+          <a:prstGeom prst="roundRect">
+            <a:avLst>
+              <a:gd name="adj" fmla="val 6818"/>
+            </a:avLst>
+          </a:prstGeom>
+          <a:solidFill>
+            <a:srgbClr val="202A26"/>
+          </a:solidFill>
+          <a:ln w="6350">
+            <a:solidFill>
+              <a:srgbClr val="2E3A35"/>
+            </a:solidFill>
+            <a:prstDash val="solid"/>
+          </a:ln>
+        </p:spPr>
+      </p:sp>
+      <p:sp>
+        <p:nvSpPr>
+          <p:cNvPr id="22" name="Text 20"/>
+          <p:cNvSpPr/>
+          <p:nvPr/>
+        </p:nvSpPr>
+        <p:spPr>
+          <a:xfrm>
+            <a:off x="7882128" y="4261104"/>
+            <a:ext cx="3602736" cy="402336"/>
+          </a:xfrm>
+          <a:prstGeom prst="rect">
+            <a:avLst/>
+          </a:prstGeom>
+          <a:noFill/>
+          <a:ln/>
+        </p:spPr>
+        <p:txBody>
+          <a:bodyPr wrap="square" lIns="0" tIns="0" rIns="0" bIns="0" rtlCol="0" anchor="ctr"/>
+          <a:lstStyle/>
+          <a:p>
+            <a:pPr indent="0" marL="0">
+              <a:buNone/>
+            </a:pPr>
+            <a:r>
+              <a:rPr lang="en-US" sz="1150" dirty="0">
+                <a:solidFill>
+                  <a:srgbClr val="7BE08A"/>
+                </a:solidFill>
+                <a:latin typeface="Calibri" pitchFamily="34" charset="0"/>
+                <a:ea typeface="Calibri" pitchFamily="34" charset="-122"/>
+                <a:cs typeface="Calibri" pitchFamily="34" charset="-120"/>
+              </a:rPr>
+              <a:t>✉   </a:t>
+            </a:r>
+            <a:pPr indent="0" marL="0">
+              <a:buNone/>
+            </a:pPr>
+            <a:r>
+              <a:rPr lang="en-US" sz="1150" b="1" dirty="0">
+                <a:solidFill>
+                  <a:srgbClr val="F3F0E8"/>
+                </a:solidFill>
+                <a:latin typeface="Calibri" pitchFamily="34" charset="0"/>
+                <a:ea typeface="Calibri" pitchFamily="34" charset="-122"/>
+                <a:cs typeface="Calibri" pitchFamily="34" charset="-120"/>
+              </a:rPr>
+              <a:t>marwan.w@bridgesandalliesre.com</a:t>
+            </a:r>
+            <a:endParaRPr lang="en-US" sz="1150" dirty="0"/>
+          </a:p>
+        </p:txBody>
+      </p:sp>
+      <p:sp>
+        <p:nvSpPr>
+          <p:cNvPr id="23" name="Shape 21"/>
+          <p:cNvSpPr/>
+          <p:nvPr/>
+        </p:nvSpPr>
+        <p:spPr>
+          <a:xfrm>
+            <a:off x="7680960" y="4736592"/>
+            <a:ext cx="3913632" cy="402336"/>
+          </a:xfrm>
+          <a:prstGeom prst="roundRect">
+            <a:avLst>
+              <a:gd name="adj" fmla="val 6818"/>
+            </a:avLst>
+          </a:prstGeom>
+          <a:solidFill>
+            <a:srgbClr val="202A26"/>
+          </a:solidFill>
+          <a:ln w="6350">
+            <a:solidFill>
+              <a:srgbClr val="2E3A35"/>
+            </a:solidFill>
+            <a:prstDash val="solid"/>
+          </a:ln>
+        </p:spPr>
+      </p:sp>
+      <p:sp>
+        <p:nvSpPr>
+          <p:cNvPr id="24" name="Text 22"/>
+          <p:cNvSpPr/>
+          <p:nvPr/>
+        </p:nvSpPr>
+        <p:spPr>
+          <a:xfrm>
+            <a:off x="7882128" y="4736592"/>
+            <a:ext cx="3602736" cy="402336"/>
+          </a:xfrm>
+          <a:prstGeom prst="rect">
+            <a:avLst/>
+          </a:prstGeom>
+          <a:noFill/>
+          <a:ln/>
+        </p:spPr>
+        <p:txBody>
+          <a:bodyPr wrap="square" lIns="0" tIns="0" rIns="0" bIns="0" rtlCol="0" anchor="ctr"/>
+          <a:lstStyle/>
+          <a:p>
+            <a:pPr indent="0" marL="0">
+              <a:buNone/>
+            </a:pPr>
+            <a:r>
+              <a:rPr lang="en-US" sz="1150" dirty="0">
+                <a:solidFill>
+                  <a:srgbClr val="7BE08A"/>
+                </a:solidFill>
+                <a:latin typeface="Calibri" pitchFamily="34" charset="0"/>
+                <a:ea typeface="Calibri" pitchFamily="34" charset="-122"/>
+                <a:cs typeface="Calibri" pitchFamily="34" charset="-120"/>
+              </a:rPr>
+              <a:t>📍   </a:t>
+            </a:r>
+            <a:pPr indent="0" marL="0">
+              <a:buNone/>
+            </a:pPr>
+            <a:r>
+              <a:rPr lang="en-US" sz="1150" b="1" dirty="0">
+                <a:solidFill>
+                  <a:srgbClr val="F3F0E8"/>
+                </a:solidFill>
+                <a:latin typeface="Calibri" pitchFamily="34" charset="0"/>
+                <a:ea typeface="Calibri" pitchFamily="34" charset="-122"/>
+                <a:cs typeface="Calibri" pitchFamily="34" charset="-120"/>
+              </a:rPr>
+              <a:t>502 Al Fattan Office Tower · JBR · Dubai</a:t>
+            </a:r>
+            <a:endParaRPr lang="en-US" sz="1150" dirty="0"/>
+          </a:p>
+        </p:txBody>
+      </p:sp>
+      <p:sp>
+        <p:nvSpPr>
+          <p:cNvPr id="25" name="Text 23"/>
           <p:cNvSpPr/>
           <p:nvPr/>
         </p:nvSpPr>
@@ -31151,7 +29933,7 @@
       </p:sp>
       <p:sp>
         <p:nvSpPr>
-          <p:cNvPr id="22" name="Text 20"/>
+          <p:cNvPr id="26" name="Text 24"/>
           <p:cNvSpPr/>
           <p:nvPr/>
         </p:nvSpPr>
@@ -31190,7 +29972,7 @@
       </p:sp>
       <p:sp>
         <p:nvSpPr>
-          <p:cNvPr id="23" name="Text 21"/>
+          <p:cNvPr id="27" name="Text 25"/>
           <p:cNvSpPr/>
           <p:nvPr/>
         </p:nvSpPr>
@@ -31224,1036 +30006,6 @@
               <a:t>All figures developer- and broker-published and subject to change. For information only — not financial advice. Verify on the current price list and SPA.</a:t>
             </a:r>
             <a:endParaRPr lang="en-US" sz="750" dirty="0"/>
-          </a:p>
-        </p:txBody>
-      </p:sp>
-    </p:spTree>
-  </p:cSld>
-  <p:clrMapOvr>
-    <a:masterClrMapping/>
-  </p:clrMapOvr>
-</p:sld>
-</file>
-
-<file path=ppt/slides/slide24.xml><?xml version="1.0" encoding="utf-8"?>
-<p:sld xmlns:a="http://schemas.openxmlformats.org/drawingml/2006/main" xmlns:r="http://schemas.openxmlformats.org/officeDocument/2006/relationships" xmlns:p="http://schemas.openxmlformats.org/presentationml/2006/main">
-  <p:cSld name="Slide 24">
-    <p:bg>
-      <p:bgPr>
-        <a:solidFill>
-          <a:srgbClr val="0F1412"/>
-        </a:solidFill>
-      </p:bgPr>
-    </p:bg>
-    <p:spTree>
-      <p:nvGrpSpPr>
-        <p:cNvPr id="1" name=""/>
-        <p:cNvGrpSpPr/>
-        <p:nvPr/>
-      </p:nvGrpSpPr>
-      <p:grpSpPr>
-        <a:xfrm>
-          <a:off x="0" y="0"/>
-          <a:ext cx="0" cy="0"/>
-          <a:chOff x="0" y="0"/>
-          <a:chExt cx="0" cy="0"/>
-        </a:xfrm>
-      </p:grpSpPr>
-      <p:sp>
-        <p:nvSpPr>
-          <p:cNvPr id="2" name="Text 0"/>
-          <p:cNvSpPr/>
-          <p:nvPr/>
-        </p:nvSpPr>
-        <p:spPr>
-          <a:xfrm>
-            <a:off x="566928" y="859536"/>
-            <a:ext cx="11027664" cy="237744"/>
-          </a:xfrm>
-          <a:prstGeom prst="rect">
-            <a:avLst/>
-          </a:prstGeom>
-          <a:noFill/>
-          <a:ln/>
-        </p:spPr>
-        <p:txBody>
-          <a:bodyPr wrap="square" lIns="0" tIns="0" rIns="0" bIns="0" rtlCol="0" anchor="ctr"/>
-          <a:lstStyle/>
-          <a:p>
-            <a:pPr indent="0" marL="0">
-              <a:buNone/>
-            </a:pPr>
-            <a:r>
-              <a:rPr lang="en-US" sz="1000" b="1" spc="260" kern="0" dirty="0">
-                <a:solidFill>
-                  <a:srgbClr val="E0A45C"/>
-                </a:solidFill>
-                <a:latin typeface="Calibri" pitchFamily="34" charset="0"/>
-                <a:ea typeface="Calibri" pitchFamily="34" charset="-122"/>
-                <a:cs typeface="Calibri" pitchFamily="34" charset="-120"/>
-              </a:rPr>
-              <a:t>INTERNAL — REMOVE BEFORE SENDING TO THE CLIENT</a:t>
-            </a:r>
-            <a:endParaRPr lang="en-US" sz="1000" dirty="0"/>
-          </a:p>
-        </p:txBody>
-      </p:sp>
-      <p:sp>
-        <p:nvSpPr>
-          <p:cNvPr id="3" name="Text 1"/>
-          <p:cNvSpPr/>
-          <p:nvPr/>
-        </p:nvSpPr>
-        <p:spPr>
-          <a:xfrm>
-            <a:off x="566928" y="1170432"/>
-            <a:ext cx="11027664" cy="749808"/>
-          </a:xfrm>
-          <a:prstGeom prst="rect">
-            <a:avLst/>
-          </a:prstGeom>
-          <a:noFill/>
-          <a:ln/>
-        </p:spPr>
-        <p:txBody>
-          <a:bodyPr wrap="square" lIns="0" tIns="0" rIns="0" bIns="0" rtlCol="0" anchor="ctr"/>
-          <a:lstStyle/>
-          <a:p>
-            <a:pPr indent="0" marL="0">
-              <a:buNone/>
-            </a:pPr>
-            <a:r>
-              <a:rPr lang="en-US" sz="3000" b="1" dirty="0">
-                <a:solidFill>
-                  <a:srgbClr val="F3F0E8"/>
-                </a:solidFill>
-                <a:latin typeface="Arial" pitchFamily="34" charset="0"/>
-                <a:ea typeface="Arial" pitchFamily="34" charset="-122"/>
-                <a:cs typeface="Arial" pitchFamily="34" charset="-120"/>
-              </a:rPr>
-              <a:t>Verify before you present</a:t>
-            </a:r>
-            <a:endParaRPr lang="en-US" sz="3000" dirty="0"/>
-          </a:p>
-        </p:txBody>
-      </p:sp>
-      <p:sp>
-        <p:nvSpPr>
-          <p:cNvPr id="4" name="Shape 2"/>
-          <p:cNvSpPr/>
-          <p:nvPr/>
-        </p:nvSpPr>
-        <p:spPr>
-          <a:xfrm>
-            <a:off x="566928" y="1975104"/>
-            <a:ext cx="3493008" cy="3200400"/>
-          </a:xfrm>
-          <a:prstGeom prst="roundRect">
-            <a:avLst>
-              <a:gd name="adj" fmla="val 857"/>
-            </a:avLst>
-          </a:prstGeom>
-          <a:solidFill>
-            <a:srgbClr val="202A26"/>
-          </a:solidFill>
-          <a:ln w="6350">
-            <a:solidFill>
-              <a:srgbClr val="2E3A35"/>
-            </a:solidFill>
-            <a:prstDash val="solid"/>
-          </a:ln>
-        </p:spPr>
-      </p:sp>
-      <p:sp>
-        <p:nvSpPr>
-          <p:cNvPr id="5" name="Shape 3"/>
-          <p:cNvSpPr/>
-          <p:nvPr/>
-        </p:nvSpPr>
-        <p:spPr>
-          <a:xfrm>
-            <a:off x="804672" y="2231136"/>
-            <a:ext cx="146304" cy="146304"/>
-          </a:xfrm>
-          <a:prstGeom prst="ellipse">
-            <a:avLst/>
-          </a:prstGeom>
-          <a:solidFill>
-            <a:srgbClr val="B04862"/>
-          </a:solidFill>
-          <a:ln/>
-        </p:spPr>
-      </p:sp>
-      <p:sp>
-        <p:nvSpPr>
-          <p:cNvPr id="6" name="Text 4"/>
-          <p:cNvSpPr/>
-          <p:nvPr/>
-        </p:nvSpPr>
-        <p:spPr>
-          <a:xfrm>
-            <a:off x="1042416" y="2157984"/>
-            <a:ext cx="2779776" cy="292608"/>
-          </a:xfrm>
-          <a:prstGeom prst="rect">
-            <a:avLst/>
-          </a:prstGeom>
-          <a:noFill/>
-          <a:ln/>
-        </p:spPr>
-        <p:txBody>
-          <a:bodyPr wrap="square" lIns="0" tIns="0" rIns="0" bIns="0" rtlCol="0" anchor="ctr"/>
-          <a:lstStyle/>
-          <a:p>
-            <a:pPr indent="0" marL="0">
-              <a:buNone/>
-            </a:pPr>
-            <a:r>
-              <a:rPr lang="en-US" sz="1500" b="1" dirty="0">
-                <a:solidFill>
-                  <a:srgbClr val="F3F0E8"/>
-                </a:solidFill>
-                <a:latin typeface="Arial" pitchFamily="34" charset="0"/>
-                <a:ea typeface="Arial" pitchFamily="34" charset="-122"/>
-                <a:cs typeface="Arial" pitchFamily="34" charset="-120"/>
-              </a:rPr>
-              <a:t>Floareá Skies</a:t>
-            </a:r>
-            <a:endParaRPr lang="en-US" sz="1500" dirty="0"/>
-          </a:p>
-        </p:txBody>
-      </p:sp>
-      <p:sp>
-        <p:nvSpPr>
-          <p:cNvPr id="7" name="Text 5"/>
-          <p:cNvSpPr/>
-          <p:nvPr/>
-        </p:nvSpPr>
-        <p:spPr>
-          <a:xfrm>
-            <a:off x="804672" y="2578608"/>
-            <a:ext cx="3017520" cy="2377440"/>
-          </a:xfrm>
-          <a:prstGeom prst="rect">
-            <a:avLst/>
-          </a:prstGeom>
-          <a:noFill/>
-          <a:ln/>
-        </p:spPr>
-        <p:txBody>
-          <a:bodyPr wrap="square" lIns="0" tIns="0" rIns="0" bIns="0" rtlCol="0" anchor="t"/>
-          <a:lstStyle/>
-          <a:p>
-            <a:pPr marL="342900" indent="-342900">
-              <a:lnSpc>
-                <a:spcPct val="110000"/>
-              </a:lnSpc>
-              <a:spcAft>
-                <a:spcPts val="500"/>
-              </a:spcAft>
-              <a:buSzPct val="100000"/>
-              <a:buChar char="•"/>
-            </a:pPr>
-            <a:r>
-              <a:rPr lang="en-US" sz="1050" dirty="0">
-                <a:solidFill>
-                  <a:srgbClr val="A7B0AB"/>
-                </a:solidFill>
-                <a:latin typeface="Calibri" pitchFamily="34" charset="0"/>
-                <a:ea typeface="Calibri" pitchFamily="34" charset="-122"/>
-                <a:cs typeface="Calibri" pitchFamily="34" charset="-120"/>
-              </a:rPr>
-              <a:t>1 BR now confirmed from sales offer FS 611 — price, size, plan, fees, Q1 2028</a:t>
-            </a:r>
-            <a:endParaRPr lang="en-US" sz="1050" dirty="0"/>
-          </a:p>
-          <a:p>
-            <a:pPr marL="342900" indent="-342900">
-              <a:lnSpc>
-                <a:spcPct val="110000"/>
-              </a:lnSpc>
-              <a:spcAft>
-                <a:spcPts val="500"/>
-              </a:spcAft>
-              <a:buSzPct val="100000"/>
-              <a:buChar char="•"/>
-            </a:pPr>
-            <a:r>
-              <a:rPr lang="en-US" sz="1050" dirty="0">
-                <a:solidFill>
-                  <a:srgbClr val="A7B0AB"/>
-                </a:solidFill>
-                <a:latin typeface="Calibri" pitchFamily="34" charset="0"/>
-                <a:ea typeface="Calibri" pitchFamily="34" charset="-122"/>
-                <a:cs typeface="Calibri" pitchFamily="34" charset="-120"/>
-              </a:rPr>
-              <a:t>2 BR price list and sizes — needed</a:t>
-            </a:r>
-            <a:endParaRPr lang="en-US" sz="1050" dirty="0"/>
-          </a:p>
-          <a:p>
-            <a:pPr marL="342900" indent="-342900">
-              <a:lnSpc>
-                <a:spcPct val="110000"/>
-              </a:lnSpc>
-              <a:spcAft>
-                <a:spcPts val="500"/>
-              </a:spcAft>
-              <a:buSzPct val="100000"/>
-              <a:buChar char="•"/>
-            </a:pPr>
-            <a:r>
-              <a:rPr lang="en-US" sz="1050" dirty="0">
-                <a:solidFill>
-                  <a:srgbClr val="A7B0AB"/>
-                </a:solidFill>
-                <a:latin typeface="Calibri" pitchFamily="34" charset="0"/>
-                <a:ea typeface="Calibri" pitchFamily="34" charset="-122"/>
-                <a:cs typeface="Calibri" pitchFamily="34" charset="-120"/>
-              </a:rPr>
-              <a:t>Service charge AED 15/sqft published, rent confirmed at 80k — 1 BR fully evidenced</a:t>
-            </a:r>
-            <a:endParaRPr lang="en-US" sz="1050" dirty="0"/>
-          </a:p>
-          <a:p>
-            <a:pPr marL="342900" indent="-342900">
-              <a:lnSpc>
-                <a:spcPct val="110000"/>
-              </a:lnSpc>
-              <a:spcAft>
-                <a:spcPts val="500"/>
-              </a:spcAft>
-              <a:buSzPct val="100000"/>
-              <a:buChar char="•"/>
-            </a:pPr>
-            <a:r>
-              <a:rPr lang="en-US" sz="1050" dirty="0">
-                <a:solidFill>
-                  <a:srgbClr val="A7B0AB"/>
-                </a:solidFill>
-                <a:latin typeface="Calibri" pitchFamily="34" charset="0"/>
-                <a:ea typeface="Calibri" pitchFamily="34" charset="-122"/>
-                <a:cs typeface="Calibri" pitchFamily="34" charset="-120"/>
-              </a:rPr>
-              <a:t>Total unit count (192?) — not in the brochure</a:t>
-            </a:r>
-            <a:endParaRPr lang="en-US" sz="1050" dirty="0"/>
-          </a:p>
-          <a:p>
-            <a:pPr marL="342900" indent="-342900">
-              <a:lnSpc>
-                <a:spcPct val="110000"/>
-              </a:lnSpc>
-              <a:spcAft>
-                <a:spcPts val="500"/>
-              </a:spcAft>
-              <a:buSzPct val="100000"/>
-              <a:buChar char="•"/>
-            </a:pPr>
-            <a:r>
-              <a:rPr lang="en-US" sz="1050" dirty="0">
-                <a:solidFill>
-                  <a:srgbClr val="A7B0AB"/>
-                </a:solidFill>
-                <a:latin typeface="Calibri" pitchFamily="34" charset="0"/>
-                <a:ea typeface="Calibri" pitchFamily="34" charset="-122"/>
-                <a:cs typeface="Calibri" pitchFamily="34" charset="-120"/>
-              </a:rPr>
-              <a:t>Kitchen spec — blank on the deliverables sheet</a:t>
-            </a:r>
-            <a:endParaRPr lang="en-US" sz="1050" dirty="0"/>
-          </a:p>
-          <a:p>
-            <a:pPr marL="342900" indent="-342900">
-              <a:lnSpc>
-                <a:spcPct val="110000"/>
-              </a:lnSpc>
-              <a:spcAft>
-                <a:spcPts val="500"/>
-              </a:spcAft>
-              <a:buSzPct val="100000"/>
-              <a:buChar char="•"/>
-            </a:pPr>
-            <a:r>
-              <a:rPr lang="en-US" sz="1050" dirty="0">
-                <a:solidFill>
-                  <a:srgbClr val="A7B0AB"/>
-                </a:solidFill>
-                <a:latin typeface="Calibri" pitchFamily="34" charset="0"/>
-                <a:ea typeface="Calibri" pitchFamily="34" charset="-122"/>
-                <a:cs typeface="Calibri" pitchFamily="34" charset="-120"/>
-              </a:rPr>
-              <a:t>Is FS 611 still available, or an indicative unit?</a:t>
-            </a:r>
-            <a:endParaRPr lang="en-US" sz="1050" dirty="0"/>
-          </a:p>
-        </p:txBody>
-      </p:sp>
-      <p:sp>
-        <p:nvSpPr>
-          <p:cNvPr id="8" name="Shape 6"/>
-          <p:cNvSpPr/>
-          <p:nvPr/>
-        </p:nvSpPr>
-        <p:spPr>
-          <a:xfrm>
-            <a:off x="4334256" y="1975104"/>
-            <a:ext cx="3493008" cy="3200400"/>
-          </a:xfrm>
-          <a:prstGeom prst="roundRect">
-            <a:avLst>
-              <a:gd name="adj" fmla="val 857"/>
-            </a:avLst>
-          </a:prstGeom>
-          <a:solidFill>
-            <a:srgbClr val="202A26"/>
-          </a:solidFill>
-          <a:ln w="6350">
-            <a:solidFill>
-              <a:srgbClr val="2E3A35"/>
-            </a:solidFill>
-            <a:prstDash val="solid"/>
-          </a:ln>
-        </p:spPr>
-      </p:sp>
-      <p:sp>
-        <p:nvSpPr>
-          <p:cNvPr id="9" name="Shape 7"/>
-          <p:cNvSpPr/>
-          <p:nvPr/>
-        </p:nvSpPr>
-        <p:spPr>
-          <a:xfrm>
-            <a:off x="4572000" y="2231136"/>
-            <a:ext cx="146304" cy="146304"/>
-          </a:xfrm>
-          <a:prstGeom prst="ellipse">
-            <a:avLst/>
-          </a:prstGeom>
-          <a:solidFill>
-            <a:srgbClr val="B08A25"/>
-          </a:solidFill>
-          <a:ln/>
-        </p:spPr>
-      </p:sp>
-      <p:sp>
-        <p:nvSpPr>
-          <p:cNvPr id="10" name="Text 8"/>
-          <p:cNvSpPr/>
-          <p:nvPr/>
-        </p:nvSpPr>
-        <p:spPr>
-          <a:xfrm>
-            <a:off x="4809744" y="2157984"/>
-            <a:ext cx="2779776" cy="292608"/>
-          </a:xfrm>
-          <a:prstGeom prst="rect">
-            <a:avLst/>
-          </a:prstGeom>
-          <a:noFill/>
-          <a:ln/>
-        </p:spPr>
-        <p:txBody>
-          <a:bodyPr wrap="square" lIns="0" tIns="0" rIns="0" bIns="0" rtlCol="0" anchor="ctr"/>
-          <a:lstStyle/>
-          <a:p>
-            <a:pPr indent="0" marL="0">
-              <a:buNone/>
-            </a:pPr>
-            <a:r>
-              <a:rPr lang="en-US" sz="1500" b="1" dirty="0">
-                <a:solidFill>
-                  <a:srgbClr val="F3F0E8"/>
-                </a:solidFill>
-                <a:latin typeface="Arial" pitchFamily="34" charset="0"/>
-                <a:ea typeface="Arial" pitchFamily="34" charset="-122"/>
-                <a:cs typeface="Arial" pitchFamily="34" charset="-120"/>
-              </a:rPr>
-              <a:t>Arancia</a:t>
-            </a:r>
-            <a:endParaRPr lang="en-US" sz="1500" dirty="0"/>
-          </a:p>
-        </p:txBody>
-      </p:sp>
-      <p:sp>
-        <p:nvSpPr>
-          <p:cNvPr id="11" name="Text 9"/>
-          <p:cNvSpPr/>
-          <p:nvPr/>
-        </p:nvSpPr>
-        <p:spPr>
-          <a:xfrm>
-            <a:off x="4572000" y="2578608"/>
-            <a:ext cx="3017520" cy="2377440"/>
-          </a:xfrm>
-          <a:prstGeom prst="rect">
-            <a:avLst/>
-          </a:prstGeom>
-          <a:noFill/>
-          <a:ln/>
-        </p:spPr>
-        <p:txBody>
-          <a:bodyPr wrap="square" lIns="0" tIns="0" rIns="0" bIns="0" rtlCol="0" anchor="t"/>
-          <a:lstStyle/>
-          <a:p>
-            <a:pPr marL="342900" indent="-342900">
-              <a:lnSpc>
-                <a:spcPct val="110000"/>
-              </a:lnSpc>
-              <a:spcAft>
-                <a:spcPts val="500"/>
-              </a:spcAft>
-              <a:buSzPct val="100000"/>
-              <a:buChar char="•"/>
-            </a:pPr>
-            <a:r>
-              <a:rPr lang="en-US" sz="1050" dirty="0">
-                <a:solidFill>
-                  <a:srgbClr val="A7B0AB"/>
-                </a:solidFill>
-                <a:latin typeface="Calibri" pitchFamily="34" charset="0"/>
-                <a:ea typeface="Calibri" pitchFamily="34" charset="-122"/>
-                <a:cs typeface="Calibri" pitchFamily="34" charset="-120"/>
-              </a:rPr>
-              <a:t>Service charge — the only one unpublished. At AED 25 the yield drops to ~6.8%</a:t>
-            </a:r>
-            <a:endParaRPr lang="en-US" sz="1050" dirty="0"/>
-          </a:p>
-          <a:p>
-            <a:pPr marL="342900" indent="-342900">
-              <a:lnSpc>
-                <a:spcPct val="110000"/>
-              </a:lnSpc>
-              <a:spcAft>
-                <a:spcPts val="500"/>
-              </a:spcAft>
-              <a:buSzPct val="100000"/>
-              <a:buChar char="•"/>
-            </a:pPr>
-            <a:r>
-              <a:rPr lang="en-US" sz="1050" dirty="0">
-                <a:solidFill>
-                  <a:srgbClr val="A7B0AB"/>
-                </a:solidFill>
-                <a:latin typeface="Calibri" pitchFamily="34" charset="0"/>
-                <a:ea typeface="Calibri" pitchFamily="34" charset="-122"/>
-                <a:cs typeface="Calibri" pitchFamily="34" charset="-120"/>
-              </a:rPr>
-              <a:t>2 BR: confirm the AED 2.1M and get sizes per unit type</a:t>
-            </a:r>
-            <a:endParaRPr lang="en-US" sz="1050" dirty="0"/>
-          </a:p>
-          <a:p>
-            <a:pPr marL="342900" indent="-342900">
-              <a:lnSpc>
-                <a:spcPct val="110000"/>
-              </a:lnSpc>
-              <a:spcAft>
-                <a:spcPts val="500"/>
-              </a:spcAft>
-              <a:buSzPct val="100000"/>
-              <a:buChar char="•"/>
-            </a:pPr>
-            <a:r>
-              <a:rPr lang="en-US" sz="1050" dirty="0">
-                <a:solidFill>
-                  <a:srgbClr val="A7B0AB"/>
-                </a:solidFill>
-                <a:latin typeface="Calibri" pitchFamily="34" charset="0"/>
-                <a:ea typeface="Calibri" pitchFamily="34" charset="-122"/>
-                <a:cs typeface="Calibri" pitchFamily="34" charset="-120"/>
-              </a:rPr>
-              <a:t>1BR entry: AED 1.0M on portals vs 1.1M on BEYOND's own site</a:t>
-            </a:r>
-            <a:endParaRPr lang="en-US" sz="1050" dirty="0"/>
-          </a:p>
-          <a:p>
-            <a:pPr marL="342900" indent="-342900">
-              <a:lnSpc>
-                <a:spcPct val="110000"/>
-              </a:lnSpc>
-              <a:spcAft>
-                <a:spcPts val="500"/>
-              </a:spcAft>
-              <a:buSzPct val="100000"/>
-              <a:buChar char="•"/>
-            </a:pPr>
-            <a:r>
-              <a:rPr lang="en-US" sz="1050" dirty="0">
-                <a:solidFill>
-                  <a:srgbClr val="A7B0AB"/>
-                </a:solidFill>
-                <a:latin typeface="Calibri" pitchFamily="34" charset="0"/>
-                <a:ea typeface="Calibri" pitchFamily="34" charset="-122"/>
-                <a:cs typeface="Calibri" pitchFamily="34" charset="-120"/>
-              </a:rPr>
-              <a:t>Drive times to Dubai Mall and DXB — unverified, so omitted</a:t>
-            </a:r>
-            <a:endParaRPr lang="en-US" sz="1050" dirty="0"/>
-          </a:p>
-          <a:p>
-            <a:pPr marL="342900" indent="-342900">
-              <a:lnSpc>
-                <a:spcPct val="110000"/>
-              </a:lnSpc>
-              <a:spcAft>
-                <a:spcPts val="500"/>
-              </a:spcAft>
-              <a:buSzPct val="100000"/>
-              <a:buChar char="•"/>
-            </a:pPr>
-            <a:r>
-              <a:rPr lang="en-US" sz="1050" dirty="0">
-                <a:solidFill>
-                  <a:srgbClr val="A7B0AB"/>
-                </a:solidFill>
-                <a:latin typeface="Calibri" pitchFamily="34" charset="0"/>
-                <a:ea typeface="Calibri" pitchFamily="34" charset="-122"/>
-                <a:cs typeface="Calibri" pitchFamily="34" charset="-120"/>
-              </a:rPr>
-              <a:t>Handover quarter: Q1 2029 dominant, Q2 2029 also cited</a:t>
-            </a:r>
-            <a:endParaRPr lang="en-US" sz="1050" dirty="0"/>
-          </a:p>
-          <a:p>
-            <a:pPr marL="342900" indent="-342900">
-              <a:lnSpc>
-                <a:spcPct val="110000"/>
-              </a:lnSpc>
-              <a:spcAft>
-                <a:spcPts val="500"/>
-              </a:spcAft>
-              <a:buSzPct val="100000"/>
-              <a:buChar char="•"/>
-            </a:pPr>
-            <a:r>
-              <a:rPr lang="en-US" sz="1050" dirty="0">
-                <a:solidFill>
-                  <a:srgbClr val="A7B0AB"/>
-                </a:solidFill>
-                <a:latin typeface="Calibri" pitchFamily="34" charset="0"/>
-                <a:ea typeface="Calibri" pitchFamily="34" charset="-122"/>
-                <a:cs typeface="Calibri" pitchFamily="34" charset="-120"/>
-              </a:rPr>
-              <a:t>Spelling — it is Arancia, not Anarcia</a:t>
-            </a:r>
-            <a:endParaRPr lang="en-US" sz="1050" dirty="0"/>
-          </a:p>
-        </p:txBody>
-      </p:sp>
-      <p:sp>
-        <p:nvSpPr>
-          <p:cNvPr id="12" name="Shape 10"/>
-          <p:cNvSpPr/>
-          <p:nvPr/>
-        </p:nvSpPr>
-        <p:spPr>
-          <a:xfrm>
-            <a:off x="8101584" y="1975104"/>
-            <a:ext cx="3493008" cy="3200400"/>
-          </a:xfrm>
-          <a:prstGeom prst="roundRect">
-            <a:avLst>
-              <a:gd name="adj" fmla="val 857"/>
-            </a:avLst>
-          </a:prstGeom>
-          <a:solidFill>
-            <a:srgbClr val="202A26"/>
-          </a:solidFill>
-          <a:ln w="6350">
-            <a:solidFill>
-              <a:srgbClr val="2E3A35"/>
-            </a:solidFill>
-            <a:prstDash val="solid"/>
-          </a:ln>
-        </p:spPr>
-      </p:sp>
-      <p:sp>
-        <p:nvSpPr>
-          <p:cNvPr id="13" name="Shape 11"/>
-          <p:cNvSpPr/>
-          <p:nvPr/>
-        </p:nvSpPr>
-        <p:spPr>
-          <a:xfrm>
-            <a:off x="8339328" y="2231136"/>
-            <a:ext cx="146304" cy="146304"/>
-          </a:xfrm>
-          <a:prstGeom prst="ellipse">
-            <a:avLst/>
-          </a:prstGeom>
-          <a:solidFill>
-            <a:srgbClr val="3A8FBF"/>
-          </a:solidFill>
-          <a:ln/>
-        </p:spPr>
-      </p:sp>
-      <p:sp>
-        <p:nvSpPr>
-          <p:cNvPr id="14" name="Text 12"/>
-          <p:cNvSpPr/>
-          <p:nvPr/>
-        </p:nvSpPr>
-        <p:spPr>
-          <a:xfrm>
-            <a:off x="8577072" y="2157984"/>
-            <a:ext cx="2779776" cy="292608"/>
-          </a:xfrm>
-          <a:prstGeom prst="rect">
-            <a:avLst/>
-          </a:prstGeom>
-          <a:noFill/>
-          <a:ln/>
-        </p:spPr>
-        <p:txBody>
-          <a:bodyPr wrap="square" lIns="0" tIns="0" rIns="0" bIns="0" rtlCol="0" anchor="ctr"/>
-          <a:lstStyle/>
-          <a:p>
-            <a:pPr indent="0" marL="0">
-              <a:buNone/>
-            </a:pPr>
-            <a:r>
-              <a:rPr lang="en-US" sz="1500" b="1" dirty="0">
-                <a:solidFill>
-                  <a:srgbClr val="F3F0E8"/>
-                </a:solidFill>
-                <a:latin typeface="Arial" pitchFamily="34" charset="0"/>
-                <a:ea typeface="Arial" pitchFamily="34" charset="-122"/>
-                <a:cs typeface="Arial" pitchFamily="34" charset="-120"/>
-              </a:rPr>
-              <a:t>Celesto Tower 4</a:t>
-            </a:r>
-            <a:endParaRPr lang="en-US" sz="1500" dirty="0"/>
-          </a:p>
-        </p:txBody>
-      </p:sp>
-      <p:sp>
-        <p:nvSpPr>
-          <p:cNvPr id="15" name="Text 13"/>
-          <p:cNvSpPr/>
-          <p:nvPr/>
-        </p:nvSpPr>
-        <p:spPr>
-          <a:xfrm>
-            <a:off x="8339328" y="2578608"/>
-            <a:ext cx="3017520" cy="2377440"/>
-          </a:xfrm>
-          <a:prstGeom prst="rect">
-            <a:avLst/>
-          </a:prstGeom>
-          <a:noFill/>
-          <a:ln/>
-        </p:spPr>
-        <p:txBody>
-          <a:bodyPr wrap="square" lIns="0" tIns="0" rIns="0" bIns="0" rtlCol="0" anchor="t"/>
-          <a:lstStyle/>
-          <a:p>
-            <a:pPr marL="342900" indent="-342900">
-              <a:lnSpc>
-                <a:spcPct val="110000"/>
-              </a:lnSpc>
-              <a:spcAft>
-                <a:spcPts val="500"/>
-              </a:spcAft>
-              <a:buSzPct val="100000"/>
-              <a:buChar char="•"/>
-            </a:pPr>
-            <a:r>
-              <a:rPr lang="en-US" sz="1050" dirty="0">
-                <a:solidFill>
-                  <a:srgbClr val="A7B0AB"/>
-                </a:solidFill>
-                <a:latin typeface="Calibri" pitchFamily="34" charset="0"/>
-                <a:ea typeface="Calibri" pitchFamily="34" charset="-122"/>
-                <a:cs typeface="Calibri" pitchFamily="34" charset="-120"/>
-              </a:rPr>
-              <a:t>1BR price list — still the blocker (2BR confirmed at 1.32M)</a:t>
-            </a:r>
-            <a:endParaRPr lang="en-US" sz="1050" dirty="0"/>
-          </a:p>
-          <a:p>
-            <a:pPr marL="342900" indent="-342900">
-              <a:lnSpc>
-                <a:spcPct val="110000"/>
-              </a:lnSpc>
-              <a:spcAft>
-                <a:spcPts val="500"/>
-              </a:spcAft>
-              <a:buSzPct val="100000"/>
-              <a:buChar char="•"/>
-            </a:pPr>
-            <a:r>
-              <a:rPr lang="en-US" sz="1050" dirty="0">
-                <a:solidFill>
-                  <a:srgbClr val="A7B0AB"/>
-                </a:solidFill>
-                <a:latin typeface="Calibri" pitchFamily="34" charset="0"/>
-                <a:ea typeface="Calibri" pitchFamily="34" charset="-122"/>
-                <a:cs typeface="Calibri" pitchFamily="34" charset="-120"/>
-              </a:rPr>
-              <a:t>Service charge — AED 12/sqft is Celesto Tower's rate; confirm for Celesto 4</a:t>
-            </a:r>
-            <a:endParaRPr lang="en-US" sz="1050" dirty="0"/>
-          </a:p>
-          <a:p>
-            <a:pPr marL="342900" indent="-342900">
-              <a:lnSpc>
-                <a:spcPct val="110000"/>
-              </a:lnSpc>
-              <a:spcAft>
-                <a:spcPts val="500"/>
-              </a:spcAft>
-              <a:buSzPct val="100000"/>
-              <a:buChar char="•"/>
-            </a:pPr>
-            <a:r>
-              <a:rPr lang="en-US" sz="1050" dirty="0">
-                <a:solidFill>
-                  <a:srgbClr val="A7B0AB"/>
-                </a:solidFill>
-                <a:latin typeface="Calibri" pitchFamily="34" charset="0"/>
-                <a:ea typeface="Calibri" pitchFamily="34" charset="-122"/>
-                <a:cs typeface="Calibri" pitchFamily="34" charset="-120"/>
-              </a:rPr>
-              <a:t>Is the 4% DLD payable or waived? AED 32k of difference</a:t>
-            </a:r>
-            <a:endParaRPr lang="en-US" sz="1050" dirty="0"/>
-          </a:p>
-          <a:p>
-            <a:pPr marL="342900" indent="-342900">
-              <a:lnSpc>
-                <a:spcPct val="110000"/>
-              </a:lnSpc>
-              <a:spcAft>
-                <a:spcPts val="500"/>
-              </a:spcAft>
-              <a:buSzPct val="100000"/>
-              <a:buChar char="•"/>
-            </a:pPr>
-            <a:r>
-              <a:rPr lang="en-US" sz="1050" dirty="0">
-                <a:solidFill>
-                  <a:srgbClr val="A7B0AB"/>
-                </a:solidFill>
-                <a:latin typeface="Calibri" pitchFamily="34" charset="0"/>
-                <a:ea typeface="Calibri" pitchFamily="34" charset="-122"/>
-                <a:cs typeface="Calibri" pitchFamily="34" charset="-120"/>
-              </a:rPr>
-              <a:t>Al Tarrad's delivery record on Celesto 1–3</a:t>
-            </a:r>
-            <a:endParaRPr lang="en-US" sz="1050" dirty="0"/>
-          </a:p>
-          <a:p>
-            <a:pPr marL="342900" indent="-342900">
-              <a:lnSpc>
-                <a:spcPct val="110000"/>
-              </a:lnSpc>
-              <a:spcAft>
-                <a:spcPts val="500"/>
-              </a:spcAft>
-              <a:buSzPct val="100000"/>
-              <a:buChar char="•"/>
-            </a:pPr>
-            <a:r>
-              <a:rPr lang="en-US" sz="1050" dirty="0">
-                <a:solidFill>
-                  <a:srgbClr val="A7B0AB"/>
-                </a:solidFill>
-                <a:latin typeface="Calibri" pitchFamily="34" charset="0"/>
-                <a:ea typeface="Calibri" pitchFamily="34" charset="-122"/>
-                <a:cs typeface="Calibri" pitchFamily="34" charset="-120"/>
-              </a:rPr>
-              <a:t>Escrow and RERA/DDA registration</a:t>
-            </a:r>
-            <a:endParaRPr lang="en-US" sz="1050" dirty="0"/>
-          </a:p>
-          <a:p>
-            <a:pPr marL="342900" indent="-342900">
-              <a:lnSpc>
-                <a:spcPct val="110000"/>
-              </a:lnSpc>
-              <a:spcAft>
-                <a:spcPts val="500"/>
-              </a:spcAft>
-              <a:buSzPct val="100000"/>
-              <a:buChar char="•"/>
-            </a:pPr>
-            <a:r>
-              <a:rPr lang="en-US" sz="1050" dirty="0">
-                <a:solidFill>
-                  <a:srgbClr val="A7B0AB"/>
-                </a:solidFill>
-                <a:latin typeface="Calibri" pitchFamily="34" charset="0"/>
-                <a:ea typeface="Calibri" pitchFamily="34" charset="-122"/>
-                <a:cs typeface="Calibri" pitchFamily="34" charset="-120"/>
-              </a:rPr>
-              <a:t>Confirm 21 residential floors — one portal says 20</a:t>
-            </a:r>
-            <a:endParaRPr lang="en-US" sz="1050" dirty="0"/>
-          </a:p>
-        </p:txBody>
-      </p:sp>
-      <p:sp>
-        <p:nvSpPr>
-          <p:cNvPr id="16" name="Shape 14"/>
-          <p:cNvSpPr/>
-          <p:nvPr/>
-        </p:nvSpPr>
-        <p:spPr>
-          <a:xfrm>
-            <a:off x="566928" y="5358384"/>
-            <a:ext cx="11027664" cy="749808"/>
-          </a:xfrm>
-          <a:prstGeom prst="roundRect">
-            <a:avLst>
-              <a:gd name="adj" fmla="val 3659"/>
-            </a:avLst>
-          </a:prstGeom>
-          <a:solidFill>
-            <a:srgbClr val="202A26"/>
-          </a:solidFill>
-          <a:ln w="6350">
-            <a:solidFill>
-              <a:srgbClr val="2E3A35"/>
-            </a:solidFill>
-            <a:prstDash val="solid"/>
-          </a:ln>
-        </p:spPr>
-      </p:sp>
-      <p:sp>
-        <p:nvSpPr>
-          <p:cNvPr id="17" name="Text 15"/>
-          <p:cNvSpPr/>
-          <p:nvPr/>
-        </p:nvSpPr>
-        <p:spPr>
-          <a:xfrm>
-            <a:off x="768096" y="5468112"/>
-            <a:ext cx="10625328" cy="530352"/>
-          </a:xfrm>
-          <a:prstGeom prst="rect">
-            <a:avLst/>
-          </a:prstGeom>
-          <a:noFill/>
-          <a:ln/>
-        </p:spPr>
-        <p:txBody>
-          <a:bodyPr wrap="square" lIns="0" tIns="0" rIns="0" bIns="0" rtlCol="0" anchor="t"/>
-          <a:lstStyle/>
-          <a:p>
-            <a:pPr indent="0" marL="0">
-              <a:lnSpc>
-                <a:spcPct val="118000"/>
-              </a:lnSpc>
-              <a:buNone/>
-            </a:pPr>
-            <a:r>
-              <a:rPr lang="en-US" sz="1100" b="1" dirty="0">
-                <a:solidFill>
-                  <a:srgbClr val="F3F0E8"/>
-                </a:solidFill>
-                <a:latin typeface="Calibri" pitchFamily="34" charset="0"/>
-                <a:ea typeface="Calibri" pitchFamily="34" charset="-122"/>
-                <a:cs typeface="Calibri" pitchFamily="34" charset="-120"/>
-              </a:rPr>
-              <a:t>Common to all three: get the service charge in writing. </a:t>
-            </a:r>
-            <a:pPr indent="0" marL="0">
-              <a:lnSpc>
-                <a:spcPct val="118000"/>
-              </a:lnSpc>
-              <a:buNone/>
-            </a:pPr>
-            <a:r>
-              <a:rPr lang="en-US" sz="1100" dirty="0">
-                <a:solidFill>
-                  <a:srgbClr val="A7B0AB"/>
-                </a:solidFill>
-                <a:latin typeface="Calibri" pitchFamily="34" charset="0"/>
-                <a:ea typeface="Calibri" pitchFamily="34" charset="-122"/>
-                <a:cs typeface="Calibri" pitchFamily="34" charset="-120"/>
-              </a:rPr>
-              <a:t>It is unpublished for every one of them and moves net yield 0.7–1.0 points — enough to reorder the comparison table on slide 3.</a:t>
-            </a:r>
-            <a:endParaRPr lang="en-US" sz="1100" dirty="0"/>
-          </a:p>
-        </p:txBody>
-      </p:sp>
-      <p:sp>
-        <p:nvSpPr>
-          <p:cNvPr id="18" name="Text 16"/>
-          <p:cNvSpPr/>
-          <p:nvPr/>
-        </p:nvSpPr>
-        <p:spPr>
-          <a:xfrm>
-            <a:off x="566928" y="6291072"/>
-            <a:ext cx="3657600" cy="274320"/>
-          </a:xfrm>
-          <a:prstGeom prst="rect">
-            <a:avLst/>
-          </a:prstGeom>
-          <a:noFill/>
-          <a:ln/>
-        </p:spPr>
-        <p:txBody>
-          <a:bodyPr wrap="square" lIns="0" tIns="0" rIns="0" bIns="0" rtlCol="0" anchor="ctr"/>
-          <a:lstStyle/>
-          <a:p>
-            <a:pPr indent="0" marL="0">
-              <a:buNone/>
-            </a:pPr>
-            <a:r>
-              <a:rPr lang="en-US" sz="950" dirty="0">
-                <a:solidFill>
-                  <a:srgbClr val="828C87"/>
-                </a:solidFill>
-                <a:latin typeface="Calibri" pitchFamily="34" charset="0"/>
-                <a:ea typeface="Calibri" pitchFamily="34" charset="-122"/>
-                <a:cs typeface="Calibri" pitchFamily="34" charset="-120"/>
-              </a:rPr>
-              <a:t>Marwan Wareth</a:t>
-            </a:r>
-            <a:endParaRPr lang="en-US" sz="950" dirty="0"/>
-          </a:p>
-        </p:txBody>
-      </p:sp>
-      <p:sp>
-        <p:nvSpPr>
-          <p:cNvPr id="19" name="Text 17"/>
-          <p:cNvSpPr/>
-          <p:nvPr/>
-        </p:nvSpPr>
-        <p:spPr>
-          <a:xfrm>
-            <a:off x="10680192" y="6291072"/>
-            <a:ext cx="914400" cy="274320"/>
-          </a:xfrm>
-          <a:prstGeom prst="rect">
-            <a:avLst/>
-          </a:prstGeom>
-          <a:noFill/>
-          <a:ln/>
-        </p:spPr>
-        <p:txBody>
-          <a:bodyPr wrap="square" lIns="0" tIns="0" rIns="0" bIns="0" rtlCol="0" anchor="ctr"/>
-          <a:lstStyle/>
-          <a:p>
-            <a:pPr algn="r" indent="0" marL="0">
-              <a:buNone/>
-            </a:pPr>
-            <a:r>
-              <a:rPr lang="en-US" sz="950" dirty="0">
-                <a:solidFill>
-                  <a:srgbClr val="828C87"/>
-                </a:solidFill>
-                <a:latin typeface="Calibri" pitchFamily="34" charset="0"/>
-                <a:ea typeface="Calibri" pitchFamily="34" charset="-122"/>
-                <a:cs typeface="Calibri" pitchFamily="34" charset="-120"/>
-              </a:rPr>
-              <a:t>24</a:t>
-            </a:r>
-            <a:endParaRPr lang="en-US" sz="950" dirty="0"/>
           </a:p>
         </p:txBody>
       </p:sp>
@@ -34125,7 +31877,7 @@
                           <a:ea typeface="Calibri" pitchFamily="34" charset="-122"/>
                           <a:cs typeface="Calibri" pitchFamily="34" charset="-120"/>
                         </a:rPr>
-                        <a:t>AED 1,204,360</a:t>
+                        <a:t>AED 1,204,160</a:t>
                       </a:r>
                       <a:endParaRPr lang="en-US" sz="1050" dirty="0">
                         <a:latin typeface="Calibri" charset="0"/>
@@ -34193,7 +31945,7 @@
                           <a:ea typeface="Calibri" pitchFamily="34" charset="-122"/>
                           <a:cs typeface="Calibri" pitchFamily="34" charset="-120"/>
                         </a:rPr>
-                        <a:t>AED 1,044,200</a:t>
+                        <a:t>AED 1,513,250</a:t>
                       </a:r>
                       <a:endParaRPr lang="en-US" sz="1050" dirty="0">
                         <a:latin typeface="Calibri" charset="0"/>
@@ -34261,7 +32013,7 @@
                           <a:ea typeface="Calibri" pitchFamily="34" charset="-122"/>
                           <a:cs typeface="Calibri" pitchFamily="34" charset="-120"/>
                         </a:rPr>
-                        <a:t>AED 836,200  est</a:t>
+                        <a:t>AED 899,650  est</a:t>
                       </a:r>
                       <a:endParaRPr lang="en-US" sz="1050" dirty="0">
                         <a:latin typeface="Calibri" charset="0"/>
@@ -34309,280 +32061,6 @@
                     </a:lnB>
                     <a:solidFill>
                       <a:srgbClr val="1B2320"/>
-                    </a:solidFill>
-                  </a:tcPr>
-                </a:tc>
-              </a:tr>
-              <a:tr h="265176">
-                <a:tc>
-                  <a:txBody>
-                    <a:bodyPr/>
-                    <a:lstStyle/>
-                    <a:p>
-                      <a:pPr algn="l" indent="0" marL="0">
-                        <a:buNone/>
-                      </a:pPr>
-                      <a:r>
-                        <a:rPr lang="en-US" sz="1050" dirty="0">
-                          <a:solidFill>
-                            <a:srgbClr val="A7B0AB"/>
-                          </a:solidFill>
-                          <a:latin typeface="Calibri" pitchFamily="34" charset="0"/>
-                          <a:ea typeface="Calibri" pitchFamily="34" charset="-122"/>
-                          <a:cs typeface="Calibri" pitchFamily="34" charset="-120"/>
-                        </a:rPr>
-                        <a:t>Net rental yield</a:t>
-                      </a:r>
-                      <a:endParaRPr lang="en-US" sz="1050" dirty="0">
-                        <a:latin typeface="Calibri" charset="0"/>
-                        <a:ea typeface="Calibri" charset="0"/>
-                        <a:cs typeface="Calibri" charset="0"/>
-                      </a:endParaRPr>
-                    </a:p>
-                  </a:txBody>
-                  <a:tcPr marL="82296" marR="82296" marT="36576" marB="36576" anchor="ctr">
-                    <a:lnL w="6350" cap="flat" cmpd="sng" algn="ctr">
-                      <a:solidFill>
-                        <a:srgbClr val="2E3A35"/>
-                      </a:solidFill>
-                      <a:prstDash val="solid"/>
-                      <a:round/>
-                      <a:headEnd type="none" w="med" len="med"/>
-                      <a:tailEnd type="none" w="med" len="med"/>
-                    </a:lnL>
-                    <a:lnR w="6350" cap="flat" cmpd="sng" algn="ctr">
-                      <a:solidFill>
-                        <a:srgbClr val="2E3A35"/>
-                      </a:solidFill>
-                      <a:prstDash val="solid"/>
-                      <a:round/>
-                      <a:headEnd type="none" w="med" len="med"/>
-                      <a:tailEnd type="none" w="med" len="med"/>
-                    </a:lnR>
-                    <a:lnT w="6350" cap="flat" cmpd="sng" algn="ctr">
-                      <a:solidFill>
-                        <a:srgbClr val="2E3A35"/>
-                      </a:solidFill>
-                      <a:prstDash val="solid"/>
-                      <a:round/>
-                      <a:headEnd type="none" w="med" len="med"/>
-                      <a:tailEnd type="none" w="med" len="med"/>
-                    </a:lnT>
-                    <a:lnB w="6350" cap="flat" cmpd="sng" algn="ctr">
-                      <a:solidFill>
-                        <a:srgbClr val="2E3A35"/>
-                      </a:solidFill>
-                      <a:prstDash val="solid"/>
-                      <a:round/>
-                      <a:headEnd type="none" w="med" len="med"/>
-                      <a:tailEnd type="none" w="med" len="med"/>
-                    </a:lnB>
-                    <a:solidFill>
-                      <a:srgbClr val="171E1B"/>
-                    </a:solidFill>
-                  </a:tcPr>
-                </a:tc>
-                <a:tc>
-                  <a:txBody>
-                    <a:bodyPr/>
-                    <a:lstStyle/>
-                    <a:p>
-                      <a:pPr algn="r" indent="0" marL="0">
-                        <a:buNone/>
-                      </a:pPr>
-                      <a:r>
-                        <a:rPr lang="en-US" sz="1050" dirty="0">
-                          <a:solidFill>
-                            <a:srgbClr val="F3F0E8"/>
-                          </a:solidFill>
-                          <a:latin typeface="Calibri" pitchFamily="34" charset="0"/>
-                          <a:ea typeface="Calibri" pitchFamily="34" charset="-122"/>
-                          <a:cs typeface="Calibri" pitchFamily="34" charset="-120"/>
-                        </a:rPr>
-                        <a:t>5.7%</a:t>
-                      </a:r>
-                      <a:endParaRPr lang="en-US" sz="1050" dirty="0">
-                        <a:latin typeface="Calibri" charset="0"/>
-                        <a:ea typeface="Calibri" charset="0"/>
-                        <a:cs typeface="Calibri" charset="0"/>
-                      </a:endParaRPr>
-                    </a:p>
-                  </a:txBody>
-                  <a:tcPr marL="82296" marR="82296" marT="36576" marB="36576" anchor="ctr">
-                    <a:lnL w="6350" cap="flat" cmpd="sng" algn="ctr">
-                      <a:solidFill>
-                        <a:srgbClr val="2E3A35"/>
-                      </a:solidFill>
-                      <a:prstDash val="solid"/>
-                      <a:round/>
-                      <a:headEnd type="none" w="med" len="med"/>
-                      <a:tailEnd type="none" w="med" len="med"/>
-                    </a:lnL>
-                    <a:lnR w="6350" cap="flat" cmpd="sng" algn="ctr">
-                      <a:solidFill>
-                        <a:srgbClr val="2E3A35"/>
-                      </a:solidFill>
-                      <a:prstDash val="solid"/>
-                      <a:round/>
-                      <a:headEnd type="none" w="med" len="med"/>
-                      <a:tailEnd type="none" w="med" len="med"/>
-                    </a:lnR>
-                    <a:lnT w="6350" cap="flat" cmpd="sng" algn="ctr">
-                      <a:solidFill>
-                        <a:srgbClr val="2E3A35"/>
-                      </a:solidFill>
-                      <a:prstDash val="solid"/>
-                      <a:round/>
-                      <a:headEnd type="none" w="med" len="med"/>
-                      <a:tailEnd type="none" w="med" len="med"/>
-                    </a:lnT>
-                    <a:lnB w="6350" cap="flat" cmpd="sng" algn="ctr">
-                      <a:solidFill>
-                        <a:srgbClr val="2E3A35"/>
-                      </a:solidFill>
-                      <a:prstDash val="solid"/>
-                      <a:round/>
-                      <a:headEnd type="none" w="med" len="med"/>
-                      <a:tailEnd type="none" w="med" len="med"/>
-                    </a:lnB>
-                    <a:solidFill>
-                      <a:srgbClr val="171E1B"/>
-                    </a:solidFill>
-                  </a:tcPr>
-                </a:tc>
-                <a:tc>
-                  <a:txBody>
-                    <a:bodyPr/>
-                    <a:lstStyle/>
-                    <a:p>
-                      <a:pPr algn="r" indent="0" marL="0">
-                        <a:buNone/>
-                      </a:pPr>
-                      <a:r>
-                        <a:rPr lang="en-US" sz="1050" b="1" dirty="0">
-                          <a:solidFill>
-                            <a:srgbClr val="7BE08A"/>
-                          </a:solidFill>
-                          <a:latin typeface="Calibri" pitchFamily="34" charset="0"/>
-                          <a:ea typeface="Calibri" pitchFamily="34" charset="-122"/>
-                          <a:cs typeface="Calibri" pitchFamily="34" charset="-120"/>
-                        </a:rPr>
-                        <a:t>7.5%</a:t>
-                      </a:r>
-                      <a:endParaRPr lang="en-US" sz="1050" dirty="0">
-                        <a:latin typeface="Calibri" charset="0"/>
-                        <a:ea typeface="Calibri" charset="0"/>
-                        <a:cs typeface="Calibri" charset="0"/>
-                      </a:endParaRPr>
-                    </a:p>
-                  </a:txBody>
-                  <a:tcPr marL="82296" marR="82296" marT="36576" marB="36576" anchor="ctr">
-                    <a:lnL w="6350" cap="flat" cmpd="sng" algn="ctr">
-                      <a:solidFill>
-                        <a:srgbClr val="2E3A35"/>
-                      </a:solidFill>
-                      <a:prstDash val="solid"/>
-                      <a:round/>
-                      <a:headEnd type="none" w="med" len="med"/>
-                      <a:tailEnd type="none" w="med" len="med"/>
-                    </a:lnL>
-                    <a:lnR w="6350" cap="flat" cmpd="sng" algn="ctr">
-                      <a:solidFill>
-                        <a:srgbClr val="2E3A35"/>
-                      </a:solidFill>
-                      <a:prstDash val="solid"/>
-                      <a:round/>
-                      <a:headEnd type="none" w="med" len="med"/>
-                      <a:tailEnd type="none" w="med" len="med"/>
-                    </a:lnR>
-                    <a:lnT w="6350" cap="flat" cmpd="sng" algn="ctr">
-                      <a:solidFill>
-                        <a:srgbClr val="2E3A35"/>
-                      </a:solidFill>
-                      <a:prstDash val="solid"/>
-                      <a:round/>
-                      <a:headEnd type="none" w="med" len="med"/>
-                      <a:tailEnd type="none" w="med" len="med"/>
-                    </a:lnT>
-                    <a:lnB w="6350" cap="flat" cmpd="sng" algn="ctr">
-                      <a:solidFill>
-                        <a:srgbClr val="2E3A35"/>
-                      </a:solidFill>
-                      <a:prstDash val="solid"/>
-                      <a:round/>
-                      <a:headEnd type="none" w="med" len="med"/>
-                      <a:tailEnd type="none" w="med" len="med"/>
-                    </a:lnB>
-                    <a:solidFill>
-                      <a:srgbClr val="171E1B"/>
-                    </a:solidFill>
-                  </a:tcPr>
-                </a:tc>
-                <a:tc>
-                  <a:txBody>
-                    <a:bodyPr/>
-                    <a:lstStyle/>
-                    <a:p>
-                      <a:pPr algn="r" indent="0" marL="0">
-                        <a:buNone/>
-                      </a:pPr>
-                      <a:r>
-                        <a:rPr lang="en-US" sz="1050" dirty="0">
-                          <a:solidFill>
-                            <a:srgbClr val="F3F0E8"/>
-                          </a:solidFill>
-                          <a:latin typeface="Calibri" pitchFamily="34" charset="0"/>
-                          <a:ea typeface="Calibri" pitchFamily="34" charset="-122"/>
-                          <a:cs typeface="Calibri" pitchFamily="34" charset="-120"/>
-                        </a:rPr>
-                        <a:t>7.3%  est</a:t>
-                      </a:r>
-                      <a:endParaRPr lang="en-US" sz="1050" dirty="0">
-                        <a:latin typeface="Calibri" charset="0"/>
-                        <a:ea typeface="Calibri" charset="0"/>
-                        <a:cs typeface="Calibri" charset="0"/>
-                      </a:endParaRPr>
-                    </a:p>
-                  </a:txBody>
-                  <a:tcPr marL="82296" marR="82296" marT="36576" marB="36576" anchor="ctr">
-                    <a:lnL w="6350" cap="flat" cmpd="sng" algn="ctr">
-                      <a:solidFill>
-                        <a:srgbClr val="2E3A35"/>
-                      </a:solidFill>
-                      <a:prstDash val="solid"/>
-                      <a:round/>
-                      <a:headEnd type="none" w="med" len="med"/>
-                      <a:tailEnd type="none" w="med" len="med"/>
-                    </a:lnL>
-                    <a:lnR w="6350" cap="flat" cmpd="sng" algn="ctr">
-                      <a:solidFill>
-                        <a:srgbClr val="2E3A35"/>
-                      </a:solidFill>
-                      <a:prstDash val="solid"/>
-                      <a:round/>
-                      <a:headEnd type="none" w="med" len="med"/>
-                      <a:tailEnd type="none" w="med" len="med"/>
-                    </a:lnR>
-                    <a:lnT w="6350" cap="flat" cmpd="sng" algn="ctr">
-                      <a:solidFill>
-                        <a:srgbClr val="2E3A35"/>
-                      </a:solidFill>
-                      <a:prstDash val="solid"/>
-                      <a:round/>
-                      <a:headEnd type="none" w="med" len="med"/>
-                      <a:tailEnd type="none" w="med" len="med"/>
-                    </a:lnT>
-                    <a:lnB w="6350" cap="flat" cmpd="sng" algn="ctr">
-                      <a:solidFill>
-                        <a:srgbClr val="2E3A35"/>
-                      </a:solidFill>
-                      <a:prstDash val="solid"/>
-                      <a:round/>
-                      <a:headEnd type="none" w="med" len="med"/>
-                      <a:tailEnd type="none" w="med" len="med"/>
-                    </a:lnB>
-                    <a:solidFill>
-                      <a:srgbClr val="171E1B"/>
                     </a:solidFill>
                   </a:tcPr>
                 </a:tc>
@@ -34652,7 +32130,7 @@
                       <a:tailEnd type="none" w="med" len="med"/>
                     </a:lnB>
                     <a:solidFill>
-                      <a:srgbClr val="1B2320"/>
+                      <a:srgbClr val="171E1B"/>
                     </a:solidFill>
                   </a:tcPr>
                 </a:tc>
@@ -34720,7 +32198,7 @@
                       <a:tailEnd type="none" w="med" len="med"/>
                     </a:lnB>
                     <a:solidFill>
-                      <a:srgbClr val="1B2320"/>
+                      <a:srgbClr val="171E1B"/>
                     </a:solidFill>
                   </a:tcPr>
                 </a:tc>
@@ -34788,7 +32266,7 @@
                       <a:tailEnd type="none" w="med" len="med"/>
                     </a:lnB>
                     <a:solidFill>
-                      <a:srgbClr val="1B2320"/>
+                      <a:srgbClr val="171E1B"/>
                     </a:solidFill>
                   </a:tcPr>
                 </a:tc>
@@ -34856,7 +32334,7 @@
                       <a:tailEnd type="none" w="med" len="med"/>
                     </a:lnB>
                     <a:solidFill>
-                      <a:srgbClr val="1B2320"/>
+                      <a:srgbClr val="171E1B"/>
                     </a:solidFill>
                   </a:tcPr>
                 </a:tc>
@@ -34926,7 +32404,7 @@
                       <a:tailEnd type="none" w="med" len="med"/>
                     </a:lnB>
                     <a:solidFill>
-                      <a:srgbClr val="171E1B"/>
+                      <a:srgbClr val="1B2320"/>
                     </a:solidFill>
                   </a:tcPr>
                 </a:tc>
@@ -34994,7 +32472,7 @@
                       <a:tailEnd type="none" w="med" len="med"/>
                     </a:lnB>
                     <a:solidFill>
-                      <a:srgbClr val="171E1B"/>
+                      <a:srgbClr val="1B2320"/>
                     </a:solidFill>
                   </a:tcPr>
                 </a:tc>
@@ -35062,7 +32540,7 @@
                       <a:tailEnd type="none" w="med" len="med"/>
                     </a:lnB>
                     <a:solidFill>
-                      <a:srgbClr val="171E1B"/>
+                      <a:srgbClr val="1B2320"/>
                     </a:solidFill>
                   </a:tcPr>
                 </a:tc>
@@ -35083,7 +32561,7 @@
                           <a:ea typeface="Calibri" pitchFamily="34" charset="-122"/>
                           <a:cs typeface="Calibri" pitchFamily="34" charset="-120"/>
                         </a:rPr>
-                        <a:t>To confirm</a:t>
+                        <a:t>Payable</a:t>
                       </a:r>
                       <a:endParaRPr lang="en-US" sz="1050" dirty="0">
                         <a:latin typeface="Calibri" charset="0"/>
@@ -35130,7 +32608,7 @@
                       <a:tailEnd type="none" w="med" len="med"/>
                     </a:lnB>
                     <a:solidFill>
-                      <a:srgbClr val="171E1B"/>
+                      <a:srgbClr val="1B2320"/>
                     </a:solidFill>
                   </a:tcPr>
                 </a:tc>
@@ -35200,7 +32678,7 @@
                       <a:tailEnd type="none" w="med" len="med"/>
                     </a:lnB>
                     <a:solidFill>
-                      <a:srgbClr val="1B2320"/>
+                      <a:srgbClr val="171E1B"/>
                     </a:solidFill>
                   </a:tcPr>
                 </a:tc>
@@ -35268,7 +32746,7 @@
                       <a:tailEnd type="none" w="med" len="med"/>
                     </a:lnB>
                     <a:solidFill>
-                      <a:srgbClr val="1B2320"/>
+                      <a:srgbClr val="171E1B"/>
                     </a:solidFill>
                   </a:tcPr>
                 </a:tc>
@@ -35336,7 +32814,7 @@
                       <a:tailEnd type="none" w="med" len="med"/>
                     </a:lnB>
                     <a:solidFill>
-                      <a:srgbClr val="1B2320"/>
+                      <a:srgbClr val="171E1B"/>
                     </a:solidFill>
                   </a:tcPr>
                 </a:tc>
@@ -35404,7 +32882,7 @@
                       <a:tailEnd type="none" w="med" len="med"/>
                     </a:lnB>
                     <a:solidFill>
-                      <a:srgbClr val="1B2320"/>
+                      <a:srgbClr val="171E1B"/>
                     </a:solidFill>
                   </a:tcPr>
                 </a:tc>
@@ -35474,7 +32952,7 @@
                       <a:tailEnd type="none" w="med" len="med"/>
                     </a:lnB>
                     <a:solidFill>
-                      <a:srgbClr val="171E1B"/>
+                      <a:srgbClr val="1B2320"/>
                     </a:solidFill>
                   </a:tcPr>
                 </a:tc>
@@ -35542,7 +33020,7 @@
                       <a:tailEnd type="none" w="med" len="med"/>
                     </a:lnB>
                     <a:solidFill>
-                      <a:srgbClr val="171E1B"/>
+                      <a:srgbClr val="1B2320"/>
                     </a:solidFill>
                   </a:tcPr>
                 </a:tc>
@@ -35563,7 +33041,7 @@
                           <a:ea typeface="Calibri" pitchFamily="34" charset="-122"/>
                           <a:cs typeface="Calibri" pitchFamily="34" charset="-120"/>
                         </a:rPr>
-                        <a:t>—</a:t>
+                        <a:t>Yellow Line, future</a:t>
                       </a:r>
                       <a:endParaRPr lang="en-US" sz="1050" dirty="0">
                         <a:latin typeface="Calibri" charset="0"/>
@@ -35610,7 +33088,7 @@
                       <a:tailEnd type="none" w="med" len="med"/>
                     </a:lnB>
                     <a:solidFill>
-                      <a:srgbClr val="171E1B"/>
+                      <a:srgbClr val="1B2320"/>
                     </a:solidFill>
                   </a:tcPr>
                 </a:tc>
@@ -35631,7 +33109,7 @@
                           <a:ea typeface="Calibri" pitchFamily="34" charset="-122"/>
                           <a:cs typeface="Calibri" pitchFamily="34" charset="-120"/>
                         </a:rPr>
-                        <a:t>Blue Line, 1 min</a:t>
+                        <a:t>Blue Line, 1 min, future</a:t>
                       </a:r>
                       <a:endParaRPr lang="en-US" sz="1050" dirty="0">
                         <a:latin typeface="Calibri" charset="0"/>
@@ -35678,7 +33156,7 @@
                       <a:tailEnd type="none" w="med" len="med"/>
                     </a:lnB>
                     <a:solidFill>
-                      <a:srgbClr val="171E1B"/>
+                      <a:srgbClr val="1B2320"/>
                     </a:solidFill>
                   </a:tcPr>
                 </a:tc>
@@ -35748,7 +33226,7 @@
                       <a:tailEnd type="none" w="med" len="med"/>
                     </a:lnB>
                     <a:solidFill>
-                      <a:srgbClr val="1B2320"/>
+                      <a:srgbClr val="171E1B"/>
                     </a:solidFill>
                   </a:tcPr>
                 </a:tc>
@@ -35816,7 +33294,7 @@
                       <a:tailEnd type="none" w="med" len="med"/>
                     </a:lnB>
                     <a:solidFill>
-                      <a:srgbClr val="1B2320"/>
+                      <a:srgbClr val="171E1B"/>
                     </a:solidFill>
                   </a:tcPr>
                 </a:tc>
@@ -35837,7 +33315,7 @@
                           <a:ea typeface="Calibri" pitchFamily="34" charset="-122"/>
                           <a:cs typeface="Calibri" pitchFamily="34" charset="-120"/>
                         </a:rPr>
-                        <a:t>To confirm</a:t>
+                        <a:t>23 min</a:t>
                       </a:r>
                       <a:endParaRPr lang="en-US" sz="1050" dirty="0">
                         <a:latin typeface="Calibri" charset="0"/>
@@ -35884,7 +33362,7 @@
                       <a:tailEnd type="none" w="med" len="med"/>
                     </a:lnB>
                     <a:solidFill>
-                      <a:srgbClr val="1B2320"/>
+                      <a:srgbClr val="171E1B"/>
                     </a:solidFill>
                   </a:tcPr>
                 </a:tc>
@@ -35952,7 +33430,7 @@
                       <a:tailEnd type="none" w="med" len="med"/>
                     </a:lnB>
                     <a:solidFill>
-                      <a:srgbClr val="1B2320"/>
+                      <a:srgbClr val="171E1B"/>
                     </a:solidFill>
                   </a:tcPr>
                 </a:tc>
@@ -36561,7 +34039,7 @@
                           <a:ea typeface="Calibri" pitchFamily="34" charset="-122"/>
                           <a:cs typeface="Calibri" pitchFamily="34" charset="-120"/>
                         </a:rPr>
-                        <a:t>Unit price</a:t>
+                        <a:t>Starting unit price</a:t>
                       </a:r>
                       <a:endParaRPr lang="en-US" sz="1000" dirty="0">
                         <a:latin typeface="Calibri" charset="0"/>
@@ -36629,7 +34107,7 @@
                           <a:ea typeface="Calibri" pitchFamily="34" charset="-122"/>
                           <a:cs typeface="Calibri" pitchFamily="34" charset="-120"/>
                         </a:rPr>
-                        <a:t>1,154,000</a:t>
+                        <a:t>1,154,000  (discount possible)</a:t>
                       </a:r>
                       <a:endParaRPr lang="en-US" sz="1000" dirty="0">
                         <a:latin typeface="Calibri" charset="0"/>
@@ -36697,7 +34175,7 @@
                           <a:ea typeface="Calibri" pitchFamily="34" charset="-122"/>
                           <a:cs typeface="Calibri" pitchFamily="34" charset="-120"/>
                         </a:rPr>
-                        <a:t>1,000,000</a:t>
+                        <a:t>1,450,000</a:t>
                       </a:r>
                       <a:endParaRPr lang="en-US" sz="1000" dirty="0">
                         <a:latin typeface="Calibri" charset="0"/>
@@ -36765,7 +34243,7 @@
                           <a:ea typeface="Calibri" pitchFamily="34" charset="-122"/>
                           <a:cs typeface="Calibri" pitchFamily="34" charset="-120"/>
                         </a:rPr>
-                        <a:t>800,000  est</a:t>
+                        <a:t>860,000  est</a:t>
                       </a:r>
                       <a:endParaRPr lang="en-US" sz="1000" dirty="0">
                         <a:latin typeface="Calibri" charset="0"/>
@@ -36971,7 +34449,7 @@
                           <a:ea typeface="Calibri" pitchFamily="34" charset="-122"/>
                           <a:cs typeface="Calibri" pitchFamily="34" charset="-120"/>
                         </a:rPr>
-                        <a:t>40,000</a:t>
+                        <a:t>58,000</a:t>
                       </a:r>
                       <a:endParaRPr lang="en-US" sz="1000" dirty="0">
                         <a:latin typeface="Calibri" charset="0"/>
@@ -37039,7 +34517,7 @@
                           <a:ea typeface="Calibri" pitchFamily="34" charset="-122"/>
                           <a:cs typeface="Calibri" pitchFamily="34" charset="-120"/>
                         </a:rPr>
-                        <a:t>32,000</a:t>
+                        <a:t>34,400</a:t>
                       </a:r>
                       <a:endParaRPr lang="en-US" sz="1000" dirty="0">
                         <a:latin typeface="Calibri" charset="0"/>
@@ -37177,7 +34655,7 @@
                           <a:ea typeface="Calibri" pitchFamily="34" charset="-122"/>
                           <a:cs typeface="Calibri" pitchFamily="34" charset="-120"/>
                         </a:rPr>
-                        <a:t>4,200</a:t>
+                        <a:t>4,000</a:t>
                       </a:r>
                       <a:endParaRPr lang="en-US" sz="1000" dirty="0">
                         <a:latin typeface="Calibri" charset="0"/>
@@ -37245,7 +34723,7 @@
                           <a:ea typeface="Calibri" pitchFamily="34" charset="-122"/>
                           <a:cs typeface="Calibri" pitchFamily="34" charset="-120"/>
                         </a:rPr>
-                        <a:t>4,200</a:t>
+                        <a:t>5,250</a:t>
                       </a:r>
                       <a:endParaRPr lang="en-US" sz="1000" dirty="0">
                         <a:latin typeface="Calibri" charset="0"/>
@@ -37313,7 +34791,7 @@
                           <a:ea typeface="Calibri" pitchFamily="34" charset="-122"/>
                           <a:cs typeface="Calibri" pitchFamily="34" charset="-120"/>
                         </a:rPr>
-                        <a:t>4,200</a:t>
+                        <a:t>5,250</a:t>
                       </a:r>
                       <a:endParaRPr lang="en-US" sz="1000" dirty="0">
                         <a:latin typeface="Calibri" charset="0"/>
@@ -37451,7 +34929,7 @@
                           <a:ea typeface="Calibri" pitchFamily="34" charset="-122"/>
                           <a:cs typeface="Calibri" pitchFamily="34" charset="-120"/>
                         </a:rPr>
-                        <a:t>1,204,360</a:t>
+                        <a:t>1,204,160</a:t>
                       </a:r>
                       <a:endParaRPr lang="en-US" sz="1000" dirty="0">
                         <a:latin typeface="Calibri" charset="0"/>
@@ -37519,7 +34997,7 @@
                           <a:ea typeface="Calibri" pitchFamily="34" charset="-122"/>
                           <a:cs typeface="Calibri" pitchFamily="34" charset="-120"/>
                         </a:rPr>
-                        <a:t>1,044,200</a:t>
+                        <a:t>1,513,250</a:t>
                       </a:r>
                       <a:endParaRPr lang="en-US" sz="1000" dirty="0">
                         <a:latin typeface="Calibri" charset="0"/>
@@ -37587,7 +35065,7 @@
                           <a:ea typeface="Calibri" pitchFamily="34" charset="-122"/>
                           <a:cs typeface="Calibri" pitchFamily="34" charset="-120"/>
                         </a:rPr>
-                        <a:t>836,200</a:t>
+                        <a:t>899,650</a:t>
                       </a:r>
                       <a:endParaRPr lang="en-US" sz="1000" dirty="0">
                         <a:latin typeface="Calibri" charset="0"/>
@@ -37725,7 +35203,7 @@
                           <a:ea typeface="Calibri" pitchFamily="34" charset="-122"/>
                           <a:cs typeface="Calibri" pitchFamily="34" charset="-120"/>
                         </a:rPr>
-                        <a:t>€280,737</a:t>
+                        <a:t>€280,690</a:t>
                       </a:r>
                       <a:endParaRPr lang="en-US" sz="1000" dirty="0">
                         <a:latin typeface="Calibri" charset="0"/>
@@ -37793,7 +35271,7 @@
                           <a:ea typeface="Calibri" pitchFamily="34" charset="-122"/>
                           <a:cs typeface="Calibri" pitchFamily="34" charset="-120"/>
                         </a:rPr>
-                        <a:t>€243,403</a:t>
+                        <a:t>€352,739</a:t>
                       </a:r>
                       <a:endParaRPr lang="en-US" sz="1000" dirty="0">
                         <a:latin typeface="Calibri" charset="0"/>
@@ -37861,7 +35339,7 @@
                           <a:ea typeface="Calibri" pitchFamily="34" charset="-122"/>
                           <a:cs typeface="Calibri" pitchFamily="34" charset="-120"/>
                         </a:rPr>
-                        <a:t>€194,918</a:t>
+                        <a:t>€209,708</a:t>
                       </a:r>
                       <a:endParaRPr lang="en-US" sz="1000" dirty="0">
                         <a:latin typeface="Calibri" charset="0"/>
@@ -38265,74 +35743,6 @@
                         <a:buNone/>
                       </a:pPr>
                       <a:r>
-                        <a:rPr lang="en-US" sz="1000" dirty="0">
-                          <a:solidFill>
-                            <a:srgbClr val="F3F0E8"/>
-                          </a:solidFill>
-                          <a:latin typeface="Calibri" pitchFamily="34" charset="0"/>
-                          <a:ea typeface="Calibri" pitchFamily="34" charset="-122"/>
-                          <a:cs typeface="Calibri" pitchFamily="34" charset="-120"/>
-                        </a:rPr>
-                        <a:t>1,378</a:t>
-                      </a:r>
-                      <a:endParaRPr lang="en-US" sz="1000" dirty="0">
-                        <a:latin typeface="Calibri" charset="0"/>
-                        <a:ea typeface="Calibri" charset="0"/>
-                        <a:cs typeface="Calibri" charset="0"/>
-                      </a:endParaRPr>
-                    </a:p>
-                  </a:txBody>
-                  <a:tcPr marL="82296" marR="82296" marT="36576" marB="36576" anchor="ctr">
-                    <a:lnL w="6350" cap="flat" cmpd="sng" algn="ctr">
-                      <a:solidFill>
-                        <a:srgbClr val="2E3A35"/>
-                      </a:solidFill>
-                      <a:prstDash val="solid"/>
-                      <a:round/>
-                      <a:headEnd type="none" w="med" len="med"/>
-                      <a:tailEnd type="none" w="med" len="med"/>
-                    </a:lnL>
-                    <a:lnR w="6350" cap="flat" cmpd="sng" algn="ctr">
-                      <a:solidFill>
-                        <a:srgbClr val="2E3A35"/>
-                      </a:solidFill>
-                      <a:prstDash val="solid"/>
-                      <a:round/>
-                      <a:headEnd type="none" w="med" len="med"/>
-                      <a:tailEnd type="none" w="med" len="med"/>
-                    </a:lnR>
-                    <a:lnT w="6350" cap="flat" cmpd="sng" algn="ctr">
-                      <a:solidFill>
-                        <a:srgbClr val="2E3A35"/>
-                      </a:solidFill>
-                      <a:prstDash val="solid"/>
-                      <a:round/>
-                      <a:headEnd type="none" w="med" len="med"/>
-                      <a:tailEnd type="none" w="med" len="med"/>
-                    </a:lnT>
-                    <a:lnB w="6350" cap="flat" cmpd="sng" algn="ctr">
-                      <a:solidFill>
-                        <a:srgbClr val="2E3A35"/>
-                      </a:solidFill>
-                      <a:prstDash val="solid"/>
-                      <a:round/>
-                      <a:headEnd type="none" w="med" len="med"/>
-                      <a:tailEnd type="none" w="med" len="med"/>
-                    </a:lnB>
-                    <a:solidFill>
-                      <a:srgbClr val="171E1B"/>
-                    </a:solidFill>
-                  </a:tcPr>
-                </a:tc>
-                <a:tc>
-                  <a:txBody>
-                    <a:bodyPr/>
-                    <a:lstStyle/>
-                    <a:p>
-                      <a:pPr algn="r" indent="0" marL="0">
-                        <a:buNone/>
-                      </a:pPr>
-                      <a:r>
                         <a:rPr lang="en-US" sz="1000" b="1" dirty="0">
                           <a:solidFill>
                             <a:srgbClr val="7BE08A"/>
@@ -38341,7 +35751,7 @@
                           <a:ea typeface="Calibri" pitchFamily="34" charset="-122"/>
                           <a:cs typeface="Calibri" pitchFamily="34" charset="-120"/>
                         </a:rPr>
-                        <a:t>1,333</a:t>
+                        <a:t>1,378</a:t>
                       </a:r>
                       <a:endParaRPr lang="en-US" sz="1000" dirty="0">
                         <a:latin typeface="Calibri" charset="0"/>
@@ -38409,7 +35819,75 @@
                           <a:ea typeface="Calibri" pitchFamily="34" charset="-122"/>
                           <a:cs typeface="Calibri" pitchFamily="34" charset="-120"/>
                         </a:rPr>
-                        <a:t>1,356</a:t>
+                        <a:t>1,933</a:t>
+                      </a:r>
+                      <a:endParaRPr lang="en-US" sz="1000" dirty="0">
+                        <a:latin typeface="Calibri" charset="0"/>
+                        <a:ea typeface="Calibri" charset="0"/>
+                        <a:cs typeface="Calibri" charset="0"/>
+                      </a:endParaRPr>
+                    </a:p>
+                  </a:txBody>
+                  <a:tcPr marL="82296" marR="82296" marT="36576" marB="36576" anchor="ctr">
+                    <a:lnL w="6350" cap="flat" cmpd="sng" algn="ctr">
+                      <a:solidFill>
+                        <a:srgbClr val="2E3A35"/>
+                      </a:solidFill>
+                      <a:prstDash val="solid"/>
+                      <a:round/>
+                      <a:headEnd type="none" w="med" len="med"/>
+                      <a:tailEnd type="none" w="med" len="med"/>
+                    </a:lnL>
+                    <a:lnR w="6350" cap="flat" cmpd="sng" algn="ctr">
+                      <a:solidFill>
+                        <a:srgbClr val="2E3A35"/>
+                      </a:solidFill>
+                      <a:prstDash val="solid"/>
+                      <a:round/>
+                      <a:headEnd type="none" w="med" len="med"/>
+                      <a:tailEnd type="none" w="med" len="med"/>
+                    </a:lnR>
+                    <a:lnT w="6350" cap="flat" cmpd="sng" algn="ctr">
+                      <a:solidFill>
+                        <a:srgbClr val="2E3A35"/>
+                      </a:solidFill>
+                      <a:prstDash val="solid"/>
+                      <a:round/>
+                      <a:headEnd type="none" w="med" len="med"/>
+                      <a:tailEnd type="none" w="med" len="med"/>
+                    </a:lnT>
+                    <a:lnB w="6350" cap="flat" cmpd="sng" algn="ctr">
+                      <a:solidFill>
+                        <a:srgbClr val="2E3A35"/>
+                      </a:solidFill>
+                      <a:prstDash val="solid"/>
+                      <a:round/>
+                      <a:headEnd type="none" w="med" len="med"/>
+                      <a:tailEnd type="none" w="med" len="med"/>
+                    </a:lnB>
+                    <a:solidFill>
+                      <a:srgbClr val="171E1B"/>
+                    </a:solidFill>
+                  </a:tcPr>
+                </a:tc>
+                <a:tc>
+                  <a:txBody>
+                    <a:bodyPr/>
+                    <a:lstStyle/>
+                    <a:p>
+                      <a:pPr algn="r" indent="0" marL="0">
+                        <a:buNone/>
+                      </a:pPr>
+                      <a:r>
+                        <a:rPr lang="en-US" sz="1000" dirty="0">
+                          <a:solidFill>
+                            <a:srgbClr val="F3F0E8"/>
+                          </a:solidFill>
+                          <a:latin typeface="Calibri" pitchFamily="34" charset="0"/>
+                          <a:ea typeface="Calibri" pitchFamily="34" charset="-122"/>
+                          <a:cs typeface="Calibri" pitchFamily="34" charset="-120"/>
+                        </a:rPr>
+                        <a:t>1,458</a:t>
                       </a:r>
                       <a:endParaRPr lang="en-US" sz="1000" dirty="0">
                         <a:latin typeface="Calibri" charset="0"/>
@@ -39705,13 +37183,13 @@
                       <a:r>
                         <a:rPr lang="en-US" sz="1000" b="1" dirty="0">
                           <a:solidFill>
-                            <a:srgbClr val="7BE08A"/>
+                            <a:srgbClr val="F3F0E8"/>
                           </a:solidFill>
                           <a:latin typeface="Calibri" pitchFamily="34" charset="0"/>
                           <a:ea typeface="Calibri" pitchFamily="34" charset="-122"/>
                           <a:cs typeface="Calibri" pitchFamily="34" charset="-120"/>
                         </a:rPr>
-                        <a:t>7.5%</a:t>
+                        <a:t>5.2%</a:t>
                       </a:r>
                       <a:endParaRPr lang="en-US" sz="1000" dirty="0">
                         <a:latin typeface="Calibri" charset="0"/>
@@ -39773,13 +37251,13 @@
                       <a:r>
                         <a:rPr lang="en-US" sz="1000" b="1" dirty="0">
                           <a:solidFill>
-                            <a:srgbClr val="F3F0E8"/>
+                            <a:srgbClr val="7BE08A"/>
                           </a:solidFill>
                           <a:latin typeface="Calibri" pitchFamily="34" charset="0"/>
                           <a:ea typeface="Calibri" pitchFamily="34" charset="-122"/>
                           <a:cs typeface="Calibri" pitchFamily="34" charset="-120"/>
                         </a:rPr>
-                        <a:t>7.3%</a:t>
+                        <a:t>6.8%</a:t>
                       </a:r>
                       <a:endParaRPr lang="en-US" sz="1000" dirty="0">
                         <a:latin typeface="Calibri" charset="0"/>
@@ -39837,41 +37315,14 @@
       </p:graphicFrame>
       <p:sp>
         <p:nvSpPr>
-          <p:cNvPr id="6" name="Shape 3"/>
+          <p:cNvPr id="6" name="Text 3"/>
           <p:cNvSpPr/>
           <p:nvPr/>
         </p:nvSpPr>
         <p:spPr>
           <a:xfrm>
-            <a:off x="566928" y="5468112"/>
-            <a:ext cx="5486400" cy="914400"/>
-          </a:xfrm>
-          <a:prstGeom prst="roundRect">
-            <a:avLst>
-              <a:gd name="adj" fmla="val 3000"/>
-            </a:avLst>
-          </a:prstGeom>
-          <a:solidFill>
-            <a:srgbClr val="202A26"/>
-          </a:solidFill>
-          <a:ln w="6350">
-            <a:solidFill>
-              <a:srgbClr val="2E3A35"/>
-            </a:solidFill>
-            <a:prstDash val="solid"/>
-          </a:ln>
-        </p:spPr>
-      </p:sp>
-      <p:sp>
-        <p:nvSpPr>
-          <p:cNvPr id="7" name="Text 4"/>
-          <p:cNvSpPr/>
-          <p:nvPr/>
-        </p:nvSpPr>
-        <p:spPr>
-          <a:xfrm>
-            <a:off x="768096" y="5577840"/>
-            <a:ext cx="5084064" cy="694944"/>
+            <a:off x="2788920" y="6254496"/>
+            <a:ext cx="6583680" cy="347472"/>
           </a:xfrm>
           <a:prstGeom prst="rect">
             <a:avLst/>
@@ -39880,136 +37331,30 @@
           <a:ln/>
         </p:spPr>
         <p:txBody>
-          <a:bodyPr wrap="square" lIns="0" tIns="0" rIns="0" bIns="0" rtlCol="0" anchor="t"/>
+          <a:bodyPr wrap="square" lIns="0" tIns="0" rIns="0" bIns="0" rtlCol="0" anchor="ctr"/>
           <a:lstStyle/>
           <a:p>
-            <a:pPr indent="0" marL="0">
-              <a:lnSpc>
-                <a:spcPct val="118000"/>
-              </a:lnSpc>
+            <a:pPr algn="ctr" indent="0" marL="0">
               <a:buNone/>
             </a:pPr>
             <a:r>
-              <a:rPr lang="en-US" sz="1000" b="1" dirty="0">
+              <a:rPr lang="en-US" sz="750" dirty="0">
                 <a:solidFill>
-                  <a:srgbClr val="F3F0E8"/>
+                  <a:srgbClr val="828C87"/>
                 </a:solidFill>
                 <a:latin typeface="Calibri" pitchFamily="34" charset="0"/>
                 <a:ea typeface="Calibri" pitchFamily="34" charset="-122"/>
                 <a:cs typeface="Calibri" pitchFamily="34" charset="-120"/>
               </a:rPr>
-              <a:t>Arancia now leads on income. </a:t>
+              <a:t>Net return = rent − service charge. Yield = net return ÷ total cost including DLD and admin. FX 1 EUR = 4.29 AED. Floareá confirmed; Arancia and Celesto prices to be verified on a price list. Not financial advice.</a:t>
             </a:r>
-            <a:pPr indent="0" marL="0">
-              <a:lnSpc>
-                <a:spcPct val="118000"/>
-              </a:lnSpc>
-              <a:buNone/>
-            </a:pPr>
-            <a:r>
-              <a:rPr lang="en-US" sz="1000" dirty="0">
-                <a:solidFill>
-                  <a:srgbClr val="A7B0AB"/>
-                </a:solidFill>
-                <a:latin typeface="Calibri" pitchFamily="34" charset="0"/>
-                <a:ea typeface="Calibri" pitchFamily="34" charset="-122"/>
-                <a:cs typeface="Calibri" pitchFamily="34" charset="-120"/>
-              </a:rPr>
-              <a:t>AED 90,000 a year on a cheaper unit returns AED 78,750 net — 7.5%. Celesto follows at 7.3% on the smallest cheque. Floareá trails at 5.7%.</a:t>
-            </a:r>
-            <a:endParaRPr lang="en-US" sz="1000" dirty="0"/>
+            <a:endParaRPr lang="en-US" sz="750" dirty="0"/>
           </a:p>
         </p:txBody>
       </p:sp>
       <p:sp>
         <p:nvSpPr>
-          <p:cNvPr id="8" name="Shape 5"/>
-          <p:cNvSpPr/>
-          <p:nvPr/>
-        </p:nvSpPr>
-        <p:spPr>
-          <a:xfrm>
-            <a:off x="6400800" y="5468112"/>
-            <a:ext cx="5193792" cy="914400"/>
-          </a:xfrm>
-          <a:prstGeom prst="roundRect">
-            <a:avLst>
-              <a:gd name="adj" fmla="val 3000"/>
-            </a:avLst>
-          </a:prstGeom>
-          <a:solidFill>
-            <a:srgbClr val="202A26"/>
-          </a:solidFill>
-          <a:ln w="6350">
-            <a:solidFill>
-              <a:srgbClr val="2E3A35"/>
-            </a:solidFill>
-            <a:prstDash val="solid"/>
-          </a:ln>
-        </p:spPr>
-      </p:sp>
-      <p:sp>
-        <p:nvSpPr>
-          <p:cNvPr id="9" name="Text 6"/>
-          <p:cNvSpPr/>
-          <p:nvPr/>
-        </p:nvSpPr>
-        <p:spPr>
-          <a:xfrm>
-            <a:off x="6601968" y="5577840"/>
-            <a:ext cx="4791456" cy="694944"/>
-          </a:xfrm>
-          <a:prstGeom prst="rect">
-            <a:avLst/>
-          </a:prstGeom>
-          <a:noFill/>
-          <a:ln/>
-        </p:spPr>
-        <p:txBody>
-          <a:bodyPr wrap="square" lIns="0" tIns="0" rIns="0" bIns="0" rtlCol="0" anchor="t"/>
-          <a:lstStyle/>
-          <a:p>
-            <a:pPr indent="0" marL="0">
-              <a:lnSpc>
-                <a:spcPct val="118000"/>
-              </a:lnSpc>
-              <a:buNone/>
-            </a:pPr>
-            <a:r>
-              <a:rPr lang="en-US" sz="1000" b="1" dirty="0">
-                <a:solidFill>
-                  <a:srgbClr val="F3F0E8"/>
-                </a:solidFill>
-                <a:latin typeface="Calibri" pitchFamily="34" charset="0"/>
-                <a:ea typeface="Calibri" pitchFamily="34" charset="-122"/>
-                <a:cs typeface="Calibri" pitchFamily="34" charset="-120"/>
-              </a:rPr>
-              <a:t>Method, so the client can check it. </a:t>
-            </a:r>
-            <a:pPr indent="0" marL="0">
-              <a:lnSpc>
-                <a:spcPct val="118000"/>
-              </a:lnSpc>
-              <a:buNone/>
-            </a:pPr>
-            <a:r>
-              <a:rPr lang="en-US" sz="1000" dirty="0">
-                <a:solidFill>
-                  <a:srgbClr val="A7B0AB"/>
-                </a:solidFill>
-                <a:latin typeface="Calibri" pitchFamily="34" charset="0"/>
-                <a:ea typeface="Calibri" pitchFamily="34" charset="-122"/>
-                <a:cs typeface="Calibri" pitchFamily="34" charset="-120"/>
-              </a:rPr>
-              <a:t>Net return = rent − service charge. Yield = net return ÷ total cost including DLD and admin. Admin held at AED 4,200. Only Floareá's figures are confirmed.</a:t>
-            </a:r>
-            <a:endParaRPr lang="en-US" sz="1000" dirty="0"/>
-          </a:p>
-        </p:txBody>
-      </p:sp>
-      <p:sp>
-        <p:nvSpPr>
-          <p:cNvPr id="10" name="Text 7"/>
+          <p:cNvPr id="7" name="Text 4"/>
           <p:cNvSpPr/>
           <p:nvPr/>
         </p:nvSpPr>
@@ -40048,7 +37393,7 @@
       </p:sp>
       <p:sp>
         <p:nvSpPr>
-          <p:cNvPr id="11" name="Text 8"/>
+          <p:cNvPr id="8" name="Text 5"/>
           <p:cNvSpPr/>
           <p:nvPr/>
         </p:nvSpPr>
@@ -40890,13 +38235,13 @@
                       <a:r>
                         <a:rPr lang="en-US" sz="1050" dirty="0">
                           <a:solidFill>
-                            <a:srgbClr val="828C87"/>
+                            <a:srgbClr val="F3F0E8"/>
                           </a:solidFill>
                           <a:latin typeface="Calibri" pitchFamily="34" charset="0"/>
                           <a:ea typeface="Calibri" pitchFamily="34" charset="-122"/>
                           <a:cs typeface="Calibri" pitchFamily="34" charset="-120"/>
                         </a:rPr>
-                        <a:t>To confirm</a:t>
+                        <a:t>1,105–1,170 sqft · 3 types</a:t>
                       </a:r>
                       <a:endParaRPr lang="en-US" sz="1050" dirty="0">
                         <a:latin typeface="Calibri" charset="0"/>
@@ -41164,13 +38509,13 @@
                       <a:r>
                         <a:rPr lang="en-US" sz="1050" dirty="0">
                           <a:solidFill>
-                            <a:srgbClr val="828C87"/>
+                            <a:srgbClr val="F3F0E8"/>
                           </a:solidFill>
                           <a:latin typeface="Calibri" pitchFamily="34" charset="0"/>
                           <a:ea typeface="Calibri" pitchFamily="34" charset="-122"/>
                           <a:cs typeface="Calibri" pitchFamily="34" charset="-120"/>
                         </a:rPr>
-                        <a:t>To confirm</a:t>
+                        <a:t>AED 1,623</a:t>
                       </a:r>
                       <a:endParaRPr lang="en-US" sz="1050" dirty="0">
                         <a:latin typeface="Calibri" charset="0"/>
@@ -41376,280 +38721,6 @@
                           <a:ea typeface="Calibri" pitchFamily="34" charset="-122"/>
                           <a:cs typeface="Calibri" pitchFamily="34" charset="-120"/>
                         </a:rPr>
-                        <a:t>Step-up vs own 1 BR / sqft</a:t>
-                      </a:r>
-                      <a:endParaRPr lang="en-US" sz="1050" dirty="0">
-                        <a:latin typeface="Calibri" charset="0"/>
-                        <a:ea typeface="Calibri" charset="0"/>
-                        <a:cs typeface="Calibri" charset="0"/>
-                      </a:endParaRPr>
-                    </a:p>
-                  </a:txBody>
-                  <a:tcPr marL="82296" marR="82296" marT="36576" marB="36576" anchor="ctr">
-                    <a:lnL w="6350" cap="flat" cmpd="sng" algn="ctr">
-                      <a:solidFill>
-                        <a:srgbClr val="2E3A35"/>
-                      </a:solidFill>
-                      <a:prstDash val="solid"/>
-                      <a:round/>
-                      <a:headEnd type="none" w="med" len="med"/>
-                      <a:tailEnd type="none" w="med" len="med"/>
-                    </a:lnL>
-                    <a:lnR w="6350" cap="flat" cmpd="sng" algn="ctr">
-                      <a:solidFill>
-                        <a:srgbClr val="2E3A35"/>
-                      </a:solidFill>
-                      <a:prstDash val="solid"/>
-                      <a:round/>
-                      <a:headEnd type="none" w="med" len="med"/>
-                      <a:tailEnd type="none" w="med" len="med"/>
-                    </a:lnR>
-                    <a:lnT w="6350" cap="flat" cmpd="sng" algn="ctr">
-                      <a:solidFill>
-                        <a:srgbClr val="2E3A35"/>
-                      </a:solidFill>
-                      <a:prstDash val="solid"/>
-                      <a:round/>
-                      <a:headEnd type="none" w="med" len="med"/>
-                      <a:tailEnd type="none" w="med" len="med"/>
-                    </a:lnT>
-                    <a:lnB w="6350" cap="flat" cmpd="sng" algn="ctr">
-                      <a:solidFill>
-                        <a:srgbClr val="2E3A35"/>
-                      </a:solidFill>
-                      <a:prstDash val="solid"/>
-                      <a:round/>
-                      <a:headEnd type="none" w="med" len="med"/>
-                      <a:tailEnd type="none" w="med" len="med"/>
-                    </a:lnB>
-                    <a:solidFill>
-                      <a:srgbClr val="1B2320"/>
-                    </a:solidFill>
-                  </a:tcPr>
-                </a:tc>
-                <a:tc>
-                  <a:txBody>
-                    <a:bodyPr/>
-                    <a:lstStyle/>
-                    <a:p>
-                      <a:pPr algn="r" indent="0" marL="0">
-                        <a:buNone/>
-                      </a:pPr>
-                      <a:r>
-                        <a:rPr lang="en-US" sz="1050" dirty="0">
-                          <a:solidFill>
-                            <a:srgbClr val="828C87"/>
-                          </a:solidFill>
-                          <a:latin typeface="Calibri" pitchFamily="34" charset="0"/>
-                          <a:ea typeface="Calibri" pitchFamily="34" charset="-122"/>
-                          <a:cs typeface="Calibri" pitchFamily="34" charset="-120"/>
-                        </a:rPr>
-                        <a:t>To confirm</a:t>
-                      </a:r>
-                      <a:endParaRPr lang="en-US" sz="1050" dirty="0">
-                        <a:latin typeface="Calibri" charset="0"/>
-                        <a:ea typeface="Calibri" charset="0"/>
-                        <a:cs typeface="Calibri" charset="0"/>
-                      </a:endParaRPr>
-                    </a:p>
-                  </a:txBody>
-                  <a:tcPr marL="82296" marR="82296" marT="36576" marB="36576" anchor="ctr">
-                    <a:lnL w="6350" cap="flat" cmpd="sng" algn="ctr">
-                      <a:solidFill>
-                        <a:srgbClr val="2E3A35"/>
-                      </a:solidFill>
-                      <a:prstDash val="solid"/>
-                      <a:round/>
-                      <a:headEnd type="none" w="med" len="med"/>
-                      <a:tailEnd type="none" w="med" len="med"/>
-                    </a:lnL>
-                    <a:lnR w="6350" cap="flat" cmpd="sng" algn="ctr">
-                      <a:solidFill>
-                        <a:srgbClr val="2E3A35"/>
-                      </a:solidFill>
-                      <a:prstDash val="solid"/>
-                      <a:round/>
-                      <a:headEnd type="none" w="med" len="med"/>
-                      <a:tailEnd type="none" w="med" len="med"/>
-                    </a:lnR>
-                    <a:lnT w="6350" cap="flat" cmpd="sng" algn="ctr">
-                      <a:solidFill>
-                        <a:srgbClr val="2E3A35"/>
-                      </a:solidFill>
-                      <a:prstDash val="solid"/>
-                      <a:round/>
-                      <a:headEnd type="none" w="med" len="med"/>
-                      <a:tailEnd type="none" w="med" len="med"/>
-                    </a:lnT>
-                    <a:lnB w="6350" cap="flat" cmpd="sng" algn="ctr">
-                      <a:solidFill>
-                        <a:srgbClr val="2E3A35"/>
-                      </a:solidFill>
-                      <a:prstDash val="solid"/>
-                      <a:round/>
-                      <a:headEnd type="none" w="med" len="med"/>
-                      <a:tailEnd type="none" w="med" len="med"/>
-                    </a:lnB>
-                    <a:solidFill>
-                      <a:srgbClr val="1B2320"/>
-                    </a:solidFill>
-                  </a:tcPr>
-                </a:tc>
-                <a:tc>
-                  <a:txBody>
-                    <a:bodyPr/>
-                    <a:lstStyle/>
-                    <a:p>
-                      <a:pPr algn="r" indent="0" marL="0">
-                        <a:buNone/>
-                      </a:pPr>
-                      <a:r>
-                        <a:rPr lang="en-US" sz="1050" dirty="0">
-                          <a:solidFill>
-                            <a:srgbClr val="F3F0E8"/>
-                          </a:solidFill>
-                          <a:latin typeface="Calibri" pitchFamily="34" charset="0"/>
-                          <a:ea typeface="Calibri" pitchFamily="34" charset="-122"/>
-                          <a:cs typeface="Calibri" pitchFamily="34" charset="-120"/>
-                        </a:rPr>
-                        <a:t>+43%</a:t>
-                      </a:r>
-                      <a:endParaRPr lang="en-US" sz="1050" dirty="0">
-                        <a:latin typeface="Calibri" charset="0"/>
-                        <a:ea typeface="Calibri" charset="0"/>
-                        <a:cs typeface="Calibri" charset="0"/>
-                      </a:endParaRPr>
-                    </a:p>
-                  </a:txBody>
-                  <a:tcPr marL="82296" marR="82296" marT="36576" marB="36576" anchor="ctr">
-                    <a:lnL w="6350" cap="flat" cmpd="sng" algn="ctr">
-                      <a:solidFill>
-                        <a:srgbClr val="2E3A35"/>
-                      </a:solidFill>
-                      <a:prstDash val="solid"/>
-                      <a:round/>
-                      <a:headEnd type="none" w="med" len="med"/>
-                      <a:tailEnd type="none" w="med" len="med"/>
-                    </a:lnL>
-                    <a:lnR w="6350" cap="flat" cmpd="sng" algn="ctr">
-                      <a:solidFill>
-                        <a:srgbClr val="2E3A35"/>
-                      </a:solidFill>
-                      <a:prstDash val="solid"/>
-                      <a:round/>
-                      <a:headEnd type="none" w="med" len="med"/>
-                      <a:tailEnd type="none" w="med" len="med"/>
-                    </a:lnR>
-                    <a:lnT w="6350" cap="flat" cmpd="sng" algn="ctr">
-                      <a:solidFill>
-                        <a:srgbClr val="2E3A35"/>
-                      </a:solidFill>
-                      <a:prstDash val="solid"/>
-                      <a:round/>
-                      <a:headEnd type="none" w="med" len="med"/>
-                      <a:tailEnd type="none" w="med" len="med"/>
-                    </a:lnT>
-                    <a:lnB w="6350" cap="flat" cmpd="sng" algn="ctr">
-                      <a:solidFill>
-                        <a:srgbClr val="2E3A35"/>
-                      </a:solidFill>
-                      <a:prstDash val="solid"/>
-                      <a:round/>
-                      <a:headEnd type="none" w="med" len="med"/>
-                      <a:tailEnd type="none" w="med" len="med"/>
-                    </a:lnB>
-                    <a:solidFill>
-                      <a:srgbClr val="1B2320"/>
-                    </a:solidFill>
-                  </a:tcPr>
-                </a:tc>
-                <a:tc>
-                  <a:txBody>
-                    <a:bodyPr/>
-                    <a:lstStyle/>
-                    <a:p>
-                      <a:pPr algn="r" indent="0" marL="0">
-                        <a:buNone/>
-                      </a:pPr>
-                      <a:r>
-                        <a:rPr lang="en-US" sz="1050" b="1" dirty="0">
-                          <a:solidFill>
-                            <a:srgbClr val="7BE08A"/>
-                          </a:solidFill>
-                          <a:latin typeface="Calibri" pitchFamily="34" charset="0"/>
-                          <a:ea typeface="Calibri" pitchFamily="34" charset="-122"/>
-                          <a:cs typeface="Calibri" pitchFamily="34" charset="-120"/>
-                        </a:rPr>
-                        <a:t>+7%</a:t>
-                      </a:r>
-                      <a:endParaRPr lang="en-US" sz="1050" dirty="0">
-                        <a:latin typeface="Calibri" charset="0"/>
-                        <a:ea typeface="Calibri" charset="0"/>
-                        <a:cs typeface="Calibri" charset="0"/>
-                      </a:endParaRPr>
-                    </a:p>
-                  </a:txBody>
-                  <a:tcPr marL="82296" marR="82296" marT="36576" marB="36576" anchor="ctr">
-                    <a:lnL w="6350" cap="flat" cmpd="sng" algn="ctr">
-                      <a:solidFill>
-                        <a:srgbClr val="2E3A35"/>
-                      </a:solidFill>
-                      <a:prstDash val="solid"/>
-                      <a:round/>
-                      <a:headEnd type="none" w="med" len="med"/>
-                      <a:tailEnd type="none" w="med" len="med"/>
-                    </a:lnL>
-                    <a:lnR w="6350" cap="flat" cmpd="sng" algn="ctr">
-                      <a:solidFill>
-                        <a:srgbClr val="2E3A35"/>
-                      </a:solidFill>
-                      <a:prstDash val="solid"/>
-                      <a:round/>
-                      <a:headEnd type="none" w="med" len="med"/>
-                      <a:tailEnd type="none" w="med" len="med"/>
-                    </a:lnR>
-                    <a:lnT w="6350" cap="flat" cmpd="sng" algn="ctr">
-                      <a:solidFill>
-                        <a:srgbClr val="2E3A35"/>
-                      </a:solidFill>
-                      <a:prstDash val="solid"/>
-                      <a:round/>
-                      <a:headEnd type="none" w="med" len="med"/>
-                      <a:tailEnd type="none" w="med" len="med"/>
-                    </a:lnT>
-                    <a:lnB w="6350" cap="flat" cmpd="sng" algn="ctr">
-                      <a:solidFill>
-                        <a:srgbClr val="2E3A35"/>
-                      </a:solidFill>
-                      <a:prstDash val="solid"/>
-                      <a:round/>
-                      <a:headEnd type="none" w="med" len="med"/>
-                      <a:tailEnd type="none" w="med" len="med"/>
-                    </a:lnB>
-                    <a:solidFill>
-                      <a:srgbClr val="1B2320"/>
-                    </a:solidFill>
-                  </a:tcPr>
-                </a:tc>
-              </a:tr>
-              <a:tr h="254203">
-                <a:tc>
-                  <a:txBody>
-                    <a:bodyPr/>
-                    <a:lstStyle/>
-                    <a:p>
-                      <a:pPr algn="l" indent="0" marL="0">
-                        <a:buNone/>
-                      </a:pPr>
-                      <a:r>
-                        <a:rPr lang="en-US" sz="1050" dirty="0">
-                          <a:solidFill>
-                            <a:srgbClr val="A7B0AB"/>
-                          </a:solidFill>
-                          <a:latin typeface="Calibri" pitchFamily="34" charset="0"/>
-                          <a:ea typeface="Calibri" pitchFamily="34" charset="-122"/>
-                          <a:cs typeface="Calibri" pitchFamily="34" charset="-120"/>
-                        </a:rPr>
                         <a:t>DLD 4%</a:t>
                       </a:r>
                       <a:endParaRPr lang="en-US" sz="1050" dirty="0">
@@ -41697,7 +38768,7 @@
                       <a:tailEnd type="none" w="med" len="med"/>
                     </a:lnB>
                     <a:solidFill>
-                      <a:srgbClr val="171E1B"/>
+                      <a:srgbClr val="1B2320"/>
                     </a:solidFill>
                   </a:tcPr>
                 </a:tc>
@@ -41765,7 +38836,7 @@
                       <a:tailEnd type="none" w="med" len="med"/>
                     </a:lnB>
                     <a:solidFill>
-                      <a:srgbClr val="171E1B"/>
+                      <a:srgbClr val="1B2320"/>
                     </a:solidFill>
                   </a:tcPr>
                 </a:tc>
@@ -41833,7 +38904,7 @@
                       <a:tailEnd type="none" w="med" len="med"/>
                     </a:lnB>
                     <a:solidFill>
-                      <a:srgbClr val="171E1B"/>
+                      <a:srgbClr val="1B2320"/>
                     </a:solidFill>
                   </a:tcPr>
                 </a:tc>
@@ -41901,7 +38972,7 @@
                       <a:tailEnd type="none" w="med" len="med"/>
                     </a:lnB>
                     <a:solidFill>
-                      <a:srgbClr val="171E1B"/>
+                      <a:srgbClr val="1B2320"/>
                     </a:solidFill>
                   </a:tcPr>
                 </a:tc>
@@ -41971,7 +39042,7 @@
                       <a:tailEnd type="none" w="med" len="med"/>
                     </a:lnB>
                     <a:solidFill>
-                      <a:srgbClr val="1B2320"/>
+                      <a:srgbClr val="171E1B"/>
                     </a:solidFill>
                   </a:tcPr>
                 </a:tc>
@@ -42039,7 +39110,7 @@
                       <a:tailEnd type="none" w="med" len="med"/>
                     </a:lnB>
                     <a:solidFill>
-                      <a:srgbClr val="1B2320"/>
+                      <a:srgbClr val="171E1B"/>
                     </a:solidFill>
                   </a:tcPr>
                 </a:tc>
@@ -42060,7 +39131,7 @@
                           <a:ea typeface="Calibri" pitchFamily="34" charset="-122"/>
                           <a:cs typeface="Calibri" pitchFamily="34" charset="-120"/>
                         </a:rPr>
-                        <a:t>5,250  est</a:t>
+                        <a:t>5,250</a:t>
                       </a:r>
                       <a:endParaRPr lang="en-US" sz="1050" dirty="0">
                         <a:latin typeface="Calibri" charset="0"/>
@@ -42107,7 +39178,7 @@
                       <a:tailEnd type="none" w="med" len="med"/>
                     </a:lnB>
                     <a:solidFill>
-                      <a:srgbClr val="1B2320"/>
+                      <a:srgbClr val="171E1B"/>
                     </a:solidFill>
                   </a:tcPr>
                 </a:tc>
@@ -42128,7 +39199,7 @@
                           <a:ea typeface="Calibri" pitchFamily="34" charset="-122"/>
                           <a:cs typeface="Calibri" pitchFamily="34" charset="-120"/>
                         </a:rPr>
-                        <a:t>5,250  est</a:t>
+                        <a:t>5,250</a:t>
                       </a:r>
                       <a:endParaRPr lang="en-US" sz="1050" dirty="0">
                         <a:latin typeface="Calibri" charset="0"/>
@@ -42175,7 +39246,7 @@
                       <a:tailEnd type="none" w="med" len="med"/>
                     </a:lnB>
                     <a:solidFill>
-                      <a:srgbClr val="1B2320"/>
+                      <a:srgbClr val="171E1B"/>
                     </a:solidFill>
                   </a:tcPr>
                 </a:tc>
@@ -42519,7 +39590,75 @@
                       <a:tailEnd type="none" w="med" len="med"/>
                     </a:lnB>
                     <a:solidFill>
-                      <a:srgbClr val="1B2320"/>
+                      <a:srgbClr val="171E1B"/>
+                    </a:solidFill>
+                  </a:tcPr>
+                </a:tc>
+                <a:tc>
+                  <a:txBody>
+                    <a:bodyPr/>
+                    <a:lstStyle/>
+                    <a:p>
+                      <a:pPr algn="r" indent="0" marL="0">
+                        <a:buNone/>
+                      </a:pPr>
+                      <a:r>
+                        <a:rPr lang="en-US" sz="1050" b="1" dirty="0">
+                          <a:solidFill>
+                            <a:srgbClr val="7BE08A"/>
+                          </a:solidFill>
+                          <a:latin typeface="Calibri" pitchFamily="34" charset="0"/>
+                          <a:ea typeface="Calibri" pitchFamily="34" charset="-122"/>
+                          <a:cs typeface="Calibri" pitchFamily="34" charset="-120"/>
+                        </a:rPr>
+                        <a:t>16 of 192</a:t>
+                      </a:r>
+                      <a:endParaRPr lang="en-US" sz="1050" dirty="0">
+                        <a:latin typeface="Calibri" charset="0"/>
+                        <a:ea typeface="Calibri" charset="0"/>
+                        <a:cs typeface="Calibri" charset="0"/>
+                      </a:endParaRPr>
+                    </a:p>
+                  </a:txBody>
+                  <a:tcPr marL="82296" marR="82296" marT="36576" marB="36576" anchor="ctr">
+                    <a:lnL w="6350" cap="flat" cmpd="sng" algn="ctr">
+                      <a:solidFill>
+                        <a:srgbClr val="2E3A35"/>
+                      </a:solidFill>
+                      <a:prstDash val="solid"/>
+                      <a:round/>
+                      <a:headEnd type="none" w="med" len="med"/>
+                      <a:tailEnd type="none" w="med" len="med"/>
+                    </a:lnL>
+                    <a:lnR w="6350" cap="flat" cmpd="sng" algn="ctr">
+                      <a:solidFill>
+                        <a:srgbClr val="2E3A35"/>
+                      </a:solidFill>
+                      <a:prstDash val="solid"/>
+                      <a:round/>
+                      <a:headEnd type="none" w="med" len="med"/>
+                      <a:tailEnd type="none" w="med" len="med"/>
+                    </a:lnR>
+                    <a:lnT w="6350" cap="flat" cmpd="sng" algn="ctr">
+                      <a:solidFill>
+                        <a:srgbClr val="2E3A35"/>
+                      </a:solidFill>
+                      <a:prstDash val="solid"/>
+                      <a:round/>
+                      <a:headEnd type="none" w="med" len="med"/>
+                      <a:tailEnd type="none" w="med" len="med"/>
+                    </a:lnT>
+                    <a:lnB w="6350" cap="flat" cmpd="sng" algn="ctr">
+                      <a:solidFill>
+                        <a:srgbClr val="2E3A35"/>
+                      </a:solidFill>
+                      <a:prstDash val="solid"/>
+                      <a:round/>
+                      <a:headEnd type="none" w="med" len="med"/>
+                      <a:tailEnd type="none" w="med" len="med"/>
+                    </a:lnB>
+                    <a:solidFill>
+                      <a:srgbClr val="171E1B"/>
                     </a:solidFill>
                   </a:tcPr>
                 </a:tc>
@@ -42587,75 +39726,7 @@
                       <a:tailEnd type="none" w="med" len="med"/>
                     </a:lnB>
                     <a:solidFill>
-                      <a:srgbClr val="1B2320"/>
-                    </a:solidFill>
-                  </a:tcPr>
-                </a:tc>
-                <a:tc>
-                  <a:txBody>
-                    <a:bodyPr/>
-                    <a:lstStyle/>
-                    <a:p>
-                      <a:pPr algn="r" indent="0" marL="0">
-                        <a:buNone/>
-                      </a:pPr>
-                      <a:r>
-                        <a:rPr lang="en-US" sz="1050" dirty="0">
-                          <a:solidFill>
-                            <a:srgbClr val="828C87"/>
-                          </a:solidFill>
-                          <a:latin typeface="Calibri" pitchFamily="34" charset="0"/>
-                          <a:ea typeface="Calibri" pitchFamily="34" charset="-122"/>
-                          <a:cs typeface="Calibri" pitchFamily="34" charset="-120"/>
-                        </a:rPr>
-                        <a:t>To confirm</a:t>
-                      </a:r>
-                      <a:endParaRPr lang="en-US" sz="1050" dirty="0">
-                        <a:latin typeface="Calibri" charset="0"/>
-                        <a:ea typeface="Calibri" charset="0"/>
-                        <a:cs typeface="Calibri" charset="0"/>
-                      </a:endParaRPr>
-                    </a:p>
-                  </a:txBody>
-                  <a:tcPr marL="82296" marR="82296" marT="36576" marB="36576" anchor="ctr">
-                    <a:lnL w="6350" cap="flat" cmpd="sng" algn="ctr">
-                      <a:solidFill>
-                        <a:srgbClr val="2E3A35"/>
-                      </a:solidFill>
-                      <a:prstDash val="solid"/>
-                      <a:round/>
-                      <a:headEnd type="none" w="med" len="med"/>
-                      <a:tailEnd type="none" w="med" len="med"/>
-                    </a:lnL>
-                    <a:lnR w="6350" cap="flat" cmpd="sng" algn="ctr">
-                      <a:solidFill>
-                        <a:srgbClr val="2E3A35"/>
-                      </a:solidFill>
-                      <a:prstDash val="solid"/>
-                      <a:round/>
-                      <a:headEnd type="none" w="med" len="med"/>
-                      <a:tailEnd type="none" w="med" len="med"/>
-                    </a:lnR>
-                    <a:lnT w="6350" cap="flat" cmpd="sng" algn="ctr">
-                      <a:solidFill>
-                        <a:srgbClr val="2E3A35"/>
-                      </a:solidFill>
-                      <a:prstDash val="solid"/>
-                      <a:round/>
-                      <a:headEnd type="none" w="med" len="med"/>
-                      <a:tailEnd type="none" w="med" len="med"/>
-                    </a:lnT>
-                    <a:lnB w="6350" cap="flat" cmpd="sng" algn="ctr">
-                      <a:solidFill>
-                        <a:srgbClr val="2E3A35"/>
-                      </a:solidFill>
-                      <a:prstDash val="solid"/>
-                      <a:round/>
-                      <a:headEnd type="none" w="med" len="med"/>
-                      <a:tailEnd type="none" w="med" len="med"/>
-                    </a:lnB>
-                    <a:solidFill>
-                      <a:srgbClr val="1B2320"/>
+                      <a:srgbClr val="171E1B"/>
                     </a:solidFill>
                   </a:tcPr>
                 </a:tc>
@@ -42723,7 +39794,7 @@
                       <a:tailEnd type="none" w="med" len="med"/>
                     </a:lnB>
                     <a:solidFill>
-                      <a:srgbClr val="1B2320"/>
+                      <a:srgbClr val="171E1B"/>
                     </a:solidFill>
                   </a:tcPr>
                 </a:tc>
@@ -42793,7 +39864,7 @@
                       <a:tailEnd type="none" w="med" len="med"/>
                     </a:lnB>
                     <a:solidFill>
-                      <a:srgbClr val="171E1B"/>
+                      <a:srgbClr val="1B2320"/>
                     </a:solidFill>
                   </a:tcPr>
                 </a:tc>
@@ -42861,7 +39932,7 @@
                       <a:tailEnd type="none" w="med" len="med"/>
                     </a:lnB>
                     <a:solidFill>
-                      <a:srgbClr val="171E1B"/>
+                      <a:srgbClr val="1B2320"/>
                     </a:solidFill>
                   </a:tcPr>
                 </a:tc>
@@ -42929,7 +40000,7 @@
                       <a:tailEnd type="none" w="med" len="med"/>
                     </a:lnB>
                     <a:solidFill>
-                      <a:srgbClr val="171E1B"/>
+                      <a:srgbClr val="1B2320"/>
                     </a:solidFill>
                   </a:tcPr>
                 </a:tc>
@@ -42997,7 +40068,7 @@
                       <a:tailEnd type="none" w="med" len="med"/>
                     </a:lnB>
                     <a:solidFill>
-                      <a:srgbClr val="171E1B"/>
+                      <a:srgbClr val="1B2320"/>
                     </a:solidFill>
                   </a:tcPr>
                 </a:tc>
@@ -43067,7 +40138,7 @@
                       <a:tailEnd type="none" w="med" len="med"/>
                     </a:lnB>
                     <a:solidFill>
-                      <a:srgbClr val="1B2320"/>
+                      <a:srgbClr val="171E1B"/>
                     </a:solidFill>
                   </a:tcPr>
                 </a:tc>
@@ -43135,7 +40206,7 @@
                       <a:tailEnd type="none" w="med" len="med"/>
                     </a:lnB>
                     <a:solidFill>
-                      <a:srgbClr val="1B2320"/>
+                      <a:srgbClr val="171E1B"/>
                     </a:solidFill>
                   </a:tcPr>
                 </a:tc>
@@ -43203,7 +40274,7 @@
                       <a:tailEnd type="none" w="med" len="med"/>
                     </a:lnB>
                     <a:solidFill>
-                      <a:srgbClr val="1B2320"/>
+                      <a:srgbClr val="171E1B"/>
                     </a:solidFill>
                   </a:tcPr>
                 </a:tc>
@@ -43271,7 +40342,7 @@
                       <a:tailEnd type="none" w="med" len="med"/>
                     </a:lnB>
                     <a:solidFill>
-                      <a:srgbClr val="1B2320"/>
+                      <a:srgbClr val="171E1B"/>
                     </a:solidFill>
                   </a:tcPr>
                 </a:tc>
@@ -43282,179 +40353,7 @@
       </p:graphicFrame>
       <p:sp>
         <p:nvSpPr>
-          <p:cNvPr id="6" name="Shape 3"/>
-          <p:cNvSpPr/>
-          <p:nvPr/>
-        </p:nvSpPr>
-        <p:spPr>
-          <a:xfrm>
-            <a:off x="566928" y="5230368"/>
-            <a:ext cx="5486400" cy="1024128"/>
-          </a:xfrm>
-          <a:prstGeom prst="roundRect">
-            <a:avLst>
-              <a:gd name="adj" fmla="val 2679"/>
-            </a:avLst>
-          </a:prstGeom>
-          <a:solidFill>
-            <a:srgbClr val="202A26"/>
-          </a:solidFill>
-          <a:ln w="6350">
-            <a:solidFill>
-              <a:srgbClr val="2E3A35"/>
-            </a:solidFill>
-            <a:prstDash val="solid"/>
-          </a:ln>
-        </p:spPr>
-      </p:sp>
-      <p:sp>
-        <p:nvSpPr>
-          <p:cNvPr id="7" name="Text 4"/>
-          <p:cNvSpPr/>
-          <p:nvPr/>
-        </p:nvSpPr>
-        <p:spPr>
-          <a:xfrm>
-            <a:off x="768096" y="5340096"/>
-            <a:ext cx="5084064" cy="804672"/>
-          </a:xfrm>
-          <a:prstGeom prst="rect">
-            <a:avLst/>
-          </a:prstGeom>
-          <a:noFill/>
-          <a:ln/>
-        </p:spPr>
-        <p:txBody>
-          <a:bodyPr wrap="square" lIns="0" tIns="0" rIns="0" bIns="0" rtlCol="0" anchor="t"/>
-          <a:lstStyle/>
-          <a:p>
-            <a:pPr indent="0" marL="0">
-              <a:lnSpc>
-                <a:spcPct val="118000"/>
-              </a:lnSpc>
-              <a:buNone/>
-            </a:pPr>
-            <a:r>
-              <a:rPr lang="en-US" sz="1000" b="1" dirty="0">
-                <a:solidFill>
-                  <a:srgbClr val="F3F0E8"/>
-                </a:solidFill>
-                <a:latin typeface="Calibri" pitchFamily="34" charset="0"/>
-                <a:ea typeface="Calibri" pitchFamily="34" charset="-122"/>
-                <a:cs typeface="Calibri" pitchFamily="34" charset="-120"/>
-              </a:rPr>
-              <a:t>The number worth saying out loud. </a:t>
-            </a:r>
-            <a:pPr indent="0" marL="0">
-              <a:lnSpc>
-                <a:spcPct val="118000"/>
-              </a:lnSpc>
-              <a:buNone/>
-            </a:pPr>
-            <a:r>
-              <a:rPr lang="en-US" sz="1000" dirty="0">
-                <a:solidFill>
-                  <a:srgbClr val="A7B0AB"/>
-                </a:solidFill>
-                <a:latin typeface="Calibri" pitchFamily="34" charset="0"/>
-                <a:ea typeface="Calibri" pitchFamily="34" charset="-122"/>
-                <a:cs typeface="Calibri" pitchFamily="34" charset="-120"/>
-              </a:rPr>
-              <a:t>Celesto's two-bedroom is 851.64 sqft — within fourteen square feet of Floareá's ONE-bedroom at 837.54. Same floor area, an extra bedroom, for AED 173,890 more all-in.</a:t>
-            </a:r>
-            <a:endParaRPr lang="en-US" sz="1000" dirty="0"/>
-          </a:p>
-        </p:txBody>
-      </p:sp>
-      <p:sp>
-        <p:nvSpPr>
-          <p:cNvPr id="8" name="Shape 5"/>
-          <p:cNvSpPr/>
-          <p:nvPr/>
-        </p:nvSpPr>
-        <p:spPr>
-          <a:xfrm>
-            <a:off x="6400800" y="5230368"/>
-            <a:ext cx="5193792" cy="1024128"/>
-          </a:xfrm>
-          <a:prstGeom prst="roundRect">
-            <a:avLst>
-              <a:gd name="adj" fmla="val 2679"/>
-            </a:avLst>
-          </a:prstGeom>
-          <a:solidFill>
-            <a:srgbClr val="202A26"/>
-          </a:solidFill>
-          <a:ln w="6350">
-            <a:solidFill>
-              <a:srgbClr val="2E3A35"/>
-            </a:solidFill>
-            <a:prstDash val="solid"/>
-          </a:ln>
-        </p:spPr>
-      </p:sp>
-      <p:sp>
-        <p:nvSpPr>
-          <p:cNvPr id="9" name="Text 6"/>
-          <p:cNvSpPr/>
-          <p:nvPr/>
-        </p:nvSpPr>
-        <p:spPr>
-          <a:xfrm>
-            <a:off x="6601968" y="5340096"/>
-            <a:ext cx="4791456" cy="804672"/>
-          </a:xfrm>
-          <a:prstGeom prst="rect">
-            <a:avLst/>
-          </a:prstGeom>
-          <a:noFill/>
-          <a:ln/>
-        </p:spPr>
-        <p:txBody>
-          <a:bodyPr wrap="square" lIns="0" tIns="0" rIns="0" bIns="0" rtlCol="0" anchor="t"/>
-          <a:lstStyle/>
-          <a:p>
-            <a:pPr indent="0" marL="0">
-              <a:lnSpc>
-                <a:spcPct val="118000"/>
-              </a:lnSpc>
-              <a:buNone/>
-            </a:pPr>
-            <a:r>
-              <a:rPr lang="en-US" sz="1000" b="1" dirty="0">
-                <a:solidFill>
-                  <a:srgbClr val="F3F0E8"/>
-                </a:solidFill>
-                <a:latin typeface="Calibri" pitchFamily="34" charset="0"/>
-                <a:ea typeface="Calibri" pitchFamily="34" charset="-122"/>
-                <a:cs typeface="Calibri" pitchFamily="34" charset="-120"/>
-              </a:rPr>
-              <a:t>How each prices the step up. </a:t>
-            </a:r>
-            <a:pPr indent="0" marL="0">
-              <a:lnSpc>
-                <a:spcPct val="118000"/>
-              </a:lnSpc>
-              <a:buNone/>
-            </a:pPr>
-            <a:r>
-              <a:rPr lang="en-US" sz="1000" dirty="0">
-                <a:solidFill>
-                  <a:srgbClr val="A7B0AB"/>
-                </a:solidFill>
-                <a:latin typeface="Calibri" pitchFamily="34" charset="0"/>
-                <a:ea typeface="Calibri" pitchFamily="34" charset="-122"/>
-                <a:cs typeface="Calibri" pitchFamily="34" charset="-120"/>
-              </a:rPr>
-              <a:t>Arancia charges 43% more per sqft for its two-bedroom than its one-bedroom. Celesto charges 7%. Arancia is the better 1 BR buy; Celesto is by far the better 2 BR buy.</a:t>
-            </a:r>
-            <a:endParaRPr lang="en-US" sz="1000" dirty="0"/>
-          </a:p>
-        </p:txBody>
-      </p:sp>
-      <p:sp>
-        <p:nvSpPr>
-          <p:cNvPr id="10" name="Text 7"/>
+          <p:cNvPr id="6" name="Text 3"/>
           <p:cNvSpPr/>
           <p:nvPr/>
         </p:nvSpPr>
@@ -43493,7 +40392,7 @@
       </p:sp>
       <p:sp>
         <p:nvSpPr>
-          <p:cNvPr id="11" name="Text 8"/>
+          <p:cNvPr id="7" name="Text 4"/>
           <p:cNvSpPr/>
           <p:nvPr/>
         </p:nvSpPr>
@@ -45973,92 +42872,6 @@
         </p:nvSpPr>
         <p:spPr>
           <a:xfrm>
-            <a:off x="5943600" y="4160520"/>
-            <a:ext cx="5650992" cy="1417320"/>
-          </a:xfrm>
-          <a:prstGeom prst="roundRect">
-            <a:avLst>
-              <a:gd name="adj" fmla="val 1935"/>
-            </a:avLst>
-          </a:prstGeom>
-          <a:solidFill>
-            <a:srgbClr val="202A26"/>
-          </a:solidFill>
-          <a:ln w="6350">
-            <a:solidFill>
-              <a:srgbClr val="2E3A35"/>
-            </a:solidFill>
-            <a:prstDash val="solid"/>
-          </a:ln>
-        </p:spPr>
-      </p:sp>
-      <p:sp>
-        <p:nvSpPr>
-          <p:cNvPr id="17" name="Text 15"/>
-          <p:cNvSpPr/>
-          <p:nvPr/>
-        </p:nvSpPr>
-        <p:spPr>
-          <a:xfrm>
-            <a:off x="6144768" y="4270248"/>
-            <a:ext cx="5248656" cy="1197864"/>
-          </a:xfrm>
-          <a:prstGeom prst="rect">
-            <a:avLst/>
-          </a:prstGeom>
-          <a:noFill/>
-          <a:ln/>
-        </p:spPr>
-        <p:txBody>
-          <a:bodyPr wrap="square" lIns="0" tIns="0" rIns="0" bIns="0" rtlCol="0" anchor="t"/>
-          <a:lstStyle/>
-          <a:p>
-            <a:pPr indent="0" marL="0">
-              <a:lnSpc>
-                <a:spcPct val="118000"/>
-              </a:lnSpc>
-              <a:buNone/>
-            </a:pPr>
-            <a:r>
-              <a:rPr lang="en-US" sz="1100" b="1" dirty="0">
-                <a:solidFill>
-                  <a:srgbClr val="F3F0E8"/>
-                </a:solidFill>
-                <a:latin typeface="Calibri" pitchFamily="34" charset="0"/>
-                <a:ea typeface="Calibri" pitchFamily="34" charset="-122"/>
-                <a:cs typeface="Calibri" pitchFamily="34" charset="-120"/>
-              </a:rPr>
-              <a:t>Said plainly: </a:t>
-            </a:r>
-            <a:pPr indent="0" marL="0">
-              <a:lnSpc>
-                <a:spcPct val="118000"/>
-              </a:lnSpc>
-              <a:buNone/>
-            </a:pPr>
-            <a:r>
-              <a:rPr lang="en-US" sz="1100" dirty="0">
-                <a:solidFill>
-                  <a:srgbClr val="A7B0AB"/>
-                </a:solidFill>
-                <a:latin typeface="Calibri" pitchFamily="34" charset="0"/>
-                <a:ea typeface="Calibri" pitchFamily="34" charset="-122"/>
-                <a:cs typeface="Calibri" pitchFamily="34" charset="-120"/>
-              </a:rPr>
-              <a:t>this is a boutique developer, not a Binghatti or an EMAAR. The upside is a small building and negotiable terms. The risk is depth of delivery record — mitigated by verifying the escrow account, RERA registration and construction-linked SPA milestones.</a:t>
-            </a:r>
-            <a:endParaRPr lang="en-US" sz="1100" dirty="0"/>
-          </a:p>
-        </p:txBody>
-      </p:sp>
-      <p:sp>
-        <p:nvSpPr>
-          <p:cNvPr id="18" name="Shape 16"/>
-          <p:cNvSpPr/>
-          <p:nvPr/>
-        </p:nvSpPr>
-        <p:spPr>
-          <a:xfrm>
             <a:off x="566928" y="384048"/>
             <a:ext cx="68580" cy="219456"/>
           </a:xfrm>
@@ -46073,7 +42886,7 @@
       </p:sp>
       <p:sp>
         <p:nvSpPr>
-          <p:cNvPr id="19" name="Text 17"/>
+          <p:cNvPr id="17" name="Text 15"/>
           <p:cNvSpPr/>
           <p:nvPr/>
         </p:nvSpPr>
@@ -46126,7 +42939,7 @@
       </p:sp>
       <p:sp>
         <p:nvSpPr>
-          <p:cNvPr id="20" name="Text 18"/>
+          <p:cNvPr id="18" name="Text 16"/>
           <p:cNvSpPr/>
           <p:nvPr/>
         </p:nvSpPr>
@@ -46165,7 +42978,7 @@
       </p:sp>
       <p:sp>
         <p:nvSpPr>
-          <p:cNvPr id="21" name="Text 19"/>
+          <p:cNvPr id="19" name="Text 17"/>
           <p:cNvSpPr/>
           <p:nvPr/>
         </p:nvSpPr>
@@ -47130,7 +43943,7 @@
                           <a:ea typeface="Calibri" pitchFamily="34" charset="-122"/>
                           <a:cs typeface="Calibri" pitchFamily="34" charset="-120"/>
                         </a:rPr>
-                        <a:t>192  (confirm)</a:t>
+                        <a:t>192</a:t>
                       </a:r>
                       <a:endParaRPr lang="en-US" sz="1050" dirty="0">
                         <a:latin typeface="Calibri" charset="0"/>
@@ -47700,7 +44513,7 @@
                 <a:ea typeface="Calibri" pitchFamily="34" charset="-122"/>
                 <a:cs typeface="Calibri" pitchFamily="34" charset="-120"/>
               </a:rPr>
-              <a:t>Internet City &amp; Media City 10 · Miracle Garden 5 · Marina, Burj Al Arab, Mall of the Emirates 15 · Downtown &amp; Dubai Mall 25 · DXB 35</a:t>
+              <a:t>Internet City &amp; Media City 10 · Miracle Garden 5 · Marina, Burj Al Arab, Mall of the Emirates 15 · Downtown &amp; Dubai Mall 25 · DXB Airport 35</a:t>
             </a:r>
             <a:endParaRPr lang="en-US" sz="1050" dirty="0"/>
           </a:p>

--- a/docs/client-deck/Three-Projects-One-Decision.pptx
+++ b/docs/client-deck/Three-Projects-One-Decision.pptx
@@ -28891,12 +28891,12 @@
         </p:nvSpPr>
         <p:spPr>
           <a:xfrm>
-            <a:off x="566928" y="5358384"/>
-            <a:ext cx="11027664" cy="859536"/>
+            <a:off x="566928" y="5266944"/>
+            <a:ext cx="11027664" cy="987552"/>
           </a:xfrm>
           <a:prstGeom prst="roundRect">
             <a:avLst>
-              <a:gd name="adj" fmla="val 3191"/>
+              <a:gd name="adj" fmla="val 2778"/>
             </a:avLst>
           </a:prstGeom>
           <a:solidFill>
@@ -28918,8 +28918,8 @@
         </p:nvSpPr>
         <p:spPr>
           <a:xfrm>
-            <a:off x="768096" y="5468112"/>
-            <a:ext cx="10625328" cy="640080"/>
+            <a:off x="768096" y="5376672"/>
+            <a:ext cx="10625328" cy="768096"/>
           </a:xfrm>
           <a:prstGeom prst="rect">
             <a:avLst/>
@@ -28938,15 +28938,15 @@
               <a:buNone/>
             </a:pPr>
             <a:r>
-              <a:rPr lang="en-US" sz="1100" b="1" dirty="0">
+              <a:rPr lang="en-US" sz="1050" b="1" dirty="0">
                 <a:solidFill>
-                  <a:srgbClr val="F3F0E8"/>
+                  <a:srgbClr val="B04862"/>
                 </a:solidFill>
                 <a:latin typeface="Calibri" pitchFamily="34" charset="0"/>
                 <a:ea typeface="Calibri" pitchFamily="34" charset="-122"/>
                 <a:cs typeface="Calibri" pitchFamily="34" charset="-120"/>
               </a:rPr>
-              <a:t>My read, on the confirmed prices: </a:t>
+              <a:t>My recommendation: Floareá Skies. </a:t>
             </a:r>
             <a:pPr indent="0" marL="0">
               <a:lnSpc>
@@ -28955,7 +28955,7 @@
               <a:buNone/>
             </a:pPr>
             <a:r>
-              <a:rPr lang="en-US" sz="1100" dirty="0">
+              <a:rPr lang="en-US" sz="1050" dirty="0">
                 <a:solidFill>
                   <a:srgbClr val="A7B0AB"/>
                 </a:solidFill>
@@ -28963,7 +28963,7 @@
                 <a:ea typeface="Calibri" pitchFamily="34" charset="-122"/>
                 <a:cs typeface="Calibri" pitchFamily="34" charset="-120"/>
               </a:rPr>
-              <a:t>yield-first, it is Celesto 4 at 6.8% on the smallest cheque. Floareá sits in the middle at 5.7% with the earliest keys and the biggest apartment. Arancia at AED 1.45M is the premium play — the strongest rent and name at 5.2%, bought for the address, not the yield. </a:t>
+              <a:t>It is the only project where every figure is confirmed by the developer in writing — and the most complete buy of the three: the largest one-bedroom at 837 sqft, delivered fully fitted, the earliest keys at Q1 2028, and just 30% before handover. Your rent starts in JVC’s proven market a year ahead of the others, and the developer is open on price. </a:t>
             </a:r>
             <a:pPr indent="0" marL="0">
               <a:lnSpc>
@@ -28972,15 +28972,15 @@
               <a:buNone/>
             </a:pPr>
             <a:r>
-              <a:rPr lang="en-US" sz="1100" b="1" dirty="0">
+              <a:rPr lang="en-US" sz="1050" b="1" dirty="0">
                 <a:solidFill>
-                  <a:srgbClr val="F3F0E8"/>
+                  <a:srgbClr val="3A8FBF"/>
                 </a:solidFill>
                 <a:latin typeface="Calibri" pitchFamily="34" charset="0"/>
                 <a:ea typeface="Calibri" pitchFamily="34" charset="-122"/>
                 <a:cs typeface="Calibri" pitchFamily="34" charset="-120"/>
               </a:rPr>
-              <a:t>Still open: </a:t>
+              <a:t>Celesto</a:t>
             </a:r>
             <a:pPr indent="0" marL="0">
               <a:lnSpc>
@@ -28989,7 +28989,7 @@
               <a:buNone/>
             </a:pPr>
             <a:r>
-              <a:rPr lang="en-US" sz="1100" dirty="0">
+              <a:rPr lang="en-US" sz="1050" dirty="0">
                 <a:solidFill>
                   <a:srgbClr val="A7B0AB"/>
                 </a:solidFill>
@@ -28997,9 +28997,43 @@
                 <a:ea typeface="Calibri" pitchFamily="34" charset="-122"/>
                 <a:cs typeface="Calibri" pitchFamily="34" charset="-120"/>
               </a:rPr>
-              <a:t>Celesto's price is an estimate; Arancia's service charge is unpublished.</a:t>
+              <a:t> is the smart smaller cheque at 6.8%; </a:t>
             </a:r>
-            <a:endParaRPr lang="en-US" sz="1100" dirty="0"/>
+            <a:pPr indent="0" marL="0">
+              <a:lnSpc>
+                <a:spcPct val="118000"/>
+              </a:lnSpc>
+              <a:buNone/>
+            </a:pPr>
+            <a:r>
+              <a:rPr lang="en-US" sz="1050" b="1" dirty="0">
+                <a:solidFill>
+                  <a:srgbClr val="B08A25"/>
+                </a:solidFill>
+                <a:latin typeface="Calibri" pitchFamily="34" charset="0"/>
+                <a:ea typeface="Calibri" pitchFamily="34" charset="-122"/>
+                <a:cs typeface="Calibri" pitchFamily="34" charset="-120"/>
+              </a:rPr>
+              <a:t>Arancia</a:t>
+            </a:r>
+            <a:pPr indent="0" marL="0">
+              <a:lnSpc>
+                <a:spcPct val="118000"/>
+              </a:lnSpc>
+              <a:buNone/>
+            </a:pPr>
+            <a:r>
+              <a:rPr lang="en-US" sz="1050" dirty="0">
+                <a:solidFill>
+                  <a:srgbClr val="A7B0AB"/>
+                </a:solidFill>
+                <a:latin typeface="Calibri" pitchFamily="34" charset="0"/>
+                <a:ea typeface="Calibri" pitchFamily="34" charset="-122"/>
+                <a:cs typeface="Calibri" pitchFamily="34" charset="-120"/>
+              </a:rPr>
+              <a:t> the five-year address play — both strong second choices.</a:t>
+            </a:r>
+            <a:endParaRPr lang="en-US" sz="1050" dirty="0"/>
           </a:p>
         </p:txBody>
       </p:sp>
